--- a/pres/rentabilidad_pyme.pptx
+++ b/pres/rentabilidad_pyme.pptx
@@ -25,9 +25,10 @@
     <p:sldId id="273" r:id="rId19"/>
     <p:sldId id="274" r:id="rId20"/>
     <p:sldId id="275" r:id="rId21"/>
+    <p:sldId id="276" r:id="rId22"/>
   </p:sldIdLst>
   <p:notesMasterIdLst>
-    <p:notesMasterId r:id="rId22"/>
+    <p:notesMasterId r:id="rId23"/>
   </p:notesMasterIdLst>
   <p:sldSz cx="12192000" cy="6858000"/>
   <p:notesSz cx="6858000" cy="12192000"/>
@@ -501,6 +502,524 @@
 </file>
 
 <file path=ppt/charts/chart10.xml><?xml version="1.0" encoding="utf-8"?>
+<c:chartSpace xmlns:c="http://schemas.openxmlformats.org/drawingml/2006/chart" xmlns:a="http://schemas.openxmlformats.org/drawingml/2006/main" xmlns:r="http://schemas.openxmlformats.org/officeDocument/2006/relationships">
+  <c:date1904 val="0"/>
+  <c:roundedCorners val="1"/>
+  <c:chart>
+    <c:autoTitleDeleted val="1"/>
+    <c:plotArea>
+      <c:layout/>
+      <c:barChart>
+        <c:barDir val="col"/>
+        <c:grouping val="clustered"/>
+        <c:varyColors val="0"/>
+        <c:ser>
+          <c:idx val="0"/>
+          <c:order val="0"/>
+          <c:tx>
+            <c:strRef>
+              <c:f>Sheet1!$B$1</c:f>
+              <c:strCache>
+                <c:ptCount val="1"/>
+                <c:pt idx="0">
+                  <c:v>Tipo circulante</c:v>
+                </c:pt>
+              </c:strCache>
+            </c:strRef>
+          </c:tx>
+          <c:spPr>
+            <a:solidFill>
+              <a:srgbClr val="C97B3C"/>
+            </a:solidFill>
+            <a:effectLst/>
+          </c:spPr>
+          <c:invertIfNegative val="0"/>
+          <c:dLbls>
+            <c:numFmt formatCode="#,##0" sourceLinked="0"/>
+            <c:txPr>
+              <a:bodyPr/>
+              <a:lstStyle/>
+              <a:p>
+                <a:pPr>
+                  <a:defRPr b="0" i="0" strike="noStrike" sz="1200" u="none">
+                    <a:solidFill>
+                      <a:srgbClr val="2B3A42"/>
+                    </a:solidFill>
+                    <a:latin typeface="Arial"/>
+                  </a:defRPr>
+                </a:pPr>
+              </a:p>
+            </c:txPr>
+            <c:showLegendKey val="0"/>
+            <c:showVal val="1"/>
+            <c:showCatName val="0"/>
+            <c:showSerName val="0"/>
+            <c:showPercent val="0"/>
+            <c:showBubbleSize val="0"/>
+            <c:showLeaderLines val="0"/>
+          </c:dLbls>
+          <c:cat>
+            <c:multiLvlStrRef>
+              <c:f>Sheet1!$A$2:$A$7</c:f>
+              <c:multiLvlStrCache>
+                <c:ptCount val="6"/>
+                <c:lvl>
+                  <c:pt idx="0">
+                    <c:v>España</c:v>
+                  </c:pt>
+                  <c:pt idx="1">
+                    <c:v>Alemania</c:v>
+                  </c:pt>
+                  <c:pt idx="2">
+                    <c:v>Francia</c:v>
+                  </c:pt>
+                  <c:pt idx="3">
+                    <c:v>Italia</c:v>
+                  </c:pt>
+                  <c:pt idx="4">
+                    <c:v>Portugal</c:v>
+                  </c:pt>
+                  <c:pt idx="5">
+                    <c:v>P. Bajos</c:v>
+                  </c:pt>
+                </c:lvl>
+              </c:multiLvlStrCache>
+            </c:multiLvlStrRef>
+          </c:cat>
+          <c:val>
+            <c:numRef>
+              <c:f>Sheet1!$B$2:$B$7</c:f>
+              <c:numCache>
+                <c:formatCode>General</c:formatCode>
+                <c:ptCount val="6"/>
+                <c:pt idx="0">
+                  <c:v>3.58</c:v>
+                </c:pt>
+                <c:pt idx="1">
+                  <c:v>4.95</c:v>
+                </c:pt>
+                <c:pt idx="2">
+                  <c:v>3.39</c:v>
+                </c:pt>
+                <c:pt idx="3">
+                  <c:v>4.11</c:v>
+                </c:pt>
+                <c:pt idx="4">
+                  <c:v>4.41</c:v>
+                </c:pt>
+                <c:pt idx="5">
+                  <c:v>2.46</c:v>
+                </c:pt>
+              </c:numCache>
+            </c:numRef>
+          </c:val>
+        </c:ser>
+        <c:dLbls>
+          <c:numFmt formatCode="#,##0" sourceLinked="0"/>
+          <c:txPr>
+            <a:bodyPr/>
+            <a:lstStyle/>
+            <a:p>
+              <a:pPr>
+                <a:defRPr b="0" i="0" strike="noStrike" sz="1200" u="none">
+                  <a:solidFill>
+                    <a:srgbClr val="2B3A42"/>
+                  </a:solidFill>
+                  <a:latin typeface="Arial"/>
+                </a:defRPr>
+              </a:pPr>
+            </a:p>
+          </c:txPr>
+          <c:showLegendKey val="0"/>
+          <c:showVal val="1"/>
+          <c:showCatName val="0"/>
+          <c:showSerName val="0"/>
+          <c:showPercent val="0"/>
+          <c:showBubbleSize val="0"/>
+          <c:showLeaderLines val="0"/>
+        </c:dLbls>
+        <c:gapWidth val="150"/>
+        <c:overlap val="0"/>
+        <c:axId val="2094734554"/>
+        <c:axId val="2094734552"/>
+        <c:axId val="2094734556"/>
+      </c:barChart>
+      <c:catAx>
+        <c:axId val="2094734554"/>
+        <c:scaling>
+          <c:orientation val="minMax"/>
+        </c:scaling>
+        <c:delete val="0"/>
+        <c:axPos val="b"/>
+        <c:numFmt formatCode="General" sourceLinked="1"/>
+        <c:majorTickMark val="out"/>
+        <c:minorTickMark val="none"/>
+        <c:tickLblPos val="low"/>
+        <c:spPr>
+          <a:ln w="12700" cap="flat">
+            <a:solidFill>
+              <a:srgbClr val="888888"/>
+            </a:solidFill>
+            <a:prstDash val="solid"/>
+            <a:round/>
+          </a:ln>
+        </c:spPr>
+        <c:txPr>
+          <a:bodyPr/>
+          <a:lstStyle/>
+          <a:p>
+            <a:pPr>
+              <a:defRPr sz="1100" b="0" i="0" u="none" strike="noStrike">
+                <a:solidFill>
+                  <a:srgbClr val="2B3A42"/>
+                </a:solidFill>
+                <a:latin typeface="Arial"/>
+              </a:defRPr>
+            </a:pPr>
+            <a:endParaRPr lang="en-US"/>
+          </a:p>
+        </c:txPr>
+        <c:crossAx val="2094734552"/>
+        <c:crosses val="autoZero"/>
+        <c:auto val="1"/>
+        <c:lblAlgn val="ctr"/>
+        <c:noMultiLvlLbl val="1"/>
+      </c:catAx>
+      <c:valAx>
+        <c:axId val="2094734552"/>
+        <c:scaling>
+          <c:orientation val="minMax"/>
+          <c:max val="6"/>
+        </c:scaling>
+        <c:delete val="0"/>
+        <c:axPos val="l"/>
+        <c:majorGridlines>
+          <c:spPr>
+            <a:ln w="12700" cap="flat">
+              <a:solidFill>
+                <a:srgbClr val="E3E9EB"/>
+              </a:solidFill>
+              <a:prstDash val="solid"/>
+              <a:round/>
+            </a:ln>
+          </c:spPr>
+        </c:majorGridlines>
+        <c:numFmt formatCode="0.0&quot;%&quot;" sourceLinked="0"/>
+        <c:majorTickMark val="out"/>
+        <c:minorTickMark val="none"/>
+        <c:tickLblPos val="nextTo"/>
+        <c:spPr>
+          <a:ln w="12700" cap="flat">
+            <a:solidFill>
+              <a:srgbClr val="888888"/>
+            </a:solidFill>
+            <a:prstDash val="solid"/>
+            <a:round/>
+          </a:ln>
+        </c:spPr>
+        <c:txPr>
+          <a:bodyPr/>
+          <a:lstStyle/>
+          <a:p>
+            <a:pPr>
+              <a:defRPr sz="1200" b="0" i="0" u="none" strike="noStrike">
+                <a:solidFill>
+                  <a:srgbClr val="6E7F88"/>
+                </a:solidFill>
+                <a:latin typeface="Arial"/>
+              </a:defRPr>
+            </a:pPr>
+            <a:endParaRPr lang="en-US"/>
+          </a:p>
+        </c:txPr>
+        <c:crossAx val="2094734554"/>
+        <c:crosses val="autoZero"/>
+        <c:crossBetween val="between"/>
+      </c:valAx>
+      <c:spPr>
+        <a:noFill/>
+        <a:ln>
+          <a:noFill/>
+        </a:ln>
+        <a:effectLst/>
+      </c:spPr>
+    </c:plotArea>
+    <c:plotVisOnly val="1"/>
+    <c:dispBlanksAs val="span"/>
+  </c:chart>
+  <c:spPr>
+    <a:noFill/>
+    <a:ln>
+      <a:noFill/>
+    </a:ln>
+    <a:effectLst/>
+  </c:spPr>
+  <c:externalData r:id="rId1">
+    <c:autoUpdate val="0"/>
+  </c:externalData>
+</c:chartSpace>
+</file>
+
+<file path=ppt/charts/chart11.xml><?xml version="1.0" encoding="utf-8"?>
+<c:chartSpace xmlns:c="http://schemas.openxmlformats.org/drawingml/2006/chart" xmlns:a="http://schemas.openxmlformats.org/drawingml/2006/main" xmlns:r="http://schemas.openxmlformats.org/officeDocument/2006/relationships">
+  <c:date1904 val="0"/>
+  <c:roundedCorners val="1"/>
+  <c:chart>
+    <c:autoTitleDeleted val="1"/>
+    <c:plotArea>
+      <c:layout/>
+      <c:barChart>
+        <c:barDir val="col"/>
+        <c:grouping val="clustered"/>
+        <c:varyColors val="0"/>
+        <c:ser>
+          <c:idx val="0"/>
+          <c:order val="0"/>
+          <c:tx>
+            <c:strRef>
+              <c:f>Sheet1!$B$1</c:f>
+              <c:strCache>
+                <c:ptCount val="1"/>
+                <c:pt idx="0">
+                  <c:v>NPL inmueble comercial</c:v>
+                </c:pt>
+              </c:strCache>
+            </c:strRef>
+          </c:tx>
+          <c:spPr>
+            <a:solidFill>
+              <a:srgbClr val="C97B3C"/>
+            </a:solidFill>
+            <a:effectLst/>
+          </c:spPr>
+          <c:invertIfNegative val="0"/>
+          <c:dLbls>
+            <c:numFmt formatCode="#,##0" sourceLinked="0"/>
+            <c:txPr>
+              <a:bodyPr/>
+              <a:lstStyle/>
+              <a:p>
+                <a:pPr>
+                  <a:defRPr b="0" i="0" strike="noStrike" sz="1200" u="none">
+                    <a:solidFill>
+                      <a:srgbClr val="2B3A42"/>
+                    </a:solidFill>
+                    <a:latin typeface="Arial"/>
+                  </a:defRPr>
+                </a:pPr>
+              </a:p>
+            </c:txPr>
+            <c:showLegendKey val="0"/>
+            <c:showVal val="1"/>
+            <c:showCatName val="0"/>
+            <c:showSerName val="0"/>
+            <c:showPercent val="0"/>
+            <c:showBubbleSize val="0"/>
+            <c:showLeaderLines val="0"/>
+          </c:dLbls>
+          <c:cat>
+            <c:multiLvlStrRef>
+              <c:f>Sheet1!$A$2:$A$7</c:f>
+              <c:multiLvlStrCache>
+                <c:ptCount val="6"/>
+                <c:lvl>
+                  <c:pt idx="0">
+                    <c:v>España</c:v>
+                  </c:pt>
+                  <c:pt idx="1">
+                    <c:v>Alemania</c:v>
+                  </c:pt>
+                  <c:pt idx="2">
+                    <c:v>Francia</c:v>
+                  </c:pt>
+                  <c:pt idx="3">
+                    <c:v>Italia</c:v>
+                  </c:pt>
+                  <c:pt idx="4">
+                    <c:v>Portugal</c:v>
+                  </c:pt>
+                  <c:pt idx="5">
+                    <c:v>P. Bajos</c:v>
+                  </c:pt>
+                </c:lvl>
+              </c:multiLvlStrCache>
+            </c:multiLvlStrRef>
+          </c:cat>
+          <c:val>
+            <c:numRef>
+              <c:f>Sheet1!$B$2:$B$7</c:f>
+              <c:numCache>
+                <c:formatCode>General</c:formatCode>
+                <c:ptCount val="6"/>
+                <c:pt idx="0">
+                  <c:v>4.25</c:v>
+                </c:pt>
+                <c:pt idx="1">
+                  <c:v>6.81</c:v>
+                </c:pt>
+                <c:pt idx="2">
+                  <c:v>3.86</c:v>
+                </c:pt>
+                <c:pt idx="3">
+                  <c:v>4.27</c:v>
+                </c:pt>
+                <c:pt idx="4">
+                  <c:v>3.83</c:v>
+                </c:pt>
+                <c:pt idx="5">
+                  <c:v>3.06</c:v>
+                </c:pt>
+              </c:numCache>
+            </c:numRef>
+          </c:val>
+        </c:ser>
+        <c:dLbls>
+          <c:numFmt formatCode="#,##0" sourceLinked="0"/>
+          <c:txPr>
+            <a:bodyPr/>
+            <a:lstStyle/>
+            <a:p>
+              <a:pPr>
+                <a:defRPr b="0" i="0" strike="noStrike" sz="1200" u="none">
+                  <a:solidFill>
+                    <a:srgbClr val="2B3A42"/>
+                  </a:solidFill>
+                  <a:latin typeface="Arial"/>
+                </a:defRPr>
+              </a:pPr>
+            </a:p>
+          </c:txPr>
+          <c:showLegendKey val="0"/>
+          <c:showVal val="1"/>
+          <c:showCatName val="0"/>
+          <c:showSerName val="0"/>
+          <c:showPercent val="0"/>
+          <c:showBubbleSize val="0"/>
+          <c:showLeaderLines val="0"/>
+        </c:dLbls>
+        <c:gapWidth val="150"/>
+        <c:overlap val="0"/>
+        <c:axId val="2094734554"/>
+        <c:axId val="2094734552"/>
+        <c:axId val="2094734556"/>
+      </c:barChart>
+      <c:catAx>
+        <c:axId val="2094734554"/>
+        <c:scaling>
+          <c:orientation val="minMax"/>
+        </c:scaling>
+        <c:delete val="0"/>
+        <c:axPos val="b"/>
+        <c:numFmt formatCode="General" sourceLinked="1"/>
+        <c:majorTickMark val="out"/>
+        <c:minorTickMark val="none"/>
+        <c:tickLblPos val="low"/>
+        <c:spPr>
+          <a:ln w="12700" cap="flat">
+            <a:solidFill>
+              <a:srgbClr val="888888"/>
+            </a:solidFill>
+            <a:prstDash val="solid"/>
+            <a:round/>
+          </a:ln>
+        </c:spPr>
+        <c:txPr>
+          <a:bodyPr/>
+          <a:lstStyle/>
+          <a:p>
+            <a:pPr>
+              <a:defRPr sz="1200" b="0" i="0" u="none" strike="noStrike">
+                <a:solidFill>
+                  <a:srgbClr val="2B3A42"/>
+                </a:solidFill>
+                <a:latin typeface="Arial"/>
+              </a:defRPr>
+            </a:pPr>
+            <a:endParaRPr lang="en-US"/>
+          </a:p>
+        </c:txPr>
+        <c:crossAx val="2094734552"/>
+        <c:crosses val="autoZero"/>
+        <c:auto val="1"/>
+        <c:lblAlgn val="ctr"/>
+        <c:noMultiLvlLbl val="1"/>
+      </c:catAx>
+      <c:valAx>
+        <c:axId val="2094734552"/>
+        <c:scaling>
+          <c:orientation val="minMax"/>
+          <c:max val="8"/>
+        </c:scaling>
+        <c:delete val="0"/>
+        <c:axPos val="l"/>
+        <c:majorGridlines>
+          <c:spPr>
+            <a:ln w="12700" cap="flat">
+              <a:solidFill>
+                <a:srgbClr val="E3E9EB"/>
+              </a:solidFill>
+              <a:prstDash val="solid"/>
+              <a:round/>
+            </a:ln>
+          </c:spPr>
+        </c:majorGridlines>
+        <c:numFmt formatCode="0&quot;%&quot;" sourceLinked="0"/>
+        <c:majorTickMark val="out"/>
+        <c:minorTickMark val="none"/>
+        <c:tickLblPos val="nextTo"/>
+        <c:spPr>
+          <a:ln w="12700" cap="flat">
+            <a:solidFill>
+              <a:srgbClr val="888888"/>
+            </a:solidFill>
+            <a:prstDash val="solid"/>
+            <a:round/>
+          </a:ln>
+        </c:spPr>
+        <c:txPr>
+          <a:bodyPr/>
+          <a:lstStyle/>
+          <a:p>
+            <a:pPr>
+              <a:defRPr sz="1200" b="0" i="0" u="none" strike="noStrike">
+                <a:solidFill>
+                  <a:srgbClr val="6E7F88"/>
+                </a:solidFill>
+                <a:latin typeface="Arial"/>
+              </a:defRPr>
+            </a:pPr>
+            <a:endParaRPr lang="en-US"/>
+          </a:p>
+        </c:txPr>
+        <c:crossAx val="2094734554"/>
+        <c:crosses val="autoZero"/>
+        <c:crossBetween val="between"/>
+      </c:valAx>
+      <c:spPr>
+        <a:noFill/>
+        <a:ln>
+          <a:noFill/>
+        </a:ln>
+        <a:effectLst/>
+      </c:spPr>
+    </c:plotArea>
+    <c:plotVisOnly val="1"/>
+    <c:dispBlanksAs val="span"/>
+  </c:chart>
+  <c:spPr>
+    <a:noFill/>
+    <a:ln>
+      <a:noFill/>
+    </a:ln>
+    <a:effectLst/>
+  </c:spPr>
+  <c:externalData r:id="rId1">
+    <c:autoUpdate val="0"/>
+  </c:externalData>
+</c:chartSpace>
+</file>
+
+<file path=ppt/charts/chart12.xml><?xml version="1.0" encoding="utf-8"?>
 <c:chartSpace xmlns:c="http://schemas.openxmlformats.org/drawingml/2006/chart" xmlns:a="http://schemas.openxmlformats.org/drawingml/2006/main" xmlns:r="http://schemas.openxmlformats.org/officeDocument/2006/relationships">
   <c:date1904 val="0"/>
   <c:roundedCorners val="1"/>
@@ -2572,6 +3091,812 @@
   <c:date1904 val="0"/>
   <c:roundedCorners val="1"/>
   <c:chart>
+    <c:title>
+      <c:tx>
+        <c:rich>
+          <a:bodyPr/>
+          <a:lstStyle/>
+          <a:p>
+            <a:pPr>
+              <a:defRPr sz="1200" b="0" i="0" u="none" strike="noStrike">
+                <a:solidFill>
+                  <a:srgbClr val="1C3F4E"/>
+                </a:solidFill>
+                <a:latin typeface="Arial"/>
+              </a:defRPr>
+            </a:pPr>
+            <a:r>
+              <a:rPr sz="1200" b="0" i="0" u="none" strike="noStrike">
+                <a:solidFill>
+                  <a:srgbClr val="1C3F4E"/>
+                </a:solidFill>
+                <a:latin typeface="Arial"/>
+              </a:rPr>
+              <a:t>Probabilidad de impago (PD)</a:t>
+            </a:r>
+          </a:p>
+        </c:rich>
+      </c:tx>
+      <c:layout/>
+      <c:overlay val="0"/>
+    </c:title>
+    <c:autoTitleDeleted val="0"/>
+    <c:plotArea>
+      <c:layout/>
+      <c:barChart>
+        <c:barDir val="col"/>
+        <c:grouping val="clustered"/>
+        <c:varyColors val="0"/>
+        <c:ser>
+          <c:idx val="0"/>
+          <c:order val="0"/>
+          <c:tx>
+            <c:strRef>
+              <c:f>Sheet1!$B$1</c:f>
+              <c:strCache>
+                <c:ptCount val="1"/>
+                <c:pt idx="0">
+                  <c:v>PD PYME</c:v>
+                </c:pt>
+              </c:strCache>
+            </c:strRef>
+          </c:tx>
+          <c:spPr>
+            <a:solidFill>
+              <a:srgbClr val="B04A3F"/>
+            </a:solidFill>
+            <a:effectLst/>
+          </c:spPr>
+          <c:invertIfNegative val="0"/>
+          <c:dLbls>
+            <c:numFmt formatCode="#,##0" sourceLinked="0"/>
+            <c:txPr>
+              <a:bodyPr/>
+              <a:lstStyle/>
+              <a:p>
+                <a:pPr>
+                  <a:defRPr b="0" i="0" strike="noStrike" sz="800" u="none">
+                    <a:solidFill>
+                      <a:srgbClr val="2B3A42"/>
+                    </a:solidFill>
+                    <a:latin typeface="Arial"/>
+                  </a:defRPr>
+                </a:pPr>
+              </a:p>
+            </c:txPr>
+            <c:showLegendKey val="0"/>
+            <c:showVal val="1"/>
+            <c:showCatName val="0"/>
+            <c:showSerName val="0"/>
+            <c:showPercent val="0"/>
+            <c:showBubbleSize val="0"/>
+            <c:showLeaderLines val="0"/>
+          </c:dLbls>
+          <c:cat>
+            <c:multiLvlStrRef>
+              <c:f>Sheet1!$A$2:$A$7</c:f>
+              <c:multiLvlStrCache>
+                <c:ptCount val="6"/>
+                <c:lvl>
+                  <c:pt idx="0">
+                    <c:v>España</c:v>
+                  </c:pt>
+                  <c:pt idx="1">
+                    <c:v>Alemania</c:v>
+                  </c:pt>
+                  <c:pt idx="2">
+                    <c:v>Francia</c:v>
+                  </c:pt>
+                  <c:pt idx="3">
+                    <c:v>Italia</c:v>
+                  </c:pt>
+                  <c:pt idx="4">
+                    <c:v>Portugal</c:v>
+                  </c:pt>
+                  <c:pt idx="5">
+                    <c:v>P. Bajos</c:v>
+                  </c:pt>
+                </c:lvl>
+              </c:multiLvlStrCache>
+            </c:multiLvlStrRef>
+          </c:cat>
+          <c:val>
+            <c:numRef>
+              <c:f>Sheet1!$B$2:$B$7</c:f>
+              <c:numCache>
+                <c:formatCode>General</c:formatCode>
+                <c:ptCount val="6"/>
+                <c:pt idx="0">
+                  <c:v>1.73</c:v>
+                </c:pt>
+                <c:pt idx="1">
+                  <c:v>1.26</c:v>
+                </c:pt>
+                <c:pt idx="2">
+                  <c:v>2.15</c:v>
+                </c:pt>
+                <c:pt idx="3">
+                  <c:v>2.26</c:v>
+                </c:pt>
+                <c:pt idx="4">
+                  <c:v>1.26</c:v>
+                </c:pt>
+                <c:pt idx="5">
+                  <c:v>1.18</c:v>
+                </c:pt>
+              </c:numCache>
+            </c:numRef>
+          </c:val>
+        </c:ser>
+        <c:ser>
+          <c:idx val="1"/>
+          <c:order val="1"/>
+          <c:tx>
+            <c:strRef>
+              <c:f>Sheet1!$C$1</c:f>
+              <c:strCache>
+                <c:ptCount val="1"/>
+                <c:pt idx="0">
+                  <c:v>PD gran empresa</c:v>
+                </c:pt>
+              </c:strCache>
+            </c:strRef>
+          </c:tx>
+          <c:spPr>
+            <a:solidFill>
+              <a:srgbClr val="B9C6CC"/>
+            </a:solidFill>
+            <a:effectLst/>
+          </c:spPr>
+          <c:invertIfNegative val="0"/>
+          <c:dLbls>
+            <c:numFmt formatCode="#,##0" sourceLinked="0"/>
+            <c:txPr>
+              <a:bodyPr/>
+              <a:lstStyle/>
+              <a:p>
+                <a:pPr>
+                  <a:defRPr b="0" i="0" strike="noStrike" sz="800" u="none">
+                    <a:solidFill>
+                      <a:srgbClr val="2B3A42"/>
+                    </a:solidFill>
+                    <a:latin typeface="Arial"/>
+                  </a:defRPr>
+                </a:pPr>
+              </a:p>
+            </c:txPr>
+            <c:showLegendKey val="0"/>
+            <c:showVal val="1"/>
+            <c:showCatName val="0"/>
+            <c:showSerName val="0"/>
+            <c:showPercent val="0"/>
+            <c:showBubbleSize val="0"/>
+            <c:showLeaderLines val="0"/>
+          </c:dLbls>
+          <c:cat>
+            <c:multiLvlStrRef>
+              <c:f>Sheet1!$A$2:$A$7</c:f>
+              <c:multiLvlStrCache>
+                <c:ptCount val="6"/>
+                <c:lvl>
+                  <c:pt idx="0">
+                    <c:v>España</c:v>
+                  </c:pt>
+                  <c:pt idx="1">
+                    <c:v>Alemania</c:v>
+                  </c:pt>
+                  <c:pt idx="2">
+                    <c:v>Francia</c:v>
+                  </c:pt>
+                  <c:pt idx="3">
+                    <c:v>Italia</c:v>
+                  </c:pt>
+                  <c:pt idx="4">
+                    <c:v>Portugal</c:v>
+                  </c:pt>
+                  <c:pt idx="5">
+                    <c:v>P. Bajos</c:v>
+                  </c:pt>
+                </c:lvl>
+              </c:multiLvlStrCache>
+            </c:multiLvlStrRef>
+          </c:cat>
+          <c:val>
+            <c:numRef>
+              <c:f>Sheet1!$C$2:$C$7</c:f>
+              <c:numCache>
+                <c:formatCode>General</c:formatCode>
+                <c:ptCount val="6"/>
+                <c:pt idx="0">
+                  <c:v>0.57</c:v>
+                </c:pt>
+                <c:pt idx="1">
+                  <c:v>0.5</c:v>
+                </c:pt>
+                <c:pt idx="2">
+                  <c:v>0.6</c:v>
+                </c:pt>
+                <c:pt idx="3">
+                  <c:v>0.67</c:v>
+                </c:pt>
+                <c:pt idx="4">
+                  <c:v>0.33</c:v>
+                </c:pt>
+                <c:pt idx="5">
+                  <c:v>0.52</c:v>
+                </c:pt>
+              </c:numCache>
+            </c:numRef>
+          </c:val>
+        </c:ser>
+        <c:dLbls>
+          <c:numFmt formatCode="#,##0" sourceLinked="0"/>
+          <c:txPr>
+            <a:bodyPr/>
+            <a:lstStyle/>
+            <a:p>
+              <a:pPr>
+                <a:defRPr b="0" i="0" strike="noStrike" sz="800" u="none">
+                  <a:solidFill>
+                    <a:srgbClr val="2B3A42"/>
+                  </a:solidFill>
+                  <a:latin typeface="Arial"/>
+                </a:defRPr>
+              </a:pPr>
+            </a:p>
+          </c:txPr>
+          <c:showLegendKey val="0"/>
+          <c:showVal val="1"/>
+          <c:showCatName val="0"/>
+          <c:showSerName val="0"/>
+          <c:showPercent val="0"/>
+          <c:showBubbleSize val="0"/>
+          <c:showLeaderLines val="0"/>
+        </c:dLbls>
+        <c:gapWidth val="150"/>
+        <c:overlap val="0"/>
+        <c:axId val="2094734554"/>
+        <c:axId val="2094734552"/>
+        <c:axId val="2094734556"/>
+      </c:barChart>
+      <c:catAx>
+        <c:axId val="2094734554"/>
+        <c:scaling>
+          <c:orientation val="minMax"/>
+        </c:scaling>
+        <c:delete val="0"/>
+        <c:axPos val="b"/>
+        <c:numFmt formatCode="General" sourceLinked="1"/>
+        <c:majorTickMark val="out"/>
+        <c:minorTickMark val="none"/>
+        <c:tickLblPos val="low"/>
+        <c:spPr>
+          <a:ln w="12700" cap="flat">
+            <a:solidFill>
+              <a:srgbClr val="888888"/>
+            </a:solidFill>
+            <a:prstDash val="solid"/>
+            <a:round/>
+          </a:ln>
+        </c:spPr>
+        <c:txPr>
+          <a:bodyPr/>
+          <a:lstStyle/>
+          <a:p>
+            <a:pPr>
+              <a:defRPr sz="900" b="0" i="0" u="none" strike="noStrike">
+                <a:solidFill>
+                  <a:srgbClr val="2B3A42"/>
+                </a:solidFill>
+                <a:latin typeface="Arial"/>
+              </a:defRPr>
+            </a:pPr>
+            <a:endParaRPr lang="en-US"/>
+          </a:p>
+        </c:txPr>
+        <c:crossAx val="2094734552"/>
+        <c:crosses val="autoZero"/>
+        <c:auto val="1"/>
+        <c:lblAlgn val="ctr"/>
+        <c:noMultiLvlLbl val="1"/>
+      </c:catAx>
+      <c:valAx>
+        <c:axId val="2094734552"/>
+        <c:scaling>
+          <c:orientation val="minMax"/>
+          <c:max val="2.6"/>
+        </c:scaling>
+        <c:delete val="0"/>
+        <c:axPos val="l"/>
+        <c:majorGridlines>
+          <c:spPr>
+            <a:ln w="12700" cap="flat">
+              <a:solidFill>
+                <a:srgbClr val="E3E9EB"/>
+              </a:solidFill>
+              <a:prstDash val="solid"/>
+              <a:round/>
+            </a:ln>
+          </c:spPr>
+        </c:majorGridlines>
+        <c:numFmt formatCode="0.0&quot;%&quot;" sourceLinked="0"/>
+        <c:majorTickMark val="out"/>
+        <c:minorTickMark val="none"/>
+        <c:tickLblPos val="nextTo"/>
+        <c:spPr>
+          <a:ln w="12700" cap="flat">
+            <a:solidFill>
+              <a:srgbClr val="888888"/>
+            </a:solidFill>
+            <a:prstDash val="solid"/>
+            <a:round/>
+          </a:ln>
+        </c:spPr>
+        <c:txPr>
+          <a:bodyPr/>
+          <a:lstStyle/>
+          <a:p>
+            <a:pPr>
+              <a:defRPr sz="1200" b="0" i="0" u="none" strike="noStrike">
+                <a:solidFill>
+                  <a:srgbClr val="6E7F88"/>
+                </a:solidFill>
+                <a:latin typeface="Arial"/>
+              </a:defRPr>
+            </a:pPr>
+            <a:endParaRPr lang="en-US"/>
+          </a:p>
+        </c:txPr>
+        <c:crossAx val="2094734554"/>
+        <c:crosses val="autoZero"/>
+        <c:crossBetween val="between"/>
+      </c:valAx>
+      <c:spPr>
+        <a:noFill/>
+        <a:ln>
+          <a:noFill/>
+        </a:ln>
+        <a:effectLst/>
+      </c:spPr>
+    </c:plotArea>
+    <c:legend>
+      <c:legendPos val="b"/>
+      <c:overlay val="0"/>
+      <c:txPr>
+        <a:bodyPr/>
+        <a:lstStyle/>
+        <a:p>
+          <a:pPr>
+            <a:defRPr sz="900">      </a:defRPr>
+          </a:pPr>
+          <a:endParaRPr lang="en-US"/>
+        </a:p>
+      </c:txPr>
+    </c:legend>
+    <c:plotVisOnly val="1"/>
+    <c:dispBlanksAs val="span"/>
+  </c:chart>
+  <c:spPr>
+    <a:noFill/>
+    <a:ln>
+      <a:noFill/>
+    </a:ln>
+    <a:effectLst/>
+  </c:spPr>
+  <c:externalData r:id="rId1">
+    <c:autoUpdate val="0"/>
+  </c:externalData>
+</c:chartSpace>
+</file>
+
+<file path=ppt/charts/chart8.xml><?xml version="1.0" encoding="utf-8"?>
+<c:chartSpace xmlns:c="http://schemas.openxmlformats.org/drawingml/2006/chart" xmlns:a="http://schemas.openxmlformats.org/drawingml/2006/main" xmlns:r="http://schemas.openxmlformats.org/officeDocument/2006/relationships">
+  <c:date1904 val="0"/>
+  <c:roundedCorners val="1"/>
+  <c:chart>
+    <c:title>
+      <c:tx>
+        <c:rich>
+          <a:bodyPr/>
+          <a:lstStyle/>
+          <a:p>
+            <a:pPr>
+              <a:defRPr sz="1200" b="0" i="0" u="none" strike="noStrike">
+                <a:solidFill>
+                  <a:srgbClr val="1C3F4E"/>
+                </a:solidFill>
+                <a:latin typeface="Arial"/>
+              </a:defRPr>
+            </a:pPr>
+            <a:r>
+              <a:rPr sz="1200" b="0" i="0" u="none" strike="noStrike">
+                <a:solidFill>
+                  <a:srgbClr val="1C3F4E"/>
+                </a:solidFill>
+                <a:latin typeface="Arial"/>
+              </a:rPr>
+              <a:t>Severidad de la pérdida (LGD)</a:t>
+            </a:r>
+          </a:p>
+        </c:rich>
+      </c:tx>
+      <c:layout/>
+      <c:overlay val="0"/>
+    </c:title>
+    <c:autoTitleDeleted val="0"/>
+    <c:plotArea>
+      <c:layout/>
+      <c:barChart>
+        <c:barDir val="col"/>
+        <c:grouping val="clustered"/>
+        <c:varyColors val="0"/>
+        <c:ser>
+          <c:idx val="0"/>
+          <c:order val="0"/>
+          <c:tx>
+            <c:strRef>
+              <c:f>Sheet1!$B$1</c:f>
+              <c:strCache>
+                <c:ptCount val="1"/>
+                <c:pt idx="0">
+                  <c:v>LGD PYME</c:v>
+                </c:pt>
+              </c:strCache>
+            </c:strRef>
+          </c:tx>
+          <c:spPr>
+            <a:solidFill>
+              <a:srgbClr val="C97B3C"/>
+            </a:solidFill>
+            <a:effectLst/>
+          </c:spPr>
+          <c:invertIfNegative val="0"/>
+          <c:dLbls>
+            <c:numFmt formatCode="#,##0" sourceLinked="0"/>
+            <c:txPr>
+              <a:bodyPr/>
+              <a:lstStyle/>
+              <a:p>
+                <a:pPr>
+                  <a:defRPr b="0" i="0" strike="noStrike" sz="800" u="none">
+                    <a:solidFill>
+                      <a:srgbClr val="2B3A42"/>
+                    </a:solidFill>
+                    <a:latin typeface="Arial"/>
+                  </a:defRPr>
+                </a:pPr>
+              </a:p>
+            </c:txPr>
+            <c:showLegendKey val="0"/>
+            <c:showVal val="1"/>
+            <c:showCatName val="0"/>
+            <c:showSerName val="0"/>
+            <c:showPercent val="0"/>
+            <c:showBubbleSize val="0"/>
+            <c:showLeaderLines val="0"/>
+          </c:dLbls>
+          <c:cat>
+            <c:multiLvlStrRef>
+              <c:f>Sheet1!$A$2:$A$7</c:f>
+              <c:multiLvlStrCache>
+                <c:ptCount val="6"/>
+                <c:lvl>
+                  <c:pt idx="0">
+                    <c:v>España</c:v>
+                  </c:pt>
+                  <c:pt idx="1">
+                    <c:v>Alemania</c:v>
+                  </c:pt>
+                  <c:pt idx="2">
+                    <c:v>Francia</c:v>
+                  </c:pt>
+                  <c:pt idx="3">
+                    <c:v>Italia</c:v>
+                  </c:pt>
+                  <c:pt idx="4">
+                    <c:v>Portugal</c:v>
+                  </c:pt>
+                  <c:pt idx="5">
+                    <c:v>P. Bajos</c:v>
+                  </c:pt>
+                </c:lvl>
+              </c:multiLvlStrCache>
+            </c:multiLvlStrRef>
+          </c:cat>
+          <c:val>
+            <c:numRef>
+              <c:f>Sheet1!$B$2:$B$7</c:f>
+              <c:numCache>
+                <c:formatCode>General</c:formatCode>
+                <c:ptCount val="6"/>
+                <c:pt idx="0">
+                  <c:v>34.38</c:v>
+                </c:pt>
+                <c:pt idx="1">
+                  <c:v>31.44</c:v>
+                </c:pt>
+                <c:pt idx="2">
+                  <c:v>31.51</c:v>
+                </c:pt>
+                <c:pt idx="3">
+                  <c:v>35.6</c:v>
+                </c:pt>
+                <c:pt idx="4">
+                  <c:v>40</c:v>
+                </c:pt>
+                <c:pt idx="5">
+                  <c:v>29.7</c:v>
+                </c:pt>
+              </c:numCache>
+            </c:numRef>
+          </c:val>
+        </c:ser>
+        <c:ser>
+          <c:idx val="1"/>
+          <c:order val="1"/>
+          <c:tx>
+            <c:strRef>
+              <c:f>Sheet1!$C$1</c:f>
+              <c:strCache>
+                <c:ptCount val="1"/>
+                <c:pt idx="0">
+                  <c:v>LGD gran empresa</c:v>
+                </c:pt>
+              </c:strCache>
+            </c:strRef>
+          </c:tx>
+          <c:spPr>
+            <a:solidFill>
+              <a:srgbClr val="B9C6CC"/>
+            </a:solidFill>
+            <a:effectLst/>
+          </c:spPr>
+          <c:invertIfNegative val="0"/>
+          <c:dLbls>
+            <c:numFmt formatCode="#,##0" sourceLinked="0"/>
+            <c:txPr>
+              <a:bodyPr/>
+              <a:lstStyle/>
+              <a:p>
+                <a:pPr>
+                  <a:defRPr b="0" i="0" strike="noStrike" sz="800" u="none">
+                    <a:solidFill>
+                      <a:srgbClr val="2B3A42"/>
+                    </a:solidFill>
+                    <a:latin typeface="Arial"/>
+                  </a:defRPr>
+                </a:pPr>
+              </a:p>
+            </c:txPr>
+            <c:showLegendKey val="0"/>
+            <c:showVal val="1"/>
+            <c:showCatName val="0"/>
+            <c:showSerName val="0"/>
+            <c:showPercent val="0"/>
+            <c:showBubbleSize val="0"/>
+            <c:showLeaderLines val="0"/>
+          </c:dLbls>
+          <c:cat>
+            <c:multiLvlStrRef>
+              <c:f>Sheet1!$A$2:$A$7</c:f>
+              <c:multiLvlStrCache>
+                <c:ptCount val="6"/>
+                <c:lvl>
+                  <c:pt idx="0">
+                    <c:v>España</c:v>
+                  </c:pt>
+                  <c:pt idx="1">
+                    <c:v>Alemania</c:v>
+                  </c:pt>
+                  <c:pt idx="2">
+                    <c:v>Francia</c:v>
+                  </c:pt>
+                  <c:pt idx="3">
+                    <c:v>Italia</c:v>
+                  </c:pt>
+                  <c:pt idx="4">
+                    <c:v>Portugal</c:v>
+                  </c:pt>
+                  <c:pt idx="5">
+                    <c:v>P. Bajos</c:v>
+                  </c:pt>
+                </c:lvl>
+              </c:multiLvlStrCache>
+            </c:multiLvlStrRef>
+          </c:cat>
+          <c:val>
+            <c:numRef>
+              <c:f>Sheet1!$C$2:$C$7</c:f>
+              <c:numCache>
+                <c:formatCode>General</c:formatCode>
+                <c:ptCount val="6"/>
+                <c:pt idx="0">
+                  <c:v>40</c:v>
+                </c:pt>
+                <c:pt idx="1">
+                  <c:v>39.55</c:v>
+                </c:pt>
+                <c:pt idx="2">
+                  <c:v>40</c:v>
+                </c:pt>
+                <c:pt idx="3">
+                  <c:v>40</c:v>
+                </c:pt>
+                <c:pt idx="4">
+                  <c:v>40</c:v>
+                </c:pt>
+                <c:pt idx="5">
+                  <c:v>40</c:v>
+                </c:pt>
+              </c:numCache>
+            </c:numRef>
+          </c:val>
+        </c:ser>
+        <c:dLbls>
+          <c:numFmt formatCode="#,##0" sourceLinked="0"/>
+          <c:txPr>
+            <a:bodyPr/>
+            <a:lstStyle/>
+            <a:p>
+              <a:pPr>
+                <a:defRPr b="0" i="0" strike="noStrike" sz="800" u="none">
+                  <a:solidFill>
+                    <a:srgbClr val="2B3A42"/>
+                  </a:solidFill>
+                  <a:latin typeface="Arial"/>
+                </a:defRPr>
+              </a:pPr>
+            </a:p>
+          </c:txPr>
+          <c:showLegendKey val="0"/>
+          <c:showVal val="1"/>
+          <c:showCatName val="0"/>
+          <c:showSerName val="0"/>
+          <c:showPercent val="0"/>
+          <c:showBubbleSize val="0"/>
+          <c:showLeaderLines val="0"/>
+        </c:dLbls>
+        <c:gapWidth val="150"/>
+        <c:overlap val="0"/>
+        <c:axId val="2094734554"/>
+        <c:axId val="2094734552"/>
+        <c:axId val="2094734556"/>
+      </c:barChart>
+      <c:catAx>
+        <c:axId val="2094734554"/>
+        <c:scaling>
+          <c:orientation val="minMax"/>
+        </c:scaling>
+        <c:delete val="0"/>
+        <c:axPos val="b"/>
+        <c:numFmt formatCode="General" sourceLinked="1"/>
+        <c:majorTickMark val="out"/>
+        <c:minorTickMark val="none"/>
+        <c:tickLblPos val="low"/>
+        <c:spPr>
+          <a:ln w="12700" cap="flat">
+            <a:solidFill>
+              <a:srgbClr val="888888"/>
+            </a:solidFill>
+            <a:prstDash val="solid"/>
+            <a:round/>
+          </a:ln>
+        </c:spPr>
+        <c:txPr>
+          <a:bodyPr/>
+          <a:lstStyle/>
+          <a:p>
+            <a:pPr>
+              <a:defRPr sz="900" b="0" i="0" u="none" strike="noStrike">
+                <a:solidFill>
+                  <a:srgbClr val="2B3A42"/>
+                </a:solidFill>
+                <a:latin typeface="Arial"/>
+              </a:defRPr>
+            </a:pPr>
+            <a:endParaRPr lang="en-US"/>
+          </a:p>
+        </c:txPr>
+        <c:crossAx val="2094734552"/>
+        <c:crosses val="autoZero"/>
+        <c:auto val="1"/>
+        <c:lblAlgn val="ctr"/>
+        <c:noMultiLvlLbl val="1"/>
+      </c:catAx>
+      <c:valAx>
+        <c:axId val="2094734552"/>
+        <c:scaling>
+          <c:orientation val="minMax"/>
+          <c:max val="48"/>
+        </c:scaling>
+        <c:delete val="0"/>
+        <c:axPos val="l"/>
+        <c:majorGridlines>
+          <c:spPr>
+            <a:ln w="12700" cap="flat">
+              <a:solidFill>
+                <a:srgbClr val="E3E9EB"/>
+              </a:solidFill>
+              <a:prstDash val="solid"/>
+              <a:round/>
+            </a:ln>
+          </c:spPr>
+        </c:majorGridlines>
+        <c:numFmt formatCode="0&quot;%&quot;" sourceLinked="0"/>
+        <c:majorTickMark val="out"/>
+        <c:minorTickMark val="none"/>
+        <c:tickLblPos val="nextTo"/>
+        <c:spPr>
+          <a:ln w="12700" cap="flat">
+            <a:solidFill>
+              <a:srgbClr val="888888"/>
+            </a:solidFill>
+            <a:prstDash val="solid"/>
+            <a:round/>
+          </a:ln>
+        </c:spPr>
+        <c:txPr>
+          <a:bodyPr/>
+          <a:lstStyle/>
+          <a:p>
+            <a:pPr>
+              <a:defRPr sz="1200" b="0" i="0" u="none" strike="noStrike">
+                <a:solidFill>
+                  <a:srgbClr val="6E7F88"/>
+                </a:solidFill>
+                <a:latin typeface="Arial"/>
+              </a:defRPr>
+            </a:pPr>
+            <a:endParaRPr lang="en-US"/>
+          </a:p>
+        </c:txPr>
+        <c:crossAx val="2094734554"/>
+        <c:crosses val="autoZero"/>
+        <c:crossBetween val="between"/>
+      </c:valAx>
+      <c:spPr>
+        <a:noFill/>
+        <a:ln>
+          <a:noFill/>
+        </a:ln>
+        <a:effectLst/>
+      </c:spPr>
+    </c:plotArea>
+    <c:legend>
+      <c:legendPos val="b"/>
+      <c:overlay val="0"/>
+      <c:txPr>
+        <a:bodyPr/>
+        <a:lstStyle/>
+        <a:p>
+          <a:pPr>
+            <a:defRPr sz="900">      </a:defRPr>
+          </a:pPr>
+          <a:endParaRPr lang="en-US"/>
+        </a:p>
+      </c:txPr>
+    </c:legend>
+    <c:plotVisOnly val="1"/>
+    <c:dispBlanksAs val="span"/>
+  </c:chart>
+  <c:spPr>
+    <a:noFill/>
+    <a:ln>
+      <a:noFill/>
+    </a:ln>
+    <a:effectLst/>
+  </c:spPr>
+  <c:externalData r:id="rId1">
+    <c:autoUpdate val="0"/>
+  </c:externalData>
+</c:chartSpace>
+</file>
+
+<file path=ppt/charts/chart9.xml><?xml version="1.0" encoding="utf-8"?>
+<c:chartSpace xmlns:c="http://schemas.openxmlformats.org/drawingml/2006/chart" xmlns:a="http://schemas.openxmlformats.org/drawingml/2006/main" xmlns:r="http://schemas.openxmlformats.org/officeDocument/2006/relationships">
+  <c:date1904 val="0"/>
+  <c:roundedCorners val="1"/>
+  <c:chart>
     <c:autoTitleDeleted val="1"/>
     <c:plotArea>
       <c:layout/>
@@ -2756,524 +4081,6 @@
         <c:scaling>
           <c:orientation val="minMax"/>
           <c:max val="70"/>
-        </c:scaling>
-        <c:delete val="0"/>
-        <c:axPos val="l"/>
-        <c:majorGridlines>
-          <c:spPr>
-            <a:ln w="12700" cap="flat">
-              <a:solidFill>
-                <a:srgbClr val="E3E9EB"/>
-              </a:solidFill>
-              <a:prstDash val="solid"/>
-              <a:round/>
-            </a:ln>
-          </c:spPr>
-        </c:majorGridlines>
-        <c:numFmt formatCode="0&quot;%&quot;" sourceLinked="0"/>
-        <c:majorTickMark val="out"/>
-        <c:minorTickMark val="none"/>
-        <c:tickLblPos val="nextTo"/>
-        <c:spPr>
-          <a:ln w="12700" cap="flat">
-            <a:solidFill>
-              <a:srgbClr val="888888"/>
-            </a:solidFill>
-            <a:prstDash val="solid"/>
-            <a:round/>
-          </a:ln>
-        </c:spPr>
-        <c:txPr>
-          <a:bodyPr/>
-          <a:lstStyle/>
-          <a:p>
-            <a:pPr>
-              <a:defRPr sz="1200" b="0" i="0" u="none" strike="noStrike">
-                <a:solidFill>
-                  <a:srgbClr val="6E7F88"/>
-                </a:solidFill>
-                <a:latin typeface="Arial"/>
-              </a:defRPr>
-            </a:pPr>
-            <a:endParaRPr lang="en-US"/>
-          </a:p>
-        </c:txPr>
-        <c:crossAx val="2094734554"/>
-        <c:crosses val="autoZero"/>
-        <c:crossBetween val="between"/>
-      </c:valAx>
-      <c:spPr>
-        <a:noFill/>
-        <a:ln>
-          <a:noFill/>
-        </a:ln>
-        <a:effectLst/>
-      </c:spPr>
-    </c:plotArea>
-    <c:plotVisOnly val="1"/>
-    <c:dispBlanksAs val="span"/>
-  </c:chart>
-  <c:spPr>
-    <a:noFill/>
-    <a:ln>
-      <a:noFill/>
-    </a:ln>
-    <a:effectLst/>
-  </c:spPr>
-  <c:externalData r:id="rId1">
-    <c:autoUpdate val="0"/>
-  </c:externalData>
-</c:chartSpace>
-</file>
-
-<file path=ppt/charts/chart8.xml><?xml version="1.0" encoding="utf-8"?>
-<c:chartSpace xmlns:c="http://schemas.openxmlformats.org/drawingml/2006/chart" xmlns:a="http://schemas.openxmlformats.org/drawingml/2006/main" xmlns:r="http://schemas.openxmlformats.org/officeDocument/2006/relationships">
-  <c:date1904 val="0"/>
-  <c:roundedCorners val="1"/>
-  <c:chart>
-    <c:autoTitleDeleted val="1"/>
-    <c:plotArea>
-      <c:layout/>
-      <c:barChart>
-        <c:barDir val="col"/>
-        <c:grouping val="clustered"/>
-        <c:varyColors val="0"/>
-        <c:ser>
-          <c:idx val="0"/>
-          <c:order val="0"/>
-          <c:tx>
-            <c:strRef>
-              <c:f>Sheet1!$B$1</c:f>
-              <c:strCache>
-                <c:ptCount val="1"/>
-                <c:pt idx="0">
-                  <c:v>Tipo circulante</c:v>
-                </c:pt>
-              </c:strCache>
-            </c:strRef>
-          </c:tx>
-          <c:spPr>
-            <a:solidFill>
-              <a:srgbClr val="C97B3C"/>
-            </a:solidFill>
-            <a:effectLst/>
-          </c:spPr>
-          <c:invertIfNegative val="0"/>
-          <c:dLbls>
-            <c:numFmt formatCode="#,##0" sourceLinked="0"/>
-            <c:txPr>
-              <a:bodyPr/>
-              <a:lstStyle/>
-              <a:p>
-                <a:pPr>
-                  <a:defRPr b="0" i="0" strike="noStrike" sz="1200" u="none">
-                    <a:solidFill>
-                      <a:srgbClr val="2B3A42"/>
-                    </a:solidFill>
-                    <a:latin typeface="Arial"/>
-                  </a:defRPr>
-                </a:pPr>
-              </a:p>
-            </c:txPr>
-            <c:showLegendKey val="0"/>
-            <c:showVal val="1"/>
-            <c:showCatName val="0"/>
-            <c:showSerName val="0"/>
-            <c:showPercent val="0"/>
-            <c:showBubbleSize val="0"/>
-            <c:showLeaderLines val="0"/>
-          </c:dLbls>
-          <c:cat>
-            <c:multiLvlStrRef>
-              <c:f>Sheet1!$A$2:$A$7</c:f>
-              <c:multiLvlStrCache>
-                <c:ptCount val="6"/>
-                <c:lvl>
-                  <c:pt idx="0">
-                    <c:v>España</c:v>
-                  </c:pt>
-                  <c:pt idx="1">
-                    <c:v>Alemania</c:v>
-                  </c:pt>
-                  <c:pt idx="2">
-                    <c:v>Francia</c:v>
-                  </c:pt>
-                  <c:pt idx="3">
-                    <c:v>Italia</c:v>
-                  </c:pt>
-                  <c:pt idx="4">
-                    <c:v>Portugal</c:v>
-                  </c:pt>
-                  <c:pt idx="5">
-                    <c:v>P. Bajos</c:v>
-                  </c:pt>
-                </c:lvl>
-              </c:multiLvlStrCache>
-            </c:multiLvlStrRef>
-          </c:cat>
-          <c:val>
-            <c:numRef>
-              <c:f>Sheet1!$B$2:$B$7</c:f>
-              <c:numCache>
-                <c:formatCode>General</c:formatCode>
-                <c:ptCount val="6"/>
-                <c:pt idx="0">
-                  <c:v>3.58</c:v>
-                </c:pt>
-                <c:pt idx="1">
-                  <c:v>4.95</c:v>
-                </c:pt>
-                <c:pt idx="2">
-                  <c:v>3.39</c:v>
-                </c:pt>
-                <c:pt idx="3">
-                  <c:v>4.11</c:v>
-                </c:pt>
-                <c:pt idx="4">
-                  <c:v>4.41</c:v>
-                </c:pt>
-                <c:pt idx="5">
-                  <c:v>2.46</c:v>
-                </c:pt>
-              </c:numCache>
-            </c:numRef>
-          </c:val>
-        </c:ser>
-        <c:dLbls>
-          <c:numFmt formatCode="#,##0" sourceLinked="0"/>
-          <c:txPr>
-            <a:bodyPr/>
-            <a:lstStyle/>
-            <a:p>
-              <a:pPr>
-                <a:defRPr b="0" i="0" strike="noStrike" sz="1200" u="none">
-                  <a:solidFill>
-                    <a:srgbClr val="2B3A42"/>
-                  </a:solidFill>
-                  <a:latin typeface="Arial"/>
-                </a:defRPr>
-              </a:pPr>
-            </a:p>
-          </c:txPr>
-          <c:showLegendKey val="0"/>
-          <c:showVal val="1"/>
-          <c:showCatName val="0"/>
-          <c:showSerName val="0"/>
-          <c:showPercent val="0"/>
-          <c:showBubbleSize val="0"/>
-          <c:showLeaderLines val="0"/>
-        </c:dLbls>
-        <c:gapWidth val="150"/>
-        <c:overlap val="0"/>
-        <c:axId val="2094734554"/>
-        <c:axId val="2094734552"/>
-        <c:axId val="2094734556"/>
-      </c:barChart>
-      <c:catAx>
-        <c:axId val="2094734554"/>
-        <c:scaling>
-          <c:orientation val="minMax"/>
-        </c:scaling>
-        <c:delete val="0"/>
-        <c:axPos val="b"/>
-        <c:numFmt formatCode="General" sourceLinked="1"/>
-        <c:majorTickMark val="out"/>
-        <c:minorTickMark val="none"/>
-        <c:tickLblPos val="low"/>
-        <c:spPr>
-          <a:ln w="12700" cap="flat">
-            <a:solidFill>
-              <a:srgbClr val="888888"/>
-            </a:solidFill>
-            <a:prstDash val="solid"/>
-            <a:round/>
-          </a:ln>
-        </c:spPr>
-        <c:txPr>
-          <a:bodyPr/>
-          <a:lstStyle/>
-          <a:p>
-            <a:pPr>
-              <a:defRPr sz="1100" b="0" i="0" u="none" strike="noStrike">
-                <a:solidFill>
-                  <a:srgbClr val="2B3A42"/>
-                </a:solidFill>
-                <a:latin typeface="Arial"/>
-              </a:defRPr>
-            </a:pPr>
-            <a:endParaRPr lang="en-US"/>
-          </a:p>
-        </c:txPr>
-        <c:crossAx val="2094734552"/>
-        <c:crosses val="autoZero"/>
-        <c:auto val="1"/>
-        <c:lblAlgn val="ctr"/>
-        <c:noMultiLvlLbl val="1"/>
-      </c:catAx>
-      <c:valAx>
-        <c:axId val="2094734552"/>
-        <c:scaling>
-          <c:orientation val="minMax"/>
-          <c:max val="6"/>
-        </c:scaling>
-        <c:delete val="0"/>
-        <c:axPos val="l"/>
-        <c:majorGridlines>
-          <c:spPr>
-            <a:ln w="12700" cap="flat">
-              <a:solidFill>
-                <a:srgbClr val="E3E9EB"/>
-              </a:solidFill>
-              <a:prstDash val="solid"/>
-              <a:round/>
-            </a:ln>
-          </c:spPr>
-        </c:majorGridlines>
-        <c:numFmt formatCode="0.0&quot;%&quot;" sourceLinked="0"/>
-        <c:majorTickMark val="out"/>
-        <c:minorTickMark val="none"/>
-        <c:tickLblPos val="nextTo"/>
-        <c:spPr>
-          <a:ln w="12700" cap="flat">
-            <a:solidFill>
-              <a:srgbClr val="888888"/>
-            </a:solidFill>
-            <a:prstDash val="solid"/>
-            <a:round/>
-          </a:ln>
-        </c:spPr>
-        <c:txPr>
-          <a:bodyPr/>
-          <a:lstStyle/>
-          <a:p>
-            <a:pPr>
-              <a:defRPr sz="1200" b="0" i="0" u="none" strike="noStrike">
-                <a:solidFill>
-                  <a:srgbClr val="6E7F88"/>
-                </a:solidFill>
-                <a:latin typeface="Arial"/>
-              </a:defRPr>
-            </a:pPr>
-            <a:endParaRPr lang="en-US"/>
-          </a:p>
-        </c:txPr>
-        <c:crossAx val="2094734554"/>
-        <c:crosses val="autoZero"/>
-        <c:crossBetween val="between"/>
-      </c:valAx>
-      <c:spPr>
-        <a:noFill/>
-        <a:ln>
-          <a:noFill/>
-        </a:ln>
-        <a:effectLst/>
-      </c:spPr>
-    </c:plotArea>
-    <c:plotVisOnly val="1"/>
-    <c:dispBlanksAs val="span"/>
-  </c:chart>
-  <c:spPr>
-    <a:noFill/>
-    <a:ln>
-      <a:noFill/>
-    </a:ln>
-    <a:effectLst/>
-  </c:spPr>
-  <c:externalData r:id="rId1">
-    <c:autoUpdate val="0"/>
-  </c:externalData>
-</c:chartSpace>
-</file>
-
-<file path=ppt/charts/chart9.xml><?xml version="1.0" encoding="utf-8"?>
-<c:chartSpace xmlns:c="http://schemas.openxmlformats.org/drawingml/2006/chart" xmlns:a="http://schemas.openxmlformats.org/drawingml/2006/main" xmlns:r="http://schemas.openxmlformats.org/officeDocument/2006/relationships">
-  <c:date1904 val="0"/>
-  <c:roundedCorners val="1"/>
-  <c:chart>
-    <c:autoTitleDeleted val="1"/>
-    <c:plotArea>
-      <c:layout/>
-      <c:barChart>
-        <c:barDir val="col"/>
-        <c:grouping val="clustered"/>
-        <c:varyColors val="0"/>
-        <c:ser>
-          <c:idx val="0"/>
-          <c:order val="0"/>
-          <c:tx>
-            <c:strRef>
-              <c:f>Sheet1!$B$1</c:f>
-              <c:strCache>
-                <c:ptCount val="1"/>
-                <c:pt idx="0">
-                  <c:v>NPL inmueble comercial</c:v>
-                </c:pt>
-              </c:strCache>
-            </c:strRef>
-          </c:tx>
-          <c:spPr>
-            <a:solidFill>
-              <a:srgbClr val="C97B3C"/>
-            </a:solidFill>
-            <a:effectLst/>
-          </c:spPr>
-          <c:invertIfNegative val="0"/>
-          <c:dLbls>
-            <c:numFmt formatCode="#,##0" sourceLinked="0"/>
-            <c:txPr>
-              <a:bodyPr/>
-              <a:lstStyle/>
-              <a:p>
-                <a:pPr>
-                  <a:defRPr b="0" i="0" strike="noStrike" sz="1200" u="none">
-                    <a:solidFill>
-                      <a:srgbClr val="2B3A42"/>
-                    </a:solidFill>
-                    <a:latin typeface="Arial"/>
-                  </a:defRPr>
-                </a:pPr>
-              </a:p>
-            </c:txPr>
-            <c:showLegendKey val="0"/>
-            <c:showVal val="1"/>
-            <c:showCatName val="0"/>
-            <c:showSerName val="0"/>
-            <c:showPercent val="0"/>
-            <c:showBubbleSize val="0"/>
-            <c:showLeaderLines val="0"/>
-          </c:dLbls>
-          <c:cat>
-            <c:multiLvlStrRef>
-              <c:f>Sheet1!$A$2:$A$7</c:f>
-              <c:multiLvlStrCache>
-                <c:ptCount val="6"/>
-                <c:lvl>
-                  <c:pt idx="0">
-                    <c:v>España</c:v>
-                  </c:pt>
-                  <c:pt idx="1">
-                    <c:v>Alemania</c:v>
-                  </c:pt>
-                  <c:pt idx="2">
-                    <c:v>Francia</c:v>
-                  </c:pt>
-                  <c:pt idx="3">
-                    <c:v>Italia</c:v>
-                  </c:pt>
-                  <c:pt idx="4">
-                    <c:v>Portugal</c:v>
-                  </c:pt>
-                  <c:pt idx="5">
-                    <c:v>P. Bajos</c:v>
-                  </c:pt>
-                </c:lvl>
-              </c:multiLvlStrCache>
-            </c:multiLvlStrRef>
-          </c:cat>
-          <c:val>
-            <c:numRef>
-              <c:f>Sheet1!$B$2:$B$7</c:f>
-              <c:numCache>
-                <c:formatCode>General</c:formatCode>
-                <c:ptCount val="6"/>
-                <c:pt idx="0">
-                  <c:v>4.25</c:v>
-                </c:pt>
-                <c:pt idx="1">
-                  <c:v>6.81</c:v>
-                </c:pt>
-                <c:pt idx="2">
-                  <c:v>3.86</c:v>
-                </c:pt>
-                <c:pt idx="3">
-                  <c:v>4.27</c:v>
-                </c:pt>
-                <c:pt idx="4">
-                  <c:v>3.83</c:v>
-                </c:pt>
-                <c:pt idx="5">
-                  <c:v>3.06</c:v>
-                </c:pt>
-              </c:numCache>
-            </c:numRef>
-          </c:val>
-        </c:ser>
-        <c:dLbls>
-          <c:numFmt formatCode="#,##0" sourceLinked="0"/>
-          <c:txPr>
-            <a:bodyPr/>
-            <a:lstStyle/>
-            <a:p>
-              <a:pPr>
-                <a:defRPr b="0" i="0" strike="noStrike" sz="1200" u="none">
-                  <a:solidFill>
-                    <a:srgbClr val="2B3A42"/>
-                  </a:solidFill>
-                  <a:latin typeface="Arial"/>
-                </a:defRPr>
-              </a:pPr>
-            </a:p>
-          </c:txPr>
-          <c:showLegendKey val="0"/>
-          <c:showVal val="1"/>
-          <c:showCatName val="0"/>
-          <c:showSerName val="0"/>
-          <c:showPercent val="0"/>
-          <c:showBubbleSize val="0"/>
-          <c:showLeaderLines val="0"/>
-        </c:dLbls>
-        <c:gapWidth val="150"/>
-        <c:overlap val="0"/>
-        <c:axId val="2094734554"/>
-        <c:axId val="2094734552"/>
-        <c:axId val="2094734556"/>
-      </c:barChart>
-      <c:catAx>
-        <c:axId val="2094734554"/>
-        <c:scaling>
-          <c:orientation val="minMax"/>
-        </c:scaling>
-        <c:delete val="0"/>
-        <c:axPos val="b"/>
-        <c:numFmt formatCode="General" sourceLinked="1"/>
-        <c:majorTickMark val="out"/>
-        <c:minorTickMark val="none"/>
-        <c:tickLblPos val="low"/>
-        <c:spPr>
-          <a:ln w="12700" cap="flat">
-            <a:solidFill>
-              <a:srgbClr val="888888"/>
-            </a:solidFill>
-            <a:prstDash val="solid"/>
-            <a:round/>
-          </a:ln>
-        </c:spPr>
-        <c:txPr>
-          <a:bodyPr/>
-          <a:lstStyle/>
-          <a:p>
-            <a:pPr>
-              <a:defRPr sz="1200" b="0" i="0" u="none" strike="noStrike">
-                <a:solidFill>
-                  <a:srgbClr val="2B3A42"/>
-                </a:solidFill>
-                <a:latin typeface="Arial"/>
-              </a:defRPr>
-            </a:pPr>
-            <a:endParaRPr lang="en-US"/>
-          </a:p>
-        </c:txPr>
-        <c:crossAx val="2094734552"/>
-        <c:crosses val="autoZero"/>
-        <c:auto val="1"/>
-        <c:lblAlgn val="ctr"/>
-        <c:noMultiLvlLbl val="1"/>
-      </c:catAx>
-      <c:valAx>
-        <c:axId val="2094734552"/>
-        <c:scaling>
-          <c:orientation val="minMax"/>
-          <c:max val="8"/>
         </c:scaling>
         <c:delete val="0"/>
         <c:axPos val="l"/>
@@ -4819,6 +5626,94 @@
             <a:fld id="{F7021451-1387-4CA6-816F-3879F97B5CBC}" type="slidenum">
               <a:rPr lang="en-US"/>
               <a:t>20</a:t>
+            </a:fld>
+            <a:endParaRPr lang="en-US"/>
+          </a:p>
+        </p:txBody>
+      </p:sp>
+    </p:spTree>
+    <p:extLst>
+      <p:ext uri="{BB962C8B-B14F-4D97-AF65-F5344CB8AC3E}">
+        <p14:creationId xmlns:p14="http://schemas.microsoft.com/office/powerpoint/2010/main" val="1024086991"/>
+      </p:ext>
+    </p:extLst>
+  </p:cSld>
+  <p:clrMapOvr>
+    <a:masterClrMapping/>
+  </p:clrMapOvr>
+</p:notes>
+</file>
+
+<file path=ppt/notesSlides/notesSlide21.xml><?xml version="1.0" encoding="utf-8"?>
+<p:notes xmlns:a="http://schemas.openxmlformats.org/drawingml/2006/main" xmlns:r="http://schemas.openxmlformats.org/officeDocument/2006/relationships" xmlns:p="http://schemas.openxmlformats.org/presentationml/2006/main">
+  <p:cSld>
+    <p:spTree>
+      <p:nvGrpSpPr>
+        <p:cNvPr id="1" name=""/>
+        <p:cNvGrpSpPr/>
+        <p:nvPr/>
+      </p:nvGrpSpPr>
+      <p:grpSpPr>
+        <a:xfrm>
+          <a:off x="0" y="0"/>
+          <a:ext cx="0" cy="0"/>
+          <a:chOff x="0" y="0"/>
+          <a:chExt cx="0" cy="0"/>
+        </a:xfrm>
+      </p:grpSpPr>
+      <p:sp>
+        <p:nvSpPr>
+          <p:cNvPr id="2" name="Slide Image Placeholder 1"/>
+          <p:cNvSpPr>
+            <a:spLocks noGrp="1" noRot="1" noChangeAspect="1"/>
+          </p:cNvSpPr>
+          <p:nvPr>
+            <p:ph type="sldImg"/>
+          </p:nvPr>
+        </p:nvSpPr>
+        <p:spPr/>
+      </p:sp>
+      <p:sp>
+        <p:nvSpPr>
+          <p:cNvPr id="3" name="Notes Placeholder 2"/>
+          <p:cNvSpPr>
+            <a:spLocks noGrp="1"/>
+          </p:cNvSpPr>
+          <p:nvPr>
+            <p:ph type="body" idx="1"/>
+          </p:nvPr>
+        </p:nvSpPr>
+        <p:spPr/>
+        <p:txBody>
+          <a:bodyPr/>
+          <a:lstStyle/>
+          <a:p>
+            <a:r>
+              <a:rPr lang="en-US" dirty="0"/>
+              <a:t/>
+            </a:r>
+            <a:endParaRPr lang="en-US" dirty="0"/>
+          </a:p>
+        </p:txBody>
+      </p:sp>
+      <p:sp>
+        <p:nvSpPr>
+          <p:cNvPr id="4" name="Slide Number Placeholder 3"/>
+          <p:cNvSpPr>
+            <a:spLocks noGrp="1"/>
+          </p:cNvSpPr>
+          <p:nvPr>
+            <p:ph type="sldNum" sz="quarter" idx="10"/>
+          </p:nvPr>
+        </p:nvSpPr>
+        <p:spPr/>
+        <p:txBody>
+          <a:bodyPr/>
+          <a:lstStyle/>
+          <a:p>
+            <a:fld id="{F7021451-1387-4CA6-816F-3879F97B5CBC}" type="slidenum">
+              <a:rPr lang="en-US"/>
+              <a:t>21</a:t>
             </a:fld>
             <a:endParaRPr lang="en-US"/>
           </a:p>
@@ -8474,6 +9369,2201 @@
                 <a:ea typeface="Cambria" pitchFamily="34" charset="-122"/>
                 <a:cs typeface="Cambria" pitchFamily="34" charset="-120"/>
               </a:rPr>
+              <a:t>Spread PYME frente a gran empresa en PD y LGD</a:t>
+            </a:r>
+            <a:endParaRPr lang="en-US" sz="3000" dirty="0"/>
+          </a:p>
+        </p:txBody>
+      </p:sp>
+      <p:sp>
+        <p:nvSpPr>
+          <p:cNvPr id="3" name="Text 1"/>
+          <p:cNvSpPr txBox="1"/>
+          <p:nvPr/>
+        </p:nvSpPr>
+        <p:spPr>
+          <a:xfrm>
+            <a:off x="548640" y="932688"/>
+            <a:ext cx="11091672" cy="384048"/>
+          </a:xfrm>
+          <a:prstGeom prst="rect">
+            <a:avLst/>
+          </a:prstGeom>
+          <a:noFill/>
+          <a:ln/>
+        </p:spPr>
+        <p:txBody>
+          <a:bodyPr wrap="square" lIns="0" tIns="0" rIns="0" bIns="0" rtlCol="0" anchor="ctr"/>
+          <a:lstStyle/>
+          <a:p>
+            <a:pPr indent="0" marL="0">
+              <a:buNone/>
+            </a:pPr>
+            <a:r>
+              <a:rPr lang="en-US" sz="1300" dirty="0">
+                <a:solidFill>
+                  <a:srgbClr val="6E7F88"/>
+                </a:solidFill>
+                <a:latin typeface="Calibri" pitchFamily="34" charset="0"/>
+                <a:ea typeface="Calibri" pitchFamily="34" charset="-122"/>
+                <a:cs typeface="Calibri" pitchFamily="34" charset="-120"/>
+              </a:rPr>
+              <a:t>Parámetros IRB, mediana de entidades · 2026-Q1 · La PYME falla más pero recupera mejor</a:t>
+            </a:r>
+            <a:endParaRPr lang="en-US" sz="1300" dirty="0"/>
+          </a:p>
+        </p:txBody>
+      </p:sp>
+      <p:graphicFrame>
+        <p:nvGraphicFramePr>
+          <p:cNvPr id="4" name="Chart 0" descr=""/>
+          <p:cNvGraphicFramePr/>
+          <p:nvPr/>
+        </p:nvGraphicFramePr>
+        <p:xfrm>
+          <a:off x="548640" y="1600200"/>
+          <a:ext cx="5943600" cy="2148840"/>
+        </p:xfrm>
+        <a:graphic xmlns:a="http://schemas.openxmlformats.org/drawingml/2006/main">
+          <a:graphicData uri="http://schemas.openxmlformats.org/drawingml/2006/chart">
+            <c:chart xmlns:c="http://schemas.openxmlformats.org/drawingml/2006/chart" r:id="rId1"/>
+          </a:graphicData>
+        </a:graphic>
+      </p:graphicFrame>
+      <p:graphicFrame>
+        <p:nvGraphicFramePr>
+          <p:cNvPr id="5" name="Chart 1" descr=""/>
+          <p:cNvGraphicFramePr/>
+          <p:nvPr/>
+        </p:nvGraphicFramePr>
+        <p:xfrm>
+          <a:off x="6355080" y="1600200"/>
+          <a:ext cx="5285232" cy="2148840"/>
+        </p:xfrm>
+        <a:graphic xmlns:a="http://schemas.openxmlformats.org/drawingml/2006/main">
+          <a:graphicData uri="http://schemas.openxmlformats.org/drawingml/2006/chart">
+            <c:chart xmlns:c="http://schemas.openxmlformats.org/drawingml/2006/chart" r:id="rId2"/>
+          </a:graphicData>
+        </a:graphic>
+      </p:graphicFrame>
+      <p:graphicFrame>
+        <p:nvGraphicFramePr>
+          <p:cNvPr id="13" name="Table 0"/>
+          <p:cNvGraphicFramePr>
+            <a:graphicFrameLocks noGrp="1"/>
+          </p:cNvGraphicFramePr>
+          <p:nvPr>
+            <p:extLst>
+              <p:ext uri="{D42A27DB-BD31-4B8C-83A1-F6EECF244321}">
+                <p14:modId xmlns:p14="http://schemas.microsoft.com/office/powerpoint/2010/main" val="1579011935"/>
+              </p:ext>
+            </p:extLst>
+          </p:nvPr>
+        </p:nvGraphicFramePr>
+        <p:xfrm>
+          <a:off x="548640" y="3950208"/>
+          <a:ext cx="11091672" cy="914400"/>
+        </p:xfrm>
+        <a:graphic>
+          <a:graphicData uri="http://schemas.openxmlformats.org/drawingml/2006/table">
+            <a:tbl>
+              <a:tblPr/>
+              <a:tblGrid>
+                <a:gridCol w="2834640"/>
+                <a:gridCol w="1389888"/>
+                <a:gridCol w="1389888"/>
+                <a:gridCol w="1389888"/>
+                <a:gridCol w="1389888"/>
+                <a:gridCol w="1389888"/>
+                <a:gridCol w="1389888"/>
+              </a:tblGrid>
+              <a:tr h="347472">
+                <a:tc>
+                  <a:txBody>
+                    <a:bodyPr/>
+                    <a:lstStyle/>
+                    <a:p>
+                      <a:pPr algn="l" indent="0" marL="0">
+                        <a:buNone/>
+                      </a:pPr>
+                      <a:r>
+                        <a:rPr lang="en-US" sz="1000" b="1" dirty="0">
+                          <a:solidFill>
+                            <a:srgbClr val="FFFFFF"/>
+                          </a:solidFill>
+                          <a:latin typeface="Calibri" pitchFamily="34" charset="0"/>
+                          <a:ea typeface="Calibri" pitchFamily="34" charset="-122"/>
+                          <a:cs typeface="Calibri" pitchFamily="34" charset="-120"/>
+                        </a:rPr>
+                        <a:t>Spread PYME − gran empresa</a:t>
+                      </a:r>
+                      <a:endParaRPr lang="en-US" sz="1000" dirty="0">
+                        <a:latin typeface="Calibri" charset="0"/>
+                        <a:ea typeface="Calibri" charset="0"/>
+                        <a:cs typeface="Calibri" charset="0"/>
+                      </a:endParaRPr>
+                    </a:p>
+                  </a:txBody>
+                  <a:tcPr marL="91440" marR="91440" marT="45720" marB="45720" anchor="ctr">
+                    <a:lnL w="6350" cap="flat" cmpd="sng" algn="ctr">
+                      <a:solidFill>
+                        <a:srgbClr val="D6DEE1"/>
+                      </a:solidFill>
+                      <a:prstDash val="solid"/>
+                      <a:round/>
+                      <a:headEnd type="none" w="med" len="med"/>
+                      <a:tailEnd type="none" w="med" len="med"/>
+                    </a:lnL>
+                    <a:lnR w="6350" cap="flat" cmpd="sng" algn="ctr">
+                      <a:solidFill>
+                        <a:srgbClr val="D6DEE1"/>
+                      </a:solidFill>
+                      <a:prstDash val="solid"/>
+                      <a:round/>
+                      <a:headEnd type="none" w="med" len="med"/>
+                      <a:tailEnd type="none" w="med" len="med"/>
+                    </a:lnR>
+                    <a:lnT w="6350" cap="flat" cmpd="sng" algn="ctr">
+                      <a:solidFill>
+                        <a:srgbClr val="D6DEE1"/>
+                      </a:solidFill>
+                      <a:prstDash val="solid"/>
+                      <a:round/>
+                      <a:headEnd type="none" w="med" len="med"/>
+                      <a:tailEnd type="none" w="med" len="med"/>
+                    </a:lnT>
+                    <a:lnB w="6350" cap="flat" cmpd="sng" algn="ctr">
+                      <a:solidFill>
+                        <a:srgbClr val="D6DEE1"/>
+                      </a:solidFill>
+                      <a:prstDash val="solid"/>
+                      <a:round/>
+                      <a:headEnd type="none" w="med" len="med"/>
+                      <a:tailEnd type="none" w="med" len="med"/>
+                    </a:lnB>
+                    <a:solidFill>
+                      <a:srgbClr val="1C3F4E"/>
+                    </a:solidFill>
+                  </a:tcPr>
+                </a:tc>
+                <a:tc>
+                  <a:txBody>
+                    <a:bodyPr/>
+                    <a:lstStyle/>
+                    <a:p>
+                      <a:pPr algn="ctr" indent="0" marL="0">
+                        <a:buNone/>
+                      </a:pPr>
+                      <a:r>
+                        <a:rPr lang="en-US" sz="1000" b="1" dirty="0">
+                          <a:solidFill>
+                            <a:srgbClr val="FFFFFF"/>
+                          </a:solidFill>
+                          <a:latin typeface="Calibri" pitchFamily="34" charset="0"/>
+                          <a:ea typeface="Calibri" pitchFamily="34" charset="-122"/>
+                          <a:cs typeface="Calibri" pitchFamily="34" charset="-120"/>
+                        </a:rPr>
+                        <a:t>España</a:t>
+                      </a:r>
+                      <a:endParaRPr lang="en-US" sz="1000" dirty="0">
+                        <a:latin typeface="Calibri" charset="0"/>
+                        <a:ea typeface="Calibri" charset="0"/>
+                        <a:cs typeface="Calibri" charset="0"/>
+                      </a:endParaRPr>
+                    </a:p>
+                  </a:txBody>
+                  <a:tcPr marL="91440" marR="91440" marT="45720" marB="45720" anchor="ctr">
+                    <a:lnL w="6350" cap="flat" cmpd="sng" algn="ctr">
+                      <a:solidFill>
+                        <a:srgbClr val="D6DEE1"/>
+                      </a:solidFill>
+                      <a:prstDash val="solid"/>
+                      <a:round/>
+                      <a:headEnd type="none" w="med" len="med"/>
+                      <a:tailEnd type="none" w="med" len="med"/>
+                    </a:lnL>
+                    <a:lnR w="6350" cap="flat" cmpd="sng" algn="ctr">
+                      <a:solidFill>
+                        <a:srgbClr val="D6DEE1"/>
+                      </a:solidFill>
+                      <a:prstDash val="solid"/>
+                      <a:round/>
+                      <a:headEnd type="none" w="med" len="med"/>
+                      <a:tailEnd type="none" w="med" len="med"/>
+                    </a:lnR>
+                    <a:lnT w="6350" cap="flat" cmpd="sng" algn="ctr">
+                      <a:solidFill>
+                        <a:srgbClr val="D6DEE1"/>
+                      </a:solidFill>
+                      <a:prstDash val="solid"/>
+                      <a:round/>
+                      <a:headEnd type="none" w="med" len="med"/>
+                      <a:tailEnd type="none" w="med" len="med"/>
+                    </a:lnT>
+                    <a:lnB w="6350" cap="flat" cmpd="sng" algn="ctr">
+                      <a:solidFill>
+                        <a:srgbClr val="D6DEE1"/>
+                      </a:solidFill>
+                      <a:prstDash val="solid"/>
+                      <a:round/>
+                      <a:headEnd type="none" w="med" len="med"/>
+                      <a:tailEnd type="none" w="med" len="med"/>
+                    </a:lnB>
+                    <a:solidFill>
+                      <a:srgbClr val="1C3F4E"/>
+                    </a:solidFill>
+                  </a:tcPr>
+                </a:tc>
+                <a:tc>
+                  <a:txBody>
+                    <a:bodyPr/>
+                    <a:lstStyle/>
+                    <a:p>
+                      <a:pPr algn="ctr" indent="0" marL="0">
+                        <a:buNone/>
+                      </a:pPr>
+                      <a:r>
+                        <a:rPr lang="en-US" sz="1000" b="1" dirty="0">
+                          <a:solidFill>
+                            <a:srgbClr val="FFFFFF"/>
+                          </a:solidFill>
+                          <a:latin typeface="Calibri" pitchFamily="34" charset="0"/>
+                          <a:ea typeface="Calibri" pitchFamily="34" charset="-122"/>
+                          <a:cs typeface="Calibri" pitchFamily="34" charset="-120"/>
+                        </a:rPr>
+                        <a:t>Alemania</a:t>
+                      </a:r>
+                      <a:endParaRPr lang="en-US" sz="1000" dirty="0">
+                        <a:latin typeface="Calibri" charset="0"/>
+                        <a:ea typeface="Calibri" charset="0"/>
+                        <a:cs typeface="Calibri" charset="0"/>
+                      </a:endParaRPr>
+                    </a:p>
+                  </a:txBody>
+                  <a:tcPr marL="91440" marR="91440" marT="45720" marB="45720" anchor="ctr">
+                    <a:lnL w="6350" cap="flat" cmpd="sng" algn="ctr">
+                      <a:solidFill>
+                        <a:srgbClr val="D6DEE1"/>
+                      </a:solidFill>
+                      <a:prstDash val="solid"/>
+                      <a:round/>
+                      <a:headEnd type="none" w="med" len="med"/>
+                      <a:tailEnd type="none" w="med" len="med"/>
+                    </a:lnL>
+                    <a:lnR w="6350" cap="flat" cmpd="sng" algn="ctr">
+                      <a:solidFill>
+                        <a:srgbClr val="D6DEE1"/>
+                      </a:solidFill>
+                      <a:prstDash val="solid"/>
+                      <a:round/>
+                      <a:headEnd type="none" w="med" len="med"/>
+                      <a:tailEnd type="none" w="med" len="med"/>
+                    </a:lnR>
+                    <a:lnT w="6350" cap="flat" cmpd="sng" algn="ctr">
+                      <a:solidFill>
+                        <a:srgbClr val="D6DEE1"/>
+                      </a:solidFill>
+                      <a:prstDash val="solid"/>
+                      <a:round/>
+                      <a:headEnd type="none" w="med" len="med"/>
+                      <a:tailEnd type="none" w="med" len="med"/>
+                    </a:lnT>
+                    <a:lnB w="6350" cap="flat" cmpd="sng" algn="ctr">
+                      <a:solidFill>
+                        <a:srgbClr val="D6DEE1"/>
+                      </a:solidFill>
+                      <a:prstDash val="solid"/>
+                      <a:round/>
+                      <a:headEnd type="none" w="med" len="med"/>
+                      <a:tailEnd type="none" w="med" len="med"/>
+                    </a:lnB>
+                    <a:solidFill>
+                      <a:srgbClr val="1C3F4E"/>
+                    </a:solidFill>
+                  </a:tcPr>
+                </a:tc>
+                <a:tc>
+                  <a:txBody>
+                    <a:bodyPr/>
+                    <a:lstStyle/>
+                    <a:p>
+                      <a:pPr algn="ctr" indent="0" marL="0">
+                        <a:buNone/>
+                      </a:pPr>
+                      <a:r>
+                        <a:rPr lang="en-US" sz="1000" b="1" dirty="0">
+                          <a:solidFill>
+                            <a:srgbClr val="FFFFFF"/>
+                          </a:solidFill>
+                          <a:latin typeface="Calibri" pitchFamily="34" charset="0"/>
+                          <a:ea typeface="Calibri" pitchFamily="34" charset="-122"/>
+                          <a:cs typeface="Calibri" pitchFamily="34" charset="-120"/>
+                        </a:rPr>
+                        <a:t>Francia</a:t>
+                      </a:r>
+                      <a:endParaRPr lang="en-US" sz="1000" dirty="0">
+                        <a:latin typeface="Calibri" charset="0"/>
+                        <a:ea typeface="Calibri" charset="0"/>
+                        <a:cs typeface="Calibri" charset="0"/>
+                      </a:endParaRPr>
+                    </a:p>
+                  </a:txBody>
+                  <a:tcPr marL="91440" marR="91440" marT="45720" marB="45720" anchor="ctr">
+                    <a:lnL w="6350" cap="flat" cmpd="sng" algn="ctr">
+                      <a:solidFill>
+                        <a:srgbClr val="D6DEE1"/>
+                      </a:solidFill>
+                      <a:prstDash val="solid"/>
+                      <a:round/>
+                      <a:headEnd type="none" w="med" len="med"/>
+                      <a:tailEnd type="none" w="med" len="med"/>
+                    </a:lnL>
+                    <a:lnR w="6350" cap="flat" cmpd="sng" algn="ctr">
+                      <a:solidFill>
+                        <a:srgbClr val="D6DEE1"/>
+                      </a:solidFill>
+                      <a:prstDash val="solid"/>
+                      <a:round/>
+                      <a:headEnd type="none" w="med" len="med"/>
+                      <a:tailEnd type="none" w="med" len="med"/>
+                    </a:lnR>
+                    <a:lnT w="6350" cap="flat" cmpd="sng" algn="ctr">
+                      <a:solidFill>
+                        <a:srgbClr val="D6DEE1"/>
+                      </a:solidFill>
+                      <a:prstDash val="solid"/>
+                      <a:round/>
+                      <a:headEnd type="none" w="med" len="med"/>
+                      <a:tailEnd type="none" w="med" len="med"/>
+                    </a:lnT>
+                    <a:lnB w="6350" cap="flat" cmpd="sng" algn="ctr">
+                      <a:solidFill>
+                        <a:srgbClr val="D6DEE1"/>
+                      </a:solidFill>
+                      <a:prstDash val="solid"/>
+                      <a:round/>
+                      <a:headEnd type="none" w="med" len="med"/>
+                      <a:tailEnd type="none" w="med" len="med"/>
+                    </a:lnB>
+                    <a:solidFill>
+                      <a:srgbClr val="1C3F4E"/>
+                    </a:solidFill>
+                  </a:tcPr>
+                </a:tc>
+                <a:tc>
+                  <a:txBody>
+                    <a:bodyPr/>
+                    <a:lstStyle/>
+                    <a:p>
+                      <a:pPr algn="ctr" indent="0" marL="0">
+                        <a:buNone/>
+                      </a:pPr>
+                      <a:r>
+                        <a:rPr lang="en-US" sz="1000" b="1" dirty="0">
+                          <a:solidFill>
+                            <a:srgbClr val="FFFFFF"/>
+                          </a:solidFill>
+                          <a:latin typeface="Calibri" pitchFamily="34" charset="0"/>
+                          <a:ea typeface="Calibri" pitchFamily="34" charset="-122"/>
+                          <a:cs typeface="Calibri" pitchFamily="34" charset="-120"/>
+                        </a:rPr>
+                        <a:t>Italia</a:t>
+                      </a:r>
+                      <a:endParaRPr lang="en-US" sz="1000" dirty="0">
+                        <a:latin typeface="Calibri" charset="0"/>
+                        <a:ea typeface="Calibri" charset="0"/>
+                        <a:cs typeface="Calibri" charset="0"/>
+                      </a:endParaRPr>
+                    </a:p>
+                  </a:txBody>
+                  <a:tcPr marL="91440" marR="91440" marT="45720" marB="45720" anchor="ctr">
+                    <a:lnL w="6350" cap="flat" cmpd="sng" algn="ctr">
+                      <a:solidFill>
+                        <a:srgbClr val="D6DEE1"/>
+                      </a:solidFill>
+                      <a:prstDash val="solid"/>
+                      <a:round/>
+                      <a:headEnd type="none" w="med" len="med"/>
+                      <a:tailEnd type="none" w="med" len="med"/>
+                    </a:lnL>
+                    <a:lnR w="6350" cap="flat" cmpd="sng" algn="ctr">
+                      <a:solidFill>
+                        <a:srgbClr val="D6DEE1"/>
+                      </a:solidFill>
+                      <a:prstDash val="solid"/>
+                      <a:round/>
+                      <a:headEnd type="none" w="med" len="med"/>
+                      <a:tailEnd type="none" w="med" len="med"/>
+                    </a:lnR>
+                    <a:lnT w="6350" cap="flat" cmpd="sng" algn="ctr">
+                      <a:solidFill>
+                        <a:srgbClr val="D6DEE1"/>
+                      </a:solidFill>
+                      <a:prstDash val="solid"/>
+                      <a:round/>
+                      <a:headEnd type="none" w="med" len="med"/>
+                      <a:tailEnd type="none" w="med" len="med"/>
+                    </a:lnT>
+                    <a:lnB w="6350" cap="flat" cmpd="sng" algn="ctr">
+                      <a:solidFill>
+                        <a:srgbClr val="D6DEE1"/>
+                      </a:solidFill>
+                      <a:prstDash val="solid"/>
+                      <a:round/>
+                      <a:headEnd type="none" w="med" len="med"/>
+                      <a:tailEnd type="none" w="med" len="med"/>
+                    </a:lnB>
+                    <a:solidFill>
+                      <a:srgbClr val="1C3F4E"/>
+                    </a:solidFill>
+                  </a:tcPr>
+                </a:tc>
+                <a:tc>
+                  <a:txBody>
+                    <a:bodyPr/>
+                    <a:lstStyle/>
+                    <a:p>
+                      <a:pPr algn="ctr" indent="0" marL="0">
+                        <a:buNone/>
+                      </a:pPr>
+                      <a:r>
+                        <a:rPr lang="en-US" sz="1000" b="1" dirty="0">
+                          <a:solidFill>
+                            <a:srgbClr val="FFFFFF"/>
+                          </a:solidFill>
+                          <a:latin typeface="Calibri" pitchFamily="34" charset="0"/>
+                          <a:ea typeface="Calibri" pitchFamily="34" charset="-122"/>
+                          <a:cs typeface="Calibri" pitchFamily="34" charset="-120"/>
+                        </a:rPr>
+                        <a:t>Portugal</a:t>
+                      </a:r>
+                      <a:endParaRPr lang="en-US" sz="1000" dirty="0">
+                        <a:latin typeface="Calibri" charset="0"/>
+                        <a:ea typeface="Calibri" charset="0"/>
+                        <a:cs typeface="Calibri" charset="0"/>
+                      </a:endParaRPr>
+                    </a:p>
+                  </a:txBody>
+                  <a:tcPr marL="91440" marR="91440" marT="45720" marB="45720" anchor="ctr">
+                    <a:lnL w="6350" cap="flat" cmpd="sng" algn="ctr">
+                      <a:solidFill>
+                        <a:srgbClr val="D6DEE1"/>
+                      </a:solidFill>
+                      <a:prstDash val="solid"/>
+                      <a:round/>
+                      <a:headEnd type="none" w="med" len="med"/>
+                      <a:tailEnd type="none" w="med" len="med"/>
+                    </a:lnL>
+                    <a:lnR w="6350" cap="flat" cmpd="sng" algn="ctr">
+                      <a:solidFill>
+                        <a:srgbClr val="D6DEE1"/>
+                      </a:solidFill>
+                      <a:prstDash val="solid"/>
+                      <a:round/>
+                      <a:headEnd type="none" w="med" len="med"/>
+                      <a:tailEnd type="none" w="med" len="med"/>
+                    </a:lnR>
+                    <a:lnT w="6350" cap="flat" cmpd="sng" algn="ctr">
+                      <a:solidFill>
+                        <a:srgbClr val="D6DEE1"/>
+                      </a:solidFill>
+                      <a:prstDash val="solid"/>
+                      <a:round/>
+                      <a:headEnd type="none" w="med" len="med"/>
+                      <a:tailEnd type="none" w="med" len="med"/>
+                    </a:lnT>
+                    <a:lnB w="6350" cap="flat" cmpd="sng" algn="ctr">
+                      <a:solidFill>
+                        <a:srgbClr val="D6DEE1"/>
+                      </a:solidFill>
+                      <a:prstDash val="solid"/>
+                      <a:round/>
+                      <a:headEnd type="none" w="med" len="med"/>
+                      <a:tailEnd type="none" w="med" len="med"/>
+                    </a:lnB>
+                    <a:solidFill>
+                      <a:srgbClr val="1C3F4E"/>
+                    </a:solidFill>
+                  </a:tcPr>
+                </a:tc>
+                <a:tc>
+                  <a:txBody>
+                    <a:bodyPr/>
+                    <a:lstStyle/>
+                    <a:p>
+                      <a:pPr algn="ctr" indent="0" marL="0">
+                        <a:buNone/>
+                      </a:pPr>
+                      <a:r>
+                        <a:rPr lang="en-US" sz="1000" b="1" dirty="0">
+                          <a:solidFill>
+                            <a:srgbClr val="FFFFFF"/>
+                          </a:solidFill>
+                          <a:latin typeface="Calibri" pitchFamily="34" charset="0"/>
+                          <a:ea typeface="Calibri" pitchFamily="34" charset="-122"/>
+                          <a:cs typeface="Calibri" pitchFamily="34" charset="-120"/>
+                        </a:rPr>
+                        <a:t>P. Bajos</a:t>
+                      </a:r>
+                      <a:endParaRPr lang="en-US" sz="1000" dirty="0">
+                        <a:latin typeface="Calibri" charset="0"/>
+                        <a:ea typeface="Calibri" charset="0"/>
+                        <a:cs typeface="Calibri" charset="0"/>
+                      </a:endParaRPr>
+                    </a:p>
+                  </a:txBody>
+                  <a:tcPr marL="91440" marR="91440" marT="45720" marB="45720" anchor="ctr">
+                    <a:lnL w="6350" cap="flat" cmpd="sng" algn="ctr">
+                      <a:solidFill>
+                        <a:srgbClr val="D6DEE1"/>
+                      </a:solidFill>
+                      <a:prstDash val="solid"/>
+                      <a:round/>
+                      <a:headEnd type="none" w="med" len="med"/>
+                      <a:tailEnd type="none" w="med" len="med"/>
+                    </a:lnL>
+                    <a:lnR w="6350" cap="flat" cmpd="sng" algn="ctr">
+                      <a:solidFill>
+                        <a:srgbClr val="D6DEE1"/>
+                      </a:solidFill>
+                      <a:prstDash val="solid"/>
+                      <a:round/>
+                      <a:headEnd type="none" w="med" len="med"/>
+                      <a:tailEnd type="none" w="med" len="med"/>
+                    </a:lnR>
+                    <a:lnT w="6350" cap="flat" cmpd="sng" algn="ctr">
+                      <a:solidFill>
+                        <a:srgbClr val="D6DEE1"/>
+                      </a:solidFill>
+                      <a:prstDash val="solid"/>
+                      <a:round/>
+                      <a:headEnd type="none" w="med" len="med"/>
+                      <a:tailEnd type="none" w="med" len="med"/>
+                    </a:lnT>
+                    <a:lnB w="6350" cap="flat" cmpd="sng" algn="ctr">
+                      <a:solidFill>
+                        <a:srgbClr val="D6DEE1"/>
+                      </a:solidFill>
+                      <a:prstDash val="solid"/>
+                      <a:round/>
+                      <a:headEnd type="none" w="med" len="med"/>
+                      <a:tailEnd type="none" w="med" len="med"/>
+                    </a:lnB>
+                    <a:solidFill>
+                      <a:srgbClr val="1C3F4E"/>
+                    </a:solidFill>
+                  </a:tcPr>
+                </a:tc>
+              </a:tr>
+              <a:tr h="347472">
+                <a:tc>
+                  <a:txBody>
+                    <a:bodyPr/>
+                    <a:lstStyle/>
+                    <a:p>
+                      <a:pPr algn="l" indent="0" marL="0">
+                        <a:buNone/>
+                      </a:pPr>
+                      <a:r>
+                        <a:rPr lang="en-US" sz="1050" b="1" dirty="0">
+                          <a:solidFill>
+                            <a:srgbClr val="2B3A42"/>
+                          </a:solidFill>
+                          <a:latin typeface="Calibri" pitchFamily="34" charset="0"/>
+                          <a:ea typeface="Calibri" pitchFamily="34" charset="-122"/>
+                          <a:cs typeface="Calibri" pitchFamily="34" charset="-120"/>
+                        </a:rPr>
+                        <a:t>PD (puntos básicos)</a:t>
+                      </a:r>
+                      <a:endParaRPr lang="en-US" sz="1050" dirty="0">
+                        <a:latin typeface="Calibri" charset="0"/>
+                        <a:ea typeface="Calibri" charset="0"/>
+                        <a:cs typeface="Calibri" charset="0"/>
+                      </a:endParaRPr>
+                    </a:p>
+                  </a:txBody>
+                  <a:tcPr marL="91440" marR="91440" marT="45720" marB="45720" anchor="ctr">
+                    <a:lnL w="6350" cap="flat" cmpd="sng" algn="ctr">
+                      <a:solidFill>
+                        <a:srgbClr val="D6DEE1"/>
+                      </a:solidFill>
+                      <a:prstDash val="solid"/>
+                      <a:round/>
+                      <a:headEnd type="none" w="med" len="med"/>
+                      <a:tailEnd type="none" w="med" len="med"/>
+                    </a:lnL>
+                    <a:lnR w="6350" cap="flat" cmpd="sng" algn="ctr">
+                      <a:solidFill>
+                        <a:srgbClr val="D6DEE1"/>
+                      </a:solidFill>
+                      <a:prstDash val="solid"/>
+                      <a:round/>
+                      <a:headEnd type="none" w="med" len="med"/>
+                      <a:tailEnd type="none" w="med" len="med"/>
+                    </a:lnR>
+                    <a:lnT w="6350" cap="flat" cmpd="sng" algn="ctr">
+                      <a:solidFill>
+                        <a:srgbClr val="D6DEE1"/>
+                      </a:solidFill>
+                      <a:prstDash val="solid"/>
+                      <a:round/>
+                      <a:headEnd type="none" w="med" len="med"/>
+                      <a:tailEnd type="none" w="med" len="med"/>
+                    </a:lnT>
+                    <a:lnB w="6350" cap="flat" cmpd="sng" algn="ctr">
+                      <a:solidFill>
+                        <a:srgbClr val="D6DEE1"/>
+                      </a:solidFill>
+                      <a:prstDash val="solid"/>
+                      <a:round/>
+                      <a:headEnd type="none" w="med" len="med"/>
+                      <a:tailEnd type="none" w="med" len="med"/>
+                    </a:lnB>
+                  </a:tcPr>
+                </a:tc>
+                <a:tc>
+                  <a:txBody>
+                    <a:bodyPr/>
+                    <a:lstStyle/>
+                    <a:p>
+                      <a:pPr algn="ctr" indent="0" marL="0">
+                        <a:buNone/>
+                      </a:pPr>
+                      <a:r>
+                        <a:rPr lang="en-US" sz="1050" b="1" dirty="0">
+                          <a:solidFill>
+                            <a:srgbClr val="B04A3F"/>
+                          </a:solidFill>
+                          <a:latin typeface="Calibri" pitchFamily="34" charset="0"/>
+                          <a:ea typeface="Calibri" pitchFamily="34" charset="-122"/>
+                          <a:cs typeface="Calibri" pitchFamily="34" charset="-120"/>
+                        </a:rPr>
+                        <a:t>+116</a:t>
+                      </a:r>
+                      <a:endParaRPr lang="en-US" sz="1050" dirty="0">
+                        <a:latin typeface="Calibri" charset="0"/>
+                        <a:ea typeface="Calibri" charset="0"/>
+                        <a:cs typeface="Calibri" charset="0"/>
+                      </a:endParaRPr>
+                    </a:p>
+                  </a:txBody>
+                  <a:tcPr marL="91440" marR="91440" marT="45720" marB="45720" anchor="ctr">
+                    <a:lnL w="6350" cap="flat" cmpd="sng" algn="ctr">
+                      <a:solidFill>
+                        <a:srgbClr val="D6DEE1"/>
+                      </a:solidFill>
+                      <a:prstDash val="solid"/>
+                      <a:round/>
+                      <a:headEnd type="none" w="med" len="med"/>
+                      <a:tailEnd type="none" w="med" len="med"/>
+                    </a:lnL>
+                    <a:lnR w="6350" cap="flat" cmpd="sng" algn="ctr">
+                      <a:solidFill>
+                        <a:srgbClr val="D6DEE1"/>
+                      </a:solidFill>
+                      <a:prstDash val="solid"/>
+                      <a:round/>
+                      <a:headEnd type="none" w="med" len="med"/>
+                      <a:tailEnd type="none" w="med" len="med"/>
+                    </a:lnR>
+                    <a:lnT w="6350" cap="flat" cmpd="sng" algn="ctr">
+                      <a:solidFill>
+                        <a:srgbClr val="D6DEE1"/>
+                      </a:solidFill>
+                      <a:prstDash val="solid"/>
+                      <a:round/>
+                      <a:headEnd type="none" w="med" len="med"/>
+                      <a:tailEnd type="none" w="med" len="med"/>
+                    </a:lnT>
+                    <a:lnB w="6350" cap="flat" cmpd="sng" algn="ctr">
+                      <a:solidFill>
+                        <a:srgbClr val="D6DEE1"/>
+                      </a:solidFill>
+                      <a:prstDash val="solid"/>
+                      <a:round/>
+                      <a:headEnd type="none" w="med" len="med"/>
+                      <a:tailEnd type="none" w="med" len="med"/>
+                    </a:lnB>
+                    <a:solidFill>
+                      <a:srgbClr val="FBEDEB"/>
+                    </a:solidFill>
+                  </a:tcPr>
+                </a:tc>
+                <a:tc>
+                  <a:txBody>
+                    <a:bodyPr/>
+                    <a:lstStyle/>
+                    <a:p>
+                      <a:pPr algn="ctr" indent="0" marL="0">
+                        <a:buNone/>
+                      </a:pPr>
+                      <a:r>
+                        <a:rPr lang="en-US" sz="1050" b="1" dirty="0">
+                          <a:solidFill>
+                            <a:srgbClr val="B04A3F"/>
+                          </a:solidFill>
+                          <a:latin typeface="Calibri" pitchFamily="34" charset="0"/>
+                          <a:ea typeface="Calibri" pitchFamily="34" charset="-122"/>
+                          <a:cs typeface="Calibri" pitchFamily="34" charset="-120"/>
+                        </a:rPr>
+                        <a:t>+76</a:t>
+                      </a:r>
+                      <a:endParaRPr lang="en-US" sz="1050" dirty="0">
+                        <a:latin typeface="Calibri" charset="0"/>
+                        <a:ea typeface="Calibri" charset="0"/>
+                        <a:cs typeface="Calibri" charset="0"/>
+                      </a:endParaRPr>
+                    </a:p>
+                  </a:txBody>
+                  <a:tcPr marL="91440" marR="91440" marT="45720" marB="45720" anchor="ctr">
+                    <a:lnL w="6350" cap="flat" cmpd="sng" algn="ctr">
+                      <a:solidFill>
+                        <a:srgbClr val="D6DEE1"/>
+                      </a:solidFill>
+                      <a:prstDash val="solid"/>
+                      <a:round/>
+                      <a:headEnd type="none" w="med" len="med"/>
+                      <a:tailEnd type="none" w="med" len="med"/>
+                    </a:lnL>
+                    <a:lnR w="6350" cap="flat" cmpd="sng" algn="ctr">
+                      <a:solidFill>
+                        <a:srgbClr val="D6DEE1"/>
+                      </a:solidFill>
+                      <a:prstDash val="solid"/>
+                      <a:round/>
+                      <a:headEnd type="none" w="med" len="med"/>
+                      <a:tailEnd type="none" w="med" len="med"/>
+                    </a:lnR>
+                    <a:lnT w="6350" cap="flat" cmpd="sng" algn="ctr">
+                      <a:solidFill>
+                        <a:srgbClr val="D6DEE1"/>
+                      </a:solidFill>
+                      <a:prstDash val="solid"/>
+                      <a:round/>
+                      <a:headEnd type="none" w="med" len="med"/>
+                      <a:tailEnd type="none" w="med" len="med"/>
+                    </a:lnT>
+                    <a:lnB w="6350" cap="flat" cmpd="sng" algn="ctr">
+                      <a:solidFill>
+                        <a:srgbClr val="D6DEE1"/>
+                      </a:solidFill>
+                      <a:prstDash val="solid"/>
+                      <a:round/>
+                      <a:headEnd type="none" w="med" len="med"/>
+                      <a:tailEnd type="none" w="med" len="med"/>
+                    </a:lnB>
+                    <a:solidFill>
+                      <a:srgbClr val="FBEDEB"/>
+                    </a:solidFill>
+                  </a:tcPr>
+                </a:tc>
+                <a:tc>
+                  <a:txBody>
+                    <a:bodyPr/>
+                    <a:lstStyle/>
+                    <a:p>
+                      <a:pPr algn="ctr" indent="0" marL="0">
+                        <a:buNone/>
+                      </a:pPr>
+                      <a:r>
+                        <a:rPr lang="en-US" sz="1050" b="1" dirty="0">
+                          <a:solidFill>
+                            <a:srgbClr val="B04A3F"/>
+                          </a:solidFill>
+                          <a:latin typeface="Calibri" pitchFamily="34" charset="0"/>
+                          <a:ea typeface="Calibri" pitchFamily="34" charset="-122"/>
+                          <a:cs typeface="Calibri" pitchFamily="34" charset="-120"/>
+                        </a:rPr>
+                        <a:t>+155</a:t>
+                      </a:r>
+                      <a:endParaRPr lang="en-US" sz="1050" dirty="0">
+                        <a:latin typeface="Calibri" charset="0"/>
+                        <a:ea typeface="Calibri" charset="0"/>
+                        <a:cs typeface="Calibri" charset="0"/>
+                      </a:endParaRPr>
+                    </a:p>
+                  </a:txBody>
+                  <a:tcPr marL="91440" marR="91440" marT="45720" marB="45720" anchor="ctr">
+                    <a:lnL w="6350" cap="flat" cmpd="sng" algn="ctr">
+                      <a:solidFill>
+                        <a:srgbClr val="D6DEE1"/>
+                      </a:solidFill>
+                      <a:prstDash val="solid"/>
+                      <a:round/>
+                      <a:headEnd type="none" w="med" len="med"/>
+                      <a:tailEnd type="none" w="med" len="med"/>
+                    </a:lnL>
+                    <a:lnR w="6350" cap="flat" cmpd="sng" algn="ctr">
+                      <a:solidFill>
+                        <a:srgbClr val="D6DEE1"/>
+                      </a:solidFill>
+                      <a:prstDash val="solid"/>
+                      <a:round/>
+                      <a:headEnd type="none" w="med" len="med"/>
+                      <a:tailEnd type="none" w="med" len="med"/>
+                    </a:lnR>
+                    <a:lnT w="6350" cap="flat" cmpd="sng" algn="ctr">
+                      <a:solidFill>
+                        <a:srgbClr val="D6DEE1"/>
+                      </a:solidFill>
+                      <a:prstDash val="solid"/>
+                      <a:round/>
+                      <a:headEnd type="none" w="med" len="med"/>
+                      <a:tailEnd type="none" w="med" len="med"/>
+                    </a:lnT>
+                    <a:lnB w="6350" cap="flat" cmpd="sng" algn="ctr">
+                      <a:solidFill>
+                        <a:srgbClr val="D6DEE1"/>
+                      </a:solidFill>
+                      <a:prstDash val="solid"/>
+                      <a:round/>
+                      <a:headEnd type="none" w="med" len="med"/>
+                      <a:tailEnd type="none" w="med" len="med"/>
+                    </a:lnB>
+                    <a:solidFill>
+                      <a:srgbClr val="FBEDEB"/>
+                    </a:solidFill>
+                  </a:tcPr>
+                </a:tc>
+                <a:tc>
+                  <a:txBody>
+                    <a:bodyPr/>
+                    <a:lstStyle/>
+                    <a:p>
+                      <a:pPr algn="ctr" indent="0" marL="0">
+                        <a:buNone/>
+                      </a:pPr>
+                      <a:r>
+                        <a:rPr lang="en-US" sz="1050" b="1" dirty="0">
+                          <a:solidFill>
+                            <a:srgbClr val="B04A3F"/>
+                          </a:solidFill>
+                          <a:latin typeface="Calibri" pitchFamily="34" charset="0"/>
+                          <a:ea typeface="Calibri" pitchFamily="34" charset="-122"/>
+                          <a:cs typeface="Calibri" pitchFamily="34" charset="-120"/>
+                        </a:rPr>
+                        <a:t>+159</a:t>
+                      </a:r>
+                      <a:endParaRPr lang="en-US" sz="1050" dirty="0">
+                        <a:latin typeface="Calibri" charset="0"/>
+                        <a:ea typeface="Calibri" charset="0"/>
+                        <a:cs typeface="Calibri" charset="0"/>
+                      </a:endParaRPr>
+                    </a:p>
+                  </a:txBody>
+                  <a:tcPr marL="91440" marR="91440" marT="45720" marB="45720" anchor="ctr">
+                    <a:lnL w="6350" cap="flat" cmpd="sng" algn="ctr">
+                      <a:solidFill>
+                        <a:srgbClr val="D6DEE1"/>
+                      </a:solidFill>
+                      <a:prstDash val="solid"/>
+                      <a:round/>
+                      <a:headEnd type="none" w="med" len="med"/>
+                      <a:tailEnd type="none" w="med" len="med"/>
+                    </a:lnL>
+                    <a:lnR w="6350" cap="flat" cmpd="sng" algn="ctr">
+                      <a:solidFill>
+                        <a:srgbClr val="D6DEE1"/>
+                      </a:solidFill>
+                      <a:prstDash val="solid"/>
+                      <a:round/>
+                      <a:headEnd type="none" w="med" len="med"/>
+                      <a:tailEnd type="none" w="med" len="med"/>
+                    </a:lnR>
+                    <a:lnT w="6350" cap="flat" cmpd="sng" algn="ctr">
+                      <a:solidFill>
+                        <a:srgbClr val="D6DEE1"/>
+                      </a:solidFill>
+                      <a:prstDash val="solid"/>
+                      <a:round/>
+                      <a:headEnd type="none" w="med" len="med"/>
+                      <a:tailEnd type="none" w="med" len="med"/>
+                    </a:lnT>
+                    <a:lnB w="6350" cap="flat" cmpd="sng" algn="ctr">
+                      <a:solidFill>
+                        <a:srgbClr val="D6DEE1"/>
+                      </a:solidFill>
+                      <a:prstDash val="solid"/>
+                      <a:round/>
+                      <a:headEnd type="none" w="med" len="med"/>
+                      <a:tailEnd type="none" w="med" len="med"/>
+                    </a:lnB>
+                    <a:solidFill>
+                      <a:srgbClr val="FBEDEB"/>
+                    </a:solidFill>
+                  </a:tcPr>
+                </a:tc>
+                <a:tc>
+                  <a:txBody>
+                    <a:bodyPr/>
+                    <a:lstStyle/>
+                    <a:p>
+                      <a:pPr algn="ctr" indent="0" marL="0">
+                        <a:buNone/>
+                      </a:pPr>
+                      <a:r>
+                        <a:rPr lang="en-US" sz="1050" b="1" dirty="0">
+                          <a:solidFill>
+                            <a:srgbClr val="B04A3F"/>
+                          </a:solidFill>
+                          <a:latin typeface="Calibri" pitchFamily="34" charset="0"/>
+                          <a:ea typeface="Calibri" pitchFamily="34" charset="-122"/>
+                          <a:cs typeface="Calibri" pitchFamily="34" charset="-120"/>
+                        </a:rPr>
+                        <a:t>+93</a:t>
+                      </a:r>
+                      <a:endParaRPr lang="en-US" sz="1050" dirty="0">
+                        <a:latin typeface="Calibri" charset="0"/>
+                        <a:ea typeface="Calibri" charset="0"/>
+                        <a:cs typeface="Calibri" charset="0"/>
+                      </a:endParaRPr>
+                    </a:p>
+                  </a:txBody>
+                  <a:tcPr marL="91440" marR="91440" marT="45720" marB="45720" anchor="ctr">
+                    <a:lnL w="6350" cap="flat" cmpd="sng" algn="ctr">
+                      <a:solidFill>
+                        <a:srgbClr val="D6DEE1"/>
+                      </a:solidFill>
+                      <a:prstDash val="solid"/>
+                      <a:round/>
+                      <a:headEnd type="none" w="med" len="med"/>
+                      <a:tailEnd type="none" w="med" len="med"/>
+                    </a:lnL>
+                    <a:lnR w="6350" cap="flat" cmpd="sng" algn="ctr">
+                      <a:solidFill>
+                        <a:srgbClr val="D6DEE1"/>
+                      </a:solidFill>
+                      <a:prstDash val="solid"/>
+                      <a:round/>
+                      <a:headEnd type="none" w="med" len="med"/>
+                      <a:tailEnd type="none" w="med" len="med"/>
+                    </a:lnR>
+                    <a:lnT w="6350" cap="flat" cmpd="sng" algn="ctr">
+                      <a:solidFill>
+                        <a:srgbClr val="D6DEE1"/>
+                      </a:solidFill>
+                      <a:prstDash val="solid"/>
+                      <a:round/>
+                      <a:headEnd type="none" w="med" len="med"/>
+                      <a:tailEnd type="none" w="med" len="med"/>
+                    </a:lnT>
+                    <a:lnB w="6350" cap="flat" cmpd="sng" algn="ctr">
+                      <a:solidFill>
+                        <a:srgbClr val="D6DEE1"/>
+                      </a:solidFill>
+                      <a:prstDash val="solid"/>
+                      <a:round/>
+                      <a:headEnd type="none" w="med" len="med"/>
+                      <a:tailEnd type="none" w="med" len="med"/>
+                    </a:lnB>
+                    <a:solidFill>
+                      <a:srgbClr val="FBEDEB"/>
+                    </a:solidFill>
+                  </a:tcPr>
+                </a:tc>
+                <a:tc>
+                  <a:txBody>
+                    <a:bodyPr/>
+                    <a:lstStyle/>
+                    <a:p>
+                      <a:pPr algn="ctr" indent="0" marL="0">
+                        <a:buNone/>
+                      </a:pPr>
+                      <a:r>
+                        <a:rPr lang="en-US" sz="1050" b="1" dirty="0">
+                          <a:solidFill>
+                            <a:srgbClr val="B04A3F"/>
+                          </a:solidFill>
+                          <a:latin typeface="Calibri" pitchFamily="34" charset="0"/>
+                          <a:ea typeface="Calibri" pitchFamily="34" charset="-122"/>
+                          <a:cs typeface="Calibri" pitchFamily="34" charset="-120"/>
+                        </a:rPr>
+                        <a:t>+66</a:t>
+                      </a:r>
+                      <a:endParaRPr lang="en-US" sz="1050" dirty="0">
+                        <a:latin typeface="Calibri" charset="0"/>
+                        <a:ea typeface="Calibri" charset="0"/>
+                        <a:cs typeface="Calibri" charset="0"/>
+                      </a:endParaRPr>
+                    </a:p>
+                  </a:txBody>
+                  <a:tcPr marL="91440" marR="91440" marT="45720" marB="45720" anchor="ctr">
+                    <a:lnL w="6350" cap="flat" cmpd="sng" algn="ctr">
+                      <a:solidFill>
+                        <a:srgbClr val="D6DEE1"/>
+                      </a:solidFill>
+                      <a:prstDash val="solid"/>
+                      <a:round/>
+                      <a:headEnd type="none" w="med" len="med"/>
+                      <a:tailEnd type="none" w="med" len="med"/>
+                    </a:lnL>
+                    <a:lnR w="6350" cap="flat" cmpd="sng" algn="ctr">
+                      <a:solidFill>
+                        <a:srgbClr val="D6DEE1"/>
+                      </a:solidFill>
+                      <a:prstDash val="solid"/>
+                      <a:round/>
+                      <a:headEnd type="none" w="med" len="med"/>
+                      <a:tailEnd type="none" w="med" len="med"/>
+                    </a:lnR>
+                    <a:lnT w="6350" cap="flat" cmpd="sng" algn="ctr">
+                      <a:solidFill>
+                        <a:srgbClr val="D6DEE1"/>
+                      </a:solidFill>
+                      <a:prstDash val="solid"/>
+                      <a:round/>
+                      <a:headEnd type="none" w="med" len="med"/>
+                      <a:tailEnd type="none" w="med" len="med"/>
+                    </a:lnT>
+                    <a:lnB w="6350" cap="flat" cmpd="sng" algn="ctr">
+                      <a:solidFill>
+                        <a:srgbClr val="D6DEE1"/>
+                      </a:solidFill>
+                      <a:prstDash val="solid"/>
+                      <a:round/>
+                      <a:headEnd type="none" w="med" len="med"/>
+                      <a:tailEnd type="none" w="med" len="med"/>
+                    </a:lnB>
+                    <a:solidFill>
+                      <a:srgbClr val="FBEDEB"/>
+                    </a:solidFill>
+                  </a:tcPr>
+                </a:tc>
+              </a:tr>
+              <a:tr h="347472">
+                <a:tc>
+                  <a:txBody>
+                    <a:bodyPr/>
+                    <a:lstStyle/>
+                    <a:p>
+                      <a:pPr algn="l" indent="0" marL="0">
+                        <a:buNone/>
+                      </a:pPr>
+                      <a:r>
+                        <a:rPr lang="en-US" sz="1050" b="1" dirty="0">
+                          <a:solidFill>
+                            <a:srgbClr val="2B3A42"/>
+                          </a:solidFill>
+                          <a:latin typeface="Calibri" pitchFamily="34" charset="0"/>
+                          <a:ea typeface="Calibri" pitchFamily="34" charset="-122"/>
+                          <a:cs typeface="Calibri" pitchFamily="34" charset="-120"/>
+                        </a:rPr>
+                        <a:t>LGD (puntos porcentuales)</a:t>
+                      </a:r>
+                      <a:endParaRPr lang="en-US" sz="1050" dirty="0">
+                        <a:latin typeface="Calibri" charset="0"/>
+                        <a:ea typeface="Calibri" charset="0"/>
+                        <a:cs typeface="Calibri" charset="0"/>
+                      </a:endParaRPr>
+                    </a:p>
+                  </a:txBody>
+                  <a:tcPr marL="91440" marR="91440" marT="45720" marB="45720" anchor="ctr">
+                    <a:lnL w="6350" cap="flat" cmpd="sng" algn="ctr">
+                      <a:solidFill>
+                        <a:srgbClr val="D6DEE1"/>
+                      </a:solidFill>
+                      <a:prstDash val="solid"/>
+                      <a:round/>
+                      <a:headEnd type="none" w="med" len="med"/>
+                      <a:tailEnd type="none" w="med" len="med"/>
+                    </a:lnL>
+                    <a:lnR w="6350" cap="flat" cmpd="sng" algn="ctr">
+                      <a:solidFill>
+                        <a:srgbClr val="D6DEE1"/>
+                      </a:solidFill>
+                      <a:prstDash val="solid"/>
+                      <a:round/>
+                      <a:headEnd type="none" w="med" len="med"/>
+                      <a:tailEnd type="none" w="med" len="med"/>
+                    </a:lnR>
+                    <a:lnT w="6350" cap="flat" cmpd="sng" algn="ctr">
+                      <a:solidFill>
+                        <a:srgbClr val="D6DEE1"/>
+                      </a:solidFill>
+                      <a:prstDash val="solid"/>
+                      <a:round/>
+                      <a:headEnd type="none" w="med" len="med"/>
+                      <a:tailEnd type="none" w="med" len="med"/>
+                    </a:lnT>
+                    <a:lnB w="6350" cap="flat" cmpd="sng" algn="ctr">
+                      <a:solidFill>
+                        <a:srgbClr val="D6DEE1"/>
+                      </a:solidFill>
+                      <a:prstDash val="solid"/>
+                      <a:round/>
+                      <a:headEnd type="none" w="med" len="med"/>
+                      <a:tailEnd type="none" w="med" len="med"/>
+                    </a:lnB>
+                  </a:tcPr>
+                </a:tc>
+                <a:tc>
+                  <a:txBody>
+                    <a:bodyPr/>
+                    <a:lstStyle/>
+                    <a:p>
+                      <a:pPr algn="ctr" indent="0" marL="0">
+                        <a:buNone/>
+                      </a:pPr>
+                      <a:r>
+                        <a:rPr lang="en-US" sz="1050" b="1" dirty="0">
+                          <a:solidFill>
+                            <a:srgbClr val="2E7D5B"/>
+                          </a:solidFill>
+                          <a:latin typeface="Calibri" pitchFamily="34" charset="0"/>
+                          <a:ea typeface="Calibri" pitchFamily="34" charset="-122"/>
+                          <a:cs typeface="Calibri" pitchFamily="34" charset="-120"/>
+                        </a:rPr>
+                        <a:t>-5.6</a:t>
+                      </a:r>
+                      <a:endParaRPr lang="en-US" sz="1050" dirty="0">
+                        <a:latin typeface="Calibri" charset="0"/>
+                        <a:ea typeface="Calibri" charset="0"/>
+                        <a:cs typeface="Calibri" charset="0"/>
+                      </a:endParaRPr>
+                    </a:p>
+                  </a:txBody>
+                  <a:tcPr marL="91440" marR="91440" marT="45720" marB="45720" anchor="ctr">
+                    <a:lnL w="6350" cap="flat" cmpd="sng" algn="ctr">
+                      <a:solidFill>
+                        <a:srgbClr val="D6DEE1"/>
+                      </a:solidFill>
+                      <a:prstDash val="solid"/>
+                      <a:round/>
+                      <a:headEnd type="none" w="med" len="med"/>
+                      <a:tailEnd type="none" w="med" len="med"/>
+                    </a:lnL>
+                    <a:lnR w="6350" cap="flat" cmpd="sng" algn="ctr">
+                      <a:solidFill>
+                        <a:srgbClr val="D6DEE1"/>
+                      </a:solidFill>
+                      <a:prstDash val="solid"/>
+                      <a:round/>
+                      <a:headEnd type="none" w="med" len="med"/>
+                      <a:tailEnd type="none" w="med" len="med"/>
+                    </a:lnR>
+                    <a:lnT w="6350" cap="flat" cmpd="sng" algn="ctr">
+                      <a:solidFill>
+                        <a:srgbClr val="D6DEE1"/>
+                      </a:solidFill>
+                      <a:prstDash val="solid"/>
+                      <a:round/>
+                      <a:headEnd type="none" w="med" len="med"/>
+                      <a:tailEnd type="none" w="med" len="med"/>
+                    </a:lnT>
+                    <a:lnB w="6350" cap="flat" cmpd="sng" algn="ctr">
+                      <a:solidFill>
+                        <a:srgbClr val="D6DEE1"/>
+                      </a:solidFill>
+                      <a:prstDash val="solid"/>
+                      <a:round/>
+                      <a:headEnd type="none" w="med" len="med"/>
+                      <a:tailEnd type="none" w="med" len="med"/>
+                    </a:lnB>
+                    <a:solidFill>
+                      <a:srgbClr val="EAF3EE"/>
+                    </a:solidFill>
+                  </a:tcPr>
+                </a:tc>
+                <a:tc>
+                  <a:txBody>
+                    <a:bodyPr/>
+                    <a:lstStyle/>
+                    <a:p>
+                      <a:pPr algn="ctr" indent="0" marL="0">
+                        <a:buNone/>
+                      </a:pPr>
+                      <a:r>
+                        <a:rPr lang="en-US" sz="1050" b="1" dirty="0">
+                          <a:solidFill>
+                            <a:srgbClr val="2E7D5B"/>
+                          </a:solidFill>
+                          <a:latin typeface="Calibri" pitchFamily="34" charset="0"/>
+                          <a:ea typeface="Calibri" pitchFamily="34" charset="-122"/>
+                          <a:cs typeface="Calibri" pitchFamily="34" charset="-120"/>
+                        </a:rPr>
+                        <a:t>-8.1</a:t>
+                      </a:r>
+                      <a:endParaRPr lang="en-US" sz="1050" dirty="0">
+                        <a:latin typeface="Calibri" charset="0"/>
+                        <a:ea typeface="Calibri" charset="0"/>
+                        <a:cs typeface="Calibri" charset="0"/>
+                      </a:endParaRPr>
+                    </a:p>
+                  </a:txBody>
+                  <a:tcPr marL="91440" marR="91440" marT="45720" marB="45720" anchor="ctr">
+                    <a:lnL w="6350" cap="flat" cmpd="sng" algn="ctr">
+                      <a:solidFill>
+                        <a:srgbClr val="D6DEE1"/>
+                      </a:solidFill>
+                      <a:prstDash val="solid"/>
+                      <a:round/>
+                      <a:headEnd type="none" w="med" len="med"/>
+                      <a:tailEnd type="none" w="med" len="med"/>
+                    </a:lnL>
+                    <a:lnR w="6350" cap="flat" cmpd="sng" algn="ctr">
+                      <a:solidFill>
+                        <a:srgbClr val="D6DEE1"/>
+                      </a:solidFill>
+                      <a:prstDash val="solid"/>
+                      <a:round/>
+                      <a:headEnd type="none" w="med" len="med"/>
+                      <a:tailEnd type="none" w="med" len="med"/>
+                    </a:lnR>
+                    <a:lnT w="6350" cap="flat" cmpd="sng" algn="ctr">
+                      <a:solidFill>
+                        <a:srgbClr val="D6DEE1"/>
+                      </a:solidFill>
+                      <a:prstDash val="solid"/>
+                      <a:round/>
+                      <a:headEnd type="none" w="med" len="med"/>
+                      <a:tailEnd type="none" w="med" len="med"/>
+                    </a:lnT>
+                    <a:lnB w="6350" cap="flat" cmpd="sng" algn="ctr">
+                      <a:solidFill>
+                        <a:srgbClr val="D6DEE1"/>
+                      </a:solidFill>
+                      <a:prstDash val="solid"/>
+                      <a:round/>
+                      <a:headEnd type="none" w="med" len="med"/>
+                      <a:tailEnd type="none" w="med" len="med"/>
+                    </a:lnB>
+                    <a:solidFill>
+                      <a:srgbClr val="EAF3EE"/>
+                    </a:solidFill>
+                  </a:tcPr>
+                </a:tc>
+                <a:tc>
+                  <a:txBody>
+                    <a:bodyPr/>
+                    <a:lstStyle/>
+                    <a:p>
+                      <a:pPr algn="ctr" indent="0" marL="0">
+                        <a:buNone/>
+                      </a:pPr>
+                      <a:r>
+                        <a:rPr lang="en-US" sz="1050" b="1" dirty="0">
+                          <a:solidFill>
+                            <a:srgbClr val="2E7D5B"/>
+                          </a:solidFill>
+                          <a:latin typeface="Calibri" pitchFamily="34" charset="0"/>
+                          <a:ea typeface="Calibri" pitchFamily="34" charset="-122"/>
+                          <a:cs typeface="Calibri" pitchFamily="34" charset="-120"/>
+                        </a:rPr>
+                        <a:t>-8.5</a:t>
+                      </a:r>
+                      <a:endParaRPr lang="en-US" sz="1050" dirty="0">
+                        <a:latin typeface="Calibri" charset="0"/>
+                        <a:ea typeface="Calibri" charset="0"/>
+                        <a:cs typeface="Calibri" charset="0"/>
+                      </a:endParaRPr>
+                    </a:p>
+                  </a:txBody>
+                  <a:tcPr marL="91440" marR="91440" marT="45720" marB="45720" anchor="ctr">
+                    <a:lnL w="6350" cap="flat" cmpd="sng" algn="ctr">
+                      <a:solidFill>
+                        <a:srgbClr val="D6DEE1"/>
+                      </a:solidFill>
+                      <a:prstDash val="solid"/>
+                      <a:round/>
+                      <a:headEnd type="none" w="med" len="med"/>
+                      <a:tailEnd type="none" w="med" len="med"/>
+                    </a:lnL>
+                    <a:lnR w="6350" cap="flat" cmpd="sng" algn="ctr">
+                      <a:solidFill>
+                        <a:srgbClr val="D6DEE1"/>
+                      </a:solidFill>
+                      <a:prstDash val="solid"/>
+                      <a:round/>
+                      <a:headEnd type="none" w="med" len="med"/>
+                      <a:tailEnd type="none" w="med" len="med"/>
+                    </a:lnR>
+                    <a:lnT w="6350" cap="flat" cmpd="sng" algn="ctr">
+                      <a:solidFill>
+                        <a:srgbClr val="D6DEE1"/>
+                      </a:solidFill>
+                      <a:prstDash val="solid"/>
+                      <a:round/>
+                      <a:headEnd type="none" w="med" len="med"/>
+                      <a:tailEnd type="none" w="med" len="med"/>
+                    </a:lnT>
+                    <a:lnB w="6350" cap="flat" cmpd="sng" algn="ctr">
+                      <a:solidFill>
+                        <a:srgbClr val="D6DEE1"/>
+                      </a:solidFill>
+                      <a:prstDash val="solid"/>
+                      <a:round/>
+                      <a:headEnd type="none" w="med" len="med"/>
+                      <a:tailEnd type="none" w="med" len="med"/>
+                    </a:lnB>
+                    <a:solidFill>
+                      <a:srgbClr val="EAF3EE"/>
+                    </a:solidFill>
+                  </a:tcPr>
+                </a:tc>
+                <a:tc>
+                  <a:txBody>
+                    <a:bodyPr/>
+                    <a:lstStyle/>
+                    <a:p>
+                      <a:pPr algn="ctr" indent="0" marL="0">
+                        <a:buNone/>
+                      </a:pPr>
+                      <a:r>
+                        <a:rPr lang="en-US" sz="1050" b="1" dirty="0">
+                          <a:solidFill>
+                            <a:srgbClr val="2E7D5B"/>
+                          </a:solidFill>
+                          <a:latin typeface="Calibri" pitchFamily="34" charset="0"/>
+                          <a:ea typeface="Calibri" pitchFamily="34" charset="-122"/>
+                          <a:cs typeface="Calibri" pitchFamily="34" charset="-120"/>
+                        </a:rPr>
+                        <a:t>-4.4</a:t>
+                      </a:r>
+                      <a:endParaRPr lang="en-US" sz="1050" dirty="0">
+                        <a:latin typeface="Calibri" charset="0"/>
+                        <a:ea typeface="Calibri" charset="0"/>
+                        <a:cs typeface="Calibri" charset="0"/>
+                      </a:endParaRPr>
+                    </a:p>
+                  </a:txBody>
+                  <a:tcPr marL="91440" marR="91440" marT="45720" marB="45720" anchor="ctr">
+                    <a:lnL w="6350" cap="flat" cmpd="sng" algn="ctr">
+                      <a:solidFill>
+                        <a:srgbClr val="D6DEE1"/>
+                      </a:solidFill>
+                      <a:prstDash val="solid"/>
+                      <a:round/>
+                      <a:headEnd type="none" w="med" len="med"/>
+                      <a:tailEnd type="none" w="med" len="med"/>
+                    </a:lnL>
+                    <a:lnR w="6350" cap="flat" cmpd="sng" algn="ctr">
+                      <a:solidFill>
+                        <a:srgbClr val="D6DEE1"/>
+                      </a:solidFill>
+                      <a:prstDash val="solid"/>
+                      <a:round/>
+                      <a:headEnd type="none" w="med" len="med"/>
+                      <a:tailEnd type="none" w="med" len="med"/>
+                    </a:lnR>
+                    <a:lnT w="6350" cap="flat" cmpd="sng" algn="ctr">
+                      <a:solidFill>
+                        <a:srgbClr val="D6DEE1"/>
+                      </a:solidFill>
+                      <a:prstDash val="solid"/>
+                      <a:round/>
+                      <a:headEnd type="none" w="med" len="med"/>
+                      <a:tailEnd type="none" w="med" len="med"/>
+                    </a:lnT>
+                    <a:lnB w="6350" cap="flat" cmpd="sng" algn="ctr">
+                      <a:solidFill>
+                        <a:srgbClr val="D6DEE1"/>
+                      </a:solidFill>
+                      <a:prstDash val="solid"/>
+                      <a:round/>
+                      <a:headEnd type="none" w="med" len="med"/>
+                      <a:tailEnd type="none" w="med" len="med"/>
+                    </a:lnB>
+                    <a:solidFill>
+                      <a:srgbClr val="EAF3EE"/>
+                    </a:solidFill>
+                  </a:tcPr>
+                </a:tc>
+                <a:tc>
+                  <a:txBody>
+                    <a:bodyPr/>
+                    <a:lstStyle/>
+                    <a:p>
+                      <a:pPr algn="ctr" indent="0" marL="0">
+                        <a:buNone/>
+                      </a:pPr>
+                      <a:r>
+                        <a:rPr lang="en-US" sz="1050" b="1" dirty="0">
+                          <a:solidFill>
+                            <a:srgbClr val="B04A3F"/>
+                          </a:solidFill>
+                          <a:latin typeface="Calibri" pitchFamily="34" charset="0"/>
+                          <a:ea typeface="Calibri" pitchFamily="34" charset="-122"/>
+                          <a:cs typeface="Calibri" pitchFamily="34" charset="-120"/>
+                        </a:rPr>
+                        <a:t>0.0</a:t>
+                      </a:r>
+                      <a:endParaRPr lang="en-US" sz="1050" dirty="0">
+                        <a:latin typeface="Calibri" charset="0"/>
+                        <a:ea typeface="Calibri" charset="0"/>
+                        <a:cs typeface="Calibri" charset="0"/>
+                      </a:endParaRPr>
+                    </a:p>
+                  </a:txBody>
+                  <a:tcPr marL="91440" marR="91440" marT="45720" marB="45720" anchor="ctr">
+                    <a:lnL w="6350" cap="flat" cmpd="sng" algn="ctr">
+                      <a:solidFill>
+                        <a:srgbClr val="D6DEE1"/>
+                      </a:solidFill>
+                      <a:prstDash val="solid"/>
+                      <a:round/>
+                      <a:headEnd type="none" w="med" len="med"/>
+                      <a:tailEnd type="none" w="med" len="med"/>
+                    </a:lnL>
+                    <a:lnR w="6350" cap="flat" cmpd="sng" algn="ctr">
+                      <a:solidFill>
+                        <a:srgbClr val="D6DEE1"/>
+                      </a:solidFill>
+                      <a:prstDash val="solid"/>
+                      <a:round/>
+                      <a:headEnd type="none" w="med" len="med"/>
+                      <a:tailEnd type="none" w="med" len="med"/>
+                    </a:lnR>
+                    <a:lnT w="6350" cap="flat" cmpd="sng" algn="ctr">
+                      <a:solidFill>
+                        <a:srgbClr val="D6DEE1"/>
+                      </a:solidFill>
+                      <a:prstDash val="solid"/>
+                      <a:round/>
+                      <a:headEnd type="none" w="med" len="med"/>
+                      <a:tailEnd type="none" w="med" len="med"/>
+                    </a:lnT>
+                    <a:lnB w="6350" cap="flat" cmpd="sng" algn="ctr">
+                      <a:solidFill>
+                        <a:srgbClr val="D6DEE1"/>
+                      </a:solidFill>
+                      <a:prstDash val="solid"/>
+                      <a:round/>
+                      <a:headEnd type="none" w="med" len="med"/>
+                      <a:tailEnd type="none" w="med" len="med"/>
+                    </a:lnB>
+                    <a:solidFill>
+                      <a:srgbClr val="FBEDEB"/>
+                    </a:solidFill>
+                  </a:tcPr>
+                </a:tc>
+                <a:tc>
+                  <a:txBody>
+                    <a:bodyPr/>
+                    <a:lstStyle/>
+                    <a:p>
+                      <a:pPr algn="ctr" indent="0" marL="0">
+                        <a:buNone/>
+                      </a:pPr>
+                      <a:r>
+                        <a:rPr lang="en-US" sz="1050" b="1" dirty="0">
+                          <a:solidFill>
+                            <a:srgbClr val="2E7D5B"/>
+                          </a:solidFill>
+                          <a:latin typeface="Calibri" pitchFamily="34" charset="0"/>
+                          <a:ea typeface="Calibri" pitchFamily="34" charset="-122"/>
+                          <a:cs typeface="Calibri" pitchFamily="34" charset="-120"/>
+                        </a:rPr>
+                        <a:t>-10.3</a:t>
+                      </a:r>
+                      <a:endParaRPr lang="en-US" sz="1050" dirty="0">
+                        <a:latin typeface="Calibri" charset="0"/>
+                        <a:ea typeface="Calibri" charset="0"/>
+                        <a:cs typeface="Calibri" charset="0"/>
+                      </a:endParaRPr>
+                    </a:p>
+                  </a:txBody>
+                  <a:tcPr marL="91440" marR="91440" marT="45720" marB="45720" anchor="ctr">
+                    <a:lnL w="6350" cap="flat" cmpd="sng" algn="ctr">
+                      <a:solidFill>
+                        <a:srgbClr val="D6DEE1"/>
+                      </a:solidFill>
+                      <a:prstDash val="solid"/>
+                      <a:round/>
+                      <a:headEnd type="none" w="med" len="med"/>
+                      <a:tailEnd type="none" w="med" len="med"/>
+                    </a:lnL>
+                    <a:lnR w="6350" cap="flat" cmpd="sng" algn="ctr">
+                      <a:solidFill>
+                        <a:srgbClr val="D6DEE1"/>
+                      </a:solidFill>
+                      <a:prstDash val="solid"/>
+                      <a:round/>
+                      <a:headEnd type="none" w="med" len="med"/>
+                      <a:tailEnd type="none" w="med" len="med"/>
+                    </a:lnR>
+                    <a:lnT w="6350" cap="flat" cmpd="sng" algn="ctr">
+                      <a:solidFill>
+                        <a:srgbClr val="D6DEE1"/>
+                      </a:solidFill>
+                      <a:prstDash val="solid"/>
+                      <a:round/>
+                      <a:headEnd type="none" w="med" len="med"/>
+                      <a:tailEnd type="none" w="med" len="med"/>
+                    </a:lnT>
+                    <a:lnB w="6350" cap="flat" cmpd="sng" algn="ctr">
+                      <a:solidFill>
+                        <a:srgbClr val="D6DEE1"/>
+                      </a:solidFill>
+                      <a:prstDash val="solid"/>
+                      <a:round/>
+                      <a:headEnd type="none" w="med" len="med"/>
+                      <a:tailEnd type="none" w="med" len="med"/>
+                    </a:lnB>
+                    <a:solidFill>
+                      <a:srgbClr val="EAF3EE"/>
+                    </a:solidFill>
+                  </a:tcPr>
+                </a:tc>
+              </a:tr>
+              <a:tr h="347472">
+                <a:tc>
+                  <a:txBody>
+                    <a:bodyPr/>
+                    <a:lstStyle/>
+                    <a:p>
+                      <a:pPr algn="l" indent="0" marL="0">
+                        <a:buNone/>
+                      </a:pPr>
+                      <a:r>
+                        <a:rPr lang="en-US" sz="1050" b="1" dirty="0">
+                          <a:solidFill>
+                            <a:srgbClr val="2B3A42"/>
+                          </a:solidFill>
+                          <a:latin typeface="Calibri" pitchFamily="34" charset="0"/>
+                          <a:ea typeface="Calibri" pitchFamily="34" charset="-122"/>
+                          <a:cs typeface="Calibri" pitchFamily="34" charset="-120"/>
+                        </a:rPr>
+                        <a:t>PD × LGD (puntos básicos)</a:t>
+                      </a:r>
+                      <a:endParaRPr lang="en-US" sz="1050" dirty="0">
+                        <a:latin typeface="Calibri" charset="0"/>
+                        <a:ea typeface="Calibri" charset="0"/>
+                        <a:cs typeface="Calibri" charset="0"/>
+                      </a:endParaRPr>
+                    </a:p>
+                  </a:txBody>
+                  <a:tcPr marL="91440" marR="91440" marT="45720" marB="45720" anchor="ctr">
+                    <a:lnL w="6350" cap="flat" cmpd="sng" algn="ctr">
+                      <a:solidFill>
+                        <a:srgbClr val="D6DEE1"/>
+                      </a:solidFill>
+                      <a:prstDash val="solid"/>
+                      <a:round/>
+                      <a:headEnd type="none" w="med" len="med"/>
+                      <a:tailEnd type="none" w="med" len="med"/>
+                    </a:lnL>
+                    <a:lnR w="6350" cap="flat" cmpd="sng" algn="ctr">
+                      <a:solidFill>
+                        <a:srgbClr val="D6DEE1"/>
+                      </a:solidFill>
+                      <a:prstDash val="solid"/>
+                      <a:round/>
+                      <a:headEnd type="none" w="med" len="med"/>
+                      <a:tailEnd type="none" w="med" len="med"/>
+                    </a:lnR>
+                    <a:lnT w="6350" cap="flat" cmpd="sng" algn="ctr">
+                      <a:solidFill>
+                        <a:srgbClr val="D6DEE1"/>
+                      </a:solidFill>
+                      <a:prstDash val="solid"/>
+                      <a:round/>
+                      <a:headEnd type="none" w="med" len="med"/>
+                      <a:tailEnd type="none" w="med" len="med"/>
+                    </a:lnT>
+                    <a:lnB w="6350" cap="flat" cmpd="sng" algn="ctr">
+                      <a:solidFill>
+                        <a:srgbClr val="D6DEE1"/>
+                      </a:solidFill>
+                      <a:prstDash val="solid"/>
+                      <a:round/>
+                      <a:headEnd type="none" w="med" len="med"/>
+                      <a:tailEnd type="none" w="med" len="med"/>
+                    </a:lnB>
+                    <a:solidFill>
+                      <a:srgbClr val="EEF2F3"/>
+                    </a:solidFill>
+                  </a:tcPr>
+                </a:tc>
+                <a:tc>
+                  <a:txBody>
+                    <a:bodyPr/>
+                    <a:lstStyle/>
+                    <a:p>
+                      <a:pPr algn="ctr" indent="0" marL="0">
+                        <a:buNone/>
+                      </a:pPr>
+                      <a:r>
+                        <a:rPr lang="en-US" sz="1050" b="1" dirty="0">
+                          <a:solidFill>
+                            <a:srgbClr val="B04A3F"/>
+                          </a:solidFill>
+                          <a:latin typeface="Calibri" pitchFamily="34" charset="0"/>
+                          <a:ea typeface="Calibri" pitchFamily="34" charset="-122"/>
+                          <a:cs typeface="Calibri" pitchFamily="34" charset="-120"/>
+                        </a:rPr>
+                        <a:t>+36</a:t>
+                      </a:r>
+                      <a:endParaRPr lang="en-US" sz="1050" dirty="0">
+                        <a:latin typeface="Calibri" charset="0"/>
+                        <a:ea typeface="Calibri" charset="0"/>
+                        <a:cs typeface="Calibri" charset="0"/>
+                      </a:endParaRPr>
+                    </a:p>
+                  </a:txBody>
+                  <a:tcPr marL="91440" marR="91440" marT="45720" marB="45720" anchor="ctr">
+                    <a:lnL w="6350" cap="flat" cmpd="sng" algn="ctr">
+                      <a:solidFill>
+                        <a:srgbClr val="D6DEE1"/>
+                      </a:solidFill>
+                      <a:prstDash val="solid"/>
+                      <a:round/>
+                      <a:headEnd type="none" w="med" len="med"/>
+                      <a:tailEnd type="none" w="med" len="med"/>
+                    </a:lnL>
+                    <a:lnR w="6350" cap="flat" cmpd="sng" algn="ctr">
+                      <a:solidFill>
+                        <a:srgbClr val="D6DEE1"/>
+                      </a:solidFill>
+                      <a:prstDash val="solid"/>
+                      <a:round/>
+                      <a:headEnd type="none" w="med" len="med"/>
+                      <a:tailEnd type="none" w="med" len="med"/>
+                    </a:lnR>
+                    <a:lnT w="6350" cap="flat" cmpd="sng" algn="ctr">
+                      <a:solidFill>
+                        <a:srgbClr val="D6DEE1"/>
+                      </a:solidFill>
+                      <a:prstDash val="solid"/>
+                      <a:round/>
+                      <a:headEnd type="none" w="med" len="med"/>
+                      <a:tailEnd type="none" w="med" len="med"/>
+                    </a:lnT>
+                    <a:lnB w="6350" cap="flat" cmpd="sng" algn="ctr">
+                      <a:solidFill>
+                        <a:srgbClr val="D6DEE1"/>
+                      </a:solidFill>
+                      <a:prstDash val="solid"/>
+                      <a:round/>
+                      <a:headEnd type="none" w="med" len="med"/>
+                      <a:tailEnd type="none" w="med" len="med"/>
+                    </a:lnB>
+                    <a:solidFill>
+                      <a:srgbClr val="F3DEDA"/>
+                    </a:solidFill>
+                  </a:tcPr>
+                </a:tc>
+                <a:tc>
+                  <a:txBody>
+                    <a:bodyPr/>
+                    <a:lstStyle/>
+                    <a:p>
+                      <a:pPr algn="ctr" indent="0" marL="0">
+                        <a:buNone/>
+                      </a:pPr>
+                      <a:r>
+                        <a:rPr lang="en-US" sz="1050" b="1" dirty="0">
+                          <a:solidFill>
+                            <a:srgbClr val="B04A3F"/>
+                          </a:solidFill>
+                          <a:latin typeface="Calibri" pitchFamily="34" charset="0"/>
+                          <a:ea typeface="Calibri" pitchFamily="34" charset="-122"/>
+                          <a:cs typeface="Calibri" pitchFamily="34" charset="-120"/>
+                        </a:rPr>
+                        <a:t>+20</a:t>
+                      </a:r>
+                      <a:endParaRPr lang="en-US" sz="1050" dirty="0">
+                        <a:latin typeface="Calibri" charset="0"/>
+                        <a:ea typeface="Calibri" charset="0"/>
+                        <a:cs typeface="Calibri" charset="0"/>
+                      </a:endParaRPr>
+                    </a:p>
+                  </a:txBody>
+                  <a:tcPr marL="91440" marR="91440" marT="45720" marB="45720" anchor="ctr">
+                    <a:lnL w="6350" cap="flat" cmpd="sng" algn="ctr">
+                      <a:solidFill>
+                        <a:srgbClr val="D6DEE1"/>
+                      </a:solidFill>
+                      <a:prstDash val="solid"/>
+                      <a:round/>
+                      <a:headEnd type="none" w="med" len="med"/>
+                      <a:tailEnd type="none" w="med" len="med"/>
+                    </a:lnL>
+                    <a:lnR w="6350" cap="flat" cmpd="sng" algn="ctr">
+                      <a:solidFill>
+                        <a:srgbClr val="D6DEE1"/>
+                      </a:solidFill>
+                      <a:prstDash val="solid"/>
+                      <a:round/>
+                      <a:headEnd type="none" w="med" len="med"/>
+                      <a:tailEnd type="none" w="med" len="med"/>
+                    </a:lnR>
+                    <a:lnT w="6350" cap="flat" cmpd="sng" algn="ctr">
+                      <a:solidFill>
+                        <a:srgbClr val="D6DEE1"/>
+                      </a:solidFill>
+                      <a:prstDash val="solid"/>
+                      <a:round/>
+                      <a:headEnd type="none" w="med" len="med"/>
+                      <a:tailEnd type="none" w="med" len="med"/>
+                    </a:lnT>
+                    <a:lnB w="6350" cap="flat" cmpd="sng" algn="ctr">
+                      <a:solidFill>
+                        <a:srgbClr val="D6DEE1"/>
+                      </a:solidFill>
+                      <a:prstDash val="solid"/>
+                      <a:round/>
+                      <a:headEnd type="none" w="med" len="med"/>
+                      <a:tailEnd type="none" w="med" len="med"/>
+                    </a:lnB>
+                    <a:solidFill>
+                      <a:srgbClr val="F3DEDA"/>
+                    </a:solidFill>
+                  </a:tcPr>
+                </a:tc>
+                <a:tc>
+                  <a:txBody>
+                    <a:bodyPr/>
+                    <a:lstStyle/>
+                    <a:p>
+                      <a:pPr algn="ctr" indent="0" marL="0">
+                        <a:buNone/>
+                      </a:pPr>
+                      <a:r>
+                        <a:rPr lang="en-US" sz="1050" b="1" dirty="0">
+                          <a:solidFill>
+                            <a:srgbClr val="B04A3F"/>
+                          </a:solidFill>
+                          <a:latin typeface="Calibri" pitchFamily="34" charset="0"/>
+                          <a:ea typeface="Calibri" pitchFamily="34" charset="-122"/>
+                          <a:cs typeface="Calibri" pitchFamily="34" charset="-120"/>
+                        </a:rPr>
+                        <a:t>+44</a:t>
+                      </a:r>
+                      <a:endParaRPr lang="en-US" sz="1050" dirty="0">
+                        <a:latin typeface="Calibri" charset="0"/>
+                        <a:ea typeface="Calibri" charset="0"/>
+                        <a:cs typeface="Calibri" charset="0"/>
+                      </a:endParaRPr>
+                    </a:p>
+                  </a:txBody>
+                  <a:tcPr marL="91440" marR="91440" marT="45720" marB="45720" anchor="ctr">
+                    <a:lnL w="6350" cap="flat" cmpd="sng" algn="ctr">
+                      <a:solidFill>
+                        <a:srgbClr val="D6DEE1"/>
+                      </a:solidFill>
+                      <a:prstDash val="solid"/>
+                      <a:round/>
+                      <a:headEnd type="none" w="med" len="med"/>
+                      <a:tailEnd type="none" w="med" len="med"/>
+                    </a:lnL>
+                    <a:lnR w="6350" cap="flat" cmpd="sng" algn="ctr">
+                      <a:solidFill>
+                        <a:srgbClr val="D6DEE1"/>
+                      </a:solidFill>
+                      <a:prstDash val="solid"/>
+                      <a:round/>
+                      <a:headEnd type="none" w="med" len="med"/>
+                      <a:tailEnd type="none" w="med" len="med"/>
+                    </a:lnR>
+                    <a:lnT w="6350" cap="flat" cmpd="sng" algn="ctr">
+                      <a:solidFill>
+                        <a:srgbClr val="D6DEE1"/>
+                      </a:solidFill>
+                      <a:prstDash val="solid"/>
+                      <a:round/>
+                      <a:headEnd type="none" w="med" len="med"/>
+                      <a:tailEnd type="none" w="med" len="med"/>
+                    </a:lnT>
+                    <a:lnB w="6350" cap="flat" cmpd="sng" algn="ctr">
+                      <a:solidFill>
+                        <a:srgbClr val="D6DEE1"/>
+                      </a:solidFill>
+                      <a:prstDash val="solid"/>
+                      <a:round/>
+                      <a:headEnd type="none" w="med" len="med"/>
+                      <a:tailEnd type="none" w="med" len="med"/>
+                    </a:lnB>
+                    <a:solidFill>
+                      <a:srgbClr val="F3DEDA"/>
+                    </a:solidFill>
+                  </a:tcPr>
+                </a:tc>
+                <a:tc>
+                  <a:txBody>
+                    <a:bodyPr/>
+                    <a:lstStyle/>
+                    <a:p>
+                      <a:pPr algn="ctr" indent="0" marL="0">
+                        <a:buNone/>
+                      </a:pPr>
+                      <a:r>
+                        <a:rPr lang="en-US" sz="1050" b="1" dirty="0">
+                          <a:solidFill>
+                            <a:srgbClr val="B04A3F"/>
+                          </a:solidFill>
+                          <a:latin typeface="Calibri" pitchFamily="34" charset="0"/>
+                          <a:ea typeface="Calibri" pitchFamily="34" charset="-122"/>
+                          <a:cs typeface="Calibri" pitchFamily="34" charset="-120"/>
+                        </a:rPr>
+                        <a:t>+53</a:t>
+                      </a:r>
+                      <a:endParaRPr lang="en-US" sz="1050" dirty="0">
+                        <a:latin typeface="Calibri" charset="0"/>
+                        <a:ea typeface="Calibri" charset="0"/>
+                        <a:cs typeface="Calibri" charset="0"/>
+                      </a:endParaRPr>
+                    </a:p>
+                  </a:txBody>
+                  <a:tcPr marL="91440" marR="91440" marT="45720" marB="45720" anchor="ctr">
+                    <a:lnL w="6350" cap="flat" cmpd="sng" algn="ctr">
+                      <a:solidFill>
+                        <a:srgbClr val="D6DEE1"/>
+                      </a:solidFill>
+                      <a:prstDash val="solid"/>
+                      <a:round/>
+                      <a:headEnd type="none" w="med" len="med"/>
+                      <a:tailEnd type="none" w="med" len="med"/>
+                    </a:lnL>
+                    <a:lnR w="6350" cap="flat" cmpd="sng" algn="ctr">
+                      <a:solidFill>
+                        <a:srgbClr val="D6DEE1"/>
+                      </a:solidFill>
+                      <a:prstDash val="solid"/>
+                      <a:round/>
+                      <a:headEnd type="none" w="med" len="med"/>
+                      <a:tailEnd type="none" w="med" len="med"/>
+                    </a:lnR>
+                    <a:lnT w="6350" cap="flat" cmpd="sng" algn="ctr">
+                      <a:solidFill>
+                        <a:srgbClr val="D6DEE1"/>
+                      </a:solidFill>
+                      <a:prstDash val="solid"/>
+                      <a:round/>
+                      <a:headEnd type="none" w="med" len="med"/>
+                      <a:tailEnd type="none" w="med" len="med"/>
+                    </a:lnT>
+                    <a:lnB w="6350" cap="flat" cmpd="sng" algn="ctr">
+                      <a:solidFill>
+                        <a:srgbClr val="D6DEE1"/>
+                      </a:solidFill>
+                      <a:prstDash val="solid"/>
+                      <a:round/>
+                      <a:headEnd type="none" w="med" len="med"/>
+                      <a:tailEnd type="none" w="med" len="med"/>
+                    </a:lnB>
+                    <a:solidFill>
+                      <a:srgbClr val="F3DEDA"/>
+                    </a:solidFill>
+                  </a:tcPr>
+                </a:tc>
+                <a:tc>
+                  <a:txBody>
+                    <a:bodyPr/>
+                    <a:lstStyle/>
+                    <a:p>
+                      <a:pPr algn="ctr" indent="0" marL="0">
+                        <a:buNone/>
+                      </a:pPr>
+                      <a:r>
+                        <a:rPr lang="en-US" sz="1050" b="1" dirty="0">
+                          <a:solidFill>
+                            <a:srgbClr val="B04A3F"/>
+                          </a:solidFill>
+                          <a:latin typeface="Calibri" pitchFamily="34" charset="0"/>
+                          <a:ea typeface="Calibri" pitchFamily="34" charset="-122"/>
+                          <a:cs typeface="Calibri" pitchFamily="34" charset="-120"/>
+                        </a:rPr>
+                        <a:t>+37</a:t>
+                      </a:r>
+                      <a:endParaRPr lang="en-US" sz="1050" dirty="0">
+                        <a:latin typeface="Calibri" charset="0"/>
+                        <a:ea typeface="Calibri" charset="0"/>
+                        <a:cs typeface="Calibri" charset="0"/>
+                      </a:endParaRPr>
+                    </a:p>
+                  </a:txBody>
+                  <a:tcPr marL="91440" marR="91440" marT="45720" marB="45720" anchor="ctr">
+                    <a:lnL w="6350" cap="flat" cmpd="sng" algn="ctr">
+                      <a:solidFill>
+                        <a:srgbClr val="D6DEE1"/>
+                      </a:solidFill>
+                      <a:prstDash val="solid"/>
+                      <a:round/>
+                      <a:headEnd type="none" w="med" len="med"/>
+                      <a:tailEnd type="none" w="med" len="med"/>
+                    </a:lnL>
+                    <a:lnR w="6350" cap="flat" cmpd="sng" algn="ctr">
+                      <a:solidFill>
+                        <a:srgbClr val="D6DEE1"/>
+                      </a:solidFill>
+                      <a:prstDash val="solid"/>
+                      <a:round/>
+                      <a:headEnd type="none" w="med" len="med"/>
+                      <a:tailEnd type="none" w="med" len="med"/>
+                    </a:lnR>
+                    <a:lnT w="6350" cap="flat" cmpd="sng" algn="ctr">
+                      <a:solidFill>
+                        <a:srgbClr val="D6DEE1"/>
+                      </a:solidFill>
+                      <a:prstDash val="solid"/>
+                      <a:round/>
+                      <a:headEnd type="none" w="med" len="med"/>
+                      <a:tailEnd type="none" w="med" len="med"/>
+                    </a:lnT>
+                    <a:lnB w="6350" cap="flat" cmpd="sng" algn="ctr">
+                      <a:solidFill>
+                        <a:srgbClr val="D6DEE1"/>
+                      </a:solidFill>
+                      <a:prstDash val="solid"/>
+                      <a:round/>
+                      <a:headEnd type="none" w="med" len="med"/>
+                      <a:tailEnd type="none" w="med" len="med"/>
+                    </a:lnB>
+                    <a:solidFill>
+                      <a:srgbClr val="F3DEDA"/>
+                    </a:solidFill>
+                  </a:tcPr>
+                </a:tc>
+                <a:tc>
+                  <a:txBody>
+                    <a:bodyPr/>
+                    <a:lstStyle/>
+                    <a:p>
+                      <a:pPr algn="ctr" indent="0" marL="0">
+                        <a:buNone/>
+                      </a:pPr>
+                      <a:r>
+                        <a:rPr lang="en-US" sz="1050" b="1" dirty="0">
+                          <a:solidFill>
+                            <a:srgbClr val="B04A3F"/>
+                          </a:solidFill>
+                          <a:latin typeface="Calibri" pitchFamily="34" charset="0"/>
+                          <a:ea typeface="Calibri" pitchFamily="34" charset="-122"/>
+                          <a:cs typeface="Calibri" pitchFamily="34" charset="-120"/>
+                        </a:rPr>
+                        <a:t>+14</a:t>
+                      </a:r>
+                      <a:endParaRPr lang="en-US" sz="1050" dirty="0">
+                        <a:latin typeface="Calibri" charset="0"/>
+                        <a:ea typeface="Calibri" charset="0"/>
+                        <a:cs typeface="Calibri" charset="0"/>
+                      </a:endParaRPr>
+                    </a:p>
+                  </a:txBody>
+                  <a:tcPr marL="91440" marR="91440" marT="45720" marB="45720" anchor="ctr">
+                    <a:lnL w="6350" cap="flat" cmpd="sng" algn="ctr">
+                      <a:solidFill>
+                        <a:srgbClr val="D6DEE1"/>
+                      </a:solidFill>
+                      <a:prstDash val="solid"/>
+                      <a:round/>
+                      <a:headEnd type="none" w="med" len="med"/>
+                      <a:tailEnd type="none" w="med" len="med"/>
+                    </a:lnL>
+                    <a:lnR w="6350" cap="flat" cmpd="sng" algn="ctr">
+                      <a:solidFill>
+                        <a:srgbClr val="D6DEE1"/>
+                      </a:solidFill>
+                      <a:prstDash val="solid"/>
+                      <a:round/>
+                      <a:headEnd type="none" w="med" len="med"/>
+                      <a:tailEnd type="none" w="med" len="med"/>
+                    </a:lnR>
+                    <a:lnT w="6350" cap="flat" cmpd="sng" algn="ctr">
+                      <a:solidFill>
+                        <a:srgbClr val="D6DEE1"/>
+                      </a:solidFill>
+                      <a:prstDash val="solid"/>
+                      <a:round/>
+                      <a:headEnd type="none" w="med" len="med"/>
+                      <a:tailEnd type="none" w="med" len="med"/>
+                    </a:lnT>
+                    <a:lnB w="6350" cap="flat" cmpd="sng" algn="ctr">
+                      <a:solidFill>
+                        <a:srgbClr val="D6DEE1"/>
+                      </a:solidFill>
+                      <a:prstDash val="solid"/>
+                      <a:round/>
+                      <a:headEnd type="none" w="med" len="med"/>
+                      <a:tailEnd type="none" w="med" len="med"/>
+                    </a:lnB>
+                    <a:solidFill>
+                      <a:srgbClr val="F3DEDA"/>
+                    </a:solidFill>
+                  </a:tcPr>
+                </a:tc>
+              </a:tr>
+            </a:tbl>
+          </a:graphicData>
+        </a:graphic>
+      </p:graphicFrame>
+      <p:sp>
+        <p:nvSpPr>
+          <p:cNvPr id="7" name="Shape 2"/>
+          <p:cNvSpPr/>
+          <p:nvPr/>
+        </p:nvSpPr>
+        <p:spPr>
+          <a:xfrm>
+            <a:off x="548640" y="5440680"/>
+            <a:ext cx="11091672" cy="777240"/>
+          </a:xfrm>
+          <a:prstGeom prst="roundRect">
+            <a:avLst>
+              <a:gd name="adj" fmla="val 7059"/>
+            </a:avLst>
+          </a:prstGeom>
+          <a:solidFill>
+            <a:srgbClr val="FBF2EA"/>
+          </a:solidFill>
+          <a:ln w="12700">
+            <a:solidFill>
+              <a:srgbClr val="C9992B"/>
+            </a:solidFill>
+            <a:prstDash val="solid"/>
+          </a:ln>
+        </p:spPr>
+      </p:sp>
+      <p:sp>
+        <p:nvSpPr>
+          <p:cNvPr id="8" name="Text 3"/>
+          <p:cNvSpPr txBox="1"/>
+          <p:nvPr/>
+        </p:nvSpPr>
+        <p:spPr>
+          <a:xfrm>
+            <a:off x="749808" y="5532120"/>
+            <a:ext cx="10835640" cy="621792"/>
+          </a:xfrm>
+          <a:prstGeom prst="rect">
+            <a:avLst/>
+          </a:prstGeom>
+          <a:noFill/>
+          <a:ln/>
+        </p:spPr>
+        <p:txBody>
+          <a:bodyPr wrap="square" lIns="0" tIns="0" rIns="0" bIns="0" rtlCol="0" anchor="ctr"/>
+          <a:lstStyle/>
+          <a:p>
+            <a:pPr indent="0" marL="0">
+              <a:buNone/>
+            </a:pPr>
+            <a:r>
+              <a:rPr lang="en-US" sz="1000" b="1" dirty="0">
+                <a:solidFill>
+                  <a:srgbClr val="8A5A2B"/>
+                </a:solidFill>
+                <a:latin typeface="Calibri" pitchFamily="34" charset="0"/>
+                <a:ea typeface="Calibri" pitchFamily="34" charset="-122"/>
+                <a:cs typeface="Calibri" pitchFamily="34" charset="-120"/>
+              </a:rPr>
+              <a:t>Cautela con el LGD de gran empresa. </a:t>
+            </a:r>
+            <a:pPr indent="0" marL="0">
+              <a:buNone/>
+            </a:pPr>
+            <a:r>
+              <a:rPr lang="en-US" sz="1000" dirty="0">
+                <a:solidFill>
+                  <a:srgbClr val="2B3A42"/>
+                </a:solidFill>
+                <a:latin typeface="Calibri" pitchFamily="34" charset="0"/>
+                <a:ea typeface="Calibri" pitchFamily="34" charset="-122"/>
+                <a:cs typeface="Calibri" pitchFamily="34" charset="-120"/>
+              </a:rPr>
+              <a:t>Está agrupado en el 40,0 % en los seis países y en todo el reparto (percentiles 25, 50 y 75), porque es el valor supervisor del IRB básico bajo CRR3, no una estimación propia. La ventaja de severidad de la PYME es real —viene de mayor garantía real— pero está exagerada por ese efecto: en media ponderada la brecha se reduce a la mitad (PYME 23,6–37,9 % frente a gran empresa 35,0–38,8 %). El spread de PD, en cambio, es sólido: la PD sí es estimación propia en ambas clases.</a:t>
+            </a:r>
+            <a:endParaRPr lang="en-US" sz="1000" dirty="0"/>
+          </a:p>
+        </p:txBody>
+      </p:sp>
+      <p:sp>
+        <p:nvSpPr>
+          <p:cNvPr id="9" name="Text 4"/>
+          <p:cNvSpPr txBox="1"/>
+          <p:nvPr/>
+        </p:nvSpPr>
+        <p:spPr>
+          <a:xfrm>
+            <a:off x="548640" y="6327648"/>
+            <a:ext cx="11091672" cy="274320"/>
+          </a:xfrm>
+          <a:prstGeom prst="rect">
+            <a:avLst/>
+          </a:prstGeom>
+          <a:noFill/>
+          <a:ln/>
+        </p:spPr>
+        <p:txBody>
+          <a:bodyPr wrap="square" lIns="0" tIns="0" rIns="0" bIns="0" rtlCol="0" anchor="ctr"/>
+          <a:lstStyle/>
+          <a:p>
+            <a:pPr indent="0" marL="0">
+              <a:buNone/>
+            </a:pPr>
+            <a:r>
+              <a:rPr lang="en-US" sz="900" i="1" dirty="0">
+                <a:solidFill>
+                  <a:srgbClr val="6E7F88"/>
+                </a:solidFill>
+                <a:latin typeface="Calibri" pitchFamily="34" charset="0"/>
+                <a:ea typeface="Calibri" pitchFamily="34" charset="-122"/>
+                <a:cs typeface="Calibri" pitchFamily="34" charset="-120"/>
+              </a:rPr>
+              <a:t>Fuente: EBA, anexo de parámetros de riesgo del Risk Dashboard Q1 2026, origen COREP C 9.02. Clases «Corporates – Of Which: SME» y «Corporates – Of Which: Large corporates».</a:t>
+            </a:r>
+            <a:endParaRPr lang="en-US" sz="900" dirty="0"/>
+          </a:p>
+        </p:txBody>
+      </p:sp>
+    </p:spTree>
+  </p:cSld>
+  <p:clrMapOvr>
+    <a:masterClrMapping/>
+  </p:clrMapOvr>
+</p:sld>
+</file>
+
+<file path=ppt/slides/slide13.xml><?xml version="1.0" encoding="utf-8"?>
+<p:sld xmlns:a="http://schemas.openxmlformats.org/drawingml/2006/main" xmlns:r="http://schemas.openxmlformats.org/officeDocument/2006/relationships" xmlns:p="http://schemas.openxmlformats.org/presentationml/2006/main">
+  <p:cSld name="Slide 13">
+    <p:spTree>
+      <p:nvGrpSpPr>
+        <p:cNvPr id="1" name=""/>
+        <p:cNvGrpSpPr/>
+        <p:nvPr/>
+      </p:nvGrpSpPr>
+      <p:grpSpPr>
+        <a:xfrm>
+          <a:off x="0" y="0"/>
+          <a:ext cx="0" cy="0"/>
+          <a:chOff x="0" y="0"/>
+          <a:chExt cx="0" cy="0"/>
+        </a:xfrm>
+      </p:grpSpPr>
+      <p:sp>
+        <p:nvSpPr>
+          <p:cNvPr id="2" name="Text 0"/>
+          <p:cNvSpPr txBox="1"/>
+          <p:nvPr/>
+        </p:nvSpPr>
+        <p:spPr>
+          <a:xfrm>
+            <a:off x="548640" y="310896"/>
+            <a:ext cx="11091672" cy="658368"/>
+          </a:xfrm>
+          <a:prstGeom prst="rect">
+            <a:avLst/>
+          </a:prstGeom>
+          <a:noFill/>
+          <a:ln/>
+        </p:spPr>
+        <p:txBody>
+          <a:bodyPr wrap="square" lIns="0" tIns="0" rIns="0" bIns="0" rtlCol="0" anchor="ctr"/>
+          <a:lstStyle/>
+          <a:p>
+            <a:pPr indent="0" marL="0">
+              <a:buNone/>
+            </a:pPr>
+            <a:r>
+              <a:rPr lang="en-US" sz="3000" b="1" dirty="0">
+                <a:solidFill>
+                  <a:srgbClr val="1C3F4E"/>
+                </a:solidFill>
+                <a:latin typeface="Cambria" pitchFamily="34" charset="0"/>
+                <a:ea typeface="Cambria" pitchFamily="34" charset="-122"/>
+                <a:cs typeface="Cambria" pitchFamily="34" charset="-120"/>
+              </a:rPr>
               <a:t>Consumo de capital: densidad de RWA de la cartera PYME</a:t>
             </a:r>
             <a:endParaRPr lang="en-US" sz="3000" dirty="0"/>
@@ -8792,9 +11882,9 @@
 </p:sld>
 </file>
 
-<file path=ppt/slides/slide13.xml><?xml version="1.0" encoding="utf-8"?>
+<file path=ppt/slides/slide14.xml><?xml version="1.0" encoding="utf-8"?>
 <p:sld xmlns:a="http://schemas.openxmlformats.org/drawingml/2006/main" xmlns:r="http://schemas.openxmlformats.org/officeDocument/2006/relationships" xmlns:p="http://schemas.openxmlformats.org/presentationml/2006/main">
-  <p:cSld name="Slide 13">
+  <p:cSld name="Slide 14">
     <p:spTree>
       <p:nvGrpSpPr>
         <p:cNvPr id="1" name=""/>
@@ -8889,7 +11979,7 @@
       </p:sp>
       <p:graphicFrame>
         <p:nvGraphicFramePr>
-          <p:cNvPr id="14" name="Table 0"/>
+          <p:cNvPr id="15" name="Table 0"/>
           <p:cNvGraphicFramePr>
             <a:graphicFrameLocks noGrp="1"/>
           </p:cNvGraphicFramePr>
@@ -12525,9 +15615,9 @@
 </p:sld>
 </file>
 
-<file path=ppt/slides/slide14.xml><?xml version="1.0" encoding="utf-8"?>
+<file path=ppt/slides/slide15.xml><?xml version="1.0" encoding="utf-8"?>
 <p:sld xmlns:a="http://schemas.openxmlformats.org/drawingml/2006/main" xmlns:r="http://schemas.openxmlformats.org/officeDocument/2006/relationships" xmlns:p="http://schemas.openxmlformats.org/presentationml/2006/main">
-  <p:cSld name="Slide 14">
+  <p:cSld name="Slide 15">
     <p:spTree>
       <p:nvGrpSpPr>
         <p:cNvPr id="1" name=""/>
@@ -12893,9 +15983,9 @@
 </p:sld>
 </file>
 
-<file path=ppt/slides/slide15.xml><?xml version="1.0" encoding="utf-8"?>
+<file path=ppt/slides/slide16.xml><?xml version="1.0" encoding="utf-8"?>
 <p:sld xmlns:a="http://schemas.openxmlformats.org/drawingml/2006/main" xmlns:r="http://schemas.openxmlformats.org/officeDocument/2006/relationships" xmlns:p="http://schemas.openxmlformats.org/presentationml/2006/main">
-  <p:cSld name="Slide 15">
+  <p:cSld name="Slide 16">
     <p:spTree>
       <p:nvGrpSpPr>
         <p:cNvPr id="1" name=""/>
@@ -13195,9 +16285,9 @@
 </p:sld>
 </file>
 
-<file path=ppt/slides/slide16.xml><?xml version="1.0" encoding="utf-8"?>
+<file path=ppt/slides/slide17.xml><?xml version="1.0" encoding="utf-8"?>
 <p:sld xmlns:a="http://schemas.openxmlformats.org/drawingml/2006/main" xmlns:r="http://schemas.openxmlformats.org/officeDocument/2006/relationships" xmlns:p="http://schemas.openxmlformats.org/presentationml/2006/main">
-  <p:cSld name="Slide 16">
+  <p:cSld name="Slide 17">
     <p:spTree>
       <p:nvGrpSpPr>
         <p:cNvPr id="1" name=""/>
@@ -13602,9 +16692,9 @@
 </p:sld>
 </file>
 
-<file path=ppt/slides/slide17.xml><?xml version="1.0" encoding="utf-8"?>
+<file path=ppt/slides/slide18.xml><?xml version="1.0" encoding="utf-8"?>
 <p:sld xmlns:a="http://schemas.openxmlformats.org/drawingml/2006/main" xmlns:r="http://schemas.openxmlformats.org/officeDocument/2006/relationships" xmlns:p="http://schemas.openxmlformats.org/presentationml/2006/main">
-  <p:cSld name="Slide 17">
+  <p:cSld name="Slide 18">
     <p:spTree>
       <p:nvGrpSpPr>
         <p:cNvPr id="1" name=""/>
@@ -13699,7 +16789,7 @@
       </p:sp>
       <p:graphicFrame>
         <p:nvGraphicFramePr>
-          <p:cNvPr id="18" name="Table 0"/>
+          <p:cNvPr id="19" name="Table 0"/>
           <p:cNvGraphicFramePr>
             <a:graphicFrameLocks noGrp="1"/>
           </p:cNvGraphicFramePr>
@@ -17104,9 +20194,9 @@
 </p:sld>
 </file>
 
-<file path=ppt/slides/slide18.xml><?xml version="1.0" encoding="utf-8"?>
+<file path=ppt/slides/slide19.xml><?xml version="1.0" encoding="utf-8"?>
 <p:sld xmlns:a="http://schemas.openxmlformats.org/drawingml/2006/main" xmlns:r="http://schemas.openxmlformats.org/officeDocument/2006/relationships" xmlns:p="http://schemas.openxmlformats.org/presentationml/2006/main">
-  <p:cSld name="Slide 18">
+  <p:cSld name="Slide 19">
     <p:spTree>
       <p:nvGrpSpPr>
         <p:cNvPr id="1" name=""/>
@@ -17201,7 +20291,7 @@
       </p:sp>
       <p:graphicFrame>
         <p:nvGraphicFramePr>
-          <p:cNvPr id="19" name="Table 0"/>
+          <p:cNvPr id="20" name="Table 0"/>
           <p:cNvGraphicFramePr>
             <a:graphicFrameLocks noGrp="1"/>
           </p:cNvGraphicFramePr>
@@ -19124,9 +22214,571 @@
 </p:sld>
 </file>
 
-<file path=ppt/slides/slide19.xml><?xml version="1.0" encoding="utf-8"?>
+<file path=ppt/slides/slide2.xml><?xml version="1.0" encoding="utf-8"?>
 <p:sld xmlns:a="http://schemas.openxmlformats.org/drawingml/2006/main" xmlns:r="http://schemas.openxmlformats.org/officeDocument/2006/relationships" xmlns:p="http://schemas.openxmlformats.org/presentationml/2006/main">
-  <p:cSld name="Slide 19">
+  <p:cSld name="Slide 2">
+    <p:spTree>
+      <p:nvGrpSpPr>
+        <p:cNvPr id="1" name=""/>
+        <p:cNvGrpSpPr/>
+        <p:nvPr/>
+      </p:nvGrpSpPr>
+      <p:grpSpPr>
+        <a:xfrm>
+          <a:off x="0" y="0"/>
+          <a:ext cx="0" cy="0"/>
+          <a:chOff x="0" y="0"/>
+          <a:chExt cx="0" cy="0"/>
+        </a:xfrm>
+      </p:grpSpPr>
+      <p:sp>
+        <p:nvSpPr>
+          <p:cNvPr id="2" name="Text 0"/>
+          <p:cNvSpPr txBox="1"/>
+          <p:nvPr/>
+        </p:nvSpPr>
+        <p:spPr>
+          <a:xfrm>
+            <a:off x="548640" y="310896"/>
+            <a:ext cx="11091672" cy="658368"/>
+          </a:xfrm>
+          <a:prstGeom prst="rect">
+            <a:avLst/>
+          </a:prstGeom>
+          <a:noFill/>
+          <a:ln/>
+        </p:spPr>
+        <p:txBody>
+          <a:bodyPr wrap="square" lIns="0" tIns="0" rIns="0" bIns="0" rtlCol="0" anchor="ctr"/>
+          <a:lstStyle/>
+          <a:p>
+            <a:pPr indent="0" marL="0">
+              <a:buNone/>
+            </a:pPr>
+            <a:r>
+              <a:rPr lang="en-US" sz="3000" b="1" dirty="0">
+                <a:solidFill>
+                  <a:srgbClr val="1C3F4E"/>
+                </a:solidFill>
+                <a:latin typeface="Cambria" pitchFamily="34" charset="0"/>
+                <a:ea typeface="Cambria" pitchFamily="34" charset="-122"/>
+                <a:cs typeface="Cambria" pitchFamily="34" charset="-120"/>
+              </a:rPr>
+              <a:t>Objetivo y método</a:t>
+            </a:r>
+            <a:endParaRPr lang="en-US" sz="3000" dirty="0"/>
+          </a:p>
+        </p:txBody>
+      </p:sp>
+      <p:sp>
+        <p:nvSpPr>
+          <p:cNvPr id="3" name="Text 1"/>
+          <p:cNvSpPr txBox="1"/>
+          <p:nvPr/>
+        </p:nvSpPr>
+        <p:spPr>
+          <a:xfrm>
+            <a:off x="548640" y="932688"/>
+            <a:ext cx="11091672" cy="384048"/>
+          </a:xfrm>
+          <a:prstGeom prst="rect">
+            <a:avLst/>
+          </a:prstGeom>
+          <a:noFill/>
+          <a:ln/>
+        </p:spPr>
+        <p:txBody>
+          <a:bodyPr wrap="square" lIns="0" tIns="0" rIns="0" bIns="0" rtlCol="0" anchor="ctr"/>
+          <a:lstStyle/>
+          <a:p>
+            <a:pPr indent="0" marL="0">
+              <a:buNone/>
+            </a:pPr>
+            <a:r>
+              <a:rPr lang="en-US" sz="1300" dirty="0">
+                <a:solidFill>
+                  <a:srgbClr val="6E7F88"/>
+                </a:solidFill>
+                <a:latin typeface="Calibri" pitchFamily="34" charset="0"/>
+                <a:ea typeface="Calibri" pitchFamily="34" charset="-122"/>
+                <a:cs typeface="Calibri" pitchFamily="34" charset="-120"/>
+              </a:rPr>
+              <a:t>Qué se mide, con qué datos y dónde están los límites</a:t>
+            </a:r>
+            <a:endParaRPr lang="en-US" sz="1300" dirty="0"/>
+          </a:p>
+        </p:txBody>
+      </p:sp>
+      <p:sp>
+        <p:nvSpPr>
+          <p:cNvPr id="4" name="Shape 2"/>
+          <p:cNvSpPr/>
+          <p:nvPr/>
+        </p:nvSpPr>
+        <p:spPr>
+          <a:xfrm>
+            <a:off x="548640" y="1600200"/>
+            <a:ext cx="11091672" cy="1069848"/>
+          </a:xfrm>
+          <a:prstGeom prst="roundRect">
+            <a:avLst>
+              <a:gd name="adj" fmla="val 5128"/>
+            </a:avLst>
+          </a:prstGeom>
+          <a:solidFill>
+            <a:srgbClr val="EEF2F3"/>
+          </a:solidFill>
+          <a:ln w="12700">
+            <a:solidFill>
+              <a:srgbClr val="DCE4E7"/>
+            </a:solidFill>
+            <a:prstDash val="solid"/>
+          </a:ln>
+        </p:spPr>
+      </p:sp>
+      <p:sp>
+        <p:nvSpPr>
+          <p:cNvPr id="5" name="Text 3"/>
+          <p:cNvSpPr txBox="1"/>
+          <p:nvPr/>
+        </p:nvSpPr>
+        <p:spPr>
+          <a:xfrm>
+            <a:off x="777240" y="1709928"/>
+            <a:ext cx="2286000" cy="292608"/>
+          </a:xfrm>
+          <a:prstGeom prst="rect">
+            <a:avLst/>
+          </a:prstGeom>
+          <a:noFill/>
+          <a:ln/>
+        </p:spPr>
+        <p:txBody>
+          <a:bodyPr wrap="square" lIns="0" tIns="0" rIns="0" bIns="0" rtlCol="0" anchor="ctr"/>
+          <a:lstStyle/>
+          <a:p>
+            <a:pPr indent="0" marL="0">
+              <a:buNone/>
+            </a:pPr>
+            <a:r>
+              <a:rPr lang="en-US" sz="1400" b="1" dirty="0">
+                <a:solidFill>
+                  <a:srgbClr val="1C3F4E"/>
+                </a:solidFill>
+                <a:latin typeface="Cambria" pitchFamily="34" charset="0"/>
+                <a:ea typeface="Cambria" pitchFamily="34" charset="-122"/>
+                <a:cs typeface="Cambria" pitchFamily="34" charset="-120"/>
+              </a:rPr>
+              <a:t>Objetivo</a:t>
+            </a:r>
+            <a:endParaRPr lang="en-US" sz="1400" dirty="0"/>
+          </a:p>
+        </p:txBody>
+      </p:sp>
+      <p:sp>
+        <p:nvSpPr>
+          <p:cNvPr id="6" name="Text 4"/>
+          <p:cNvSpPr txBox="1"/>
+          <p:nvPr/>
+        </p:nvSpPr>
+        <p:spPr>
+          <a:xfrm>
+            <a:off x="3200400" y="1709928"/>
+            <a:ext cx="8165592" cy="841248"/>
+          </a:xfrm>
+          <a:prstGeom prst="rect">
+            <a:avLst/>
+          </a:prstGeom>
+          <a:noFill/>
+          <a:ln/>
+        </p:spPr>
+        <p:txBody>
+          <a:bodyPr wrap="square" lIns="0" tIns="0" rIns="0" bIns="0" rtlCol="0" anchor="ctr"/>
+          <a:lstStyle/>
+          <a:p>
+            <a:pPr indent="0" marL="0">
+              <a:buNone/>
+            </a:pPr>
+            <a:r>
+              <a:rPr lang="en-US" sz="1200" dirty="0">
+                <a:solidFill>
+                  <a:srgbClr val="2B3A42"/>
+                </a:solidFill>
+                <a:latin typeface="Calibri" pitchFamily="34" charset="0"/>
+                <a:ea typeface="Calibri" pitchFamily="34" charset="-122"/>
+                <a:cs typeface="Calibri" pitchFamily="34" charset="-120"/>
+              </a:rPr>
+              <a:t>Comparar la rentabilidad del negocio PYME entre seis países europeos, producto a producto, sobre datos oficiales y no sobre estimaciones de mercado.</a:t>
+            </a:r>
+            <a:endParaRPr lang="en-US" sz="1200" dirty="0"/>
+          </a:p>
+        </p:txBody>
+      </p:sp>
+      <p:sp>
+        <p:nvSpPr>
+          <p:cNvPr id="7" name="Shape 5"/>
+          <p:cNvSpPr/>
+          <p:nvPr/>
+        </p:nvSpPr>
+        <p:spPr>
+          <a:xfrm>
+            <a:off x="548640" y="2788920"/>
+            <a:ext cx="11091672" cy="1069848"/>
+          </a:xfrm>
+          <a:prstGeom prst="roundRect">
+            <a:avLst>
+              <a:gd name="adj" fmla="val 5128"/>
+            </a:avLst>
+          </a:prstGeom>
+          <a:solidFill>
+            <a:srgbClr val="EEF2F3"/>
+          </a:solidFill>
+          <a:ln w="12700">
+            <a:solidFill>
+              <a:srgbClr val="DCE4E7"/>
+            </a:solidFill>
+            <a:prstDash val="solid"/>
+          </a:ln>
+        </p:spPr>
+      </p:sp>
+      <p:sp>
+        <p:nvSpPr>
+          <p:cNvPr id="8" name="Text 6"/>
+          <p:cNvSpPr txBox="1"/>
+          <p:nvPr/>
+        </p:nvSpPr>
+        <p:spPr>
+          <a:xfrm>
+            <a:off x="777240" y="2898648"/>
+            <a:ext cx="2286000" cy="292608"/>
+          </a:xfrm>
+          <a:prstGeom prst="rect">
+            <a:avLst/>
+          </a:prstGeom>
+          <a:noFill/>
+          <a:ln/>
+        </p:spPr>
+        <p:txBody>
+          <a:bodyPr wrap="square" lIns="0" tIns="0" rIns="0" bIns="0" rtlCol="0" anchor="ctr"/>
+          <a:lstStyle/>
+          <a:p>
+            <a:pPr indent="0" marL="0">
+              <a:buNone/>
+            </a:pPr>
+            <a:r>
+              <a:rPr lang="en-US" sz="1400" b="1" dirty="0">
+                <a:solidFill>
+                  <a:srgbClr val="1C3F4E"/>
+                </a:solidFill>
+                <a:latin typeface="Cambria" pitchFamily="34" charset="0"/>
+                <a:ea typeface="Cambria" pitchFamily="34" charset="-122"/>
+                <a:cs typeface="Cambria" pitchFamily="34" charset="-120"/>
+              </a:rPr>
+              <a:t>Alcance</a:t>
+            </a:r>
+            <a:endParaRPr lang="en-US" sz="1400" dirty="0"/>
+          </a:p>
+        </p:txBody>
+      </p:sp>
+      <p:sp>
+        <p:nvSpPr>
+          <p:cNvPr id="9" name="Text 7"/>
+          <p:cNvSpPr txBox="1"/>
+          <p:nvPr/>
+        </p:nvSpPr>
+        <p:spPr>
+          <a:xfrm>
+            <a:off x="3200400" y="2898648"/>
+            <a:ext cx="8165592" cy="841248"/>
+          </a:xfrm>
+          <a:prstGeom prst="rect">
+            <a:avLst/>
+          </a:prstGeom>
+          <a:noFill/>
+          <a:ln/>
+        </p:spPr>
+        <p:txBody>
+          <a:bodyPr wrap="square" lIns="0" tIns="0" rIns="0" bIns="0" rtlCol="0" anchor="ctr"/>
+          <a:lstStyle/>
+          <a:p>
+            <a:pPr indent="0" marL="0">
+              <a:buNone/>
+            </a:pPr>
+            <a:r>
+              <a:rPr lang="en-US" sz="1200" dirty="0">
+                <a:solidFill>
+                  <a:srgbClr val="2B3A42"/>
+                </a:solidFill>
+                <a:latin typeface="Calibri" pitchFamily="34" charset="0"/>
+                <a:ea typeface="Calibri" pitchFamily="34" charset="-122"/>
+                <a:cs typeface="Calibri" pitchFamily="34" charset="-120"/>
+              </a:rPr>
+              <a:t>Hipotecas, préstamos, circulante, factoring y confirming, más el coste de los recursos. Segmentación por tramo de importe del préstamo, que es como segmenta la estadística oficial europea.</a:t>
+            </a:r>
+            <a:endParaRPr lang="en-US" sz="1200" dirty="0"/>
+          </a:p>
+        </p:txBody>
+      </p:sp>
+      <p:sp>
+        <p:nvSpPr>
+          <p:cNvPr id="10" name="Shape 8"/>
+          <p:cNvSpPr/>
+          <p:nvPr/>
+        </p:nvSpPr>
+        <p:spPr>
+          <a:xfrm>
+            <a:off x="548640" y="3977640"/>
+            <a:ext cx="11091672" cy="1069848"/>
+          </a:xfrm>
+          <a:prstGeom prst="roundRect">
+            <a:avLst>
+              <a:gd name="adj" fmla="val 5128"/>
+            </a:avLst>
+          </a:prstGeom>
+          <a:solidFill>
+            <a:srgbClr val="EEF2F3"/>
+          </a:solidFill>
+          <a:ln w="12700">
+            <a:solidFill>
+              <a:srgbClr val="DCE4E7"/>
+            </a:solidFill>
+            <a:prstDash val="solid"/>
+          </a:ln>
+        </p:spPr>
+      </p:sp>
+      <p:sp>
+        <p:nvSpPr>
+          <p:cNvPr id="11" name="Text 9"/>
+          <p:cNvSpPr txBox="1"/>
+          <p:nvPr/>
+        </p:nvSpPr>
+        <p:spPr>
+          <a:xfrm>
+            <a:off x="777240" y="4087368"/>
+            <a:ext cx="2286000" cy="292608"/>
+          </a:xfrm>
+          <a:prstGeom prst="rect">
+            <a:avLst/>
+          </a:prstGeom>
+          <a:noFill/>
+          <a:ln/>
+        </p:spPr>
+        <p:txBody>
+          <a:bodyPr wrap="square" lIns="0" tIns="0" rIns="0" bIns="0" rtlCol="0" anchor="ctr"/>
+          <a:lstStyle/>
+          <a:p>
+            <a:pPr indent="0" marL="0">
+              <a:buNone/>
+            </a:pPr>
+            <a:r>
+              <a:rPr lang="en-US" sz="1400" b="1" dirty="0">
+                <a:solidFill>
+                  <a:srgbClr val="1C3F4E"/>
+                </a:solidFill>
+                <a:latin typeface="Cambria" pitchFamily="34" charset="0"/>
+                <a:ea typeface="Cambria" pitchFamily="34" charset="-122"/>
+                <a:cs typeface="Cambria" pitchFamily="34" charset="-120"/>
+              </a:rPr>
+              <a:t>Método</a:t>
+            </a:r>
+            <a:endParaRPr lang="en-US" sz="1400" dirty="0"/>
+          </a:p>
+        </p:txBody>
+      </p:sp>
+      <p:sp>
+        <p:nvSpPr>
+          <p:cNvPr id="12" name="Text 10"/>
+          <p:cNvSpPr txBox="1"/>
+          <p:nvPr/>
+        </p:nvSpPr>
+        <p:spPr>
+          <a:xfrm>
+            <a:off x="3200400" y="4087368"/>
+            <a:ext cx="8165592" cy="841248"/>
+          </a:xfrm>
+          <a:prstGeom prst="rect">
+            <a:avLst/>
+          </a:prstGeom>
+          <a:noFill/>
+          <a:ln/>
+        </p:spPr>
+        <p:txBody>
+          <a:bodyPr wrap="square" lIns="0" tIns="0" rIns="0" bIns="0" rtlCol="0" anchor="ctr"/>
+          <a:lstStyle/>
+          <a:p>
+            <a:pPr indent="0" marL="0">
+              <a:buNone/>
+            </a:pPr>
+            <a:r>
+              <a:rPr lang="en-US" sz="1200" dirty="0">
+                <a:solidFill>
+                  <a:srgbClr val="2B3A42"/>
+                </a:solidFill>
+                <a:latin typeface="Calibri" pitchFamily="34" charset="0"/>
+                <a:ea typeface="Calibri" pitchFamily="34" charset="-122"/>
+                <a:cs typeface="Calibri" pitchFamily="34" charset="-120"/>
+              </a:rPr>
+              <a:t>Cuenta de resultados en porcentaje del saldo medio: precio más comisiones, menos coste de fondos, riesgo y gastos. El capital se asigna por densidad de RWA sobre el CET1 observado.</a:t>
+            </a:r>
+            <a:endParaRPr lang="en-US" sz="1200" dirty="0"/>
+          </a:p>
+        </p:txBody>
+      </p:sp>
+      <p:sp>
+        <p:nvSpPr>
+          <p:cNvPr id="13" name="Shape 11"/>
+          <p:cNvSpPr/>
+          <p:nvPr/>
+        </p:nvSpPr>
+        <p:spPr>
+          <a:xfrm>
+            <a:off x="548640" y="5166360"/>
+            <a:ext cx="11091672" cy="1069848"/>
+          </a:xfrm>
+          <a:prstGeom prst="roundRect">
+            <a:avLst>
+              <a:gd name="adj" fmla="val 5128"/>
+            </a:avLst>
+          </a:prstGeom>
+          <a:solidFill>
+            <a:srgbClr val="F7EDE4"/>
+          </a:solidFill>
+          <a:ln w="12700">
+            <a:solidFill>
+              <a:srgbClr val="C97B3C"/>
+            </a:solidFill>
+            <a:prstDash val="solid"/>
+          </a:ln>
+        </p:spPr>
+      </p:sp>
+      <p:sp>
+        <p:nvSpPr>
+          <p:cNvPr id="14" name="Text 12"/>
+          <p:cNvSpPr txBox="1"/>
+          <p:nvPr/>
+        </p:nvSpPr>
+        <p:spPr>
+          <a:xfrm>
+            <a:off x="777240" y="5276088"/>
+            <a:ext cx="2286000" cy="292608"/>
+          </a:xfrm>
+          <a:prstGeom prst="rect">
+            <a:avLst/>
+          </a:prstGeom>
+          <a:noFill/>
+          <a:ln/>
+        </p:spPr>
+        <p:txBody>
+          <a:bodyPr wrap="square" lIns="0" tIns="0" rIns="0" bIns="0" rtlCol="0" anchor="ctr"/>
+          <a:lstStyle/>
+          <a:p>
+            <a:pPr indent="0" marL="0">
+              <a:buNone/>
+            </a:pPr>
+            <a:r>
+              <a:rPr lang="en-US" sz="1400" b="1" dirty="0">
+                <a:solidFill>
+                  <a:srgbClr val="C97B3C"/>
+                </a:solidFill>
+                <a:latin typeface="Cambria" pitchFamily="34" charset="0"/>
+                <a:ea typeface="Cambria" pitchFamily="34" charset="-122"/>
+                <a:cs typeface="Cambria" pitchFamily="34" charset="-120"/>
+              </a:rPr>
+              <a:t>Límite principal</a:t>
+            </a:r>
+            <a:endParaRPr lang="en-US" sz="1400" dirty="0"/>
+          </a:p>
+        </p:txBody>
+      </p:sp>
+      <p:sp>
+        <p:nvSpPr>
+          <p:cNvPr id="15" name="Text 13"/>
+          <p:cNvSpPr txBox="1"/>
+          <p:nvPr/>
+        </p:nvSpPr>
+        <p:spPr>
+          <a:xfrm>
+            <a:off x="3200400" y="5276088"/>
+            <a:ext cx="8165592" cy="841248"/>
+          </a:xfrm>
+          <a:prstGeom prst="rect">
+            <a:avLst/>
+          </a:prstGeom>
+          <a:noFill/>
+          <a:ln/>
+        </p:spPr>
+        <p:txBody>
+          <a:bodyPr wrap="square" lIns="0" tIns="0" rIns="0" bIns="0" rtlCol="0" anchor="ctr"/>
+          <a:lstStyle/>
+          <a:p>
+            <a:pPr indent="0" marL="0">
+              <a:buNone/>
+            </a:pPr>
+            <a:r>
+              <a:rPr lang="en-US" sz="1200" dirty="0">
+                <a:solidFill>
+                  <a:srgbClr val="2B3A42"/>
+                </a:solidFill>
+                <a:latin typeface="Calibri" pitchFamily="34" charset="0"/>
+                <a:ea typeface="Calibri" pitchFamily="34" charset="-122"/>
+                <a:cs typeface="Calibri" pitchFamily="34" charset="-120"/>
+              </a:rPr>
+              <a:t>Solo España e Italia publican un tipo con comisiones para empresas. Para los otros cuatro países la comisión es un supuesto, no un dato. El ROE de esos países depende de ese supuesto.</a:t>
+            </a:r>
+            <a:endParaRPr lang="en-US" sz="1200" dirty="0"/>
+          </a:p>
+        </p:txBody>
+      </p:sp>
+      <p:sp>
+        <p:nvSpPr>
+          <p:cNvPr id="16" name="Text 14"/>
+          <p:cNvSpPr txBox="1"/>
+          <p:nvPr/>
+        </p:nvSpPr>
+        <p:spPr>
+          <a:xfrm>
+            <a:off x="548640" y="6327648"/>
+            <a:ext cx="11091672" cy="274320"/>
+          </a:xfrm>
+          <a:prstGeom prst="rect">
+            <a:avLst/>
+          </a:prstGeom>
+          <a:noFill/>
+          <a:ln/>
+        </p:spPr>
+        <p:txBody>
+          <a:bodyPr wrap="square" lIns="0" tIns="0" rIns="0" bIns="0" rtlCol="0" anchor="ctr"/>
+          <a:lstStyle/>
+          <a:p>
+            <a:pPr indent="0" marL="0">
+              <a:buNone/>
+            </a:pPr>
+            <a:r>
+              <a:rPr lang="en-US" sz="900" i="1" dirty="0">
+                <a:solidFill>
+                  <a:srgbClr val="6E7F88"/>
+                </a:solidFill>
+                <a:latin typeface="Calibri" pitchFamily="34" charset="0"/>
+                <a:ea typeface="Calibri" pitchFamily="34" charset="-122"/>
+                <a:cs typeface="Calibri" pitchFamily="34" charset="-120"/>
+              </a:rPr>
+              <a:t>Detalle completo de fuentes, supuestos y huecos en notas.md del repositorio del proyecto.</a:t>
+            </a:r>
+            <a:endParaRPr lang="en-US" sz="900" dirty="0"/>
+          </a:p>
+        </p:txBody>
+      </p:sp>
+    </p:spTree>
+  </p:cSld>
+  <p:clrMapOvr>
+    <a:masterClrMapping/>
+  </p:clrMapOvr>
+</p:sld>
+</file>
+
+<file path=ppt/slides/slide20.xml><?xml version="1.0" encoding="utf-8"?>
+<p:sld xmlns:a="http://schemas.openxmlformats.org/drawingml/2006/main" xmlns:r="http://schemas.openxmlformats.org/officeDocument/2006/relationships" xmlns:p="http://schemas.openxmlformats.org/presentationml/2006/main">
+  <p:cSld name="Slide 20">
     <p:bg>
       <p:bgPr>
         <a:solidFill>
@@ -19802,571 +23454,9 @@
 </p:sld>
 </file>
 
-<file path=ppt/slides/slide2.xml><?xml version="1.0" encoding="utf-8"?>
+<file path=ppt/slides/slide21.xml><?xml version="1.0" encoding="utf-8"?>
 <p:sld xmlns:a="http://schemas.openxmlformats.org/drawingml/2006/main" xmlns:r="http://schemas.openxmlformats.org/officeDocument/2006/relationships" xmlns:p="http://schemas.openxmlformats.org/presentationml/2006/main">
-  <p:cSld name="Slide 2">
-    <p:spTree>
-      <p:nvGrpSpPr>
-        <p:cNvPr id="1" name=""/>
-        <p:cNvGrpSpPr/>
-        <p:nvPr/>
-      </p:nvGrpSpPr>
-      <p:grpSpPr>
-        <a:xfrm>
-          <a:off x="0" y="0"/>
-          <a:ext cx="0" cy="0"/>
-          <a:chOff x="0" y="0"/>
-          <a:chExt cx="0" cy="0"/>
-        </a:xfrm>
-      </p:grpSpPr>
-      <p:sp>
-        <p:nvSpPr>
-          <p:cNvPr id="2" name="Text 0"/>
-          <p:cNvSpPr txBox="1"/>
-          <p:nvPr/>
-        </p:nvSpPr>
-        <p:spPr>
-          <a:xfrm>
-            <a:off x="548640" y="310896"/>
-            <a:ext cx="11091672" cy="658368"/>
-          </a:xfrm>
-          <a:prstGeom prst="rect">
-            <a:avLst/>
-          </a:prstGeom>
-          <a:noFill/>
-          <a:ln/>
-        </p:spPr>
-        <p:txBody>
-          <a:bodyPr wrap="square" lIns="0" tIns="0" rIns="0" bIns="0" rtlCol="0" anchor="ctr"/>
-          <a:lstStyle/>
-          <a:p>
-            <a:pPr indent="0" marL="0">
-              <a:buNone/>
-            </a:pPr>
-            <a:r>
-              <a:rPr lang="en-US" sz="3000" b="1" dirty="0">
-                <a:solidFill>
-                  <a:srgbClr val="1C3F4E"/>
-                </a:solidFill>
-                <a:latin typeface="Cambria" pitchFamily="34" charset="0"/>
-                <a:ea typeface="Cambria" pitchFamily="34" charset="-122"/>
-                <a:cs typeface="Cambria" pitchFamily="34" charset="-120"/>
-              </a:rPr>
-              <a:t>Objetivo y método</a:t>
-            </a:r>
-            <a:endParaRPr lang="en-US" sz="3000" dirty="0"/>
-          </a:p>
-        </p:txBody>
-      </p:sp>
-      <p:sp>
-        <p:nvSpPr>
-          <p:cNvPr id="3" name="Text 1"/>
-          <p:cNvSpPr txBox="1"/>
-          <p:nvPr/>
-        </p:nvSpPr>
-        <p:spPr>
-          <a:xfrm>
-            <a:off x="548640" y="932688"/>
-            <a:ext cx="11091672" cy="384048"/>
-          </a:xfrm>
-          <a:prstGeom prst="rect">
-            <a:avLst/>
-          </a:prstGeom>
-          <a:noFill/>
-          <a:ln/>
-        </p:spPr>
-        <p:txBody>
-          <a:bodyPr wrap="square" lIns="0" tIns="0" rIns="0" bIns="0" rtlCol="0" anchor="ctr"/>
-          <a:lstStyle/>
-          <a:p>
-            <a:pPr indent="0" marL="0">
-              <a:buNone/>
-            </a:pPr>
-            <a:r>
-              <a:rPr lang="en-US" sz="1300" dirty="0">
-                <a:solidFill>
-                  <a:srgbClr val="6E7F88"/>
-                </a:solidFill>
-                <a:latin typeface="Calibri" pitchFamily="34" charset="0"/>
-                <a:ea typeface="Calibri" pitchFamily="34" charset="-122"/>
-                <a:cs typeface="Calibri" pitchFamily="34" charset="-120"/>
-              </a:rPr>
-              <a:t>Qué se mide, con qué datos y dónde están los límites</a:t>
-            </a:r>
-            <a:endParaRPr lang="en-US" sz="1300" dirty="0"/>
-          </a:p>
-        </p:txBody>
-      </p:sp>
-      <p:sp>
-        <p:nvSpPr>
-          <p:cNvPr id="4" name="Shape 2"/>
-          <p:cNvSpPr/>
-          <p:nvPr/>
-        </p:nvSpPr>
-        <p:spPr>
-          <a:xfrm>
-            <a:off x="548640" y="1600200"/>
-            <a:ext cx="11091672" cy="1069848"/>
-          </a:xfrm>
-          <a:prstGeom prst="roundRect">
-            <a:avLst>
-              <a:gd name="adj" fmla="val 5128"/>
-            </a:avLst>
-          </a:prstGeom>
-          <a:solidFill>
-            <a:srgbClr val="EEF2F3"/>
-          </a:solidFill>
-          <a:ln w="12700">
-            <a:solidFill>
-              <a:srgbClr val="DCE4E7"/>
-            </a:solidFill>
-            <a:prstDash val="solid"/>
-          </a:ln>
-        </p:spPr>
-      </p:sp>
-      <p:sp>
-        <p:nvSpPr>
-          <p:cNvPr id="5" name="Text 3"/>
-          <p:cNvSpPr txBox="1"/>
-          <p:nvPr/>
-        </p:nvSpPr>
-        <p:spPr>
-          <a:xfrm>
-            <a:off x="777240" y="1709928"/>
-            <a:ext cx="2286000" cy="292608"/>
-          </a:xfrm>
-          <a:prstGeom prst="rect">
-            <a:avLst/>
-          </a:prstGeom>
-          <a:noFill/>
-          <a:ln/>
-        </p:spPr>
-        <p:txBody>
-          <a:bodyPr wrap="square" lIns="0" tIns="0" rIns="0" bIns="0" rtlCol="0" anchor="ctr"/>
-          <a:lstStyle/>
-          <a:p>
-            <a:pPr indent="0" marL="0">
-              <a:buNone/>
-            </a:pPr>
-            <a:r>
-              <a:rPr lang="en-US" sz="1400" b="1" dirty="0">
-                <a:solidFill>
-                  <a:srgbClr val="1C3F4E"/>
-                </a:solidFill>
-                <a:latin typeface="Cambria" pitchFamily="34" charset="0"/>
-                <a:ea typeface="Cambria" pitchFamily="34" charset="-122"/>
-                <a:cs typeface="Cambria" pitchFamily="34" charset="-120"/>
-              </a:rPr>
-              <a:t>Objetivo</a:t>
-            </a:r>
-            <a:endParaRPr lang="en-US" sz="1400" dirty="0"/>
-          </a:p>
-        </p:txBody>
-      </p:sp>
-      <p:sp>
-        <p:nvSpPr>
-          <p:cNvPr id="6" name="Text 4"/>
-          <p:cNvSpPr txBox="1"/>
-          <p:nvPr/>
-        </p:nvSpPr>
-        <p:spPr>
-          <a:xfrm>
-            <a:off x="3200400" y="1709928"/>
-            <a:ext cx="8165592" cy="841248"/>
-          </a:xfrm>
-          <a:prstGeom prst="rect">
-            <a:avLst/>
-          </a:prstGeom>
-          <a:noFill/>
-          <a:ln/>
-        </p:spPr>
-        <p:txBody>
-          <a:bodyPr wrap="square" lIns="0" tIns="0" rIns="0" bIns="0" rtlCol="0" anchor="ctr"/>
-          <a:lstStyle/>
-          <a:p>
-            <a:pPr indent="0" marL="0">
-              <a:buNone/>
-            </a:pPr>
-            <a:r>
-              <a:rPr lang="en-US" sz="1200" dirty="0">
-                <a:solidFill>
-                  <a:srgbClr val="2B3A42"/>
-                </a:solidFill>
-                <a:latin typeface="Calibri" pitchFamily="34" charset="0"/>
-                <a:ea typeface="Calibri" pitchFamily="34" charset="-122"/>
-                <a:cs typeface="Calibri" pitchFamily="34" charset="-120"/>
-              </a:rPr>
-              <a:t>Comparar la rentabilidad del negocio PYME entre seis países europeos, producto a producto, sobre datos oficiales y no sobre estimaciones de mercado.</a:t>
-            </a:r>
-            <a:endParaRPr lang="en-US" sz="1200" dirty="0"/>
-          </a:p>
-        </p:txBody>
-      </p:sp>
-      <p:sp>
-        <p:nvSpPr>
-          <p:cNvPr id="7" name="Shape 5"/>
-          <p:cNvSpPr/>
-          <p:nvPr/>
-        </p:nvSpPr>
-        <p:spPr>
-          <a:xfrm>
-            <a:off x="548640" y="2788920"/>
-            <a:ext cx="11091672" cy="1069848"/>
-          </a:xfrm>
-          <a:prstGeom prst="roundRect">
-            <a:avLst>
-              <a:gd name="adj" fmla="val 5128"/>
-            </a:avLst>
-          </a:prstGeom>
-          <a:solidFill>
-            <a:srgbClr val="EEF2F3"/>
-          </a:solidFill>
-          <a:ln w="12700">
-            <a:solidFill>
-              <a:srgbClr val="DCE4E7"/>
-            </a:solidFill>
-            <a:prstDash val="solid"/>
-          </a:ln>
-        </p:spPr>
-      </p:sp>
-      <p:sp>
-        <p:nvSpPr>
-          <p:cNvPr id="8" name="Text 6"/>
-          <p:cNvSpPr txBox="1"/>
-          <p:nvPr/>
-        </p:nvSpPr>
-        <p:spPr>
-          <a:xfrm>
-            <a:off x="777240" y="2898648"/>
-            <a:ext cx="2286000" cy="292608"/>
-          </a:xfrm>
-          <a:prstGeom prst="rect">
-            <a:avLst/>
-          </a:prstGeom>
-          <a:noFill/>
-          <a:ln/>
-        </p:spPr>
-        <p:txBody>
-          <a:bodyPr wrap="square" lIns="0" tIns="0" rIns="0" bIns="0" rtlCol="0" anchor="ctr"/>
-          <a:lstStyle/>
-          <a:p>
-            <a:pPr indent="0" marL="0">
-              <a:buNone/>
-            </a:pPr>
-            <a:r>
-              <a:rPr lang="en-US" sz="1400" b="1" dirty="0">
-                <a:solidFill>
-                  <a:srgbClr val="1C3F4E"/>
-                </a:solidFill>
-                <a:latin typeface="Cambria" pitchFamily="34" charset="0"/>
-                <a:ea typeface="Cambria" pitchFamily="34" charset="-122"/>
-                <a:cs typeface="Cambria" pitchFamily="34" charset="-120"/>
-              </a:rPr>
-              <a:t>Alcance</a:t>
-            </a:r>
-            <a:endParaRPr lang="en-US" sz="1400" dirty="0"/>
-          </a:p>
-        </p:txBody>
-      </p:sp>
-      <p:sp>
-        <p:nvSpPr>
-          <p:cNvPr id="9" name="Text 7"/>
-          <p:cNvSpPr txBox="1"/>
-          <p:nvPr/>
-        </p:nvSpPr>
-        <p:spPr>
-          <a:xfrm>
-            <a:off x="3200400" y="2898648"/>
-            <a:ext cx="8165592" cy="841248"/>
-          </a:xfrm>
-          <a:prstGeom prst="rect">
-            <a:avLst/>
-          </a:prstGeom>
-          <a:noFill/>
-          <a:ln/>
-        </p:spPr>
-        <p:txBody>
-          <a:bodyPr wrap="square" lIns="0" tIns="0" rIns="0" bIns="0" rtlCol="0" anchor="ctr"/>
-          <a:lstStyle/>
-          <a:p>
-            <a:pPr indent="0" marL="0">
-              <a:buNone/>
-            </a:pPr>
-            <a:r>
-              <a:rPr lang="en-US" sz="1200" dirty="0">
-                <a:solidFill>
-                  <a:srgbClr val="2B3A42"/>
-                </a:solidFill>
-                <a:latin typeface="Calibri" pitchFamily="34" charset="0"/>
-                <a:ea typeface="Calibri" pitchFamily="34" charset="-122"/>
-                <a:cs typeface="Calibri" pitchFamily="34" charset="-120"/>
-              </a:rPr>
-              <a:t>Hipotecas, préstamos, circulante, factoring y confirming, más el coste de los recursos. Segmentación por tramo de importe del préstamo, que es como segmenta la estadística oficial europea.</a:t>
-            </a:r>
-            <a:endParaRPr lang="en-US" sz="1200" dirty="0"/>
-          </a:p>
-        </p:txBody>
-      </p:sp>
-      <p:sp>
-        <p:nvSpPr>
-          <p:cNvPr id="10" name="Shape 8"/>
-          <p:cNvSpPr/>
-          <p:nvPr/>
-        </p:nvSpPr>
-        <p:spPr>
-          <a:xfrm>
-            <a:off x="548640" y="3977640"/>
-            <a:ext cx="11091672" cy="1069848"/>
-          </a:xfrm>
-          <a:prstGeom prst="roundRect">
-            <a:avLst>
-              <a:gd name="adj" fmla="val 5128"/>
-            </a:avLst>
-          </a:prstGeom>
-          <a:solidFill>
-            <a:srgbClr val="EEF2F3"/>
-          </a:solidFill>
-          <a:ln w="12700">
-            <a:solidFill>
-              <a:srgbClr val="DCE4E7"/>
-            </a:solidFill>
-            <a:prstDash val="solid"/>
-          </a:ln>
-        </p:spPr>
-      </p:sp>
-      <p:sp>
-        <p:nvSpPr>
-          <p:cNvPr id="11" name="Text 9"/>
-          <p:cNvSpPr txBox="1"/>
-          <p:nvPr/>
-        </p:nvSpPr>
-        <p:spPr>
-          <a:xfrm>
-            <a:off x="777240" y="4087368"/>
-            <a:ext cx="2286000" cy="292608"/>
-          </a:xfrm>
-          <a:prstGeom prst="rect">
-            <a:avLst/>
-          </a:prstGeom>
-          <a:noFill/>
-          <a:ln/>
-        </p:spPr>
-        <p:txBody>
-          <a:bodyPr wrap="square" lIns="0" tIns="0" rIns="0" bIns="0" rtlCol="0" anchor="ctr"/>
-          <a:lstStyle/>
-          <a:p>
-            <a:pPr indent="0" marL="0">
-              <a:buNone/>
-            </a:pPr>
-            <a:r>
-              <a:rPr lang="en-US" sz="1400" b="1" dirty="0">
-                <a:solidFill>
-                  <a:srgbClr val="1C3F4E"/>
-                </a:solidFill>
-                <a:latin typeface="Cambria" pitchFamily="34" charset="0"/>
-                <a:ea typeface="Cambria" pitchFamily="34" charset="-122"/>
-                <a:cs typeface="Cambria" pitchFamily="34" charset="-120"/>
-              </a:rPr>
-              <a:t>Método</a:t>
-            </a:r>
-            <a:endParaRPr lang="en-US" sz="1400" dirty="0"/>
-          </a:p>
-        </p:txBody>
-      </p:sp>
-      <p:sp>
-        <p:nvSpPr>
-          <p:cNvPr id="12" name="Text 10"/>
-          <p:cNvSpPr txBox="1"/>
-          <p:nvPr/>
-        </p:nvSpPr>
-        <p:spPr>
-          <a:xfrm>
-            <a:off x="3200400" y="4087368"/>
-            <a:ext cx="8165592" cy="841248"/>
-          </a:xfrm>
-          <a:prstGeom prst="rect">
-            <a:avLst/>
-          </a:prstGeom>
-          <a:noFill/>
-          <a:ln/>
-        </p:spPr>
-        <p:txBody>
-          <a:bodyPr wrap="square" lIns="0" tIns="0" rIns="0" bIns="0" rtlCol="0" anchor="ctr"/>
-          <a:lstStyle/>
-          <a:p>
-            <a:pPr indent="0" marL="0">
-              <a:buNone/>
-            </a:pPr>
-            <a:r>
-              <a:rPr lang="en-US" sz="1200" dirty="0">
-                <a:solidFill>
-                  <a:srgbClr val="2B3A42"/>
-                </a:solidFill>
-                <a:latin typeface="Calibri" pitchFamily="34" charset="0"/>
-                <a:ea typeface="Calibri" pitchFamily="34" charset="-122"/>
-                <a:cs typeface="Calibri" pitchFamily="34" charset="-120"/>
-              </a:rPr>
-              <a:t>Cuenta de resultados en porcentaje del saldo medio: precio más comisiones, menos coste de fondos, riesgo y gastos. El capital se asigna por densidad de RWA sobre el CET1 observado.</a:t>
-            </a:r>
-            <a:endParaRPr lang="en-US" sz="1200" dirty="0"/>
-          </a:p>
-        </p:txBody>
-      </p:sp>
-      <p:sp>
-        <p:nvSpPr>
-          <p:cNvPr id="13" name="Shape 11"/>
-          <p:cNvSpPr/>
-          <p:nvPr/>
-        </p:nvSpPr>
-        <p:spPr>
-          <a:xfrm>
-            <a:off x="548640" y="5166360"/>
-            <a:ext cx="11091672" cy="1069848"/>
-          </a:xfrm>
-          <a:prstGeom prst="roundRect">
-            <a:avLst>
-              <a:gd name="adj" fmla="val 5128"/>
-            </a:avLst>
-          </a:prstGeom>
-          <a:solidFill>
-            <a:srgbClr val="F7EDE4"/>
-          </a:solidFill>
-          <a:ln w="12700">
-            <a:solidFill>
-              <a:srgbClr val="C97B3C"/>
-            </a:solidFill>
-            <a:prstDash val="solid"/>
-          </a:ln>
-        </p:spPr>
-      </p:sp>
-      <p:sp>
-        <p:nvSpPr>
-          <p:cNvPr id="14" name="Text 12"/>
-          <p:cNvSpPr txBox="1"/>
-          <p:nvPr/>
-        </p:nvSpPr>
-        <p:spPr>
-          <a:xfrm>
-            <a:off x="777240" y="5276088"/>
-            <a:ext cx="2286000" cy="292608"/>
-          </a:xfrm>
-          <a:prstGeom prst="rect">
-            <a:avLst/>
-          </a:prstGeom>
-          <a:noFill/>
-          <a:ln/>
-        </p:spPr>
-        <p:txBody>
-          <a:bodyPr wrap="square" lIns="0" tIns="0" rIns="0" bIns="0" rtlCol="0" anchor="ctr"/>
-          <a:lstStyle/>
-          <a:p>
-            <a:pPr indent="0" marL="0">
-              <a:buNone/>
-            </a:pPr>
-            <a:r>
-              <a:rPr lang="en-US" sz="1400" b="1" dirty="0">
-                <a:solidFill>
-                  <a:srgbClr val="C97B3C"/>
-                </a:solidFill>
-                <a:latin typeface="Cambria" pitchFamily="34" charset="0"/>
-                <a:ea typeface="Cambria" pitchFamily="34" charset="-122"/>
-                <a:cs typeface="Cambria" pitchFamily="34" charset="-120"/>
-              </a:rPr>
-              <a:t>Límite principal</a:t>
-            </a:r>
-            <a:endParaRPr lang="en-US" sz="1400" dirty="0"/>
-          </a:p>
-        </p:txBody>
-      </p:sp>
-      <p:sp>
-        <p:nvSpPr>
-          <p:cNvPr id="15" name="Text 13"/>
-          <p:cNvSpPr txBox="1"/>
-          <p:nvPr/>
-        </p:nvSpPr>
-        <p:spPr>
-          <a:xfrm>
-            <a:off x="3200400" y="5276088"/>
-            <a:ext cx="8165592" cy="841248"/>
-          </a:xfrm>
-          <a:prstGeom prst="rect">
-            <a:avLst/>
-          </a:prstGeom>
-          <a:noFill/>
-          <a:ln/>
-        </p:spPr>
-        <p:txBody>
-          <a:bodyPr wrap="square" lIns="0" tIns="0" rIns="0" bIns="0" rtlCol="0" anchor="ctr"/>
-          <a:lstStyle/>
-          <a:p>
-            <a:pPr indent="0" marL="0">
-              <a:buNone/>
-            </a:pPr>
-            <a:r>
-              <a:rPr lang="en-US" sz="1200" dirty="0">
-                <a:solidFill>
-                  <a:srgbClr val="2B3A42"/>
-                </a:solidFill>
-                <a:latin typeface="Calibri" pitchFamily="34" charset="0"/>
-                <a:ea typeface="Calibri" pitchFamily="34" charset="-122"/>
-                <a:cs typeface="Calibri" pitchFamily="34" charset="-120"/>
-              </a:rPr>
-              <a:t>Solo España e Italia publican un tipo con comisiones para empresas. Para los otros cuatro países la comisión es un supuesto, no un dato. El ROE de esos países depende de ese supuesto.</a:t>
-            </a:r>
-            <a:endParaRPr lang="en-US" sz="1200" dirty="0"/>
-          </a:p>
-        </p:txBody>
-      </p:sp>
-      <p:sp>
-        <p:nvSpPr>
-          <p:cNvPr id="16" name="Text 14"/>
-          <p:cNvSpPr txBox="1"/>
-          <p:nvPr/>
-        </p:nvSpPr>
-        <p:spPr>
-          <a:xfrm>
-            <a:off x="548640" y="6327648"/>
-            <a:ext cx="11091672" cy="274320"/>
-          </a:xfrm>
-          <a:prstGeom prst="rect">
-            <a:avLst/>
-          </a:prstGeom>
-          <a:noFill/>
-          <a:ln/>
-        </p:spPr>
-        <p:txBody>
-          <a:bodyPr wrap="square" lIns="0" tIns="0" rIns="0" bIns="0" rtlCol="0" anchor="ctr"/>
-          <a:lstStyle/>
-          <a:p>
-            <a:pPr indent="0" marL="0">
-              <a:buNone/>
-            </a:pPr>
-            <a:r>
-              <a:rPr lang="en-US" sz="900" i="1" dirty="0">
-                <a:solidFill>
-                  <a:srgbClr val="6E7F88"/>
-                </a:solidFill>
-                <a:latin typeface="Calibri" pitchFamily="34" charset="0"/>
-                <a:ea typeface="Calibri" pitchFamily="34" charset="-122"/>
-                <a:cs typeface="Calibri" pitchFamily="34" charset="-120"/>
-              </a:rPr>
-              <a:t>Detalle completo de fuentes, supuestos y huecos en notas.md del repositorio del proyecto.</a:t>
-            </a:r>
-            <a:endParaRPr lang="en-US" sz="900" dirty="0"/>
-          </a:p>
-        </p:txBody>
-      </p:sp>
-    </p:spTree>
-  </p:cSld>
-  <p:clrMapOvr>
-    <a:masterClrMapping/>
-  </p:clrMapOvr>
-</p:sld>
-</file>
-
-<file path=ppt/slides/slide20.xml><?xml version="1.0" encoding="utf-8"?>
-<p:sld xmlns:a="http://schemas.openxmlformats.org/drawingml/2006/main" xmlns:r="http://schemas.openxmlformats.org/officeDocument/2006/relationships" xmlns:p="http://schemas.openxmlformats.org/presentationml/2006/main">
-  <p:cSld name="Slide 20">
+  <p:cSld name="Slide 21">
     <p:spTree>
       <p:nvGrpSpPr>
         <p:cNvPr id="1" name=""/>
@@ -20461,7 +23551,7 @@
       </p:sp>
       <p:graphicFrame>
         <p:nvGraphicFramePr>
-          <p:cNvPr id="21" name="Table 0"/>
+          <p:cNvPr id="22" name="Table 0"/>
           <p:cNvGraphicFramePr>
             <a:graphicFrameLocks noGrp="1"/>
           </p:cNvGraphicFramePr>

--- a/pres/rentabilidad_pyme.pptx
+++ b/pres/rentabilidad_pyme.pptx
@@ -186,9 +186,9 @@
           </c:dLbls>
           <c:cat>
             <c:multiLvlStrRef>
-              <c:f>Sheet1!$A$2:$A$7</c:f>
+              <c:f>Sheet1!$A$2:$A$8</c:f>
               <c:multiLvlStrCache>
-                <c:ptCount val="6"/>
+                <c:ptCount val="7"/>
                 <c:lvl>
                   <c:pt idx="0">
                     <c:v>España</c:v>
@@ -208,16 +208,19 @@
                   <c:pt idx="5">
                     <c:v>P. Bajos</c:v>
                   </c:pt>
+                  <c:pt idx="6">
+                    <c:v>Irlanda</c:v>
+                  </c:pt>
                 </c:lvl>
               </c:multiLvlStrCache>
             </c:multiLvlStrRef>
           </c:cat>
           <c:val>
             <c:numRef>
-              <c:f>Sheet1!$B$2:$B$7</c:f>
+              <c:f>Sheet1!$B$2:$B$8</c:f>
               <c:numCache>
                 <c:formatCode>General</c:formatCode>
-                <c:ptCount val="6"/>
+                <c:ptCount val="7"/>
                 <c:pt idx="0">
                   <c:v>3.42</c:v>
                 </c:pt>
@@ -235,6 +238,9 @@
                 </c:pt>
                 <c:pt idx="5">
                   <c:v>4.57</c:v>
+                </c:pt>
+                <c:pt idx="6">
+                  <c:v>5.64</c:v>
                 </c:pt>
               </c:numCache>
             </c:numRef>
@@ -287,9 +293,9 @@
           </c:dLbls>
           <c:cat>
             <c:multiLvlStrRef>
-              <c:f>Sheet1!$A$2:$A$7</c:f>
+              <c:f>Sheet1!$A$2:$A$8</c:f>
               <c:multiLvlStrCache>
-                <c:ptCount val="6"/>
+                <c:ptCount val="7"/>
                 <c:lvl>
                   <c:pt idx="0">
                     <c:v>España</c:v>
@@ -309,16 +315,19 @@
                   <c:pt idx="5">
                     <c:v>P. Bajos</c:v>
                   </c:pt>
+                  <c:pt idx="6">
+                    <c:v>Irlanda</c:v>
+                  </c:pt>
                 </c:lvl>
               </c:multiLvlStrCache>
             </c:multiLvlStrRef>
           </c:cat>
           <c:val>
             <c:numRef>
-              <c:f>Sheet1!$C$2:$C$7</c:f>
+              <c:f>Sheet1!$C$2:$C$8</c:f>
               <c:numCache>
                 <c:formatCode>General</c:formatCode>
-                <c:ptCount val="6"/>
+                <c:ptCount val="7"/>
                 <c:pt idx="0">
                   <c:v>3.46</c:v>
                 </c:pt>
@@ -336,6 +345,9 @@
                 </c:pt>
                 <c:pt idx="5">
                   <c:v>3.37</c:v>
+                </c:pt>
+                <c:pt idx="6">
+                  <c:v>5.04</c:v>
                 </c:pt>
               </c:numCache>
             </c:numRef>
@@ -560,9 +572,9 @@
           </c:dLbls>
           <c:cat>
             <c:multiLvlStrRef>
-              <c:f>Sheet1!$A$2:$A$7</c:f>
+              <c:f>Sheet1!$A$2:$A$8</c:f>
               <c:multiLvlStrCache>
-                <c:ptCount val="6"/>
+                <c:ptCount val="7"/>
                 <c:lvl>
                   <c:pt idx="0">
                     <c:v>España</c:v>
@@ -582,16 +594,19 @@
                   <c:pt idx="5">
                     <c:v>P. Bajos</c:v>
                   </c:pt>
+                  <c:pt idx="6">
+                    <c:v>Irlanda</c:v>
+                  </c:pt>
                 </c:lvl>
               </c:multiLvlStrCache>
             </c:multiLvlStrRef>
           </c:cat>
           <c:val>
             <c:numRef>
-              <c:f>Sheet1!$B$2:$B$7</c:f>
+              <c:f>Sheet1!$B$2:$B$8</c:f>
               <c:numCache>
                 <c:formatCode>General</c:formatCode>
-                <c:ptCount val="6"/>
+                <c:ptCount val="7"/>
                 <c:pt idx="0">
                   <c:v>3.58</c:v>
                 </c:pt>
@@ -609,6 +624,9 @@
                 </c:pt>
                 <c:pt idx="5">
                   <c:v>2.46</c:v>
+                </c:pt>
+                <c:pt idx="6">
+                  <c:v>4.92</c:v>
                 </c:pt>
               </c:numCache>
             </c:numRef>
@@ -819,9 +837,9 @@
           </c:dLbls>
           <c:cat>
             <c:multiLvlStrRef>
-              <c:f>Sheet1!$A$2:$A$7</c:f>
+              <c:f>Sheet1!$A$2:$A$8</c:f>
               <c:multiLvlStrCache>
-                <c:ptCount val="6"/>
+                <c:ptCount val="7"/>
                 <c:lvl>
                   <c:pt idx="0">
                     <c:v>España</c:v>
@@ -841,16 +859,19 @@
                   <c:pt idx="5">
                     <c:v>P. Bajos</c:v>
                   </c:pt>
+                  <c:pt idx="6">
+                    <c:v>Irlanda</c:v>
+                  </c:pt>
                 </c:lvl>
               </c:multiLvlStrCache>
             </c:multiLvlStrRef>
           </c:cat>
           <c:val>
             <c:numRef>
-              <c:f>Sheet1!$B$2:$B$7</c:f>
+              <c:f>Sheet1!$B$2:$B$8</c:f>
               <c:numCache>
                 <c:formatCode>General</c:formatCode>
-                <c:ptCount val="6"/>
+                <c:ptCount val="7"/>
                 <c:pt idx="0">
                   <c:v>4.25</c:v>
                 </c:pt>
@@ -868,6 +889,9 @@
                 </c:pt>
                 <c:pt idx="5">
                   <c:v>3.06</c:v>
+                </c:pt>
+                <c:pt idx="6">
+                  <c:v>3.5</c:v>
                 </c:pt>
               </c:numCache>
             </c:numRef>
@@ -1078,9 +1102,9 @@
           </c:dLbls>
           <c:cat>
             <c:multiLvlStrRef>
-              <c:f>Sheet1!$A$2:$A$7</c:f>
+              <c:f>Sheet1!$A$2:$A$8</c:f>
               <c:multiLvlStrCache>
-                <c:ptCount val="6"/>
+                <c:ptCount val="7"/>
                 <c:lvl>
                   <c:pt idx="0">
                     <c:v>España</c:v>
@@ -1100,16 +1124,19 @@
                   <c:pt idx="5">
                     <c:v>P. Bajos</c:v>
                   </c:pt>
+                  <c:pt idx="6">
+                    <c:v>Irlanda</c:v>
+                  </c:pt>
                 </c:lvl>
               </c:multiLvlStrCache>
             </c:multiLvlStrRef>
           </c:cat>
           <c:val>
             <c:numRef>
-              <c:f>Sheet1!$B$2:$B$7</c:f>
+              <c:f>Sheet1!$B$2:$B$8</c:f>
               <c:numCache>
                 <c:formatCode>General</c:formatCode>
-                <c:ptCount val="6"/>
+                <c:ptCount val="7"/>
                 <c:pt idx="0">
                   <c:v>16.5</c:v>
                 </c:pt>
@@ -1127,6 +1154,9 @@
                 </c:pt>
                 <c:pt idx="5">
                   <c:v>14</c:v>
+                </c:pt>
+                <c:pt idx="6">
+                  <c:v>4.5</c:v>
                 </c:pt>
               </c:numCache>
             </c:numRef>
@@ -1675,9 +1705,9 @@
           </c:dLbls>
           <c:cat>
             <c:multiLvlStrRef>
-              <c:f>Sheet1!$A$2:$A$7</c:f>
+              <c:f>Sheet1!$A$2:$A$8</c:f>
               <c:multiLvlStrCache>
-                <c:ptCount val="6"/>
+                <c:ptCount val="7"/>
                 <c:lvl>
                   <c:pt idx="0">
                     <c:v>España</c:v>
@@ -1697,16 +1727,19 @@
                   <c:pt idx="5">
                     <c:v>P. Bajos</c:v>
                   </c:pt>
+                  <c:pt idx="6">
+                    <c:v>Irlanda</c:v>
+                  </c:pt>
                 </c:lvl>
               </c:multiLvlStrCache>
             </c:multiLvlStrRef>
           </c:cat>
           <c:val>
             <c:numRef>
-              <c:f>Sheet1!$B$2:$B$7</c:f>
+              <c:f>Sheet1!$B$2:$B$8</c:f>
               <c:numCache>
                 <c:formatCode>General</c:formatCode>
-                <c:ptCount val="6"/>
+                <c:ptCount val="7"/>
                 <c:pt idx="0">
                   <c:v>5.49</c:v>
                 </c:pt>
@@ -1724,6 +1757,9 @@
                 </c:pt>
                 <c:pt idx="5">
                   <c:v>13.71</c:v>
+                </c:pt>
+                <c:pt idx="6">
+                  <c:v>7.65</c:v>
                 </c:pt>
               </c:numCache>
             </c:numRef>
@@ -1935,9 +1971,9 @@
           </c:dLbls>
           <c:cat>
             <c:multiLvlStrRef>
-              <c:f>Sheet1!$A$2:$A$7</c:f>
+              <c:f>Sheet1!$A$2:$A$8</c:f>
               <c:multiLvlStrCache>
-                <c:ptCount val="6"/>
+                <c:ptCount val="7"/>
                 <c:lvl>
                   <c:pt idx="0">
                     <c:v>España</c:v>
@@ -1957,33 +1993,39 @@
                   <c:pt idx="5">
                     <c:v>P. Bajos</c:v>
                   </c:pt>
+                  <c:pt idx="6">
+                    <c:v>Irlanda</c:v>
+                  </c:pt>
                 </c:lvl>
               </c:multiLvlStrCache>
             </c:multiLvlStrRef>
           </c:cat>
           <c:val>
             <c:numRef>
-              <c:f>Sheet1!$B$2:$B$7</c:f>
+              <c:f>Sheet1!$B$2:$B$8</c:f>
               <c:numCache>
                 <c:formatCode>General</c:formatCode>
-                <c:ptCount val="6"/>
+                <c:ptCount val="7"/>
                 <c:pt idx="0">
-                  <c:v>0.44</c:v>
+                  <c:v>0</c:v>
                 </c:pt>
                 <c:pt idx="1">
-                  <c:v>0.72</c:v>
+                  <c:v>0</c:v>
                 </c:pt>
                 <c:pt idx="2">
-                  <c:v>0.52</c:v>
+                  <c:v>0</c:v>
                 </c:pt>
                 <c:pt idx="3">
-                  <c:v>0.56</c:v>
+                  <c:v>0</c:v>
                 </c:pt>
                 <c:pt idx="4">
-                  <c:v>0.07</c:v>
+                  <c:v>0</c:v>
                 </c:pt>
                 <c:pt idx="5">
-                  <c:v>0.85</c:v>
+                  <c:v>0</c:v>
+                </c:pt>
+                <c:pt idx="6">
+                  <c:v>0</c:v>
                 </c:pt>
               </c:numCache>
             </c:numRef>
@@ -2037,9 +2079,9 @@
           </c:dLbls>
           <c:cat>
             <c:multiLvlStrRef>
-              <c:f>Sheet1!$A$2:$A$7</c:f>
+              <c:f>Sheet1!$A$2:$A$8</c:f>
               <c:multiLvlStrCache>
-                <c:ptCount val="6"/>
+                <c:ptCount val="7"/>
                 <c:lvl>
                   <c:pt idx="0">
                     <c:v>España</c:v>
@@ -2059,33 +2101,39 @@
                   <c:pt idx="5">
                     <c:v>P. Bajos</c:v>
                   </c:pt>
+                  <c:pt idx="6">
+                    <c:v>Irlanda</c:v>
+                  </c:pt>
                 </c:lvl>
               </c:multiLvlStrCache>
             </c:multiLvlStrRef>
           </c:cat>
           <c:val>
             <c:numRef>
-              <c:f>Sheet1!$C$2:$C$7</c:f>
+              <c:f>Sheet1!$C$2:$C$8</c:f>
               <c:numCache>
                 <c:formatCode>General</c:formatCode>
-                <c:ptCount val="6"/>
+                <c:ptCount val="7"/>
                 <c:pt idx="0">
-                  <c:v>1.65</c:v>
+                  <c:v>0</c:v>
                 </c:pt>
                 <c:pt idx="1">
-                  <c:v>1.37</c:v>
+                  <c:v>0</c:v>
                 </c:pt>
                 <c:pt idx="2">
-                  <c:v>1.57</c:v>
+                  <c:v>0</c:v>
                 </c:pt>
                 <c:pt idx="3">
-                  <c:v>1.53</c:v>
+                  <c:v>0</c:v>
                 </c:pt>
                 <c:pt idx="4">
-                  <c:v>2.02</c:v>
+                  <c:v>0</c:v>
                 </c:pt>
                 <c:pt idx="5">
-                  <c:v>1.24</c:v>
+                  <c:v>0</c:v>
+                </c:pt>
+                <c:pt idx="6">
+                  <c:v>0</c:v>
                 </c:pt>
               </c:numCache>
             </c:numRef>
@@ -2310,9 +2358,9 @@
           </c:dLbls>
           <c:cat>
             <c:multiLvlStrRef>
-              <c:f>Sheet1!$A$2:$A$7</c:f>
+              <c:f>Sheet1!$A$2:$A$8</c:f>
               <c:multiLvlStrCache>
-                <c:ptCount val="6"/>
+                <c:ptCount val="7"/>
                 <c:lvl>
                   <c:pt idx="0">
                     <c:v>España</c:v>
@@ -2332,16 +2380,19 @@
                   <c:pt idx="5">
                     <c:v>P. Bajos</c:v>
                   </c:pt>
+                  <c:pt idx="6">
+                    <c:v>Irlanda</c:v>
+                  </c:pt>
                 </c:lvl>
               </c:multiLvlStrCache>
             </c:multiLvlStrRef>
           </c:cat>
           <c:val>
             <c:numRef>
-              <c:f>Sheet1!$B$2:$B$7</c:f>
+              <c:f>Sheet1!$B$2:$B$8</c:f>
               <c:numCache>
                 <c:formatCode>General</c:formatCode>
-                <c:ptCount val="6"/>
+                <c:ptCount val="7"/>
                 <c:pt idx="0">
                   <c:v>2.6</c:v>
                 </c:pt>
@@ -2359,6 +2410,9 @@
                 </c:pt>
                 <c:pt idx="5">
                   <c:v>1.35</c:v>
+                </c:pt>
+                <c:pt idx="6">
+                  <c:v>1.1</c:v>
                 </c:pt>
               </c:numCache>
             </c:numRef>
@@ -2411,9 +2465,9 @@
           </c:dLbls>
           <c:cat>
             <c:multiLvlStrRef>
-              <c:f>Sheet1!$A$2:$A$7</c:f>
+              <c:f>Sheet1!$A$2:$A$8</c:f>
               <c:multiLvlStrCache>
-                <c:ptCount val="6"/>
+                <c:ptCount val="7"/>
                 <c:lvl>
                   <c:pt idx="0">
                     <c:v>España</c:v>
@@ -2433,16 +2487,19 @@
                   <c:pt idx="5">
                     <c:v>P. Bajos</c:v>
                   </c:pt>
+                  <c:pt idx="6">
+                    <c:v>Irlanda</c:v>
+                  </c:pt>
                 </c:lvl>
               </c:multiLvlStrCache>
             </c:multiLvlStrRef>
           </c:cat>
           <c:val>
             <c:numRef>
-              <c:f>Sheet1!$C$2:$C$7</c:f>
+              <c:f>Sheet1!$C$2:$C$8</c:f>
               <c:numCache>
                 <c:formatCode>General</c:formatCode>
-                <c:ptCount val="6"/>
+                <c:ptCount val="7"/>
                 <c:pt idx="0">
                   <c:v>2.99</c:v>
                 </c:pt>
@@ -2460,6 +2517,9 @@
                 </c:pt>
                 <c:pt idx="5">
                   <c:v>2.86</c:v>
+                </c:pt>
+                <c:pt idx="6">
+                  <c:v>2.5</c:v>
                 </c:pt>
               </c:numCache>
             </c:numRef>
@@ -2512,9 +2572,9 @@
           </c:dLbls>
           <c:cat>
             <c:multiLvlStrRef>
-              <c:f>Sheet1!$A$2:$A$7</c:f>
+              <c:f>Sheet1!$A$2:$A$8</c:f>
               <c:multiLvlStrCache>
-                <c:ptCount val="6"/>
+                <c:ptCount val="7"/>
                 <c:lvl>
                   <c:pt idx="0">
                     <c:v>España</c:v>
@@ -2534,16 +2594,19 @@
                   <c:pt idx="5">
                     <c:v>P. Bajos</c:v>
                   </c:pt>
+                  <c:pt idx="6">
+                    <c:v>Irlanda</c:v>
+                  </c:pt>
                 </c:lvl>
               </c:multiLvlStrCache>
             </c:multiLvlStrRef>
           </c:cat>
           <c:val>
             <c:numRef>
-              <c:f>Sheet1!$D$2:$D$7</c:f>
+              <c:f>Sheet1!$D$2:$D$8</c:f>
               <c:numCache>
                 <c:formatCode>General</c:formatCode>
-                <c:ptCount val="6"/>
+                <c:ptCount val="7"/>
                 <c:pt idx="0">
                   <c:v>5.38</c:v>
                 </c:pt>
@@ -2561,6 +2624,9 @@
                 </c:pt>
                 <c:pt idx="5">
                   <c:v>3.13</c:v>
+                </c:pt>
+                <c:pt idx="6">
+                  <c:v>3.77</c:v>
                 </c:pt>
               </c:numCache>
             </c:numRef>
@@ -2613,9 +2679,9 @@
           </c:dLbls>
           <c:cat>
             <c:multiLvlStrRef>
-              <c:f>Sheet1!$A$2:$A$7</c:f>
+              <c:f>Sheet1!$A$2:$A$8</c:f>
               <c:multiLvlStrCache>
-                <c:ptCount val="6"/>
+                <c:ptCount val="7"/>
                 <c:lvl>
                   <c:pt idx="0">
                     <c:v>España</c:v>
@@ -2635,16 +2701,19 @@
                   <c:pt idx="5">
                     <c:v>P. Bajos</c:v>
                   </c:pt>
+                  <c:pt idx="6">
+                    <c:v>Irlanda</c:v>
+                  </c:pt>
                 </c:lvl>
               </c:multiLvlStrCache>
             </c:multiLvlStrRef>
           </c:cat>
           <c:val>
             <c:numRef>
-              <c:f>Sheet1!$E$2:$E$7</c:f>
+              <c:f>Sheet1!$E$2:$E$8</c:f>
               <c:numCache>
                 <c:formatCode>General</c:formatCode>
-                <c:ptCount val="6"/>
+                <c:ptCount val="7"/>
                 <c:pt idx="0">
                   <c:v>4.25</c:v>
                 </c:pt>
@@ -2662,6 +2731,9 @@
                 </c:pt>
                 <c:pt idx="5">
                   <c:v>3.06</c:v>
+                </c:pt>
+                <c:pt idx="6">
+                  <c:v>3.5</c:v>
                 </c:pt>
               </c:numCache>
             </c:numRef>
@@ -2886,9 +2958,9 @@
           </c:dLbls>
           <c:cat>
             <c:multiLvlStrRef>
-              <c:f>Sheet1!$A$2:$A$7</c:f>
+              <c:f>Sheet1!$A$2:$A$8</c:f>
               <c:multiLvlStrCache>
-                <c:ptCount val="6"/>
+                <c:ptCount val="7"/>
                 <c:lvl>
                   <c:pt idx="0">
                     <c:v>España</c:v>
@@ -2908,16 +2980,19 @@
                   <c:pt idx="5">
                     <c:v>P. Bajos</c:v>
                   </c:pt>
+                  <c:pt idx="6">
+                    <c:v>Irlanda</c:v>
+                  </c:pt>
                 </c:lvl>
               </c:multiLvlStrCache>
             </c:multiLvlStrRef>
           </c:cat>
           <c:val>
             <c:numRef>
-              <c:f>Sheet1!$B$2:$B$7</c:f>
+              <c:f>Sheet1!$B$2:$B$8</c:f>
               <c:numCache>
                 <c:formatCode>General</c:formatCode>
-                <c:ptCount val="6"/>
+                <c:ptCount val="7"/>
                 <c:pt idx="0">
                   <c:v>0.59</c:v>
                 </c:pt>
@@ -2935,6 +3010,9 @@
                 </c:pt>
                 <c:pt idx="5">
                   <c:v>0.35</c:v>
+                </c:pt>
+                <c:pt idx="6">
+                  <c:v>0.4</c:v>
                 </c:pt>
               </c:numCache>
             </c:numRef>
@@ -3174,9 +3252,9 @@
           </c:dLbls>
           <c:cat>
             <c:multiLvlStrRef>
-              <c:f>Sheet1!$A$2:$A$7</c:f>
+              <c:f>Sheet1!$A$2:$A$8</c:f>
               <c:multiLvlStrCache>
-                <c:ptCount val="6"/>
+                <c:ptCount val="7"/>
                 <c:lvl>
                   <c:pt idx="0">
                     <c:v>España</c:v>
@@ -3196,16 +3274,19 @@
                   <c:pt idx="5">
                     <c:v>P. Bajos</c:v>
                   </c:pt>
+                  <c:pt idx="6">
+                    <c:v>Irlanda</c:v>
+                  </c:pt>
                 </c:lvl>
               </c:multiLvlStrCache>
             </c:multiLvlStrRef>
           </c:cat>
           <c:val>
             <c:numRef>
-              <c:f>Sheet1!$B$2:$B$7</c:f>
+              <c:f>Sheet1!$B$2:$B$8</c:f>
               <c:numCache>
                 <c:formatCode>General</c:formatCode>
-                <c:ptCount val="6"/>
+                <c:ptCount val="7"/>
                 <c:pt idx="0">
                   <c:v>1.73</c:v>
                 </c:pt>
@@ -3223,6 +3304,9 @@
                 </c:pt>
                 <c:pt idx="5">
                   <c:v>1.18</c:v>
+                </c:pt>
+                <c:pt idx="6">
+                  <c:v>1.08</c:v>
                 </c:pt>
               </c:numCache>
             </c:numRef>
@@ -3275,9 +3359,9 @@
           </c:dLbls>
           <c:cat>
             <c:multiLvlStrRef>
-              <c:f>Sheet1!$A$2:$A$7</c:f>
+              <c:f>Sheet1!$A$2:$A$8</c:f>
               <c:multiLvlStrCache>
-                <c:ptCount val="6"/>
+                <c:ptCount val="7"/>
                 <c:lvl>
                   <c:pt idx="0">
                     <c:v>España</c:v>
@@ -3297,16 +3381,19 @@
                   <c:pt idx="5">
                     <c:v>P. Bajos</c:v>
                   </c:pt>
+                  <c:pt idx="6">
+                    <c:v>Irlanda</c:v>
+                  </c:pt>
                 </c:lvl>
               </c:multiLvlStrCache>
             </c:multiLvlStrRef>
           </c:cat>
           <c:val>
             <c:numRef>
-              <c:f>Sheet1!$C$2:$C$7</c:f>
+              <c:f>Sheet1!$C$2:$C$8</c:f>
               <c:numCache>
                 <c:formatCode>General</c:formatCode>
-                <c:ptCount val="6"/>
+                <c:ptCount val="7"/>
                 <c:pt idx="0">
                   <c:v>0.57</c:v>
                 </c:pt>
@@ -3324,6 +3411,9 @@
                 </c:pt>
                 <c:pt idx="5">
                   <c:v>0.52</c:v>
+                </c:pt>
+                <c:pt idx="6">
+                  <c:v>0.26</c:v>
                 </c:pt>
               </c:numCache>
             </c:numRef>
@@ -3577,9 +3667,9 @@
           </c:dLbls>
           <c:cat>
             <c:multiLvlStrRef>
-              <c:f>Sheet1!$A$2:$A$7</c:f>
+              <c:f>Sheet1!$A$2:$A$8</c:f>
               <c:multiLvlStrCache>
-                <c:ptCount val="6"/>
+                <c:ptCount val="7"/>
                 <c:lvl>
                   <c:pt idx="0">
                     <c:v>España</c:v>
@@ -3599,16 +3689,19 @@
                   <c:pt idx="5">
                     <c:v>P. Bajos</c:v>
                   </c:pt>
+                  <c:pt idx="6">
+                    <c:v>Irlanda</c:v>
+                  </c:pt>
                 </c:lvl>
               </c:multiLvlStrCache>
             </c:multiLvlStrRef>
           </c:cat>
           <c:val>
             <c:numRef>
-              <c:f>Sheet1!$B$2:$B$7</c:f>
+              <c:f>Sheet1!$B$2:$B$8</c:f>
               <c:numCache>
                 <c:formatCode>General</c:formatCode>
-                <c:ptCount val="6"/>
+                <c:ptCount val="7"/>
                 <c:pt idx="0">
                   <c:v>34.38</c:v>
                 </c:pt>
@@ -3626,6 +3719,9 @@
                 </c:pt>
                 <c:pt idx="5">
                   <c:v>29.7</c:v>
+                </c:pt>
+                <c:pt idx="6">
+                  <c:v>37.34</c:v>
                 </c:pt>
               </c:numCache>
             </c:numRef>
@@ -3678,9 +3774,9 @@
           </c:dLbls>
           <c:cat>
             <c:multiLvlStrRef>
-              <c:f>Sheet1!$A$2:$A$7</c:f>
+              <c:f>Sheet1!$A$2:$A$8</c:f>
               <c:multiLvlStrCache>
-                <c:ptCount val="6"/>
+                <c:ptCount val="7"/>
                 <c:lvl>
                   <c:pt idx="0">
                     <c:v>España</c:v>
@@ -3700,16 +3796,19 @@
                   <c:pt idx="5">
                     <c:v>P. Bajos</c:v>
                   </c:pt>
+                  <c:pt idx="6">
+                    <c:v>Irlanda</c:v>
+                  </c:pt>
                 </c:lvl>
               </c:multiLvlStrCache>
             </c:multiLvlStrRef>
           </c:cat>
           <c:val>
             <c:numRef>
-              <c:f>Sheet1!$C$2:$C$7</c:f>
+              <c:f>Sheet1!$C$2:$C$8</c:f>
               <c:numCache>
                 <c:formatCode>General</c:formatCode>
-                <c:ptCount val="6"/>
+                <c:ptCount val="7"/>
                 <c:pt idx="0">
                   <c:v>40</c:v>
                 </c:pt>
@@ -3726,6 +3825,9 @@
                   <c:v>40</c:v>
                 </c:pt>
                 <c:pt idx="5">
+                  <c:v>40</c:v>
+                </c:pt>
+                <c:pt idx="6">
                   <c:v>40</c:v>
                 </c:pt>
               </c:numCache>
@@ -3951,9 +4053,9 @@
           </c:dLbls>
           <c:cat>
             <c:multiLvlStrRef>
-              <c:f>Sheet1!$A$2:$A$7</c:f>
+              <c:f>Sheet1!$A$2:$A$8</c:f>
               <c:multiLvlStrCache>
-                <c:ptCount val="6"/>
+                <c:ptCount val="7"/>
                 <c:lvl>
                   <c:pt idx="0">
                     <c:v>España</c:v>
@@ -3973,16 +4075,19 @@
                   <c:pt idx="5">
                     <c:v>P. Bajos</c:v>
                   </c:pt>
+                  <c:pt idx="6">
+                    <c:v>Irlanda</c:v>
+                  </c:pt>
                 </c:lvl>
               </c:multiLvlStrCache>
             </c:multiLvlStrRef>
           </c:cat>
           <c:val>
             <c:numRef>
-              <c:f>Sheet1!$B$2:$B$7</c:f>
+              <c:f>Sheet1!$B$2:$B$8</c:f>
               <c:numCache>
                 <c:formatCode>General</c:formatCode>
-                <c:ptCount val="6"/>
+                <c:ptCount val="7"/>
                 <c:pt idx="0">
                   <c:v>59.46</c:v>
                 </c:pt>
@@ -4000,6 +4105,9 @@
                 </c:pt>
                 <c:pt idx="5">
                   <c:v>37.2</c:v>
+                </c:pt>
+                <c:pt idx="6">
+                  <c:v>69.97</c:v>
                 </c:pt>
               </c:numCache>
             </c:numRef>
@@ -7376,7 +7484,7 @@
                 <a:gridCol w="932688"/>
                 <a:gridCol w="996696"/>
               </a:tblGrid>
-              <a:tr h="384048">
+              <a:tr h="352044">
                 <a:tc>
                   <a:txBody>
                     <a:bodyPr/>
@@ -7639,7 +7747,7 @@
                   </a:tcPr>
                 </a:tc>
               </a:tr>
-              <a:tr h="384048">
+              <a:tr h="352044">
                 <a:tc>
                   <a:txBody>
                     <a:bodyPr/>
@@ -7904,7 +8012,7 @@
                   </a:tcPr>
                 </a:tc>
               </a:tr>
-              <a:tr h="384048">
+              <a:tr h="352044">
                 <a:tc>
                   <a:txBody>
                     <a:bodyPr/>
@@ -8169,7 +8277,7 @@
                   </a:tcPr>
                 </a:tc>
               </a:tr>
-              <a:tr h="384048">
+              <a:tr h="352044">
                 <a:tc>
                   <a:txBody>
                     <a:bodyPr/>
@@ -8434,7 +8542,7 @@
                   </a:tcPr>
                 </a:tc>
               </a:tr>
-              <a:tr h="384048">
+              <a:tr h="352044">
                 <a:tc>
                   <a:txBody>
                     <a:bodyPr/>
@@ -8699,7 +8807,7 @@
                   </a:tcPr>
                 </a:tc>
               </a:tr>
-              <a:tr h="384048">
+              <a:tr h="352044">
                 <a:tc>
                   <a:txBody>
                     <a:bodyPr/>
@@ -8964,7 +9072,7 @@
                   </a:tcPr>
                 </a:tc>
               </a:tr>
-              <a:tr h="384048">
+              <a:tr h="352044">
                 <a:tc>
                   <a:txBody>
                     <a:bodyPr/>
@@ -9178,6 +9286,271 @@
                           <a:cs typeface="Calibri" pitchFamily="34" charset="-120"/>
                         </a:rPr>
                         <a:t>0.35 %</a:t>
+                      </a:r>
+                      <a:endParaRPr lang="en-US" sz="1050" dirty="0">
+                        <a:latin typeface="Calibri" charset="0"/>
+                        <a:ea typeface="Calibri" charset="0"/>
+                        <a:cs typeface="Calibri" charset="0"/>
+                      </a:endParaRPr>
+                    </a:p>
+                  </a:txBody>
+                  <a:tcPr marL="91440" marR="91440" marT="45720" marB="45720" anchor="ctr">
+                    <a:lnL w="6350" cap="flat" cmpd="sng" algn="ctr">
+                      <a:solidFill>
+                        <a:srgbClr val="D6DEE1"/>
+                      </a:solidFill>
+                      <a:prstDash val="solid"/>
+                      <a:round/>
+                      <a:headEnd type="none" w="med" len="med"/>
+                      <a:tailEnd type="none" w="med" len="med"/>
+                    </a:lnL>
+                    <a:lnR w="6350" cap="flat" cmpd="sng" algn="ctr">
+                      <a:solidFill>
+                        <a:srgbClr val="D6DEE1"/>
+                      </a:solidFill>
+                      <a:prstDash val="solid"/>
+                      <a:round/>
+                      <a:headEnd type="none" w="med" len="med"/>
+                      <a:tailEnd type="none" w="med" len="med"/>
+                    </a:lnR>
+                    <a:lnT w="6350" cap="flat" cmpd="sng" algn="ctr">
+                      <a:solidFill>
+                        <a:srgbClr val="D6DEE1"/>
+                      </a:solidFill>
+                      <a:prstDash val="solid"/>
+                      <a:round/>
+                      <a:headEnd type="none" w="med" len="med"/>
+                      <a:tailEnd type="none" w="med" len="med"/>
+                    </a:lnT>
+                    <a:lnB w="6350" cap="flat" cmpd="sng" algn="ctr">
+                      <a:solidFill>
+                        <a:srgbClr val="D6DEE1"/>
+                      </a:solidFill>
+                      <a:prstDash val="solid"/>
+                      <a:round/>
+                      <a:headEnd type="none" w="med" len="med"/>
+                      <a:tailEnd type="none" w="med" len="med"/>
+                    </a:lnB>
+                    <a:solidFill>
+                      <a:srgbClr val="FBEDEB"/>
+                    </a:solidFill>
+                  </a:tcPr>
+                </a:tc>
+              </a:tr>
+              <a:tr h="352044">
+                <a:tc>
+                  <a:txBody>
+                    <a:bodyPr/>
+                    <a:lstStyle/>
+                    <a:p>
+                      <a:pPr algn="l" indent="0" marL="0">
+                        <a:buNone/>
+                      </a:pPr>
+                      <a:r>
+                        <a:rPr lang="en-US" sz="1050" b="1" dirty="0">
+                          <a:solidFill>
+                            <a:srgbClr val="2B3A42"/>
+                          </a:solidFill>
+                          <a:latin typeface="Calibri" pitchFamily="34" charset="0"/>
+                          <a:ea typeface="Calibri" pitchFamily="34" charset="-122"/>
+                          <a:cs typeface="Calibri" pitchFamily="34" charset="-120"/>
+                        </a:rPr>
+                        <a:t>Irlanda</a:t>
+                      </a:r>
+                      <a:endParaRPr lang="en-US" sz="1050" dirty="0">
+                        <a:latin typeface="Calibri" charset="0"/>
+                        <a:ea typeface="Calibri" charset="0"/>
+                        <a:cs typeface="Calibri" charset="0"/>
+                      </a:endParaRPr>
+                    </a:p>
+                  </a:txBody>
+                  <a:tcPr marL="91440" marR="91440" marT="45720" marB="45720" anchor="ctr">
+                    <a:lnL w="6350" cap="flat" cmpd="sng" algn="ctr">
+                      <a:solidFill>
+                        <a:srgbClr val="D6DEE1"/>
+                      </a:solidFill>
+                      <a:prstDash val="solid"/>
+                      <a:round/>
+                      <a:headEnd type="none" w="med" len="med"/>
+                      <a:tailEnd type="none" w="med" len="med"/>
+                    </a:lnL>
+                    <a:lnR w="6350" cap="flat" cmpd="sng" algn="ctr">
+                      <a:solidFill>
+                        <a:srgbClr val="D6DEE1"/>
+                      </a:solidFill>
+                      <a:prstDash val="solid"/>
+                      <a:round/>
+                      <a:headEnd type="none" w="med" len="med"/>
+                      <a:tailEnd type="none" w="med" len="med"/>
+                    </a:lnR>
+                    <a:lnT w="6350" cap="flat" cmpd="sng" algn="ctr">
+                      <a:solidFill>
+                        <a:srgbClr val="D6DEE1"/>
+                      </a:solidFill>
+                      <a:prstDash val="solid"/>
+                      <a:round/>
+                      <a:headEnd type="none" w="med" len="med"/>
+                      <a:tailEnd type="none" w="med" len="med"/>
+                    </a:lnT>
+                    <a:lnB w="6350" cap="flat" cmpd="sng" algn="ctr">
+                      <a:solidFill>
+                        <a:srgbClr val="D6DEE1"/>
+                      </a:solidFill>
+                      <a:prstDash val="solid"/>
+                      <a:round/>
+                      <a:headEnd type="none" w="med" len="med"/>
+                      <a:tailEnd type="none" w="med" len="med"/>
+                    </a:lnB>
+                  </a:tcPr>
+                </a:tc>
+                <a:tc>
+                  <a:txBody>
+                    <a:bodyPr/>
+                    <a:lstStyle/>
+                    <a:p>
+                      <a:pPr algn="ctr" indent="0" marL="0">
+                        <a:buNone/>
+                      </a:pPr>
+                      <a:r>
+                        <a:rPr lang="en-US" sz="1050" dirty="0">
+                          <a:solidFill>
+                            <a:srgbClr val="2B3A42"/>
+                          </a:solidFill>
+                          <a:latin typeface="Calibri" pitchFamily="34" charset="0"/>
+                          <a:ea typeface="Calibri" pitchFamily="34" charset="-122"/>
+                          <a:cs typeface="Calibri" pitchFamily="34" charset="-120"/>
+                        </a:rPr>
+                        <a:t>1.08 %</a:t>
+                      </a:r>
+                      <a:endParaRPr lang="en-US" sz="1050" dirty="0">
+                        <a:latin typeface="Calibri" charset="0"/>
+                        <a:ea typeface="Calibri" charset="0"/>
+                        <a:cs typeface="Calibri" charset="0"/>
+                      </a:endParaRPr>
+                    </a:p>
+                  </a:txBody>
+                  <a:tcPr marL="91440" marR="91440" marT="45720" marB="45720" anchor="ctr">
+                    <a:lnL w="6350" cap="flat" cmpd="sng" algn="ctr">
+                      <a:solidFill>
+                        <a:srgbClr val="D6DEE1"/>
+                      </a:solidFill>
+                      <a:prstDash val="solid"/>
+                      <a:round/>
+                      <a:headEnd type="none" w="med" len="med"/>
+                      <a:tailEnd type="none" w="med" len="med"/>
+                    </a:lnL>
+                    <a:lnR w="6350" cap="flat" cmpd="sng" algn="ctr">
+                      <a:solidFill>
+                        <a:srgbClr val="D6DEE1"/>
+                      </a:solidFill>
+                      <a:prstDash val="solid"/>
+                      <a:round/>
+                      <a:headEnd type="none" w="med" len="med"/>
+                      <a:tailEnd type="none" w="med" len="med"/>
+                    </a:lnR>
+                    <a:lnT w="6350" cap="flat" cmpd="sng" algn="ctr">
+                      <a:solidFill>
+                        <a:srgbClr val="D6DEE1"/>
+                      </a:solidFill>
+                      <a:prstDash val="solid"/>
+                      <a:round/>
+                      <a:headEnd type="none" w="med" len="med"/>
+                      <a:tailEnd type="none" w="med" len="med"/>
+                    </a:lnT>
+                    <a:lnB w="6350" cap="flat" cmpd="sng" algn="ctr">
+                      <a:solidFill>
+                        <a:srgbClr val="D6DEE1"/>
+                      </a:solidFill>
+                      <a:prstDash val="solid"/>
+                      <a:round/>
+                      <a:headEnd type="none" w="med" len="med"/>
+                      <a:tailEnd type="none" w="med" len="med"/>
+                    </a:lnB>
+                  </a:tcPr>
+                </a:tc>
+                <a:tc>
+                  <a:txBody>
+                    <a:bodyPr/>
+                    <a:lstStyle/>
+                    <a:p>
+                      <a:pPr algn="ctr" indent="0" marL="0">
+                        <a:buNone/>
+                      </a:pPr>
+                      <a:r>
+                        <a:rPr lang="en-US" sz="1050" dirty="0">
+                          <a:solidFill>
+                            <a:srgbClr val="2B3A42"/>
+                          </a:solidFill>
+                          <a:latin typeface="Calibri" pitchFamily="34" charset="0"/>
+                          <a:ea typeface="Calibri" pitchFamily="34" charset="-122"/>
+                          <a:cs typeface="Calibri" pitchFamily="34" charset="-120"/>
+                        </a:rPr>
+                        <a:t>37.3 %</a:t>
+                      </a:r>
+                      <a:endParaRPr lang="en-US" sz="1050" dirty="0">
+                        <a:latin typeface="Calibri" charset="0"/>
+                        <a:ea typeface="Calibri" charset="0"/>
+                        <a:cs typeface="Calibri" charset="0"/>
+                      </a:endParaRPr>
+                    </a:p>
+                  </a:txBody>
+                  <a:tcPr marL="91440" marR="91440" marT="45720" marB="45720" anchor="ctr">
+                    <a:lnL w="6350" cap="flat" cmpd="sng" algn="ctr">
+                      <a:solidFill>
+                        <a:srgbClr val="D6DEE1"/>
+                      </a:solidFill>
+                      <a:prstDash val="solid"/>
+                      <a:round/>
+                      <a:headEnd type="none" w="med" len="med"/>
+                      <a:tailEnd type="none" w="med" len="med"/>
+                    </a:lnL>
+                    <a:lnR w="6350" cap="flat" cmpd="sng" algn="ctr">
+                      <a:solidFill>
+                        <a:srgbClr val="D6DEE1"/>
+                      </a:solidFill>
+                      <a:prstDash val="solid"/>
+                      <a:round/>
+                      <a:headEnd type="none" w="med" len="med"/>
+                      <a:tailEnd type="none" w="med" len="med"/>
+                    </a:lnR>
+                    <a:lnT w="6350" cap="flat" cmpd="sng" algn="ctr">
+                      <a:solidFill>
+                        <a:srgbClr val="D6DEE1"/>
+                      </a:solidFill>
+                      <a:prstDash val="solid"/>
+                      <a:round/>
+                      <a:headEnd type="none" w="med" len="med"/>
+                      <a:tailEnd type="none" w="med" len="med"/>
+                    </a:lnT>
+                    <a:lnB w="6350" cap="flat" cmpd="sng" algn="ctr">
+                      <a:solidFill>
+                        <a:srgbClr val="D6DEE1"/>
+                      </a:solidFill>
+                      <a:prstDash val="solid"/>
+                      <a:round/>
+                      <a:headEnd type="none" w="med" len="med"/>
+                      <a:tailEnd type="none" w="med" len="med"/>
+                    </a:lnB>
+                  </a:tcPr>
+                </a:tc>
+                <a:tc>
+                  <a:txBody>
+                    <a:bodyPr/>
+                    <a:lstStyle/>
+                    <a:p>
+                      <a:pPr algn="ctr" indent="0" marL="0">
+                        <a:buNone/>
+                      </a:pPr>
+                      <a:r>
+                        <a:rPr lang="en-US" sz="1050" b="1" dirty="0">
+                          <a:solidFill>
+                            <a:srgbClr val="B04A3F"/>
+                          </a:solidFill>
+                          <a:latin typeface="Calibri" pitchFamily="34" charset="0"/>
+                          <a:ea typeface="Calibri" pitchFamily="34" charset="-122"/>
+                          <a:cs typeface="Calibri" pitchFamily="34" charset="-120"/>
+                        </a:rPr>
+                        <a:t>0.40 %</a:t>
                       </a:r>
                       <a:endParaRPr lang="en-US" sz="1050" dirty="0">
                         <a:latin typeface="Calibri" charset="0"/>
@@ -9266,7 +9639,7 @@
                 <a:ea typeface="Calibri" pitchFamily="34" charset="-122"/>
                 <a:cs typeface="Calibri" pitchFamily="34" charset="-120"/>
               </a:rPr>
-              <a:t>Italia tiene la peor combinación (PD 2,26 % y LGD 35,6 %) y Países Bajos la mejor (1,18 % y 29,7 %). Portugal tiene la LGD más alta de los seis, un 40 %, compensada por una PD baja.</a:t>
+              <a:t>Italia tiene la peor combinación (PD 2,26 % y LGD 35,6 %) y Países Bajos la mejor (1,18 % y 29,7 %). Irlanda tiene la PD más baja de los siete, 1,08 %, pero una LGD del 37,3 %. Portugal tiene la LGD más alta, un 40 %, compensada por una PD baja.</a:t>
             </a:r>
             <a:endParaRPr lang="en-US" sz="1200" dirty="0"/>
           </a:p>
@@ -9469,15 +9842,16 @@
             <a:tbl>
               <a:tblPr/>
               <a:tblGrid>
-                <a:gridCol w="2834640"/>
-                <a:gridCol w="1389888"/>
-                <a:gridCol w="1389888"/>
-                <a:gridCol w="1389888"/>
-                <a:gridCol w="1389888"/>
-                <a:gridCol w="1389888"/>
-                <a:gridCol w="1389888"/>
+                <a:gridCol w="2651760"/>
+                <a:gridCol w="1206094"/>
+                <a:gridCol w="1206094"/>
+                <a:gridCol w="1206094"/>
+                <a:gridCol w="1206094"/>
+                <a:gridCol w="1206094"/>
+                <a:gridCol w="1206094"/>
+                <a:gridCol w="1206094"/>
               </a:tblGrid>
-              <a:tr h="347472">
+              <a:tr h="329184">
                 <a:tc>
                   <a:txBody>
                     <a:bodyPr/>
@@ -9954,8 +10328,76 @@
                     </a:solidFill>
                   </a:tcPr>
                 </a:tc>
+                <a:tc>
+                  <a:txBody>
+                    <a:bodyPr/>
+                    <a:lstStyle/>
+                    <a:p>
+                      <a:pPr algn="ctr" indent="0" marL="0">
+                        <a:buNone/>
+                      </a:pPr>
+                      <a:r>
+                        <a:rPr lang="en-US" sz="1000" b="1" dirty="0">
+                          <a:solidFill>
+                            <a:srgbClr val="FFFFFF"/>
+                          </a:solidFill>
+                          <a:latin typeface="Calibri" pitchFamily="34" charset="0"/>
+                          <a:ea typeface="Calibri" pitchFamily="34" charset="-122"/>
+                          <a:cs typeface="Calibri" pitchFamily="34" charset="-120"/>
+                        </a:rPr>
+                        <a:t>Irlanda</a:t>
+                      </a:r>
+                      <a:endParaRPr lang="en-US" sz="1000" dirty="0">
+                        <a:latin typeface="Calibri" charset="0"/>
+                        <a:ea typeface="Calibri" charset="0"/>
+                        <a:cs typeface="Calibri" charset="0"/>
+                      </a:endParaRPr>
+                    </a:p>
+                  </a:txBody>
+                  <a:tcPr marL="91440" marR="91440" marT="45720" marB="45720" anchor="ctr">
+                    <a:lnL w="6350" cap="flat" cmpd="sng" algn="ctr">
+                      <a:solidFill>
+                        <a:srgbClr val="D6DEE1"/>
+                      </a:solidFill>
+                      <a:prstDash val="solid"/>
+                      <a:round/>
+                      <a:headEnd type="none" w="med" len="med"/>
+                      <a:tailEnd type="none" w="med" len="med"/>
+                    </a:lnL>
+                    <a:lnR w="6350" cap="flat" cmpd="sng" algn="ctr">
+                      <a:solidFill>
+                        <a:srgbClr val="D6DEE1"/>
+                      </a:solidFill>
+                      <a:prstDash val="solid"/>
+                      <a:round/>
+                      <a:headEnd type="none" w="med" len="med"/>
+                      <a:tailEnd type="none" w="med" len="med"/>
+                    </a:lnR>
+                    <a:lnT w="6350" cap="flat" cmpd="sng" algn="ctr">
+                      <a:solidFill>
+                        <a:srgbClr val="D6DEE1"/>
+                      </a:solidFill>
+                      <a:prstDash val="solid"/>
+                      <a:round/>
+                      <a:headEnd type="none" w="med" len="med"/>
+                      <a:tailEnd type="none" w="med" len="med"/>
+                    </a:lnT>
+                    <a:lnB w="6350" cap="flat" cmpd="sng" algn="ctr">
+                      <a:solidFill>
+                        <a:srgbClr val="D6DEE1"/>
+                      </a:solidFill>
+                      <a:prstDash val="solid"/>
+                      <a:round/>
+                      <a:headEnd type="none" w="med" len="med"/>
+                      <a:tailEnd type="none" w="med" len="med"/>
+                    </a:lnB>
+                    <a:solidFill>
+                      <a:srgbClr val="1C3F4E"/>
+                    </a:solidFill>
+                  </a:tcPr>
+                </a:tc>
               </a:tr>
-              <a:tr h="347472">
+              <a:tr h="329184">
                 <a:tc>
                   <a:txBody>
                     <a:bodyPr/>
@@ -10429,8 +10871,76 @@
                     </a:solidFill>
                   </a:tcPr>
                 </a:tc>
+                <a:tc>
+                  <a:txBody>
+                    <a:bodyPr/>
+                    <a:lstStyle/>
+                    <a:p>
+                      <a:pPr algn="ctr" indent="0" marL="0">
+                        <a:buNone/>
+                      </a:pPr>
+                      <a:r>
+                        <a:rPr lang="en-US" sz="1050" b="1" dirty="0">
+                          <a:solidFill>
+                            <a:srgbClr val="B04A3F"/>
+                          </a:solidFill>
+                          <a:latin typeface="Calibri" pitchFamily="34" charset="0"/>
+                          <a:ea typeface="Calibri" pitchFamily="34" charset="-122"/>
+                          <a:cs typeface="Calibri" pitchFamily="34" charset="-120"/>
+                        </a:rPr>
+                        <a:t>+82</a:t>
+                      </a:r>
+                      <a:endParaRPr lang="en-US" sz="1050" dirty="0">
+                        <a:latin typeface="Calibri" charset="0"/>
+                        <a:ea typeface="Calibri" charset="0"/>
+                        <a:cs typeface="Calibri" charset="0"/>
+                      </a:endParaRPr>
+                    </a:p>
+                  </a:txBody>
+                  <a:tcPr marL="91440" marR="91440" marT="45720" marB="45720" anchor="ctr">
+                    <a:lnL w="6350" cap="flat" cmpd="sng" algn="ctr">
+                      <a:solidFill>
+                        <a:srgbClr val="D6DEE1"/>
+                      </a:solidFill>
+                      <a:prstDash val="solid"/>
+                      <a:round/>
+                      <a:headEnd type="none" w="med" len="med"/>
+                      <a:tailEnd type="none" w="med" len="med"/>
+                    </a:lnL>
+                    <a:lnR w="6350" cap="flat" cmpd="sng" algn="ctr">
+                      <a:solidFill>
+                        <a:srgbClr val="D6DEE1"/>
+                      </a:solidFill>
+                      <a:prstDash val="solid"/>
+                      <a:round/>
+                      <a:headEnd type="none" w="med" len="med"/>
+                      <a:tailEnd type="none" w="med" len="med"/>
+                    </a:lnR>
+                    <a:lnT w="6350" cap="flat" cmpd="sng" algn="ctr">
+                      <a:solidFill>
+                        <a:srgbClr val="D6DEE1"/>
+                      </a:solidFill>
+                      <a:prstDash val="solid"/>
+                      <a:round/>
+                      <a:headEnd type="none" w="med" len="med"/>
+                      <a:tailEnd type="none" w="med" len="med"/>
+                    </a:lnT>
+                    <a:lnB w="6350" cap="flat" cmpd="sng" algn="ctr">
+                      <a:solidFill>
+                        <a:srgbClr val="D6DEE1"/>
+                      </a:solidFill>
+                      <a:prstDash val="solid"/>
+                      <a:round/>
+                      <a:headEnd type="none" w="med" len="med"/>
+                      <a:tailEnd type="none" w="med" len="med"/>
+                    </a:lnB>
+                    <a:solidFill>
+                      <a:srgbClr val="FBEDEB"/>
+                    </a:solidFill>
+                  </a:tcPr>
+                </a:tc>
               </a:tr>
-              <a:tr h="347472">
+              <a:tr h="329184">
                 <a:tc>
                   <a:txBody>
                     <a:bodyPr/>
@@ -10904,8 +11414,76 @@
                     </a:solidFill>
                   </a:tcPr>
                 </a:tc>
+                <a:tc>
+                  <a:txBody>
+                    <a:bodyPr/>
+                    <a:lstStyle/>
+                    <a:p>
+                      <a:pPr algn="ctr" indent="0" marL="0">
+                        <a:buNone/>
+                      </a:pPr>
+                      <a:r>
+                        <a:rPr lang="en-US" sz="1050" b="1" dirty="0">
+                          <a:solidFill>
+                            <a:srgbClr val="2E7D5B"/>
+                          </a:solidFill>
+                          <a:latin typeface="Calibri" pitchFamily="34" charset="0"/>
+                          <a:ea typeface="Calibri" pitchFamily="34" charset="-122"/>
+                          <a:cs typeface="Calibri" pitchFamily="34" charset="-120"/>
+                        </a:rPr>
+                        <a:t>-2.7</a:t>
+                      </a:r>
+                      <a:endParaRPr lang="en-US" sz="1050" dirty="0">
+                        <a:latin typeface="Calibri" charset="0"/>
+                        <a:ea typeface="Calibri" charset="0"/>
+                        <a:cs typeface="Calibri" charset="0"/>
+                      </a:endParaRPr>
+                    </a:p>
+                  </a:txBody>
+                  <a:tcPr marL="91440" marR="91440" marT="45720" marB="45720" anchor="ctr">
+                    <a:lnL w="6350" cap="flat" cmpd="sng" algn="ctr">
+                      <a:solidFill>
+                        <a:srgbClr val="D6DEE1"/>
+                      </a:solidFill>
+                      <a:prstDash val="solid"/>
+                      <a:round/>
+                      <a:headEnd type="none" w="med" len="med"/>
+                      <a:tailEnd type="none" w="med" len="med"/>
+                    </a:lnL>
+                    <a:lnR w="6350" cap="flat" cmpd="sng" algn="ctr">
+                      <a:solidFill>
+                        <a:srgbClr val="D6DEE1"/>
+                      </a:solidFill>
+                      <a:prstDash val="solid"/>
+                      <a:round/>
+                      <a:headEnd type="none" w="med" len="med"/>
+                      <a:tailEnd type="none" w="med" len="med"/>
+                    </a:lnR>
+                    <a:lnT w="6350" cap="flat" cmpd="sng" algn="ctr">
+                      <a:solidFill>
+                        <a:srgbClr val="D6DEE1"/>
+                      </a:solidFill>
+                      <a:prstDash val="solid"/>
+                      <a:round/>
+                      <a:headEnd type="none" w="med" len="med"/>
+                      <a:tailEnd type="none" w="med" len="med"/>
+                    </a:lnT>
+                    <a:lnB w="6350" cap="flat" cmpd="sng" algn="ctr">
+                      <a:solidFill>
+                        <a:srgbClr val="D6DEE1"/>
+                      </a:solidFill>
+                      <a:prstDash val="solid"/>
+                      <a:round/>
+                      <a:headEnd type="none" w="med" len="med"/>
+                      <a:tailEnd type="none" w="med" len="med"/>
+                    </a:lnB>
+                    <a:solidFill>
+                      <a:srgbClr val="EAF3EE"/>
+                    </a:solidFill>
+                  </a:tcPr>
+                </a:tc>
               </a:tr>
-              <a:tr h="347472">
+              <a:tr h="329184">
                 <a:tc>
                   <a:txBody>
                     <a:bodyPr/>
@@ -11332,6 +11910,74 @@
                           <a:cs typeface="Calibri" pitchFamily="34" charset="-120"/>
                         </a:rPr>
                         <a:t>+14</a:t>
+                      </a:r>
+                      <a:endParaRPr lang="en-US" sz="1050" dirty="0">
+                        <a:latin typeface="Calibri" charset="0"/>
+                        <a:ea typeface="Calibri" charset="0"/>
+                        <a:cs typeface="Calibri" charset="0"/>
+                      </a:endParaRPr>
+                    </a:p>
+                  </a:txBody>
+                  <a:tcPr marL="91440" marR="91440" marT="45720" marB="45720" anchor="ctr">
+                    <a:lnL w="6350" cap="flat" cmpd="sng" algn="ctr">
+                      <a:solidFill>
+                        <a:srgbClr val="D6DEE1"/>
+                      </a:solidFill>
+                      <a:prstDash val="solid"/>
+                      <a:round/>
+                      <a:headEnd type="none" w="med" len="med"/>
+                      <a:tailEnd type="none" w="med" len="med"/>
+                    </a:lnL>
+                    <a:lnR w="6350" cap="flat" cmpd="sng" algn="ctr">
+                      <a:solidFill>
+                        <a:srgbClr val="D6DEE1"/>
+                      </a:solidFill>
+                      <a:prstDash val="solid"/>
+                      <a:round/>
+                      <a:headEnd type="none" w="med" len="med"/>
+                      <a:tailEnd type="none" w="med" len="med"/>
+                    </a:lnR>
+                    <a:lnT w="6350" cap="flat" cmpd="sng" algn="ctr">
+                      <a:solidFill>
+                        <a:srgbClr val="D6DEE1"/>
+                      </a:solidFill>
+                      <a:prstDash val="solid"/>
+                      <a:round/>
+                      <a:headEnd type="none" w="med" len="med"/>
+                      <a:tailEnd type="none" w="med" len="med"/>
+                    </a:lnT>
+                    <a:lnB w="6350" cap="flat" cmpd="sng" algn="ctr">
+                      <a:solidFill>
+                        <a:srgbClr val="D6DEE1"/>
+                      </a:solidFill>
+                      <a:prstDash val="solid"/>
+                      <a:round/>
+                      <a:headEnd type="none" w="med" len="med"/>
+                      <a:tailEnd type="none" w="med" len="med"/>
+                    </a:lnB>
+                    <a:solidFill>
+                      <a:srgbClr val="F3DEDA"/>
+                    </a:solidFill>
+                  </a:tcPr>
+                </a:tc>
+                <a:tc>
+                  <a:txBody>
+                    <a:bodyPr/>
+                    <a:lstStyle/>
+                    <a:p>
+                      <a:pPr algn="ctr" indent="0" marL="0">
+                        <a:buNone/>
+                      </a:pPr>
+                      <a:r>
+                        <a:rPr lang="en-US" sz="1050" b="1" dirty="0">
+                          <a:solidFill>
+                            <a:srgbClr val="B04A3F"/>
+                          </a:solidFill>
+                          <a:latin typeface="Calibri" pitchFamily="34" charset="0"/>
+                          <a:ea typeface="Calibri" pitchFamily="34" charset="-122"/>
+                          <a:cs typeface="Calibri" pitchFamily="34" charset="-120"/>
+                        </a:rPr>
+                        <a:t>+30</a:t>
                       </a:r>
                       <a:endParaRPr lang="en-US" sz="1050" dirty="0">
                         <a:latin typeface="Calibri" charset="0"/>
@@ -11461,7 +12107,7 @@
                 <a:ea typeface="Calibri" pitchFamily="34" charset="-122"/>
                 <a:cs typeface="Calibri" pitchFamily="34" charset="-120"/>
               </a:rPr>
-              <a:t>Está agrupado en el 40,0 % en los seis países y en todo el reparto (percentiles 25, 50 y 75), porque es el valor supervisor del IRB básico bajo CRR3, no una estimación propia. La ventaja de severidad de la PYME es real —viene de mayor garantía real— pero está exagerada por ese efecto: en media ponderada la brecha se reduce a la mitad (PYME 23,6–37,9 % frente a gran empresa 35,0–38,8 %). El spread de PD, en cambio, es sólido: la PD sí es estimación propia en ambas clases.</a:t>
+              <a:t>Está agrupado en el 40,0 % en los siete países y en todo el reparto (percentiles 25, 50 y 75), porque es el valor supervisor del IRB básico bajo CRR3, no una estimación propia. La ventaja de severidad de la PYME es real —viene de mayor garantía real— pero está exagerada por ese efecto: en media ponderada la brecha se reduce a la mitad (PYME 23,6–37,9 % frente a gran empresa 35,0–38,8 %). El spread de PD, en cambio, es sólido: la PD sí es estimación propia en ambas clases.</a:t>
             </a:r>
             <a:endParaRPr lang="en-US" sz="1000" dirty="0"/>
           </a:p>
@@ -11685,7 +12331,7 @@
                 <a:ea typeface="Cambria" pitchFamily="34" charset="-122"/>
                 <a:cs typeface="Cambria" pitchFamily="34" charset="-120"/>
               </a:rPr>
-              <a:t>Casi el doble de capital en España que en Alemania</a:t>
+              <a:t>El capital manda sobre el precio</a:t>
             </a:r>
             <a:endParaRPr lang="en-US" sz="1300" dirty="0"/>
           </a:p>
@@ -11724,7 +12370,7 @@
                 <a:ea typeface="Calibri" pitchFamily="34" charset="-122"/>
                 <a:cs typeface="Calibri" pitchFamily="34" charset="-120"/>
               </a:rPr>
-              <a:t>Un euro de préstamo PYME consume un 59,5 % de RWA en España y un 35,3 % en Alemania. Sobre el mismo margen, eso divide el ROE casi por dos. Es el factor que más mueve el ranking, por delante del precio.</a:t>
+              <a:t>Va del 35,3 % en Alemania al 70,0 % en Irlanda: un euro de préstamo PYME consume el doble de capital en Irlanda que en Alemania. Sobre el mismo margen, eso divide el ROE por dos. Es el factor que más mueve el ranking, por delante del precio.</a:t>
             </a:r>
             <a:endParaRPr lang="en-US" sz="1100" dirty="0"/>
           </a:p>
@@ -11829,7 +12475,7 @@
                 <a:ea typeface="Calibri" pitchFamily="34" charset="-122"/>
                 <a:cs typeface="Calibri" pitchFamily="34" charset="-120"/>
               </a:rPr>
-              <a:t>España: 308k   ·   Alemania: 317k   ·   Francia: 961k   ·   Italia: 252k   ·   Portugal: 30k   ·   P. Bajos: 259k</a:t>
+              <a:t>España: 308k   ·   Alemania: 317k   ·   Francia: 961k   ·   Italia: 252k   ·   Portugal: 30k   ·   P. Bajos: 259k   ·   Irlanda: 17k</a:t>
             </a:r>
             <a:endParaRPr lang="en-US" sz="1050" dirty="0"/>
           </a:p>
@@ -12000,15 +12646,16 @@
             <a:tbl>
               <a:tblPr/>
               <a:tblGrid>
-                <a:gridCol w="2743200"/>
-                <a:gridCol w="1540764"/>
-                <a:gridCol w="1540764"/>
-                <a:gridCol w="1540764"/>
-                <a:gridCol w="1540764"/>
-                <a:gridCol w="1540764"/>
-                <a:gridCol w="1540764"/>
+                <a:gridCol w="2468880"/>
+                <a:gridCol w="1231697"/>
+                <a:gridCol w="1231697"/>
+                <a:gridCol w="1231697"/>
+                <a:gridCol w="1231697"/>
+                <a:gridCol w="1231697"/>
+                <a:gridCol w="1231697"/>
+                <a:gridCol w="1231697"/>
               </a:tblGrid>
-              <a:tr h="438912">
+              <a:tr h="420624">
                 <a:tc>
                   <a:txBody>
                     <a:bodyPr/>
@@ -12485,8 +13132,76 @@
                     </a:solidFill>
                   </a:tcPr>
                 </a:tc>
+                <a:tc>
+                  <a:txBody>
+                    <a:bodyPr/>
+                    <a:lstStyle/>
+                    <a:p>
+                      <a:pPr algn="ctr" indent="0" marL="0">
+                        <a:buNone/>
+                      </a:pPr>
+                      <a:r>
+                        <a:rPr lang="en-US" sz="1100" b="1" dirty="0">
+                          <a:solidFill>
+                            <a:srgbClr val="FFFFFF"/>
+                          </a:solidFill>
+                          <a:latin typeface="Calibri" pitchFamily="34" charset="0"/>
+                          <a:ea typeface="Calibri" pitchFamily="34" charset="-122"/>
+                          <a:cs typeface="Calibri" pitchFamily="34" charset="-120"/>
+                        </a:rPr>
+                        <a:t>Irlanda</a:t>
+                      </a:r>
+                      <a:endParaRPr lang="en-US" sz="1100" dirty="0">
+                        <a:latin typeface="Calibri" charset="0"/>
+                        <a:ea typeface="Calibri" charset="0"/>
+                        <a:cs typeface="Calibri" charset="0"/>
+                      </a:endParaRPr>
+                    </a:p>
+                  </a:txBody>
+                  <a:tcPr marL="91440" marR="91440" marT="45720" marB="45720" anchor="ctr">
+                    <a:lnL w="6350" cap="flat" cmpd="sng" algn="ctr">
+                      <a:solidFill>
+                        <a:srgbClr val="D6DEE1"/>
+                      </a:solidFill>
+                      <a:prstDash val="solid"/>
+                      <a:round/>
+                      <a:headEnd type="none" w="med" len="med"/>
+                      <a:tailEnd type="none" w="med" len="med"/>
+                    </a:lnL>
+                    <a:lnR w="6350" cap="flat" cmpd="sng" algn="ctr">
+                      <a:solidFill>
+                        <a:srgbClr val="D6DEE1"/>
+                      </a:solidFill>
+                      <a:prstDash val="solid"/>
+                      <a:round/>
+                      <a:headEnd type="none" w="med" len="med"/>
+                      <a:tailEnd type="none" w="med" len="med"/>
+                    </a:lnR>
+                    <a:lnT w="6350" cap="flat" cmpd="sng" algn="ctr">
+                      <a:solidFill>
+                        <a:srgbClr val="D6DEE1"/>
+                      </a:solidFill>
+                      <a:prstDash val="solid"/>
+                      <a:round/>
+                      <a:headEnd type="none" w="med" len="med"/>
+                      <a:tailEnd type="none" w="med" len="med"/>
+                    </a:lnT>
+                    <a:lnB w="6350" cap="flat" cmpd="sng" algn="ctr">
+                      <a:solidFill>
+                        <a:srgbClr val="D6DEE1"/>
+                      </a:solidFill>
+                      <a:prstDash val="solid"/>
+                      <a:round/>
+                      <a:headEnd type="none" w="med" len="med"/>
+                      <a:tailEnd type="none" w="med" len="med"/>
+                    </a:lnB>
+                    <a:solidFill>
+                      <a:srgbClr val="1C3F4E"/>
+                    </a:solidFill>
+                  </a:tcPr>
+                </a:tc>
               </a:tr>
-              <a:tr h="438912">
+              <a:tr h="420624">
                 <a:tc>
                   <a:txBody>
                     <a:bodyPr/>
@@ -12963,8 +13678,76 @@
                     </a:solidFill>
                   </a:tcPr>
                 </a:tc>
+                <a:tc>
+                  <a:txBody>
+                    <a:bodyPr/>
+                    <a:lstStyle/>
+                    <a:p>
+                      <a:pPr algn="ctr" indent="0" marL="0">
+                        <a:buNone/>
+                      </a:pPr>
+                      <a:r>
+                        <a:rPr lang="en-US" sz="1100" dirty="0">
+                          <a:solidFill>
+                            <a:srgbClr val="2B3A42"/>
+                          </a:solidFill>
+                          <a:latin typeface="Calibri" pitchFamily="34" charset="0"/>
+                          <a:ea typeface="Calibri" pitchFamily="34" charset="-122"/>
+                          <a:cs typeface="Calibri" pitchFamily="34" charset="-120"/>
+                        </a:rPr>
+                        <a:t>1.10 %</a:t>
+                      </a:r>
+                      <a:endParaRPr lang="en-US" sz="1100" dirty="0">
+                        <a:latin typeface="Calibri" charset="0"/>
+                        <a:ea typeface="Calibri" charset="0"/>
+                        <a:cs typeface="Calibri" charset="0"/>
+                      </a:endParaRPr>
+                    </a:p>
+                  </a:txBody>
+                  <a:tcPr marL="91440" marR="91440" marT="45720" marB="45720" anchor="ctr">
+                    <a:lnL w="6350" cap="flat" cmpd="sng" algn="ctr">
+                      <a:solidFill>
+                        <a:srgbClr val="D6DEE1"/>
+                      </a:solidFill>
+                      <a:prstDash val="solid"/>
+                      <a:round/>
+                      <a:headEnd type="none" w="med" len="med"/>
+                      <a:tailEnd type="none" w="med" len="med"/>
+                    </a:lnL>
+                    <a:lnR w="6350" cap="flat" cmpd="sng" algn="ctr">
+                      <a:solidFill>
+                        <a:srgbClr val="D6DEE1"/>
+                      </a:solidFill>
+                      <a:prstDash val="solid"/>
+                      <a:round/>
+                      <a:headEnd type="none" w="med" len="med"/>
+                      <a:tailEnd type="none" w="med" len="med"/>
+                    </a:lnR>
+                    <a:lnT w="6350" cap="flat" cmpd="sng" algn="ctr">
+                      <a:solidFill>
+                        <a:srgbClr val="D6DEE1"/>
+                      </a:solidFill>
+                      <a:prstDash val="solid"/>
+                      <a:round/>
+                      <a:headEnd type="none" w="med" len="med"/>
+                      <a:tailEnd type="none" w="med" len="med"/>
+                    </a:lnT>
+                    <a:lnB w="6350" cap="flat" cmpd="sng" algn="ctr">
+                      <a:solidFill>
+                        <a:srgbClr val="D6DEE1"/>
+                      </a:solidFill>
+                      <a:prstDash val="solid"/>
+                      <a:round/>
+                      <a:headEnd type="none" w="med" len="med"/>
+                      <a:tailEnd type="none" w="med" len="med"/>
+                    </a:lnB>
+                    <a:solidFill>
+                      <a:srgbClr val="FFFFFF"/>
+                    </a:solidFill>
+                  </a:tcPr>
+                </a:tc>
               </a:tr>
-              <a:tr h="438912">
+              <a:tr h="420624">
                 <a:tc>
                   <a:txBody>
                     <a:bodyPr/>
@@ -13441,8 +14224,76 @@
                     </a:solidFill>
                   </a:tcPr>
                 </a:tc>
+                <a:tc>
+                  <a:txBody>
+                    <a:bodyPr/>
+                    <a:lstStyle/>
+                    <a:p>
+                      <a:pPr algn="ctr" indent="0" marL="0">
+                        <a:buNone/>
+                      </a:pPr>
+                      <a:r>
+                        <a:rPr lang="en-US" sz="1100" dirty="0">
+                          <a:solidFill>
+                            <a:srgbClr val="2B3A42"/>
+                          </a:solidFill>
+                          <a:latin typeface="Calibri" pitchFamily="34" charset="0"/>
+                          <a:ea typeface="Calibri" pitchFamily="34" charset="-122"/>
+                          <a:cs typeface="Calibri" pitchFamily="34" charset="-120"/>
+                        </a:rPr>
+                        <a:t>0.24 %</a:t>
+                      </a:r>
+                      <a:endParaRPr lang="en-US" sz="1100" dirty="0">
+                        <a:latin typeface="Calibri" charset="0"/>
+                        <a:ea typeface="Calibri" charset="0"/>
+                        <a:cs typeface="Calibri" charset="0"/>
+                      </a:endParaRPr>
+                    </a:p>
+                  </a:txBody>
+                  <a:tcPr marL="91440" marR="91440" marT="45720" marB="45720" anchor="ctr">
+                    <a:lnL w="6350" cap="flat" cmpd="sng" algn="ctr">
+                      <a:solidFill>
+                        <a:srgbClr val="D6DEE1"/>
+                      </a:solidFill>
+                      <a:prstDash val="solid"/>
+                      <a:round/>
+                      <a:headEnd type="none" w="med" len="med"/>
+                      <a:tailEnd type="none" w="med" len="med"/>
+                    </a:lnL>
+                    <a:lnR w="6350" cap="flat" cmpd="sng" algn="ctr">
+                      <a:solidFill>
+                        <a:srgbClr val="D6DEE1"/>
+                      </a:solidFill>
+                      <a:prstDash val="solid"/>
+                      <a:round/>
+                      <a:headEnd type="none" w="med" len="med"/>
+                      <a:tailEnd type="none" w="med" len="med"/>
+                    </a:lnR>
+                    <a:lnT w="6350" cap="flat" cmpd="sng" algn="ctr">
+                      <a:solidFill>
+                        <a:srgbClr val="D6DEE1"/>
+                      </a:solidFill>
+                      <a:prstDash val="solid"/>
+                      <a:round/>
+                      <a:headEnd type="none" w="med" len="med"/>
+                      <a:tailEnd type="none" w="med" len="med"/>
+                    </a:lnT>
+                    <a:lnB w="6350" cap="flat" cmpd="sng" algn="ctr">
+                      <a:solidFill>
+                        <a:srgbClr val="D6DEE1"/>
+                      </a:solidFill>
+                      <a:prstDash val="solid"/>
+                      <a:round/>
+                      <a:headEnd type="none" w="med" len="med"/>
+                      <a:tailEnd type="none" w="med" len="med"/>
+                    </a:lnB>
+                    <a:solidFill>
+                      <a:srgbClr val="EEF2F3"/>
+                    </a:solidFill>
+                  </a:tcPr>
+                </a:tc>
               </a:tr>
-              <a:tr h="438912">
+              <a:tr h="420624">
                 <a:tc>
                   <a:txBody>
                     <a:bodyPr/>
@@ -13919,8 +14770,76 @@
                     </a:solidFill>
                   </a:tcPr>
                 </a:tc>
+                <a:tc>
+                  <a:txBody>
+                    <a:bodyPr/>
+                    <a:lstStyle/>
+                    <a:p>
+                      <a:pPr algn="ctr" indent="0" marL="0">
+                        <a:buNone/>
+                      </a:pPr>
+                      <a:r>
+                        <a:rPr lang="en-US" sz="1100" dirty="0">
+                          <a:solidFill>
+                            <a:srgbClr val="2B3A42"/>
+                          </a:solidFill>
+                          <a:latin typeface="Calibri" pitchFamily="34" charset="0"/>
+                          <a:ea typeface="Calibri" pitchFamily="34" charset="-122"/>
+                          <a:cs typeface="Calibri" pitchFamily="34" charset="-120"/>
+                        </a:rPr>
+                        <a:t>57.4 %</a:t>
+                      </a:r>
+                      <a:endParaRPr lang="en-US" sz="1100" dirty="0">
+                        <a:latin typeface="Calibri" charset="0"/>
+                        <a:ea typeface="Calibri" charset="0"/>
+                        <a:cs typeface="Calibri" charset="0"/>
+                      </a:endParaRPr>
+                    </a:p>
+                  </a:txBody>
+                  <a:tcPr marL="91440" marR="91440" marT="45720" marB="45720" anchor="ctr">
+                    <a:lnL w="6350" cap="flat" cmpd="sng" algn="ctr">
+                      <a:solidFill>
+                        <a:srgbClr val="D6DEE1"/>
+                      </a:solidFill>
+                      <a:prstDash val="solid"/>
+                      <a:round/>
+                      <a:headEnd type="none" w="med" len="med"/>
+                      <a:tailEnd type="none" w="med" len="med"/>
+                    </a:lnL>
+                    <a:lnR w="6350" cap="flat" cmpd="sng" algn="ctr">
+                      <a:solidFill>
+                        <a:srgbClr val="D6DEE1"/>
+                      </a:solidFill>
+                      <a:prstDash val="solid"/>
+                      <a:round/>
+                      <a:headEnd type="none" w="med" len="med"/>
+                      <a:tailEnd type="none" w="med" len="med"/>
+                    </a:lnR>
+                    <a:lnT w="6350" cap="flat" cmpd="sng" algn="ctr">
+                      <a:solidFill>
+                        <a:srgbClr val="D6DEE1"/>
+                      </a:solidFill>
+                      <a:prstDash val="solid"/>
+                      <a:round/>
+                      <a:headEnd type="none" w="med" len="med"/>
+                      <a:tailEnd type="none" w="med" len="med"/>
+                    </a:lnT>
+                    <a:lnB w="6350" cap="flat" cmpd="sng" algn="ctr">
+                      <a:solidFill>
+                        <a:srgbClr val="D6DEE1"/>
+                      </a:solidFill>
+                      <a:prstDash val="solid"/>
+                      <a:round/>
+                      <a:headEnd type="none" w="med" len="med"/>
+                      <a:tailEnd type="none" w="med" len="med"/>
+                    </a:lnB>
+                    <a:solidFill>
+                      <a:srgbClr val="FFFFFF"/>
+                    </a:solidFill>
+                  </a:tcPr>
+                </a:tc>
               </a:tr>
-              <a:tr h="438912">
+              <a:tr h="420624">
                 <a:tc>
                   <a:txBody>
                     <a:bodyPr/>
@@ -14397,8 +15316,76 @@
                     </a:solidFill>
                   </a:tcPr>
                 </a:tc>
+                <a:tc>
+                  <a:txBody>
+                    <a:bodyPr/>
+                    <a:lstStyle/>
+                    <a:p>
+                      <a:pPr algn="ctr" indent="0" marL="0">
+                        <a:buNone/>
+                      </a:pPr>
+                      <a:r>
+                        <a:rPr lang="en-US" sz="1100" dirty="0">
+                          <a:solidFill>
+                            <a:srgbClr val="2B3A42"/>
+                          </a:solidFill>
+                          <a:latin typeface="Calibri" pitchFamily="34" charset="0"/>
+                          <a:ea typeface="Calibri" pitchFamily="34" charset="-122"/>
+                          <a:cs typeface="Calibri" pitchFamily="34" charset="-120"/>
+                        </a:rPr>
+                        <a:t>9.4 %</a:t>
+                      </a:r>
+                      <a:endParaRPr lang="en-US" sz="1100" dirty="0">
+                        <a:latin typeface="Calibri" charset="0"/>
+                        <a:ea typeface="Calibri" charset="0"/>
+                        <a:cs typeface="Calibri" charset="0"/>
+                      </a:endParaRPr>
+                    </a:p>
+                  </a:txBody>
+                  <a:tcPr marL="91440" marR="91440" marT="45720" marB="45720" anchor="ctr">
+                    <a:lnL w="6350" cap="flat" cmpd="sng" algn="ctr">
+                      <a:solidFill>
+                        <a:srgbClr val="D6DEE1"/>
+                      </a:solidFill>
+                      <a:prstDash val="solid"/>
+                      <a:round/>
+                      <a:headEnd type="none" w="med" len="med"/>
+                      <a:tailEnd type="none" w="med" len="med"/>
+                    </a:lnL>
+                    <a:lnR w="6350" cap="flat" cmpd="sng" algn="ctr">
+                      <a:solidFill>
+                        <a:srgbClr val="D6DEE1"/>
+                      </a:solidFill>
+                      <a:prstDash val="solid"/>
+                      <a:round/>
+                      <a:headEnd type="none" w="med" len="med"/>
+                      <a:tailEnd type="none" w="med" len="med"/>
+                    </a:lnR>
+                    <a:lnT w="6350" cap="flat" cmpd="sng" algn="ctr">
+                      <a:solidFill>
+                        <a:srgbClr val="D6DEE1"/>
+                      </a:solidFill>
+                      <a:prstDash val="solid"/>
+                      <a:round/>
+                      <a:headEnd type="none" w="med" len="med"/>
+                      <a:tailEnd type="none" w="med" len="med"/>
+                    </a:lnT>
+                    <a:lnB w="6350" cap="flat" cmpd="sng" algn="ctr">
+                      <a:solidFill>
+                        <a:srgbClr val="D6DEE1"/>
+                      </a:solidFill>
+                      <a:prstDash val="solid"/>
+                      <a:round/>
+                      <a:headEnd type="none" w="med" len="med"/>
+                      <a:tailEnd type="none" w="med" len="med"/>
+                    </a:lnB>
+                    <a:solidFill>
+                      <a:srgbClr val="EEF2F3"/>
+                    </a:solidFill>
+                  </a:tcPr>
+                </a:tc>
               </a:tr>
-              <a:tr h="438912">
+              <a:tr h="420624">
                 <a:tc>
                   <a:txBody>
                     <a:bodyPr/>
@@ -14875,8 +15862,76 @@
                     </a:solidFill>
                   </a:tcPr>
                 </a:tc>
+                <a:tc>
+                  <a:txBody>
+                    <a:bodyPr/>
+                    <a:lstStyle/>
+                    <a:p>
+                      <a:pPr algn="ctr" indent="0" marL="0">
+                        <a:buNone/>
+                      </a:pPr>
+                      <a:r>
+                        <a:rPr lang="en-US" sz="1100" dirty="0">
+                          <a:solidFill>
+                            <a:srgbClr val="2B3A42"/>
+                          </a:solidFill>
+                          <a:latin typeface="Calibri" pitchFamily="34" charset="0"/>
+                          <a:ea typeface="Calibri" pitchFamily="34" charset="-122"/>
+                          <a:cs typeface="Calibri" pitchFamily="34" charset="-120"/>
+                        </a:rPr>
+                        <a:t>18.3 %</a:t>
+                      </a:r>
+                      <a:endParaRPr lang="en-US" sz="1100" dirty="0">
+                        <a:latin typeface="Calibri" charset="0"/>
+                        <a:ea typeface="Calibri" charset="0"/>
+                        <a:cs typeface="Calibri" charset="0"/>
+                      </a:endParaRPr>
+                    </a:p>
+                  </a:txBody>
+                  <a:tcPr marL="91440" marR="91440" marT="45720" marB="45720" anchor="ctr">
+                    <a:lnL w="6350" cap="flat" cmpd="sng" algn="ctr">
+                      <a:solidFill>
+                        <a:srgbClr val="D6DEE1"/>
+                      </a:solidFill>
+                      <a:prstDash val="solid"/>
+                      <a:round/>
+                      <a:headEnd type="none" w="med" len="med"/>
+                      <a:tailEnd type="none" w="med" len="med"/>
+                    </a:lnL>
+                    <a:lnR w="6350" cap="flat" cmpd="sng" algn="ctr">
+                      <a:solidFill>
+                        <a:srgbClr val="D6DEE1"/>
+                      </a:solidFill>
+                      <a:prstDash val="solid"/>
+                      <a:round/>
+                      <a:headEnd type="none" w="med" len="med"/>
+                      <a:tailEnd type="none" w="med" len="med"/>
+                    </a:lnR>
+                    <a:lnT w="6350" cap="flat" cmpd="sng" algn="ctr">
+                      <a:solidFill>
+                        <a:srgbClr val="D6DEE1"/>
+                      </a:solidFill>
+                      <a:prstDash val="solid"/>
+                      <a:round/>
+                      <a:headEnd type="none" w="med" len="med"/>
+                      <a:tailEnd type="none" w="med" len="med"/>
+                    </a:lnT>
+                    <a:lnB w="6350" cap="flat" cmpd="sng" algn="ctr">
+                      <a:solidFill>
+                        <a:srgbClr val="D6DEE1"/>
+                      </a:solidFill>
+                      <a:prstDash val="solid"/>
+                      <a:round/>
+                      <a:headEnd type="none" w="med" len="med"/>
+                      <a:tailEnd type="none" w="med" len="med"/>
+                    </a:lnB>
+                    <a:solidFill>
+                      <a:srgbClr val="FFFFFF"/>
+                    </a:solidFill>
+                  </a:tcPr>
+                </a:tc>
               </a:tr>
-              <a:tr h="438912">
+              <a:tr h="420624">
                 <a:tc>
                   <a:txBody>
                     <a:bodyPr/>
@@ -15303,6 +16358,74 @@
                           <a:cs typeface="Calibri" pitchFamily="34" charset="-120"/>
                         </a:rPr>
                         <a:t>20.4 %</a:t>
+                      </a:r>
+                      <a:endParaRPr lang="en-US" sz="1100" dirty="0">
+                        <a:latin typeface="Calibri" charset="0"/>
+                        <a:ea typeface="Calibri" charset="0"/>
+                        <a:cs typeface="Calibri" charset="0"/>
+                      </a:endParaRPr>
+                    </a:p>
+                  </a:txBody>
+                  <a:tcPr marL="91440" marR="91440" marT="45720" marB="45720" anchor="ctr">
+                    <a:lnL w="6350" cap="flat" cmpd="sng" algn="ctr">
+                      <a:solidFill>
+                        <a:srgbClr val="D6DEE1"/>
+                      </a:solidFill>
+                      <a:prstDash val="solid"/>
+                      <a:round/>
+                      <a:headEnd type="none" w="med" len="med"/>
+                      <a:tailEnd type="none" w="med" len="med"/>
+                    </a:lnL>
+                    <a:lnR w="6350" cap="flat" cmpd="sng" algn="ctr">
+                      <a:solidFill>
+                        <a:srgbClr val="D6DEE1"/>
+                      </a:solidFill>
+                      <a:prstDash val="solid"/>
+                      <a:round/>
+                      <a:headEnd type="none" w="med" len="med"/>
+                      <a:tailEnd type="none" w="med" len="med"/>
+                    </a:lnR>
+                    <a:lnT w="6350" cap="flat" cmpd="sng" algn="ctr">
+                      <a:solidFill>
+                        <a:srgbClr val="D6DEE1"/>
+                      </a:solidFill>
+                      <a:prstDash val="solid"/>
+                      <a:round/>
+                      <a:headEnd type="none" w="med" len="med"/>
+                      <a:tailEnd type="none" w="med" len="med"/>
+                    </a:lnT>
+                    <a:lnB w="6350" cap="flat" cmpd="sng" algn="ctr">
+                      <a:solidFill>
+                        <a:srgbClr val="D6DEE1"/>
+                      </a:solidFill>
+                      <a:prstDash val="solid"/>
+                      <a:round/>
+                      <a:headEnd type="none" w="med" len="med"/>
+                      <a:tailEnd type="none" w="med" len="med"/>
+                    </a:lnB>
+                    <a:solidFill>
+                      <a:srgbClr val="EEF2F3"/>
+                    </a:solidFill>
+                  </a:tcPr>
+                </a:tc>
+                <a:tc>
+                  <a:txBody>
+                    <a:bodyPr/>
+                    <a:lstStyle/>
+                    <a:p>
+                      <a:pPr algn="ctr" indent="0" marL="0">
+                        <a:buNone/>
+                      </a:pPr>
+                      <a:r>
+                        <a:rPr lang="en-US" sz="1100" dirty="0">
+                          <a:solidFill>
+                            <a:srgbClr val="2B3A42"/>
+                          </a:solidFill>
+                          <a:latin typeface="Calibri" pitchFamily="34" charset="0"/>
+                          <a:ea typeface="Calibri" pitchFamily="34" charset="-122"/>
+                          <a:cs typeface="Calibri" pitchFamily="34" charset="-120"/>
+                        </a:rPr>
+                        <a:t>18.4 %</a:t>
                       </a:r>
                       <a:endParaRPr lang="en-US" sz="1100" dirty="0">
                         <a:latin typeface="Calibri" charset="0"/>
@@ -16639,7 +17762,7 @@
                 <a:ea typeface="Calibri" pitchFamily="34" charset="-122"/>
                 <a:cs typeface="Calibri" pitchFamily="34" charset="-120"/>
               </a:rPr>
-              <a:t>Volumen cedido 2025 (M€):  España 270k  ·  Alemania 423k  ·  Francia 439k  ·  Italia 297k  ·  Portugal 52k  ·  P. Bajos 165k</a:t>
+              <a:t>Volumen cedido 2025 (M€):  España 270k  ·  Alemania 423k  ·  Francia 439k  ·  Italia 297k  ·  Portugal 52k  ·  P. Bajos 165k  ·  Irlanda 29k</a:t>
             </a:r>
             <a:endParaRPr lang="en-US" sz="1150" dirty="0"/>
           </a:p>
@@ -29753,11 +30876,11 @@
         <p:spPr>
           <a:xfrm>
             <a:off x="7680960" y="1600200"/>
-            <a:ext cx="3959352" cy="1828800"/>
+            <a:ext cx="3959352" cy="2121408"/>
           </a:xfrm>
           <a:prstGeom prst="roundRect">
             <a:avLst>
-              <a:gd name="adj" fmla="val 3000"/>
+              <a:gd name="adj" fmla="val 2586"/>
             </a:avLst>
           </a:prstGeom>
           <a:solidFill>
@@ -29818,8 +30941,8 @@
         </p:nvSpPr>
         <p:spPr>
           <a:xfrm>
-            <a:off x="7863840" y="2240280"/>
-            <a:ext cx="3611880" cy="1097280"/>
+            <a:off x="7863840" y="2212848"/>
+            <a:ext cx="3611880" cy="1444752"/>
           </a:xfrm>
           <a:prstGeom prst="rect">
             <a:avLst/>
@@ -29833,12 +30956,12 @@
           <a:p>
             <a:pPr indent="0" marL="0">
               <a:lnSpc>
-                <a:spcPts val="1500"/>
+                <a:spcPts val="1300"/>
               </a:lnSpc>
               <a:buNone/>
             </a:pPr>
             <a:r>
-              <a:rPr lang="en-US" sz="1100" dirty="0">
+              <a:rPr lang="en-US" sz="1050" dirty="0">
                 <a:solidFill>
                   <a:srgbClr val="2B3A42"/>
                 </a:solidFill>
@@ -29848,17 +30971,17 @@
               </a:rPr>
               <a:t>España: 50.5 %</a:t>
             </a:r>
-            <a:endParaRPr lang="en-US" sz="1100" dirty="0"/>
+            <a:endParaRPr lang="en-US" sz="1050" dirty="0"/>
           </a:p>
           <a:p>
             <a:pPr indent="0" marL="0">
               <a:lnSpc>
-                <a:spcPts val="1500"/>
+                <a:spcPts val="1300"/>
               </a:lnSpc>
               <a:buNone/>
             </a:pPr>
             <a:r>
-              <a:rPr lang="en-US" sz="1100" dirty="0">
+              <a:rPr lang="en-US" sz="1050" dirty="0">
                 <a:solidFill>
                   <a:srgbClr val="2B3A42"/>
                 </a:solidFill>
@@ -29868,17 +30991,17 @@
               </a:rPr>
               <a:t>Alemania: 17.8 %</a:t>
             </a:r>
-            <a:endParaRPr lang="en-US" sz="1100" dirty="0"/>
+            <a:endParaRPr lang="en-US" sz="1050" dirty="0"/>
           </a:p>
           <a:p>
             <a:pPr indent="0" marL="0">
               <a:lnSpc>
-                <a:spcPts val="1500"/>
+                <a:spcPts val="1300"/>
               </a:lnSpc>
               <a:buNone/>
             </a:pPr>
             <a:r>
-              <a:rPr lang="en-US" sz="1100" dirty="0">
+              <a:rPr lang="en-US" sz="1050" dirty="0">
                 <a:solidFill>
                   <a:srgbClr val="2B3A42"/>
                 </a:solidFill>
@@ -29888,17 +31011,17 @@
               </a:rPr>
               <a:t>Francia: 30 %</a:t>
             </a:r>
-            <a:endParaRPr lang="en-US" sz="1100" dirty="0"/>
+            <a:endParaRPr lang="en-US" sz="1050" dirty="0"/>
           </a:p>
           <a:p>
             <a:pPr indent="0" marL="0">
               <a:lnSpc>
-                <a:spcPts val="1500"/>
+                <a:spcPts val="1300"/>
               </a:lnSpc>
               <a:buNone/>
             </a:pPr>
             <a:r>
-              <a:rPr lang="en-US" sz="1100" dirty="0">
+              <a:rPr lang="en-US" sz="1050" dirty="0">
                 <a:solidFill>
                   <a:srgbClr val="2B3A42"/>
                 </a:solidFill>
@@ -29908,17 +31031,17 @@
               </a:rPr>
               <a:t>Italia: 34.6 %</a:t>
             </a:r>
-            <a:endParaRPr lang="en-US" sz="1100" dirty="0"/>
+            <a:endParaRPr lang="en-US" sz="1050" dirty="0"/>
           </a:p>
           <a:p>
             <a:pPr indent="0" marL="0">
               <a:lnSpc>
-                <a:spcPts val="1500"/>
+                <a:spcPts val="1300"/>
               </a:lnSpc>
               <a:buNone/>
             </a:pPr>
             <a:r>
-              <a:rPr lang="en-US" sz="1100" dirty="0">
+              <a:rPr lang="en-US" sz="1050" dirty="0">
                 <a:solidFill>
                   <a:srgbClr val="2B3A42"/>
                 </a:solidFill>
@@ -29928,17 +31051,17 @@
               </a:rPr>
               <a:t>Portugal: 51.1 %</a:t>
             </a:r>
-            <a:endParaRPr lang="en-US" sz="1100" dirty="0"/>
+            <a:endParaRPr lang="en-US" sz="1050" dirty="0"/>
           </a:p>
           <a:p>
             <a:pPr indent="0" marL="0">
               <a:lnSpc>
-                <a:spcPts val="1500"/>
+                <a:spcPts val="1300"/>
               </a:lnSpc>
               <a:buNone/>
             </a:pPr>
             <a:r>
-              <a:rPr lang="en-US" sz="1100" dirty="0">
+              <a:rPr lang="en-US" sz="1050" dirty="0">
                 <a:solidFill>
                   <a:srgbClr val="2B3A42"/>
                 </a:solidFill>
@@ -29948,7 +31071,27 @@
               </a:rPr>
               <a:t>P. Bajos: 7.6 %</a:t>
             </a:r>
-            <a:endParaRPr lang="en-US" sz="1100" dirty="0"/>
+            <a:endParaRPr lang="en-US" sz="1050" dirty="0"/>
+          </a:p>
+          <a:p>
+            <a:pPr indent="0" marL="0">
+              <a:lnSpc>
+                <a:spcPts val="1300"/>
+              </a:lnSpc>
+              <a:buNone/>
+            </a:pPr>
+            <a:r>
+              <a:rPr lang="en-US" sz="1050" dirty="0">
+                <a:solidFill>
+                  <a:srgbClr val="2B3A42"/>
+                </a:solidFill>
+                <a:latin typeface="Calibri" pitchFamily="34" charset="0"/>
+                <a:ea typeface="Calibri" pitchFamily="34" charset="-122"/>
+                <a:cs typeface="Calibri" pitchFamily="34" charset="-120"/>
+              </a:rPr>
+              <a:t>Irlanda: 16.8 %</a:t>
+            </a:r>
+            <a:endParaRPr lang="en-US" sz="1050" dirty="0"/>
           </a:p>
         </p:txBody>
       </p:sp>
@@ -29960,12 +31103,12 @@
         </p:nvSpPr>
         <p:spPr>
           <a:xfrm>
-            <a:off x="7680960" y="3611880"/>
-            <a:ext cx="3959352" cy="1645920"/>
+            <a:off x="7680960" y="3858768"/>
+            <a:ext cx="3959352" cy="1399032"/>
           </a:xfrm>
           <a:prstGeom prst="roundRect">
             <a:avLst>
-              <a:gd name="adj" fmla="val 3333"/>
+              <a:gd name="adj" fmla="val 3922"/>
             </a:avLst>
           </a:prstGeom>
           <a:solidFill>
@@ -29987,7 +31130,7 @@
         </p:nvSpPr>
         <p:spPr>
           <a:xfrm>
-            <a:off x="7863840" y="3749040"/>
+            <a:off x="7863840" y="3968496"/>
             <a:ext cx="3611880" cy="320040"/>
           </a:xfrm>
           <a:prstGeom prst="rect">
@@ -30026,8 +31169,8 @@
         </p:nvSpPr>
         <p:spPr>
           <a:xfrm>
-            <a:off x="7863840" y="4114800"/>
-            <a:ext cx="3611880" cy="1005840"/>
+            <a:off x="7863840" y="4297680"/>
+            <a:ext cx="3611880" cy="868680"/>
           </a:xfrm>
           <a:prstGeom prst="rect">
             <a:avLst/>
@@ -30043,7 +31186,7 @@
               <a:buNone/>
             </a:pPr>
             <a:r>
-              <a:rPr lang="en-US" sz="1100" dirty="0">
+              <a:rPr lang="en-US" sz="1050" dirty="0">
                 <a:solidFill>
                   <a:srgbClr val="2B3A42"/>
                 </a:solidFill>
@@ -30051,9 +31194,9 @@
                 <a:ea typeface="Calibri" pitchFamily="34" charset="-122"/>
                 <a:cs typeface="Calibri" pitchFamily="34" charset="-120"/>
               </a:rPr>
-              <a:t>En España y Portugal la mitad de la nueva producción es de importe ≤1 M€. En Países Bajos es el 7,6 %. Cualquier comparación de rentabilidad debe normalizar por este peso.</a:t>
+              <a:t>En España y Portugal la mitad de la nueva producción es de importe ≤1 M€. En Países Bajos es el 7,6 % y en Irlanda el 16,8 %. Cualquier comparación de rentabilidad debe normalizar por este peso.</a:t>
             </a:r>
-            <a:endParaRPr lang="en-US" sz="1100" dirty="0"/>
+            <a:endParaRPr lang="en-US" sz="1050" dirty="0"/>
           </a:p>
         </p:txBody>
       </p:sp>
@@ -30717,13 +31860,14 @@
             <a:tbl>
               <a:tblPr/>
               <a:tblGrid>
-                <a:gridCol w="2743200"/>
-                <a:gridCol w="1540764"/>
-                <a:gridCol w="1540764"/>
-                <a:gridCol w="1540764"/>
-                <a:gridCol w="1540764"/>
-                <a:gridCol w="1540764"/>
-                <a:gridCol w="1540764"/>
+                <a:gridCol w="2468880"/>
+                <a:gridCol w="1231697"/>
+                <a:gridCol w="1231697"/>
+                <a:gridCol w="1231697"/>
+                <a:gridCol w="1231697"/>
+                <a:gridCol w="1231697"/>
+                <a:gridCol w="1231697"/>
+                <a:gridCol w="1231697"/>
               </a:tblGrid>
               <a:tr h="338328">
                 <a:tc>
@@ -31152,6 +32296,74 @@
                           <a:cs typeface="Calibri" pitchFamily="34" charset="-120"/>
                         </a:rPr>
                         <a:t>P. Bajos</a:t>
+                      </a:r>
+                      <a:endParaRPr lang="en-US" sz="1100" dirty="0">
+                        <a:latin typeface="Calibri" charset="0"/>
+                        <a:ea typeface="Calibri" charset="0"/>
+                        <a:cs typeface="Calibri" charset="0"/>
+                      </a:endParaRPr>
+                    </a:p>
+                  </a:txBody>
+                  <a:tcPr marL="91440" marR="91440" marT="45720" marB="45720" anchor="ctr">
+                    <a:lnL w="6350" cap="flat" cmpd="sng" algn="ctr">
+                      <a:solidFill>
+                        <a:srgbClr val="D6DEE1"/>
+                      </a:solidFill>
+                      <a:prstDash val="solid"/>
+                      <a:round/>
+                      <a:headEnd type="none" w="med" len="med"/>
+                      <a:tailEnd type="none" w="med" len="med"/>
+                    </a:lnL>
+                    <a:lnR w="6350" cap="flat" cmpd="sng" algn="ctr">
+                      <a:solidFill>
+                        <a:srgbClr val="D6DEE1"/>
+                      </a:solidFill>
+                      <a:prstDash val="solid"/>
+                      <a:round/>
+                      <a:headEnd type="none" w="med" len="med"/>
+                      <a:tailEnd type="none" w="med" len="med"/>
+                    </a:lnR>
+                    <a:lnT w="6350" cap="flat" cmpd="sng" algn="ctr">
+                      <a:solidFill>
+                        <a:srgbClr val="D6DEE1"/>
+                      </a:solidFill>
+                      <a:prstDash val="solid"/>
+                      <a:round/>
+                      <a:headEnd type="none" w="med" len="med"/>
+                      <a:tailEnd type="none" w="med" len="med"/>
+                    </a:lnT>
+                    <a:lnB w="6350" cap="flat" cmpd="sng" algn="ctr">
+                      <a:solidFill>
+                        <a:srgbClr val="D6DEE1"/>
+                      </a:solidFill>
+                      <a:prstDash val="solid"/>
+                      <a:round/>
+                      <a:headEnd type="none" w="med" len="med"/>
+                      <a:tailEnd type="none" w="med" len="med"/>
+                    </a:lnB>
+                    <a:solidFill>
+                      <a:srgbClr val="1C3F4E"/>
+                    </a:solidFill>
+                  </a:tcPr>
+                </a:tc>
+                <a:tc>
+                  <a:txBody>
+                    <a:bodyPr/>
+                    <a:lstStyle/>
+                    <a:p>
+                      <a:pPr algn="ctr" indent="0" marL="0">
+                        <a:buNone/>
+                      </a:pPr>
+                      <a:r>
+                        <a:rPr lang="en-US" sz="1100" b="1" dirty="0">
+                          <a:solidFill>
+                            <a:srgbClr val="FFFFFF"/>
+                          </a:solidFill>
+                          <a:latin typeface="Calibri" pitchFamily="34" charset="0"/>
+                          <a:ea typeface="Calibri" pitchFamily="34" charset="-122"/>
+                          <a:cs typeface="Calibri" pitchFamily="34" charset="-120"/>
+                        </a:rPr>
+                        <a:t>Irlanda</a:t>
                       </a:r>
                       <a:endParaRPr lang="en-US" sz="1100" dirty="0">
                         <a:latin typeface="Calibri" charset="0"/>
@@ -31659,6 +32871,71 @@
                     </a:lnB>
                   </a:tcPr>
                 </a:tc>
+                <a:tc>
+                  <a:txBody>
+                    <a:bodyPr/>
+                    <a:lstStyle/>
+                    <a:p>
+                      <a:pPr algn="ctr" indent="0" marL="0">
+                        <a:buNone/>
+                      </a:pPr>
+                      <a:r>
+                        <a:rPr lang="en-US" sz="1100" dirty="0">
+                          <a:solidFill>
+                            <a:srgbClr val="2B3A42"/>
+                          </a:solidFill>
+                          <a:latin typeface="Calibri" pitchFamily="34" charset="0"/>
+                          <a:ea typeface="Calibri" pitchFamily="34" charset="-122"/>
+                          <a:cs typeface="Calibri" pitchFamily="34" charset="-120"/>
+                        </a:rPr>
+                        <a:t>5.37</a:t>
+                      </a:r>
+                      <a:endParaRPr lang="en-US" sz="1100" dirty="0">
+                        <a:latin typeface="Calibri" charset="0"/>
+                        <a:ea typeface="Calibri" charset="0"/>
+                        <a:cs typeface="Calibri" charset="0"/>
+                      </a:endParaRPr>
+                    </a:p>
+                  </a:txBody>
+                  <a:tcPr marL="91440" marR="91440" marT="45720" marB="45720" anchor="ctr">
+                    <a:lnL w="6350" cap="flat" cmpd="sng" algn="ctr">
+                      <a:solidFill>
+                        <a:srgbClr val="D6DEE1"/>
+                      </a:solidFill>
+                      <a:prstDash val="solid"/>
+                      <a:round/>
+                      <a:headEnd type="none" w="med" len="med"/>
+                      <a:tailEnd type="none" w="med" len="med"/>
+                    </a:lnL>
+                    <a:lnR w="6350" cap="flat" cmpd="sng" algn="ctr">
+                      <a:solidFill>
+                        <a:srgbClr val="D6DEE1"/>
+                      </a:solidFill>
+                      <a:prstDash val="solid"/>
+                      <a:round/>
+                      <a:headEnd type="none" w="med" len="med"/>
+                      <a:tailEnd type="none" w="med" len="med"/>
+                    </a:lnR>
+                    <a:lnT w="6350" cap="flat" cmpd="sng" algn="ctr">
+                      <a:solidFill>
+                        <a:srgbClr val="D6DEE1"/>
+                      </a:solidFill>
+                      <a:prstDash val="solid"/>
+                      <a:round/>
+                      <a:headEnd type="none" w="med" len="med"/>
+                      <a:tailEnd type="none" w="med" len="med"/>
+                    </a:lnT>
+                    <a:lnB w="6350" cap="flat" cmpd="sng" algn="ctr">
+                      <a:solidFill>
+                        <a:srgbClr val="D6DEE1"/>
+                      </a:solidFill>
+                      <a:prstDash val="solid"/>
+                      <a:round/>
+                      <a:headEnd type="none" w="med" len="med"/>
+                      <a:tailEnd type="none" w="med" len="med"/>
+                    </a:lnB>
+                  </a:tcPr>
+                </a:tc>
               </a:tr>
               <a:tr h="338328">
                 <a:tc>
@@ -31679,6 +32956,74 @@
                           <a:cs typeface="Calibri" pitchFamily="34" charset="-120"/>
                         </a:rPr>
                         <a:t>+ Comisiones</a:t>
+                      </a:r>
+                      <a:endParaRPr lang="en-US" sz="1100" dirty="0">
+                        <a:latin typeface="Calibri" charset="0"/>
+                        <a:ea typeface="Calibri" charset="0"/>
+                        <a:cs typeface="Calibri" charset="0"/>
+                      </a:endParaRPr>
+                    </a:p>
+                  </a:txBody>
+                  <a:tcPr marL="91440" marR="91440" marT="45720" marB="45720" anchor="ctr">
+                    <a:lnL w="6350" cap="flat" cmpd="sng" algn="ctr">
+                      <a:solidFill>
+                        <a:srgbClr val="D6DEE1"/>
+                      </a:solidFill>
+                      <a:prstDash val="solid"/>
+                      <a:round/>
+                      <a:headEnd type="none" w="med" len="med"/>
+                      <a:tailEnd type="none" w="med" len="med"/>
+                    </a:lnL>
+                    <a:lnR w="6350" cap="flat" cmpd="sng" algn="ctr">
+                      <a:solidFill>
+                        <a:srgbClr val="D6DEE1"/>
+                      </a:solidFill>
+                      <a:prstDash val="solid"/>
+                      <a:round/>
+                      <a:headEnd type="none" w="med" len="med"/>
+                      <a:tailEnd type="none" w="med" len="med"/>
+                    </a:lnR>
+                    <a:lnT w="6350" cap="flat" cmpd="sng" algn="ctr">
+                      <a:solidFill>
+                        <a:srgbClr val="D6DEE1"/>
+                      </a:solidFill>
+                      <a:prstDash val="solid"/>
+                      <a:round/>
+                      <a:headEnd type="none" w="med" len="med"/>
+                      <a:tailEnd type="none" w="med" len="med"/>
+                    </a:lnT>
+                    <a:lnB w="6350" cap="flat" cmpd="sng" algn="ctr">
+                      <a:solidFill>
+                        <a:srgbClr val="D6DEE1"/>
+                      </a:solidFill>
+                      <a:prstDash val="solid"/>
+                      <a:round/>
+                      <a:headEnd type="none" w="med" len="med"/>
+                      <a:tailEnd type="none" w="med" len="med"/>
+                    </a:lnB>
+                    <a:solidFill>
+                      <a:srgbClr val="FBF2EA"/>
+                    </a:solidFill>
+                  </a:tcPr>
+                </a:tc>
+                <a:tc>
+                  <a:txBody>
+                    <a:bodyPr/>
+                    <a:lstStyle/>
+                    <a:p>
+                      <a:pPr algn="ctr" indent="0" marL="0">
+                        <a:buNone/>
+                      </a:pPr>
+                      <a:r>
+                        <a:rPr lang="en-US" sz="1100" dirty="0">
+                          <a:solidFill>
+                            <a:srgbClr val="8A5A2B"/>
+                          </a:solidFill>
+                          <a:latin typeface="Calibri" pitchFamily="34" charset="0"/>
+                          <a:ea typeface="Calibri" pitchFamily="34" charset="-122"/>
+                          <a:cs typeface="Calibri" pitchFamily="34" charset="-120"/>
+                        </a:rPr>
+                        <a:t>0.87</a:t>
                       </a:r>
                       <a:endParaRPr lang="en-US" sz="1100" dirty="0">
                         <a:latin typeface="Calibri" charset="0"/>
@@ -32615,6 +33960,74 @@
                     </a:solidFill>
                   </a:tcPr>
                 </a:tc>
+                <a:tc>
+                  <a:txBody>
+                    <a:bodyPr/>
+                    <a:lstStyle/>
+                    <a:p>
+                      <a:pPr algn="ctr" indent="0" marL="0">
+                        <a:buNone/>
+                      </a:pPr>
+                      <a:r>
+                        <a:rPr lang="en-US" sz="1100" b="1" dirty="0">
+                          <a:solidFill>
+                            <a:srgbClr val="1C3F4E"/>
+                          </a:solidFill>
+                          <a:latin typeface="Calibri" pitchFamily="34" charset="0"/>
+                          <a:ea typeface="Calibri" pitchFamily="34" charset="-122"/>
+                          <a:cs typeface="Calibri" pitchFamily="34" charset="-120"/>
+                        </a:rPr>
+                        <a:t>6.24</a:t>
+                      </a:r>
+                      <a:endParaRPr lang="en-US" sz="1100" dirty="0">
+                        <a:latin typeface="Calibri" charset="0"/>
+                        <a:ea typeface="Calibri" charset="0"/>
+                        <a:cs typeface="Calibri" charset="0"/>
+                      </a:endParaRPr>
+                    </a:p>
+                  </a:txBody>
+                  <a:tcPr marL="91440" marR="91440" marT="45720" marB="45720" anchor="ctr">
+                    <a:lnL w="6350" cap="flat" cmpd="sng" algn="ctr">
+                      <a:solidFill>
+                        <a:srgbClr val="D6DEE1"/>
+                      </a:solidFill>
+                      <a:prstDash val="solid"/>
+                      <a:round/>
+                      <a:headEnd type="none" w="med" len="med"/>
+                      <a:tailEnd type="none" w="med" len="med"/>
+                    </a:lnL>
+                    <a:lnR w="6350" cap="flat" cmpd="sng" algn="ctr">
+                      <a:solidFill>
+                        <a:srgbClr val="D6DEE1"/>
+                      </a:solidFill>
+                      <a:prstDash val="solid"/>
+                      <a:round/>
+                      <a:headEnd type="none" w="med" len="med"/>
+                      <a:tailEnd type="none" w="med" len="med"/>
+                    </a:lnR>
+                    <a:lnT w="6350" cap="flat" cmpd="sng" algn="ctr">
+                      <a:solidFill>
+                        <a:srgbClr val="D6DEE1"/>
+                      </a:solidFill>
+                      <a:prstDash val="solid"/>
+                      <a:round/>
+                      <a:headEnd type="none" w="med" len="med"/>
+                      <a:tailEnd type="none" w="med" len="med"/>
+                    </a:lnT>
+                    <a:lnB w="6350" cap="flat" cmpd="sng" algn="ctr">
+                      <a:solidFill>
+                        <a:srgbClr val="D6DEE1"/>
+                      </a:solidFill>
+                      <a:prstDash val="solid"/>
+                      <a:round/>
+                      <a:headEnd type="none" w="med" len="med"/>
+                      <a:tailEnd type="none" w="med" len="med"/>
+                    </a:lnB>
+                    <a:solidFill>
+                      <a:srgbClr val="EEF2F3"/>
+                    </a:solidFill>
+                  </a:tcPr>
+                </a:tc>
               </a:tr>
               <a:tr h="338328">
                 <a:tc>
@@ -32635,6 +34048,71 @@
                           <a:cs typeface="Calibri" pitchFamily="34" charset="-120"/>
                         </a:rPr>
                         <a:t>− Coste de fondos</a:t>
+                      </a:r>
+                      <a:endParaRPr lang="en-US" sz="1100" dirty="0">
+                        <a:latin typeface="Calibri" charset="0"/>
+                        <a:ea typeface="Calibri" charset="0"/>
+                        <a:cs typeface="Calibri" charset="0"/>
+                      </a:endParaRPr>
+                    </a:p>
+                  </a:txBody>
+                  <a:tcPr marL="91440" marR="91440" marT="45720" marB="45720" anchor="ctr">
+                    <a:lnL w="6350" cap="flat" cmpd="sng" algn="ctr">
+                      <a:solidFill>
+                        <a:srgbClr val="D6DEE1"/>
+                      </a:solidFill>
+                      <a:prstDash val="solid"/>
+                      <a:round/>
+                      <a:headEnd type="none" w="med" len="med"/>
+                      <a:tailEnd type="none" w="med" len="med"/>
+                    </a:lnL>
+                    <a:lnR w="6350" cap="flat" cmpd="sng" algn="ctr">
+                      <a:solidFill>
+                        <a:srgbClr val="D6DEE1"/>
+                      </a:solidFill>
+                      <a:prstDash val="solid"/>
+                      <a:round/>
+                      <a:headEnd type="none" w="med" len="med"/>
+                      <a:tailEnd type="none" w="med" len="med"/>
+                    </a:lnR>
+                    <a:lnT w="6350" cap="flat" cmpd="sng" algn="ctr">
+                      <a:solidFill>
+                        <a:srgbClr val="D6DEE1"/>
+                      </a:solidFill>
+                      <a:prstDash val="solid"/>
+                      <a:round/>
+                      <a:headEnd type="none" w="med" len="med"/>
+                      <a:tailEnd type="none" w="med" len="med"/>
+                    </a:lnT>
+                    <a:lnB w="6350" cap="flat" cmpd="sng" algn="ctr">
+                      <a:solidFill>
+                        <a:srgbClr val="D6DEE1"/>
+                      </a:solidFill>
+                      <a:prstDash val="solid"/>
+                      <a:round/>
+                      <a:headEnd type="none" w="med" len="med"/>
+                      <a:tailEnd type="none" w="med" len="med"/>
+                    </a:lnB>
+                  </a:tcPr>
+                </a:tc>
+                <a:tc>
+                  <a:txBody>
+                    <a:bodyPr/>
+                    <a:lstStyle/>
+                    <a:p>
+                      <a:pPr algn="ctr" indent="0" marL="0">
+                        <a:buNone/>
+                      </a:pPr>
+                      <a:r>
+                        <a:rPr lang="en-US" sz="1100" dirty="0">
+                          <a:solidFill>
+                            <a:srgbClr val="2B3A42"/>
+                          </a:solidFill>
+                          <a:latin typeface="Calibri" pitchFamily="34" charset="0"/>
+                          <a:ea typeface="Calibri" pitchFamily="34" charset="-122"/>
+                          <a:cs typeface="Calibri" pitchFamily="34" charset="-120"/>
+                        </a:rPr>
+                        <a:t>2.23</a:t>
                       </a:r>
                       <a:endParaRPr lang="en-US" sz="1100" dirty="0">
                         <a:latin typeface="Calibri" charset="0"/>
@@ -33500,6 +34978,74 @@
                           <a:cs typeface="Calibri" pitchFamily="34" charset="-120"/>
                         </a:rPr>
                         <a:t>3.14</a:t>
+                      </a:r>
+                      <a:endParaRPr lang="en-US" sz="1100" dirty="0">
+                        <a:latin typeface="Calibri" charset="0"/>
+                        <a:ea typeface="Calibri" charset="0"/>
+                        <a:cs typeface="Calibri" charset="0"/>
+                      </a:endParaRPr>
+                    </a:p>
+                  </a:txBody>
+                  <a:tcPr marL="91440" marR="91440" marT="45720" marB="45720" anchor="ctr">
+                    <a:lnL w="6350" cap="flat" cmpd="sng" algn="ctr">
+                      <a:solidFill>
+                        <a:srgbClr val="D6DEE1"/>
+                      </a:solidFill>
+                      <a:prstDash val="solid"/>
+                      <a:round/>
+                      <a:headEnd type="none" w="med" len="med"/>
+                      <a:tailEnd type="none" w="med" len="med"/>
+                    </a:lnL>
+                    <a:lnR w="6350" cap="flat" cmpd="sng" algn="ctr">
+                      <a:solidFill>
+                        <a:srgbClr val="D6DEE1"/>
+                      </a:solidFill>
+                      <a:prstDash val="solid"/>
+                      <a:round/>
+                      <a:headEnd type="none" w="med" len="med"/>
+                      <a:tailEnd type="none" w="med" len="med"/>
+                    </a:lnR>
+                    <a:lnT w="6350" cap="flat" cmpd="sng" algn="ctr">
+                      <a:solidFill>
+                        <a:srgbClr val="D6DEE1"/>
+                      </a:solidFill>
+                      <a:prstDash val="solid"/>
+                      <a:round/>
+                      <a:headEnd type="none" w="med" len="med"/>
+                      <a:tailEnd type="none" w="med" len="med"/>
+                    </a:lnT>
+                    <a:lnB w="6350" cap="flat" cmpd="sng" algn="ctr">
+                      <a:solidFill>
+                        <a:srgbClr val="D6DEE1"/>
+                      </a:solidFill>
+                      <a:prstDash val="solid"/>
+                      <a:round/>
+                      <a:headEnd type="none" w="med" len="med"/>
+                      <a:tailEnd type="none" w="med" len="med"/>
+                    </a:lnB>
+                    <a:solidFill>
+                      <a:srgbClr val="EEF2F3"/>
+                    </a:solidFill>
+                  </a:tcPr>
+                </a:tc>
+                <a:tc>
+                  <a:txBody>
+                    <a:bodyPr/>
+                    <a:lstStyle/>
+                    <a:p>
+                      <a:pPr algn="ctr" indent="0" marL="0">
+                        <a:buNone/>
+                      </a:pPr>
+                      <a:r>
+                        <a:rPr lang="en-US" sz="1100" b="1" dirty="0">
+                          <a:solidFill>
+                            <a:srgbClr val="1C3F4E"/>
+                          </a:solidFill>
+                          <a:latin typeface="Calibri" pitchFamily="34" charset="0"/>
+                          <a:ea typeface="Calibri" pitchFamily="34" charset="-122"/>
+                          <a:cs typeface="Calibri" pitchFamily="34" charset="-120"/>
+                        </a:rPr>
+                        <a:t>4.01</a:t>
                       </a:r>
                       <a:endParaRPr lang="en-US" sz="1100" dirty="0">
                         <a:latin typeface="Calibri" charset="0"/>
@@ -34028,6 +35574,74 @@
                     </a:solidFill>
                   </a:tcPr>
                 </a:tc>
+                <a:tc>
+                  <a:txBody>
+                    <a:bodyPr/>
+                    <a:lstStyle/>
+                    <a:p>
+                      <a:pPr algn="ctr" indent="0" marL="0">
+                        <a:buNone/>
+                      </a:pPr>
+                      <a:r>
+                        <a:rPr lang="en-US" sz="1100" dirty="0">
+                          <a:solidFill>
+                            <a:srgbClr val="8A5A2B"/>
+                          </a:solidFill>
+                          <a:latin typeface="Calibri" pitchFamily="34" charset="0"/>
+                          <a:ea typeface="Calibri" pitchFamily="34" charset="-122"/>
+                          <a:cs typeface="Calibri" pitchFamily="34" charset="-120"/>
+                        </a:rPr>
+                        <a:t>0.40</a:t>
+                      </a:r>
+                      <a:endParaRPr lang="en-US" sz="1100" dirty="0">
+                        <a:latin typeface="Calibri" charset="0"/>
+                        <a:ea typeface="Calibri" charset="0"/>
+                        <a:cs typeface="Calibri" charset="0"/>
+                      </a:endParaRPr>
+                    </a:p>
+                  </a:txBody>
+                  <a:tcPr marL="91440" marR="91440" marT="45720" marB="45720" anchor="ctr">
+                    <a:lnL w="6350" cap="flat" cmpd="sng" algn="ctr">
+                      <a:solidFill>
+                        <a:srgbClr val="D6DEE1"/>
+                      </a:solidFill>
+                      <a:prstDash val="solid"/>
+                      <a:round/>
+                      <a:headEnd type="none" w="med" len="med"/>
+                      <a:tailEnd type="none" w="med" len="med"/>
+                    </a:lnL>
+                    <a:lnR w="6350" cap="flat" cmpd="sng" algn="ctr">
+                      <a:solidFill>
+                        <a:srgbClr val="D6DEE1"/>
+                      </a:solidFill>
+                      <a:prstDash val="solid"/>
+                      <a:round/>
+                      <a:headEnd type="none" w="med" len="med"/>
+                      <a:tailEnd type="none" w="med" len="med"/>
+                    </a:lnR>
+                    <a:lnT w="6350" cap="flat" cmpd="sng" algn="ctr">
+                      <a:solidFill>
+                        <a:srgbClr val="D6DEE1"/>
+                      </a:solidFill>
+                      <a:prstDash val="solid"/>
+                      <a:round/>
+                      <a:headEnd type="none" w="med" len="med"/>
+                      <a:tailEnd type="none" w="med" len="med"/>
+                    </a:lnT>
+                    <a:lnB w="6350" cap="flat" cmpd="sng" algn="ctr">
+                      <a:solidFill>
+                        <a:srgbClr val="D6DEE1"/>
+                      </a:solidFill>
+                      <a:prstDash val="solid"/>
+                      <a:round/>
+                      <a:headEnd type="none" w="med" len="med"/>
+                      <a:tailEnd type="none" w="med" len="med"/>
+                    </a:lnB>
+                    <a:solidFill>
+                      <a:srgbClr val="FBF2EA"/>
+                    </a:solidFill>
+                  </a:tcPr>
+                </a:tc>
               </a:tr>
               <a:tr h="338328">
                 <a:tc>
@@ -34456,6 +36070,74 @@
                           <a:cs typeface="Calibri" pitchFamily="34" charset="-120"/>
                         </a:rPr>
                         <a:t>1.68</a:t>
+                      </a:r>
+                      <a:endParaRPr lang="en-US" sz="1100" dirty="0">
+                        <a:latin typeface="Calibri" charset="0"/>
+                        <a:ea typeface="Calibri" charset="0"/>
+                        <a:cs typeface="Calibri" charset="0"/>
+                      </a:endParaRPr>
+                    </a:p>
+                  </a:txBody>
+                  <a:tcPr marL="91440" marR="91440" marT="45720" marB="45720" anchor="ctr">
+                    <a:lnL w="6350" cap="flat" cmpd="sng" algn="ctr">
+                      <a:solidFill>
+                        <a:srgbClr val="D6DEE1"/>
+                      </a:solidFill>
+                      <a:prstDash val="solid"/>
+                      <a:round/>
+                      <a:headEnd type="none" w="med" len="med"/>
+                      <a:tailEnd type="none" w="med" len="med"/>
+                    </a:lnL>
+                    <a:lnR w="6350" cap="flat" cmpd="sng" algn="ctr">
+                      <a:solidFill>
+                        <a:srgbClr val="D6DEE1"/>
+                      </a:solidFill>
+                      <a:prstDash val="solid"/>
+                      <a:round/>
+                      <a:headEnd type="none" w="med" len="med"/>
+                      <a:tailEnd type="none" w="med" len="med"/>
+                    </a:lnR>
+                    <a:lnT w="6350" cap="flat" cmpd="sng" algn="ctr">
+                      <a:solidFill>
+                        <a:srgbClr val="D6DEE1"/>
+                      </a:solidFill>
+                      <a:prstDash val="solid"/>
+                      <a:round/>
+                      <a:headEnd type="none" w="med" len="med"/>
+                      <a:tailEnd type="none" w="med" len="med"/>
+                    </a:lnT>
+                    <a:lnB w="6350" cap="flat" cmpd="sng" algn="ctr">
+                      <a:solidFill>
+                        <a:srgbClr val="D6DEE1"/>
+                      </a:solidFill>
+                      <a:prstDash val="solid"/>
+                      <a:round/>
+                      <a:headEnd type="none" w="med" len="med"/>
+                      <a:tailEnd type="none" w="med" len="med"/>
+                    </a:lnB>
+                    <a:solidFill>
+                      <a:srgbClr val="FBF2EA"/>
+                    </a:solidFill>
+                  </a:tcPr>
+                </a:tc>
+                <a:tc>
+                  <a:txBody>
+                    <a:bodyPr/>
+                    <a:lstStyle/>
+                    <a:p>
+                      <a:pPr algn="ctr" indent="0" marL="0">
+                        <a:buNone/>
+                      </a:pPr>
+                      <a:r>
+                        <a:rPr lang="en-US" sz="1100" dirty="0">
+                          <a:solidFill>
+                            <a:srgbClr val="8A5A2B"/>
+                          </a:solidFill>
+                          <a:latin typeface="Calibri" pitchFamily="34" charset="0"/>
+                          <a:ea typeface="Calibri" pitchFamily="34" charset="-122"/>
+                          <a:cs typeface="Calibri" pitchFamily="34" charset="-120"/>
+                        </a:rPr>
+                        <a:t>2.30</a:t>
                       </a:r>
                       <a:endParaRPr lang="en-US" sz="1100" dirty="0">
                         <a:latin typeface="Calibri" charset="0"/>
@@ -34984,6 +36666,74 @@
                     </a:solidFill>
                   </a:tcPr>
                 </a:tc>
+                <a:tc>
+                  <a:txBody>
+                    <a:bodyPr/>
+                    <a:lstStyle/>
+                    <a:p>
+                      <a:pPr algn="ctr" indent="0" marL="0">
+                        <a:buNone/>
+                      </a:pPr>
+                      <a:r>
+                        <a:rPr lang="en-US" sz="1100" b="1" dirty="0">
+                          <a:solidFill>
+                            <a:srgbClr val="1C3F4E"/>
+                          </a:solidFill>
+                          <a:latin typeface="Calibri" pitchFamily="34" charset="0"/>
+                          <a:ea typeface="Calibri" pitchFamily="34" charset="-122"/>
+                          <a:cs typeface="Calibri" pitchFamily="34" charset="-120"/>
+                        </a:rPr>
+                        <a:t>1.31</a:t>
+                      </a:r>
+                      <a:endParaRPr lang="en-US" sz="1100" dirty="0">
+                        <a:latin typeface="Calibri" charset="0"/>
+                        <a:ea typeface="Calibri" charset="0"/>
+                        <a:cs typeface="Calibri" charset="0"/>
+                      </a:endParaRPr>
+                    </a:p>
+                  </a:txBody>
+                  <a:tcPr marL="91440" marR="91440" marT="45720" marB="45720" anchor="ctr">
+                    <a:lnL w="6350" cap="flat" cmpd="sng" algn="ctr">
+                      <a:solidFill>
+                        <a:srgbClr val="D6DEE1"/>
+                      </a:solidFill>
+                      <a:prstDash val="solid"/>
+                      <a:round/>
+                      <a:headEnd type="none" w="med" len="med"/>
+                      <a:tailEnd type="none" w="med" len="med"/>
+                    </a:lnL>
+                    <a:lnR w="6350" cap="flat" cmpd="sng" algn="ctr">
+                      <a:solidFill>
+                        <a:srgbClr val="D6DEE1"/>
+                      </a:solidFill>
+                      <a:prstDash val="solid"/>
+                      <a:round/>
+                      <a:headEnd type="none" w="med" len="med"/>
+                      <a:tailEnd type="none" w="med" len="med"/>
+                    </a:lnR>
+                    <a:lnT w="6350" cap="flat" cmpd="sng" algn="ctr">
+                      <a:solidFill>
+                        <a:srgbClr val="D6DEE1"/>
+                      </a:solidFill>
+                      <a:prstDash val="solid"/>
+                      <a:round/>
+                      <a:headEnd type="none" w="med" len="med"/>
+                      <a:tailEnd type="none" w="med" len="med"/>
+                    </a:lnT>
+                    <a:lnB w="6350" cap="flat" cmpd="sng" algn="ctr">
+                      <a:solidFill>
+                        <a:srgbClr val="D6DEE1"/>
+                      </a:solidFill>
+                      <a:prstDash val="solid"/>
+                      <a:round/>
+                      <a:headEnd type="none" w="med" len="med"/>
+                      <a:tailEnd type="none" w="med" len="med"/>
+                    </a:lnB>
+                    <a:solidFill>
+                      <a:srgbClr val="EEF2F3"/>
+                    </a:solidFill>
+                  </a:tcPr>
+                </a:tc>
               </a:tr>
               <a:tr h="338328">
                 <a:tc>
@@ -35412,6 +37162,74 @@
                           <a:cs typeface="Calibri" pitchFamily="34" charset="-120"/>
                         </a:rPr>
                         <a:t>6.09</a:t>
+                      </a:r>
+                      <a:endParaRPr lang="en-US" sz="1100" dirty="0">
+                        <a:latin typeface="Calibri" charset="0"/>
+                        <a:ea typeface="Calibri" charset="0"/>
+                        <a:cs typeface="Calibri" charset="0"/>
+                      </a:endParaRPr>
+                    </a:p>
+                  </a:txBody>
+                  <a:tcPr marL="91440" marR="91440" marT="45720" marB="45720" anchor="ctr">
+                    <a:lnL w="6350" cap="flat" cmpd="sng" algn="ctr">
+                      <a:solidFill>
+                        <a:srgbClr val="D6DEE1"/>
+                      </a:solidFill>
+                      <a:prstDash val="solid"/>
+                      <a:round/>
+                      <a:headEnd type="none" w="med" len="med"/>
+                      <a:tailEnd type="none" w="med" len="med"/>
+                    </a:lnL>
+                    <a:lnR w="6350" cap="flat" cmpd="sng" algn="ctr">
+                      <a:solidFill>
+                        <a:srgbClr val="D6DEE1"/>
+                      </a:solidFill>
+                      <a:prstDash val="solid"/>
+                      <a:round/>
+                      <a:headEnd type="none" w="med" len="med"/>
+                      <a:tailEnd type="none" w="med" len="med"/>
+                    </a:lnR>
+                    <a:lnT w="6350" cap="flat" cmpd="sng" algn="ctr">
+                      <a:solidFill>
+                        <a:srgbClr val="D6DEE1"/>
+                      </a:solidFill>
+                      <a:prstDash val="solid"/>
+                      <a:round/>
+                      <a:headEnd type="none" w="med" len="med"/>
+                      <a:tailEnd type="none" w="med" len="med"/>
+                    </a:lnT>
+                    <a:lnB w="6350" cap="flat" cmpd="sng" algn="ctr">
+                      <a:solidFill>
+                        <a:srgbClr val="D6DEE1"/>
+                      </a:solidFill>
+                      <a:prstDash val="solid"/>
+                      <a:round/>
+                      <a:headEnd type="none" w="med" len="med"/>
+                      <a:tailEnd type="none" w="med" len="med"/>
+                    </a:lnB>
+                    <a:solidFill>
+                      <a:srgbClr val="FBF2EA"/>
+                    </a:solidFill>
+                  </a:tcPr>
+                </a:tc>
+                <a:tc>
+                  <a:txBody>
+                    <a:bodyPr/>
+                    <a:lstStyle/>
+                    <a:p>
+                      <a:pPr algn="ctr" indent="0" marL="0">
+                        <a:buNone/>
+                      </a:pPr>
+                      <a:r>
+                        <a:rPr lang="en-US" sz="1100" dirty="0">
+                          <a:solidFill>
+                            <a:srgbClr val="8A5A2B"/>
+                          </a:solidFill>
+                          <a:latin typeface="Calibri" pitchFamily="34" charset="0"/>
+                          <a:ea typeface="Calibri" pitchFamily="34" charset="-122"/>
+                          <a:cs typeface="Calibri" pitchFamily="34" charset="-120"/>
+                        </a:rPr>
+                        <a:t>12.81</a:t>
                       </a:r>
                       <a:endParaRPr lang="en-US" sz="1100" dirty="0">
                         <a:latin typeface="Calibri" charset="0"/>
@@ -35890,6 +37708,74 @@
                           <a:cs typeface="Calibri" pitchFamily="34" charset="-120"/>
                         </a:rPr>
                         <a:t>13.7 %</a:t>
+                      </a:r>
+                      <a:endParaRPr lang="en-US" sz="1100" dirty="0">
+                        <a:latin typeface="Calibri" charset="0"/>
+                        <a:ea typeface="Calibri" charset="0"/>
+                        <a:cs typeface="Calibri" charset="0"/>
+                      </a:endParaRPr>
+                    </a:p>
+                  </a:txBody>
+                  <a:tcPr marL="91440" marR="91440" marT="45720" marB="45720" anchor="ctr">
+                    <a:lnL w="6350" cap="flat" cmpd="sng" algn="ctr">
+                      <a:solidFill>
+                        <a:srgbClr val="D6DEE1"/>
+                      </a:solidFill>
+                      <a:prstDash val="solid"/>
+                      <a:round/>
+                      <a:headEnd type="none" w="med" len="med"/>
+                      <a:tailEnd type="none" w="med" len="med"/>
+                    </a:lnL>
+                    <a:lnR w="6350" cap="flat" cmpd="sng" algn="ctr">
+                      <a:solidFill>
+                        <a:srgbClr val="D6DEE1"/>
+                      </a:solidFill>
+                      <a:prstDash val="solid"/>
+                      <a:round/>
+                      <a:headEnd type="none" w="med" len="med"/>
+                      <a:tailEnd type="none" w="med" len="med"/>
+                    </a:lnR>
+                    <a:lnT w="6350" cap="flat" cmpd="sng" algn="ctr">
+                      <a:solidFill>
+                        <a:srgbClr val="D6DEE1"/>
+                      </a:solidFill>
+                      <a:prstDash val="solid"/>
+                      <a:round/>
+                      <a:headEnd type="none" w="med" len="med"/>
+                      <a:tailEnd type="none" w="med" len="med"/>
+                    </a:lnT>
+                    <a:lnB w="6350" cap="flat" cmpd="sng" algn="ctr">
+                      <a:solidFill>
+                        <a:srgbClr val="D6DEE1"/>
+                      </a:solidFill>
+                      <a:prstDash val="solid"/>
+                      <a:round/>
+                      <a:headEnd type="none" w="med" len="med"/>
+                      <a:tailEnd type="none" w="med" len="med"/>
+                    </a:lnB>
+                    <a:solidFill>
+                      <a:srgbClr val="1C3F4E"/>
+                    </a:solidFill>
+                  </a:tcPr>
+                </a:tc>
+                <a:tc>
+                  <a:txBody>
+                    <a:bodyPr/>
+                    <a:lstStyle/>
+                    <a:p>
+                      <a:pPr algn="ctr" indent="0" marL="0">
+                        <a:buNone/>
+                      </a:pPr>
+                      <a:r>
+                        <a:rPr lang="en-US" sz="1100" b="1" dirty="0">
+                          <a:solidFill>
+                            <a:srgbClr val="FFFFFF"/>
+                          </a:solidFill>
+                          <a:latin typeface="Calibri" pitchFamily="34" charset="0"/>
+                          <a:ea typeface="Calibri" pitchFamily="34" charset="-122"/>
+                          <a:cs typeface="Calibri" pitchFamily="34" charset="-120"/>
+                        </a:rPr>
+                        <a:t>7.7 %</a:t>
                       </a:r>
                       <a:endParaRPr lang="en-US" sz="1100" dirty="0">
                         <a:latin typeface="Calibri" charset="0"/>
@@ -36348,8 +38234,8 @@
         </p:nvSpPr>
         <p:spPr>
           <a:xfrm>
-            <a:off x="7772400" y="2194560"/>
-            <a:ext cx="3703320" cy="3017520"/>
+            <a:off x="7772400" y="2157984"/>
+            <a:ext cx="3703320" cy="3163824"/>
           </a:xfrm>
           <a:prstGeom prst="rect">
             <a:avLst/>
@@ -36365,7 +38251,7 @@
               <a:buNone/>
             </a:pPr>
             <a:r>
-              <a:rPr lang="en-US" sz="1150" b="1" dirty="0">
+              <a:rPr lang="en-US" sz="1050" b="1" dirty="0">
                 <a:solidFill>
                   <a:srgbClr val="2B3A42"/>
                 </a:solidFill>
@@ -36375,14 +38261,14 @@
               </a:rPr>
               <a:t>Países Bajos y Alemania encabezan</a:t>
             </a:r>
-            <a:endParaRPr lang="en-US" sz="1150" dirty="0"/>
+            <a:endParaRPr lang="en-US" sz="1050" dirty="0"/>
           </a:p>
           <a:p>
             <a:pPr indent="0" marL="0">
               <a:buNone/>
             </a:pPr>
             <a:r>
-              <a:rPr lang="en-US" sz="1150" dirty="0">
+              <a:rPr lang="en-US" sz="1050" dirty="0">
                 <a:solidFill>
                   <a:srgbClr val="2B3A42"/>
                 </a:solidFill>
@@ -36390,17 +38276,17 @@
                 <a:ea typeface="Calibri" pitchFamily="34" charset="-122"/>
                 <a:cs typeface="Calibri" pitchFamily="34" charset="-120"/>
               </a:rPr>
-              <a:t>por la misma razón: el menor coste del riesgo de los seis (0,35 % y 0,40 %) y la menor densidad de RWA (37 % y 35 %), que reduce el capital a inmovilizar.
+              <a:t>por la misma razón: un coste del riesgo bajo (0,35 % y 0,40 %) y la menor densidad de RWA (37 % y 35 %), que reduce el capital a inmovilizar.
 </a:t>
             </a:r>
-            <a:endParaRPr lang="en-US" sz="1150" dirty="0"/>
+            <a:endParaRPr lang="en-US" sz="1050" dirty="0"/>
           </a:p>
           <a:p>
             <a:pPr indent="0" marL="0">
               <a:buNone/>
             </a:pPr>
             <a:r>
-              <a:rPr lang="en-US" sz="1150" b="1" dirty="0">
+              <a:rPr lang="en-US" sz="1050" b="1" dirty="0">
                 <a:solidFill>
                   <a:srgbClr val="2B3A42"/>
                 </a:solidFill>
@@ -36410,14 +38296,14 @@
               </a:rPr>
               <a:t>España cae al quinto puesto</a:t>
             </a:r>
-            <a:endParaRPr lang="en-US" sz="1150" dirty="0"/>
+            <a:endParaRPr lang="en-US" sz="1050" dirty="0"/>
           </a:p>
           <a:p>
             <a:pPr indent="0" marL="0">
               <a:buNone/>
             </a:pPr>
             <a:r>
-              <a:rPr lang="en-US" sz="1150" dirty="0">
+              <a:rPr lang="en-US" sz="1050" dirty="0">
                 <a:solidFill>
                   <a:srgbClr val="2B3A42"/>
                 </a:solidFill>
@@ -36425,17 +38311,52 @@
                 <a:ea typeface="Calibri" pitchFamily="34" charset="-122"/>
                 <a:cs typeface="Calibri" pitchFamily="34" charset="-120"/>
               </a:rPr>
-              <a:t>por combinar el precio más bajo con una densidad de RWA del 59,5 %, la segunda mayor: cada euro de préstamo PYME consume casi el doble de capital que en Alemania.
+              <a:t>por combinar el precio más bajo con una densidad de RWA del 59,5 %: consume casi el doble de capital que Alemania.
 </a:t>
             </a:r>
-            <a:endParaRPr lang="en-US" sz="1150" dirty="0"/>
+            <a:endParaRPr lang="en-US" sz="1050" dirty="0"/>
           </a:p>
           <a:p>
             <a:pPr indent="0" marL="0">
               <a:buNone/>
             </a:pPr>
             <a:r>
-              <a:rPr lang="en-US" sz="1150" b="1" dirty="0">
+              <a:rPr lang="en-US" sz="1050" b="1" dirty="0">
+                <a:solidFill>
+                  <a:srgbClr val="2B3A42"/>
+                </a:solidFill>
+                <a:latin typeface="Calibri" pitchFamily="34" charset="0"/>
+                <a:ea typeface="Calibri" pitchFamily="34" charset="-122"/>
+                <a:cs typeface="Calibri" pitchFamily="34" charset="-120"/>
+              </a:rPr>
+              <a:t>Irlanda lo ilustra al revés</a:t>
+            </a:r>
+            <a:endParaRPr lang="en-US" sz="1050" dirty="0"/>
+          </a:p>
+          <a:p>
+            <a:pPr indent="0" marL="0">
+              <a:buNone/>
+            </a:pPr>
+            <a:r>
+              <a:rPr lang="en-US" sz="1050" dirty="0">
+                <a:solidFill>
+                  <a:srgbClr val="2B3A42"/>
+                </a:solidFill>
+                <a:latin typeface="Calibri" pitchFamily="34" charset="0"/>
+                <a:ea typeface="Calibri" pitchFamily="34" charset="-122"/>
+                <a:cs typeface="Calibri" pitchFamily="34" charset="-120"/>
+              </a:rPr>
+              <a:t>— precio más alto (5,37 %) y mejor PD, pero densidad del 70 % y cost-income del 57 %: se queda en 7,7 %.
+</a:t>
+            </a:r>
+            <a:endParaRPr lang="en-US" sz="1050" dirty="0"/>
+          </a:p>
+          <a:p>
+            <a:pPr indent="0" marL="0">
+              <a:buNone/>
+            </a:pPr>
+            <a:r>
+              <a:rPr lang="en-US" sz="1050" b="1" dirty="0">
                 <a:solidFill>
                   <a:srgbClr val="2B3A42"/>
                 </a:solidFill>
@@ -36445,14 +38366,14 @@
               </a:rPr>
               <a:t>Francia queda última</a:t>
             </a:r>
-            <a:endParaRPr lang="en-US" sz="1150" dirty="0"/>
+            <a:endParaRPr lang="en-US" sz="1050" dirty="0"/>
           </a:p>
           <a:p>
             <a:pPr indent="0" marL="0">
               <a:buNone/>
             </a:pPr>
             <a:r>
-              <a:rPr lang="en-US" sz="1150" dirty="0">
+              <a:rPr lang="en-US" sz="1050" dirty="0">
                 <a:solidFill>
                   <a:srgbClr val="2B3A42"/>
                 </a:solidFill>
@@ -36462,7 +38383,7 @@
               </a:rPr>
               <a:t>con un 1,7 %, y en negativo si no se asume comisión alguna.</a:t>
             </a:r>
-            <a:endParaRPr lang="en-US" sz="1150" dirty="0"/>
+            <a:endParaRPr lang="en-US" sz="1050" dirty="0"/>
           </a:p>
         </p:txBody>
       </p:sp>
@@ -36623,7 +38544,7 @@
           </p:nvPr>
         </p:nvGraphicFramePr>
         <p:xfrm>
-          <a:off x="548640" y="1691640"/>
+          <a:off x="548640" y="1664208"/>
           <a:ext cx="11091672" cy="914400"/>
         </p:xfrm>
         <a:graphic>
@@ -36632,14 +38553,14 @@
               <a:tblPr/>
               <a:tblGrid>
                 <a:gridCol w="2468880"/>
-                <a:gridCol w="1440180"/>
-                <a:gridCol w="1440180"/>
-                <a:gridCol w="1440180"/>
-                <a:gridCol w="1440180"/>
-                <a:gridCol w="1440180"/>
-                <a:gridCol w="1440180"/>
+                <a:gridCol w="1437437"/>
+                <a:gridCol w="1437437"/>
+                <a:gridCol w="1437437"/>
+                <a:gridCol w="1437437"/>
+                <a:gridCol w="1437437"/>
+                <a:gridCol w="1437437"/>
               </a:tblGrid>
-              <a:tr h="420624">
+              <a:tr h="365760">
                 <a:tc>
                   <a:txBody>
                     <a:bodyPr/>
@@ -37117,7 +39038,7 @@
                   </a:tcPr>
                 </a:tc>
               </a:tr>
-              <a:tr h="420624">
+              <a:tr h="365760">
                 <a:tc>
                   <a:txBody>
                     <a:bodyPr/>
@@ -37577,7 +39498,7 @@
                   </a:tcPr>
                 </a:tc>
               </a:tr>
-              <a:tr h="420624">
+              <a:tr h="365760">
                 <a:tc>
                   <a:txBody>
                     <a:bodyPr/>
@@ -38037,7 +39958,7 @@
                   </a:tcPr>
                 </a:tc>
               </a:tr>
-              <a:tr h="420624">
+              <a:tr h="365760">
                 <a:tc>
                   <a:txBody>
                     <a:bodyPr/>
@@ -38497,7 +40418,7 @@
                   </a:tcPr>
                 </a:tc>
               </a:tr>
-              <a:tr h="420624">
+              <a:tr h="365760">
                 <a:tc>
                   <a:txBody>
                     <a:bodyPr/>
@@ -38957,7 +40878,7 @@
                   </a:tcPr>
                 </a:tc>
               </a:tr>
-              <a:tr h="420624">
+              <a:tr h="365760">
                 <a:tc>
                   <a:txBody>
                     <a:bodyPr/>
@@ -39417,7 +41338,7 @@
                   </a:tcPr>
                 </a:tc>
               </a:tr>
-              <a:tr h="420624">
+              <a:tr h="365760">
                 <a:tc>
                   <a:txBody>
                     <a:bodyPr/>
@@ -39877,6 +41798,466 @@
                   </a:tcPr>
                 </a:tc>
               </a:tr>
+              <a:tr h="365760">
+                <a:tc>
+                  <a:txBody>
+                    <a:bodyPr/>
+                    <a:lstStyle/>
+                    <a:p>
+                      <a:pPr algn="l" indent="0" marL="0">
+                        <a:buNone/>
+                      </a:pPr>
+                      <a:r>
+                        <a:rPr lang="en-US" sz="1100" b="1" dirty="0">
+                          <a:solidFill>
+                            <a:srgbClr val="2B3A42"/>
+                          </a:solidFill>
+                          <a:latin typeface="Calibri" pitchFamily="34" charset="0"/>
+                          <a:ea typeface="Calibri" pitchFamily="34" charset="-122"/>
+                          <a:cs typeface="Calibri" pitchFamily="34" charset="-120"/>
+                        </a:rPr>
+                        <a:t>Irlanda</a:t>
+                      </a:r>
+                      <a:endParaRPr lang="en-US" sz="1100" dirty="0">
+                        <a:latin typeface="Calibri" charset="0"/>
+                        <a:ea typeface="Calibri" charset="0"/>
+                        <a:cs typeface="Calibri" charset="0"/>
+                      </a:endParaRPr>
+                    </a:p>
+                  </a:txBody>
+                  <a:tcPr marL="91440" marR="91440" marT="45720" marB="45720" anchor="ctr">
+                    <a:lnL w="6350" cap="flat" cmpd="sng" algn="ctr">
+                      <a:solidFill>
+                        <a:srgbClr val="D6DEE1"/>
+                      </a:solidFill>
+                      <a:prstDash val="solid"/>
+                      <a:round/>
+                      <a:headEnd type="none" w="med" len="med"/>
+                      <a:tailEnd type="none" w="med" len="med"/>
+                    </a:lnL>
+                    <a:lnR w="6350" cap="flat" cmpd="sng" algn="ctr">
+                      <a:solidFill>
+                        <a:srgbClr val="D6DEE1"/>
+                      </a:solidFill>
+                      <a:prstDash val="solid"/>
+                      <a:round/>
+                      <a:headEnd type="none" w="med" len="med"/>
+                      <a:tailEnd type="none" w="med" len="med"/>
+                    </a:lnR>
+                    <a:lnT w="6350" cap="flat" cmpd="sng" algn="ctr">
+                      <a:solidFill>
+                        <a:srgbClr val="D6DEE1"/>
+                      </a:solidFill>
+                      <a:prstDash val="solid"/>
+                      <a:round/>
+                      <a:headEnd type="none" w="med" len="med"/>
+                      <a:tailEnd type="none" w="med" len="med"/>
+                    </a:lnT>
+                    <a:lnB w="6350" cap="flat" cmpd="sng" algn="ctr">
+                      <a:solidFill>
+                        <a:srgbClr val="D6DEE1"/>
+                      </a:solidFill>
+                      <a:prstDash val="solid"/>
+                      <a:round/>
+                      <a:headEnd type="none" w="med" len="med"/>
+                      <a:tailEnd type="none" w="med" len="med"/>
+                    </a:lnB>
+                  </a:tcPr>
+                </a:tc>
+                <a:tc>
+                  <a:txBody>
+                    <a:bodyPr/>
+                    <a:lstStyle/>
+                    <a:p>
+                      <a:pPr algn="ctr" indent="0" marL="0">
+                        <a:buNone/>
+                      </a:pPr>
+                      <a:r>
+                        <a:rPr lang="en-US" sz="1100" dirty="0">
+                          <a:solidFill>
+                            <a:srgbClr val="2B3A42"/>
+                          </a:solidFill>
+                          <a:latin typeface="Calibri" pitchFamily="34" charset="0"/>
+                          <a:ea typeface="Calibri" pitchFamily="34" charset="-122"/>
+                          <a:cs typeface="Calibri" pitchFamily="34" charset="-120"/>
+                        </a:rPr>
+                        <a:t>5.5 %</a:t>
+                      </a:r>
+                      <a:endParaRPr lang="en-US" sz="1100" dirty="0">
+                        <a:latin typeface="Calibri" charset="0"/>
+                        <a:ea typeface="Calibri" charset="0"/>
+                        <a:cs typeface="Calibri" charset="0"/>
+                      </a:endParaRPr>
+                    </a:p>
+                  </a:txBody>
+                  <a:tcPr marL="91440" marR="91440" marT="45720" marB="45720" anchor="ctr">
+                    <a:lnL w="6350" cap="flat" cmpd="sng" algn="ctr">
+                      <a:solidFill>
+                        <a:srgbClr val="D6DEE1"/>
+                      </a:solidFill>
+                      <a:prstDash val="solid"/>
+                      <a:round/>
+                      <a:headEnd type="none" w="med" len="med"/>
+                      <a:tailEnd type="none" w="med" len="med"/>
+                    </a:lnL>
+                    <a:lnR w="6350" cap="flat" cmpd="sng" algn="ctr">
+                      <a:solidFill>
+                        <a:srgbClr val="D6DEE1"/>
+                      </a:solidFill>
+                      <a:prstDash val="solid"/>
+                      <a:round/>
+                      <a:headEnd type="none" w="med" len="med"/>
+                      <a:tailEnd type="none" w="med" len="med"/>
+                    </a:lnR>
+                    <a:lnT w="6350" cap="flat" cmpd="sng" algn="ctr">
+                      <a:solidFill>
+                        <a:srgbClr val="D6DEE1"/>
+                      </a:solidFill>
+                      <a:prstDash val="solid"/>
+                      <a:round/>
+                      <a:headEnd type="none" w="med" len="med"/>
+                      <a:tailEnd type="none" w="med" len="med"/>
+                    </a:lnT>
+                    <a:lnB w="6350" cap="flat" cmpd="sng" algn="ctr">
+                      <a:solidFill>
+                        <a:srgbClr val="D6DEE1"/>
+                      </a:solidFill>
+                      <a:prstDash val="solid"/>
+                      <a:round/>
+                      <a:headEnd type="none" w="med" len="med"/>
+                      <a:tailEnd type="none" w="med" len="med"/>
+                    </a:lnB>
+                  </a:tcPr>
+                </a:tc>
+                <a:tc>
+                  <a:txBody>
+                    <a:bodyPr/>
+                    <a:lstStyle/>
+                    <a:p>
+                      <a:pPr algn="ctr" indent="0" marL="0">
+                        <a:buNone/>
+                      </a:pPr>
+                      <a:r>
+                        <a:rPr lang="en-US" sz="1100" dirty="0">
+                          <a:solidFill>
+                            <a:srgbClr val="2B3A42"/>
+                          </a:solidFill>
+                          <a:latin typeface="Calibri" pitchFamily="34" charset="0"/>
+                          <a:ea typeface="Calibri" pitchFamily="34" charset="-122"/>
+                          <a:cs typeface="Calibri" pitchFamily="34" charset="-120"/>
+                        </a:rPr>
+                        <a:t>6.1 %</a:t>
+                      </a:r>
+                      <a:endParaRPr lang="en-US" sz="1100" dirty="0">
+                        <a:latin typeface="Calibri" charset="0"/>
+                        <a:ea typeface="Calibri" charset="0"/>
+                        <a:cs typeface="Calibri" charset="0"/>
+                      </a:endParaRPr>
+                    </a:p>
+                  </a:txBody>
+                  <a:tcPr marL="91440" marR="91440" marT="45720" marB="45720" anchor="ctr">
+                    <a:lnL w="6350" cap="flat" cmpd="sng" algn="ctr">
+                      <a:solidFill>
+                        <a:srgbClr val="D6DEE1"/>
+                      </a:solidFill>
+                      <a:prstDash val="solid"/>
+                      <a:round/>
+                      <a:headEnd type="none" w="med" len="med"/>
+                      <a:tailEnd type="none" w="med" len="med"/>
+                    </a:lnL>
+                    <a:lnR w="6350" cap="flat" cmpd="sng" algn="ctr">
+                      <a:solidFill>
+                        <a:srgbClr val="D6DEE1"/>
+                      </a:solidFill>
+                      <a:prstDash val="solid"/>
+                      <a:round/>
+                      <a:headEnd type="none" w="med" len="med"/>
+                      <a:tailEnd type="none" w="med" len="med"/>
+                    </a:lnR>
+                    <a:lnT w="6350" cap="flat" cmpd="sng" algn="ctr">
+                      <a:solidFill>
+                        <a:srgbClr val="D6DEE1"/>
+                      </a:solidFill>
+                      <a:prstDash val="solid"/>
+                      <a:round/>
+                      <a:headEnd type="none" w="med" len="med"/>
+                      <a:tailEnd type="none" w="med" len="med"/>
+                    </a:lnT>
+                    <a:lnB w="6350" cap="flat" cmpd="sng" algn="ctr">
+                      <a:solidFill>
+                        <a:srgbClr val="D6DEE1"/>
+                      </a:solidFill>
+                      <a:prstDash val="solid"/>
+                      <a:round/>
+                      <a:headEnd type="none" w="med" len="med"/>
+                      <a:tailEnd type="none" w="med" len="med"/>
+                    </a:lnB>
+                  </a:tcPr>
+                </a:tc>
+                <a:tc>
+                  <a:txBody>
+                    <a:bodyPr/>
+                    <a:lstStyle/>
+                    <a:p>
+                      <a:pPr algn="ctr" indent="0" marL="0">
+                        <a:buNone/>
+                      </a:pPr>
+                      <a:r>
+                        <a:rPr lang="en-US" sz="1100" dirty="0">
+                          <a:solidFill>
+                            <a:srgbClr val="2B3A42"/>
+                          </a:solidFill>
+                          <a:latin typeface="Calibri" pitchFamily="34" charset="0"/>
+                          <a:ea typeface="Calibri" pitchFamily="34" charset="-122"/>
+                          <a:cs typeface="Calibri" pitchFamily="34" charset="-120"/>
+                        </a:rPr>
+                        <a:t>6.7 %</a:t>
+                      </a:r>
+                      <a:endParaRPr lang="en-US" sz="1100" dirty="0">
+                        <a:latin typeface="Calibri" charset="0"/>
+                        <a:ea typeface="Calibri" charset="0"/>
+                        <a:cs typeface="Calibri" charset="0"/>
+                      </a:endParaRPr>
+                    </a:p>
+                  </a:txBody>
+                  <a:tcPr marL="91440" marR="91440" marT="45720" marB="45720" anchor="ctr">
+                    <a:lnL w="6350" cap="flat" cmpd="sng" algn="ctr">
+                      <a:solidFill>
+                        <a:srgbClr val="D6DEE1"/>
+                      </a:solidFill>
+                      <a:prstDash val="solid"/>
+                      <a:round/>
+                      <a:headEnd type="none" w="med" len="med"/>
+                      <a:tailEnd type="none" w="med" len="med"/>
+                    </a:lnL>
+                    <a:lnR w="6350" cap="flat" cmpd="sng" algn="ctr">
+                      <a:solidFill>
+                        <a:srgbClr val="D6DEE1"/>
+                      </a:solidFill>
+                      <a:prstDash val="solid"/>
+                      <a:round/>
+                      <a:headEnd type="none" w="med" len="med"/>
+                      <a:tailEnd type="none" w="med" len="med"/>
+                    </a:lnR>
+                    <a:lnT w="6350" cap="flat" cmpd="sng" algn="ctr">
+                      <a:solidFill>
+                        <a:srgbClr val="D6DEE1"/>
+                      </a:solidFill>
+                      <a:prstDash val="solid"/>
+                      <a:round/>
+                      <a:headEnd type="none" w="med" len="med"/>
+                      <a:tailEnd type="none" w="med" len="med"/>
+                    </a:lnT>
+                    <a:lnB w="6350" cap="flat" cmpd="sng" algn="ctr">
+                      <a:solidFill>
+                        <a:srgbClr val="D6DEE1"/>
+                      </a:solidFill>
+                      <a:prstDash val="solid"/>
+                      <a:round/>
+                      <a:headEnd type="none" w="med" len="med"/>
+                      <a:tailEnd type="none" w="med" len="med"/>
+                    </a:lnB>
+                  </a:tcPr>
+                </a:tc>
+                <a:tc>
+                  <a:txBody>
+                    <a:bodyPr/>
+                    <a:lstStyle/>
+                    <a:p>
+                      <a:pPr algn="ctr" indent="0" marL="0">
+                        <a:buNone/>
+                      </a:pPr>
+                      <a:r>
+                        <a:rPr lang="en-US" sz="1100" b="1" dirty="0">
+                          <a:solidFill>
+                            <a:srgbClr val="8A5A2B"/>
+                          </a:solidFill>
+                          <a:latin typeface="Calibri" pitchFamily="34" charset="0"/>
+                          <a:ea typeface="Calibri" pitchFamily="34" charset="-122"/>
+                          <a:cs typeface="Calibri" pitchFamily="34" charset="-120"/>
+                        </a:rPr>
+                        <a:t>7.6 %</a:t>
+                      </a:r>
+                      <a:endParaRPr lang="en-US" sz="1100" dirty="0">
+                        <a:latin typeface="Calibri" charset="0"/>
+                        <a:ea typeface="Calibri" charset="0"/>
+                        <a:cs typeface="Calibri" charset="0"/>
+                      </a:endParaRPr>
+                    </a:p>
+                  </a:txBody>
+                  <a:tcPr marL="91440" marR="91440" marT="45720" marB="45720" anchor="ctr">
+                    <a:lnL w="6350" cap="flat" cmpd="sng" algn="ctr">
+                      <a:solidFill>
+                        <a:srgbClr val="D6DEE1"/>
+                      </a:solidFill>
+                      <a:prstDash val="solid"/>
+                      <a:round/>
+                      <a:headEnd type="none" w="med" len="med"/>
+                      <a:tailEnd type="none" w="med" len="med"/>
+                    </a:lnL>
+                    <a:lnR w="6350" cap="flat" cmpd="sng" algn="ctr">
+                      <a:solidFill>
+                        <a:srgbClr val="D6DEE1"/>
+                      </a:solidFill>
+                      <a:prstDash val="solid"/>
+                      <a:round/>
+                      <a:headEnd type="none" w="med" len="med"/>
+                      <a:tailEnd type="none" w="med" len="med"/>
+                    </a:lnR>
+                    <a:lnT w="6350" cap="flat" cmpd="sng" algn="ctr">
+                      <a:solidFill>
+                        <a:srgbClr val="D6DEE1"/>
+                      </a:solidFill>
+                      <a:prstDash val="solid"/>
+                      <a:round/>
+                      <a:headEnd type="none" w="med" len="med"/>
+                      <a:tailEnd type="none" w="med" len="med"/>
+                    </a:lnT>
+                    <a:lnB w="6350" cap="flat" cmpd="sng" algn="ctr">
+                      <a:solidFill>
+                        <a:srgbClr val="D6DEE1"/>
+                      </a:solidFill>
+                      <a:prstDash val="solid"/>
+                      <a:round/>
+                      <a:headEnd type="none" w="med" len="med"/>
+                      <a:tailEnd type="none" w="med" len="med"/>
+                    </a:lnB>
+                    <a:solidFill>
+                      <a:srgbClr val="F7EDE4"/>
+                    </a:solidFill>
+                  </a:tcPr>
+                </a:tc>
+                <a:tc>
+                  <a:txBody>
+                    <a:bodyPr/>
+                    <a:lstStyle/>
+                    <a:p>
+                      <a:pPr algn="ctr" indent="0" marL="0">
+                        <a:buNone/>
+                      </a:pPr>
+                      <a:r>
+                        <a:rPr lang="en-US" sz="1100" dirty="0">
+                          <a:solidFill>
+                            <a:srgbClr val="2B3A42"/>
+                          </a:solidFill>
+                          <a:latin typeface="Calibri" pitchFamily="34" charset="0"/>
+                          <a:ea typeface="Calibri" pitchFamily="34" charset="-122"/>
+                          <a:cs typeface="Calibri" pitchFamily="34" charset="-120"/>
+                        </a:rPr>
+                        <a:t>8.0 %</a:t>
+                      </a:r>
+                      <a:endParaRPr lang="en-US" sz="1100" dirty="0">
+                        <a:latin typeface="Calibri" charset="0"/>
+                        <a:ea typeface="Calibri" charset="0"/>
+                        <a:cs typeface="Calibri" charset="0"/>
+                      </a:endParaRPr>
+                    </a:p>
+                  </a:txBody>
+                  <a:tcPr marL="91440" marR="91440" marT="45720" marB="45720" anchor="ctr">
+                    <a:lnL w="6350" cap="flat" cmpd="sng" algn="ctr">
+                      <a:solidFill>
+                        <a:srgbClr val="D6DEE1"/>
+                      </a:solidFill>
+                      <a:prstDash val="solid"/>
+                      <a:round/>
+                      <a:headEnd type="none" w="med" len="med"/>
+                      <a:tailEnd type="none" w="med" len="med"/>
+                    </a:lnL>
+                    <a:lnR w="6350" cap="flat" cmpd="sng" algn="ctr">
+                      <a:solidFill>
+                        <a:srgbClr val="D6DEE1"/>
+                      </a:solidFill>
+                      <a:prstDash val="solid"/>
+                      <a:round/>
+                      <a:headEnd type="none" w="med" len="med"/>
+                      <a:tailEnd type="none" w="med" len="med"/>
+                    </a:lnR>
+                    <a:lnT w="6350" cap="flat" cmpd="sng" algn="ctr">
+                      <a:solidFill>
+                        <a:srgbClr val="D6DEE1"/>
+                      </a:solidFill>
+                      <a:prstDash val="solid"/>
+                      <a:round/>
+                      <a:headEnd type="none" w="med" len="med"/>
+                      <a:tailEnd type="none" w="med" len="med"/>
+                    </a:lnT>
+                    <a:lnB w="6350" cap="flat" cmpd="sng" algn="ctr">
+                      <a:solidFill>
+                        <a:srgbClr val="D6DEE1"/>
+                      </a:solidFill>
+                      <a:prstDash val="solid"/>
+                      <a:round/>
+                      <a:headEnd type="none" w="med" len="med"/>
+                      <a:tailEnd type="none" w="med" len="med"/>
+                    </a:lnB>
+                  </a:tcPr>
+                </a:tc>
+                <a:tc>
+                  <a:txBody>
+                    <a:bodyPr/>
+                    <a:lstStyle/>
+                    <a:p>
+                      <a:pPr algn="ctr" indent="0" marL="0">
+                        <a:buNone/>
+                      </a:pPr>
+                      <a:r>
+                        <a:rPr lang="en-US" sz="1100" dirty="0">
+                          <a:solidFill>
+                            <a:srgbClr val="2B3A42"/>
+                          </a:solidFill>
+                          <a:latin typeface="Calibri" pitchFamily="34" charset="0"/>
+                          <a:ea typeface="Calibri" pitchFamily="34" charset="-122"/>
+                          <a:cs typeface="Calibri" pitchFamily="34" charset="-120"/>
+                        </a:rPr>
+                        <a:t>9.2 %</a:t>
+                      </a:r>
+                      <a:endParaRPr lang="en-US" sz="1100" dirty="0">
+                        <a:latin typeface="Calibri" charset="0"/>
+                        <a:ea typeface="Calibri" charset="0"/>
+                        <a:cs typeface="Calibri" charset="0"/>
+                      </a:endParaRPr>
+                    </a:p>
+                  </a:txBody>
+                  <a:tcPr marL="91440" marR="91440" marT="45720" marB="45720" anchor="ctr">
+                    <a:lnL w="6350" cap="flat" cmpd="sng" algn="ctr">
+                      <a:solidFill>
+                        <a:srgbClr val="D6DEE1"/>
+                      </a:solidFill>
+                      <a:prstDash val="solid"/>
+                      <a:round/>
+                      <a:headEnd type="none" w="med" len="med"/>
+                      <a:tailEnd type="none" w="med" len="med"/>
+                    </a:lnL>
+                    <a:lnR w="6350" cap="flat" cmpd="sng" algn="ctr">
+                      <a:solidFill>
+                        <a:srgbClr val="D6DEE1"/>
+                      </a:solidFill>
+                      <a:prstDash val="solid"/>
+                      <a:round/>
+                      <a:headEnd type="none" w="med" len="med"/>
+                      <a:tailEnd type="none" w="med" len="med"/>
+                    </a:lnR>
+                    <a:lnT w="6350" cap="flat" cmpd="sng" algn="ctr">
+                      <a:solidFill>
+                        <a:srgbClr val="D6DEE1"/>
+                      </a:solidFill>
+                      <a:prstDash val="solid"/>
+                      <a:round/>
+                      <a:headEnd type="none" w="med" len="med"/>
+                      <a:tailEnd type="none" w="med" len="med"/>
+                    </a:lnT>
+                    <a:lnB w="6350" cap="flat" cmpd="sng" algn="ctr">
+                      <a:solidFill>
+                        <a:srgbClr val="D6DEE1"/>
+                      </a:solidFill>
+                      <a:prstDash val="solid"/>
+                      <a:round/>
+                      <a:headEnd type="none" w="med" len="med"/>
+                      <a:tailEnd type="none" w="med" len="med"/>
+                    </a:lnB>
+                  </a:tcPr>
+                </a:tc>
+              </a:tr>
             </a:tbl>
           </a:graphicData>
         </a:graphic>
@@ -39889,12 +42270,12 @@
         </p:nvSpPr>
         <p:spPr>
           <a:xfrm>
-            <a:off x="548640" y="4572000"/>
-            <a:ext cx="11091672" cy="1417320"/>
+            <a:off x="548640" y="4800600"/>
+            <a:ext cx="11091672" cy="1280160"/>
           </a:xfrm>
           <a:prstGeom prst="roundRect">
             <a:avLst>
-              <a:gd name="adj" fmla="val 3871"/>
+              <a:gd name="adj" fmla="val 4286"/>
             </a:avLst>
           </a:prstGeom>
           <a:solidFill>
@@ -39916,7 +42297,7 @@
         </p:nvSpPr>
         <p:spPr>
           <a:xfrm>
-            <a:off x="777240" y="4709160"/>
+            <a:off x="777240" y="4901184"/>
             <a:ext cx="10789920" cy="292608"/>
           </a:xfrm>
           <a:prstGeom prst="rect">
@@ -39955,8 +42336,8 @@
         </p:nvSpPr>
         <p:spPr>
           <a:xfrm>
-            <a:off x="777240" y="5029200"/>
-            <a:ext cx="10789920" cy="822960"/>
+            <a:off x="777240" y="5212080"/>
+            <a:ext cx="10789920" cy="777240"/>
           </a:xfrm>
           <a:prstGeom prst="rect">
             <a:avLst/>
@@ -39972,7 +42353,7 @@
               <a:buNone/>
             </a:pPr>
             <a:r>
-              <a:rPr lang="en-US" sz="1150" dirty="0">
+              <a:rPr lang="en-US" sz="1100" dirty="0">
                 <a:solidFill>
                   <a:srgbClr val="2B3A42"/>
                 </a:solidFill>
@@ -39982,7 +42363,7 @@
               </a:rPr>
               <a:t>El nivel del ROE se mueve mucho: España pasa del 3,5 % al 11,8 % según se asuma cero o 150 pb de comisión. El ordenamiento se mueve menos: Francia es último en todos los escenarios e Italia, Portugal y Países Bajos encabezan en todos. Lo que sí cambia es la posición relativa de España, que sube conforme se asume más comisión — y es el único país donde sabemos que la comisión es alta.</a:t>
             </a:r>
-            <a:endParaRPr lang="en-US" sz="1150" dirty="0"/>
+            <a:endParaRPr lang="en-US" sz="1100" dirty="0"/>
           </a:p>
         </p:txBody>
       </p:sp>

--- a/pres/rentabilidad_pyme.pptx
+++ b/pres/rentabilidad_pyme.pptx
@@ -1741,25 +1741,25 @@
                 <c:formatCode>General</c:formatCode>
                 <c:ptCount val="7"/>
                 <c:pt idx="0">
-                  <c:v>5.49</c:v>
+                  <c:v>13.4</c:v>
                 </c:pt>
                 <c:pt idx="1">
-                  <c:v>12.09</c:v>
+                  <c:v>18.11</c:v>
                 </c:pt>
                 <c:pt idx="2">
-                  <c:v>1.66</c:v>
+                  <c:v>5.03</c:v>
                 </c:pt>
                 <c:pt idx="3">
-                  <c:v>7.65</c:v>
+                  <c:v>15.77</c:v>
                 </c:pt>
                 <c:pt idx="4">
-                  <c:v>8.08</c:v>
+                  <c:v>14.87</c:v>
                 </c:pt>
                 <c:pt idx="5">
-                  <c:v>13.71</c:v>
+                  <c:v>20.42</c:v>
                 </c:pt>
                 <c:pt idx="6">
-                  <c:v>7.65</c:v>
+                  <c:v>12.2</c:v>
                 </c:pt>
               </c:numCache>
             </c:numRef>
@@ -1932,14 +1932,14 @@
               <c:strCache>
                 <c:ptCount val="1"/>
                 <c:pt idx="0">
-                  <c:v>Depósito a la vista</c:v>
+                  <c:v>Coste ponderado de los recursos</c:v>
                 </c:pt>
               </c:strCache>
             </c:strRef>
           </c:tx>
           <c:spPr>
             <a:solidFill>
-              <a:srgbClr val="6E7F88"/>
+              <a:srgbClr val="1C3F4E"/>
             </a:solidFill>
             <a:effectLst/>
           </c:spPr>
@@ -1951,7 +1951,7 @@
               <a:lstStyle/>
               <a:p>
                 <a:pPr>
-                  <a:defRPr b="0" i="0" strike="noStrike" sz="1000" u="none">
+                  <a:defRPr b="0" i="0" strike="noStrike" sz="900" u="none">
                     <a:solidFill>
                       <a:srgbClr val="FFFFFF"/>
                     </a:solidFill>
@@ -2007,25 +2007,25 @@
                 <c:formatCode>General</c:formatCode>
                 <c:ptCount val="7"/>
                 <c:pt idx="0">
-                  <c:v>0</c:v>
+                  <c:v>0.75</c:v>
                 </c:pt>
                 <c:pt idx="1">
-                  <c:v>0</c:v>
+                  <c:v>1.16</c:v>
                 </c:pt>
                 <c:pt idx="2">
-                  <c:v>0</c:v>
+                  <c:v>1.34</c:v>
                 </c:pt>
                 <c:pt idx="3">
-                  <c:v>0</c:v>
+                  <c:v>0.76</c:v>
                 </c:pt>
                 <c:pt idx="4">
-                  <c:v>0</c:v>
+                  <c:v>0.71</c:v>
                 </c:pt>
                 <c:pt idx="5">
-                  <c:v>0</c:v>
+                  <c:v>1.06</c:v>
                 </c:pt>
                 <c:pt idx="6">
-                  <c:v>0</c:v>
+                  <c:v>0.41</c:v>
                 </c:pt>
               </c:numCache>
             </c:numRef>
@@ -2040,7 +2040,7 @@
               <c:strCache>
                 <c:ptCount val="1"/>
                 <c:pt idx="0">
-                  <c:v>Margen sobre facilidad BCE</c:v>
+                  <c:v>Margen sobre la facilidad del BCE</c:v>
                 </c:pt>
               </c:strCache>
             </c:strRef>
@@ -2059,7 +2059,7 @@
               <a:lstStyle/>
               <a:p>
                 <a:pPr>
-                  <a:defRPr b="0" i="0" strike="noStrike" sz="1000" u="none">
+                  <a:defRPr b="0" i="0" strike="noStrike" sz="900" u="none">
                     <a:solidFill>
                       <a:srgbClr val="FFFFFF"/>
                     </a:solidFill>
@@ -2115,25 +2115,25 @@
                 <c:formatCode>General</c:formatCode>
                 <c:ptCount val="7"/>
                 <c:pt idx="0">
-                  <c:v>0</c:v>
+                  <c:v>1.34</c:v>
                 </c:pt>
                 <c:pt idx="1">
-                  <c:v>0</c:v>
+                  <c:v>0.93</c:v>
                 </c:pt>
                 <c:pt idx="2">
-                  <c:v>0</c:v>
+                  <c:v>0.75</c:v>
                 </c:pt>
                 <c:pt idx="3">
-                  <c:v>0</c:v>
+                  <c:v>1.33</c:v>
                 </c:pt>
                 <c:pt idx="4">
-                  <c:v>0</c:v>
+                  <c:v>1.38</c:v>
                 </c:pt>
                 <c:pt idx="5">
-                  <c:v>0</c:v>
+                  <c:v>1.03</c:v>
                 </c:pt>
                 <c:pt idx="6">
-                  <c:v>0</c:v>
+                  <c:v>1.68</c:v>
                 </c:pt>
               </c:numCache>
             </c:numRef>
@@ -2146,7 +2146,7 @@
             <a:lstStyle/>
             <a:p>
               <a:pPr>
-                <a:defRPr b="0" i="0" strike="noStrike" sz="1000" u="none">
+                <a:defRPr b="0" i="0" strike="noStrike" sz="900" u="none">
                   <a:solidFill>
                     <a:srgbClr val="FFFFFF"/>
                   </a:solidFill>
@@ -2195,7 +2195,7 @@
           <a:lstStyle/>
           <a:p>
             <a:pPr>
-              <a:defRPr sz="1100" b="0" i="0" u="none" strike="noStrike">
+              <a:defRPr sz="1000" b="0" i="0" u="none" strike="noStrike">
                 <a:solidFill>
                   <a:srgbClr val="2B3A42"/>
                 </a:solidFill>
@@ -2215,6 +2215,7 @@
         <c:axId val="2094734552"/>
         <c:scaling>
           <c:orientation val="minMax"/>
+          <c:max val="2.4"/>
         </c:scaling>
         <c:delete val="0"/>
         <c:axPos val="l"/>
@@ -2277,7 +2278,7 @@
         <a:lstStyle/>
         <a:p>
           <a:pPr>
-            <a:defRPr sz="1100">      </a:defRPr>
+            <a:defRPr sz="1000">      </a:defRPr>
           </a:pPr>
           <a:endParaRPr lang="en-US"/>
         </a:p>
@@ -21994,7 +21995,7 @@
                           <a:ea typeface="Calibri" pitchFamily="34" charset="-122"/>
                           <a:cs typeface="Calibri" pitchFamily="34" charset="-120"/>
                         </a:rPr>
-                        <a:t>Coste de fondos</a:t>
+                        <a:t>Coste de los recursos</a:t>
                       </a:r>
                       <a:endParaRPr lang="en-US" sz="1000" dirty="0">
                         <a:latin typeface="Calibri" charset="0"/>
@@ -22059,7 +22060,7 @@
                           <a:ea typeface="Calibri" pitchFamily="34" charset="-122"/>
                           <a:cs typeface="Calibri" pitchFamily="34" charset="-120"/>
                         </a:rPr>
-                        <a:t>Euríbor 3m 2,23 %</a:t>
+                        <a:t>0,41 % a 1,34 % por país</a:t>
                       </a:r>
                       <a:endParaRPr lang="en-US" sz="1000" dirty="0">
                         <a:latin typeface="Calibri" charset="0"/>
@@ -22124,7 +22125,7 @@
                           <a:ea typeface="Calibri" pitchFamily="34" charset="-122"/>
                           <a:cs typeface="Calibri" pitchFamily="34" charset="-120"/>
                         </a:rPr>
-                        <a:t>Observado. Igual para los seis países</a:t>
+                        <a:t>Observado. Tipos del MIR ponderados por saldos del BSI. Supone financiar el crédito PYME con depósito de empresa</a:t>
                       </a:r>
                       <a:endParaRPr lang="en-US" sz="1000" dirty="0">
                         <a:latin typeface="Calibri" charset="0"/>
@@ -22181,15 +22182,15 @@
                         <a:buNone/>
                       </a:pPr>
                       <a:r>
-                        <a:rPr lang="en-US" sz="1000" dirty="0">
-                          <a:solidFill>
-                            <a:srgbClr val="2B3A42"/>
-                          </a:solidFill>
-                          <a:latin typeface="Calibri" pitchFamily="34" charset="0"/>
-                          <a:ea typeface="Calibri" pitchFamily="34" charset="-122"/>
-                          <a:cs typeface="Calibri" pitchFamily="34" charset="-120"/>
-                        </a:rPr>
-                        <a:t>MEDIO. Desplaza todos los ROE en paralelo</a:t>
+                        <a:rPr lang="en-US" sz="1000" b="1" dirty="0">
+                          <a:solidFill>
+                            <a:srgbClr val="B04A3F"/>
+                          </a:solidFill>
+                          <a:latin typeface="Calibri" pitchFamily="34" charset="0"/>
+                          <a:ea typeface="Calibri" pitchFamily="34" charset="-122"/>
+                          <a:cs typeface="Calibri" pitchFamily="34" charset="-120"/>
+                        </a:rPr>
+                        <a:t>ALTO. Con fondeo en mercado al 2,23 % los ROE caerían entre 6 y 12 puntos</a:t>
                       </a:r>
                       <a:endParaRPr lang="en-US" sz="1000" dirty="0">
                         <a:latin typeface="Calibri" charset="0"/>
@@ -34047,7 +34048,7 @@
                           <a:ea typeface="Calibri" pitchFamily="34" charset="-122"/>
                           <a:cs typeface="Calibri" pitchFamily="34" charset="-120"/>
                         </a:rPr>
-                        <a:t>− Coste de fondos</a:t>
+                        <a:t>− Coste de los recursos</a:t>
                       </a:r>
                       <a:endParaRPr lang="en-US" sz="1100" dirty="0">
                         <a:latin typeface="Calibri" charset="0"/>
@@ -34112,7 +34113,7 @@
                           <a:ea typeface="Calibri" pitchFamily="34" charset="-122"/>
                           <a:cs typeface="Calibri" pitchFamily="34" charset="-120"/>
                         </a:rPr>
-                        <a:t>2.23</a:t>
+                        <a:t>0.75</a:t>
                       </a:r>
                       <a:endParaRPr lang="en-US" sz="1100" dirty="0">
                         <a:latin typeface="Calibri" charset="0"/>
@@ -34177,7 +34178,7 @@
                           <a:ea typeface="Calibri" pitchFamily="34" charset="-122"/>
                           <a:cs typeface="Calibri" pitchFamily="34" charset="-120"/>
                         </a:rPr>
-                        <a:t>2.23</a:t>
+                        <a:t>1.16</a:t>
                       </a:r>
                       <a:endParaRPr lang="en-US" sz="1100" dirty="0">
                         <a:latin typeface="Calibri" charset="0"/>
@@ -34242,7 +34243,7 @@
                           <a:ea typeface="Calibri" pitchFamily="34" charset="-122"/>
                           <a:cs typeface="Calibri" pitchFamily="34" charset="-120"/>
                         </a:rPr>
-                        <a:t>2.23</a:t>
+                        <a:t>1.34</a:t>
                       </a:r>
                       <a:endParaRPr lang="en-US" sz="1100" dirty="0">
                         <a:latin typeface="Calibri" charset="0"/>
@@ -34307,7 +34308,7 @@
                           <a:ea typeface="Calibri" pitchFamily="34" charset="-122"/>
                           <a:cs typeface="Calibri" pitchFamily="34" charset="-120"/>
                         </a:rPr>
-                        <a:t>2.23</a:t>
+                        <a:t>0.76</a:t>
                       </a:r>
                       <a:endParaRPr lang="en-US" sz="1100" dirty="0">
                         <a:latin typeface="Calibri" charset="0"/>
@@ -34372,7 +34373,7 @@
                           <a:ea typeface="Calibri" pitchFamily="34" charset="-122"/>
                           <a:cs typeface="Calibri" pitchFamily="34" charset="-120"/>
                         </a:rPr>
-                        <a:t>2.23</a:t>
+                        <a:t>0.71</a:t>
                       </a:r>
                       <a:endParaRPr lang="en-US" sz="1100" dirty="0">
                         <a:latin typeface="Calibri" charset="0"/>
@@ -34437,7 +34438,7 @@
                           <a:ea typeface="Calibri" pitchFamily="34" charset="-122"/>
                           <a:cs typeface="Calibri" pitchFamily="34" charset="-120"/>
                         </a:rPr>
-                        <a:t>2.23</a:t>
+                        <a:t>1.06</a:t>
                       </a:r>
                       <a:endParaRPr lang="en-US" sz="1100" dirty="0">
                         <a:latin typeface="Calibri" charset="0"/>
@@ -34502,7 +34503,7 @@
                           <a:ea typeface="Calibri" pitchFamily="34" charset="-122"/>
                           <a:cs typeface="Calibri" pitchFamily="34" charset="-120"/>
                         </a:rPr>
-                        <a:t>2.23</a:t>
+                        <a:t>0.41</a:t>
                       </a:r>
                       <a:endParaRPr lang="en-US" sz="1100" dirty="0">
                         <a:latin typeface="Calibri" charset="0"/>
@@ -34637,7 +34638,7 @@
                           <a:ea typeface="Calibri" pitchFamily="34" charset="-122"/>
                           <a:cs typeface="Calibri" pitchFamily="34" charset="-120"/>
                         </a:rPr>
-                        <a:t>2.05</a:t>
+                        <a:t>3.54</a:t>
                       </a:r>
                       <a:endParaRPr lang="en-US" sz="1100" dirty="0">
                         <a:latin typeface="Calibri" charset="0"/>
@@ -34705,7 +34706,7 @@
                           <a:ea typeface="Calibri" pitchFamily="34" charset="-122"/>
                           <a:cs typeface="Calibri" pitchFamily="34" charset="-120"/>
                         </a:rPr>
-                        <a:t>3.03</a:t>
+                        <a:t>4.11</a:t>
                       </a:r>
                       <a:endParaRPr lang="en-US" sz="1100" dirty="0">
                         <a:latin typeface="Calibri" charset="0"/>
@@ -34773,7 +34774,7 @@
                           <a:ea typeface="Calibri" pitchFamily="34" charset="-122"/>
                           <a:cs typeface="Calibri" pitchFamily="34" charset="-120"/>
                         </a:rPr>
-                        <a:t>2.41</a:t>
+                        <a:t>3.30</a:t>
                       </a:r>
                       <a:endParaRPr lang="en-US" sz="1100" dirty="0">
                         <a:latin typeface="Calibri" charset="0"/>
@@ -34841,7 +34842,7 @@
                           <a:ea typeface="Calibri" pitchFamily="34" charset="-122"/>
                           <a:cs typeface="Calibri" pitchFamily="34" charset="-120"/>
                         </a:rPr>
-                        <a:t>2.89</a:t>
+                        <a:t>4.36</a:t>
                       </a:r>
                       <a:endParaRPr lang="en-US" sz="1100" dirty="0">
                         <a:latin typeface="Calibri" charset="0"/>
@@ -34909,7 +34910,7 @@
                           <a:ea typeface="Calibri" pitchFamily="34" charset="-122"/>
                           <a:cs typeface="Calibri" pitchFamily="34" charset="-120"/>
                         </a:rPr>
-                        <a:t>2.58</a:t>
+                        <a:t>4.10</a:t>
                       </a:r>
                       <a:endParaRPr lang="en-US" sz="1100" dirty="0">
                         <a:latin typeface="Calibri" charset="0"/>
@@ -34977,7 +34978,7 @@
                           <a:ea typeface="Calibri" pitchFamily="34" charset="-122"/>
                           <a:cs typeface="Calibri" pitchFamily="34" charset="-120"/>
                         </a:rPr>
-                        <a:t>3.14</a:t>
+                        <a:t>4.32</a:t>
                       </a:r>
                       <a:endParaRPr lang="en-US" sz="1100" dirty="0">
                         <a:latin typeface="Calibri" charset="0"/>
@@ -35045,7 +35046,7 @@
                           <a:ea typeface="Calibri" pitchFamily="34" charset="-122"/>
                           <a:cs typeface="Calibri" pitchFamily="34" charset="-120"/>
                         </a:rPr>
-                        <a:t>4.01</a:t>
+                        <a:t>5.83</a:t>
                       </a:r>
                       <a:endParaRPr lang="en-US" sz="1100" dirty="0">
                         <a:latin typeface="Calibri" charset="0"/>
@@ -35729,7 +35730,7 @@
                           <a:ea typeface="Calibri" pitchFamily="34" charset="-122"/>
                           <a:cs typeface="Calibri" pitchFamily="34" charset="-120"/>
                         </a:rPr>
-                        <a:t>0.87</a:t>
+                        <a:t>1.49</a:t>
                       </a:r>
                       <a:endParaRPr lang="en-US" sz="1100" dirty="0">
                         <a:latin typeface="Calibri" charset="0"/>
@@ -35797,7 +35798,7 @@
                           <a:ea typeface="Calibri" pitchFamily="34" charset="-122"/>
                           <a:cs typeface="Calibri" pitchFamily="34" charset="-120"/>
                         </a:rPr>
-                        <a:t>1.67</a:t>
+                        <a:t>2.27</a:t>
                       </a:r>
                       <a:endParaRPr lang="en-US" sz="1100" dirty="0">
                         <a:latin typeface="Calibri" charset="0"/>
@@ -35865,7 +35866,7 @@
                           <a:ea typeface="Calibri" pitchFamily="34" charset="-122"/>
                           <a:cs typeface="Calibri" pitchFamily="34" charset="-120"/>
                         </a:rPr>
-                        <a:t>1.58</a:t>
+                        <a:t>2.17</a:t>
                       </a:r>
                       <a:endParaRPr lang="en-US" sz="1100" dirty="0">
                         <a:latin typeface="Calibri" charset="0"/>
@@ -35933,7 +35934,7 @@
                           <a:ea typeface="Calibri" pitchFamily="34" charset="-122"/>
                           <a:cs typeface="Calibri" pitchFamily="34" charset="-120"/>
                         </a:rPr>
-                        <a:t>1.35</a:t>
+                        <a:t>2.04</a:t>
                       </a:r>
                       <a:endParaRPr lang="en-US" sz="1100" dirty="0">
                         <a:latin typeface="Calibri" charset="0"/>
@@ -36001,7 +36002,7 @@
                           <a:ea typeface="Calibri" pitchFamily="34" charset="-122"/>
                           <a:cs typeface="Calibri" pitchFamily="34" charset="-120"/>
                         </a:rPr>
-                        <a:t>0.90</a:t>
+                        <a:t>1.43</a:t>
                       </a:r>
                       <a:endParaRPr lang="en-US" sz="1100" dirty="0">
                         <a:latin typeface="Calibri" charset="0"/>
@@ -36069,7 +36070,7 @@
                           <a:ea typeface="Calibri" pitchFamily="34" charset="-122"/>
                           <a:cs typeface="Calibri" pitchFamily="34" charset="-120"/>
                         </a:rPr>
-                        <a:t>1.68</a:t>
+                        <a:t>2.31</a:t>
                       </a:r>
                       <a:endParaRPr lang="en-US" sz="1100" dirty="0">
                         <a:latin typeface="Calibri" charset="0"/>
@@ -36137,7 +36138,7 @@
                           <a:ea typeface="Calibri" pitchFamily="34" charset="-122"/>
                           <a:cs typeface="Calibri" pitchFamily="34" charset="-120"/>
                         </a:rPr>
-                        <a:t>2.30</a:t>
+                        <a:t>3.35</a:t>
                       </a:r>
                       <a:endParaRPr lang="en-US" sz="1100" dirty="0">
                         <a:latin typeface="Calibri" charset="0"/>
@@ -36275,7 +36276,7 @@
                           <a:ea typeface="Calibri" pitchFamily="34" charset="-122"/>
                           <a:cs typeface="Calibri" pitchFamily="34" charset="-120"/>
                         </a:rPr>
-                        <a:t>0.59</a:t>
+                        <a:t>1.45</a:t>
                       </a:r>
                       <a:endParaRPr lang="en-US" sz="1100" dirty="0">
                         <a:latin typeface="Calibri" charset="0"/>
@@ -36343,7 +36344,7 @@
                           <a:ea typeface="Calibri" pitchFamily="34" charset="-122"/>
                           <a:cs typeface="Calibri" pitchFamily="34" charset="-120"/>
                         </a:rPr>
-                        <a:t>0.96</a:t>
+                        <a:t>1.45</a:t>
                       </a:r>
                       <a:endParaRPr lang="en-US" sz="1100" dirty="0">
                         <a:latin typeface="Calibri" charset="0"/>
@@ -36411,7 +36412,7 @@
                           <a:ea typeface="Calibri" pitchFamily="34" charset="-122"/>
                           <a:cs typeface="Calibri" pitchFamily="34" charset="-120"/>
                         </a:rPr>
-                        <a:t>0.15</a:t>
+                        <a:t>0.46</a:t>
                       </a:r>
                       <a:endParaRPr lang="en-US" sz="1100" dirty="0">
                         <a:latin typeface="Calibri" charset="0"/>
@@ -36479,7 +36480,7 @@
                           <a:ea typeface="Calibri" pitchFamily="34" charset="-122"/>
                           <a:cs typeface="Calibri" pitchFamily="34" charset="-120"/>
                         </a:rPr>
-                        <a:t>0.74</a:t>
+                        <a:t>1.52</a:t>
                       </a:r>
                       <a:endParaRPr lang="en-US" sz="1100" dirty="0">
                         <a:latin typeface="Calibri" charset="0"/>
@@ -36547,7 +36548,7 @@
                           <a:ea typeface="Calibri" pitchFamily="34" charset="-122"/>
                           <a:cs typeface="Calibri" pitchFamily="34" charset="-120"/>
                         </a:rPr>
-                        <a:t>1.18</a:t>
+                        <a:t>2.17</a:t>
                       </a:r>
                       <a:endParaRPr lang="en-US" sz="1100" dirty="0">
                         <a:latin typeface="Calibri" charset="0"/>
@@ -36615,7 +36616,7 @@
                           <a:ea typeface="Calibri" pitchFamily="34" charset="-122"/>
                           <a:cs typeface="Calibri" pitchFamily="34" charset="-120"/>
                         </a:rPr>
-                        <a:t>1.11</a:t>
+                        <a:t>1.66</a:t>
                       </a:r>
                       <a:endParaRPr lang="en-US" sz="1100" dirty="0">
                         <a:latin typeface="Calibri" charset="0"/>
@@ -36683,7 +36684,7 @@
                           <a:ea typeface="Calibri" pitchFamily="34" charset="-122"/>
                           <a:cs typeface="Calibri" pitchFamily="34" charset="-120"/>
                         </a:rPr>
-                        <a:t>1.31</a:t>
+                        <a:t>2.08</a:t>
                       </a:r>
                       <a:endParaRPr lang="en-US" sz="1100" dirty="0">
                         <a:latin typeface="Calibri" charset="0"/>
@@ -37367,7 +37368,7 @@
                           <a:ea typeface="Calibri" pitchFamily="34" charset="-122"/>
                           <a:cs typeface="Calibri" pitchFamily="34" charset="-120"/>
                         </a:rPr>
-                        <a:t>5.5 %</a:t>
+                        <a:t>13.4 %</a:t>
                       </a:r>
                       <a:endParaRPr lang="en-US" sz="1100" dirty="0">
                         <a:latin typeface="Calibri" charset="0"/>
@@ -37435,7 +37436,7 @@
                           <a:ea typeface="Calibri" pitchFamily="34" charset="-122"/>
                           <a:cs typeface="Calibri" pitchFamily="34" charset="-120"/>
                         </a:rPr>
-                        <a:t>12.1 %</a:t>
+                        <a:t>18.1 %</a:t>
                       </a:r>
                       <a:endParaRPr lang="en-US" sz="1100" dirty="0">
                         <a:latin typeface="Calibri" charset="0"/>
@@ -37503,7 +37504,7 @@
                           <a:ea typeface="Calibri" pitchFamily="34" charset="-122"/>
                           <a:cs typeface="Calibri" pitchFamily="34" charset="-120"/>
                         </a:rPr>
-                        <a:t>1.7 %</a:t>
+                        <a:t>5.0 %</a:t>
                       </a:r>
                       <a:endParaRPr lang="en-US" sz="1100" dirty="0">
                         <a:latin typeface="Calibri" charset="0"/>
@@ -37571,7 +37572,7 @@
                           <a:ea typeface="Calibri" pitchFamily="34" charset="-122"/>
                           <a:cs typeface="Calibri" pitchFamily="34" charset="-120"/>
                         </a:rPr>
-                        <a:t>7.7 %</a:t>
+                        <a:t>15.8 %</a:t>
                       </a:r>
                       <a:endParaRPr lang="en-US" sz="1100" dirty="0">
                         <a:latin typeface="Calibri" charset="0"/>
@@ -37639,7 +37640,7 @@
                           <a:ea typeface="Calibri" pitchFamily="34" charset="-122"/>
                           <a:cs typeface="Calibri" pitchFamily="34" charset="-120"/>
                         </a:rPr>
-                        <a:t>8.1 %</a:t>
+                        <a:t>14.9 %</a:t>
                       </a:r>
                       <a:endParaRPr lang="en-US" sz="1100" dirty="0">
                         <a:latin typeface="Calibri" charset="0"/>
@@ -37707,7 +37708,7 @@
                           <a:ea typeface="Calibri" pitchFamily="34" charset="-122"/>
                           <a:cs typeface="Calibri" pitchFamily="34" charset="-120"/>
                         </a:rPr>
-                        <a:t>13.7 %</a:t>
+                        <a:t>20.4 %</a:t>
                       </a:r>
                       <a:endParaRPr lang="en-US" sz="1100" dirty="0">
                         <a:latin typeface="Calibri" charset="0"/>
@@ -37775,7 +37776,7 @@
                           <a:ea typeface="Calibri" pitchFamily="34" charset="-122"/>
                           <a:cs typeface="Calibri" pitchFamily="34" charset="-120"/>
                         </a:rPr>
-                        <a:t>7.7 %</a:t>
+                        <a:t>12.2 %</a:t>
                       </a:r>
                       <a:endParaRPr lang="en-US" sz="1100" dirty="0">
                         <a:latin typeface="Calibri" charset="0"/>
@@ -37996,7 +37997,7 @@
                 <a:ea typeface="Calibri" pitchFamily="34" charset="-122"/>
                 <a:cs typeface="Calibri" pitchFamily="34" charset="-120"/>
               </a:rPr>
-              <a:t>Solo la fila de comisiones es supuesto. Riesgo y capital son ahora observados por país.</a:t>
+              <a:t>Solo la fila de comisiones es supuesto. Precio, recursos, riesgo y capital son observados por país.</a:t>
             </a:r>
             <a:endParaRPr lang="en-US" sz="1000" dirty="0"/>
           </a:p>
@@ -38035,7 +38036,7 @@
                 <a:ea typeface="Calibri" pitchFamily="34" charset="-122"/>
                 <a:cs typeface="Calibri" pitchFamily="34" charset="-120"/>
               </a:rPr>
-              <a:t>Precio: BCE MIR. Comisiones: cuña española de 87 pb aplicada a los seis (único supuesto material). Riesgo: PD × LGD de la clase IRB de PYME (COREP C 9.02). Gastos: eficiencia EBA sobre margen. Capital: densidad de RWA observada de la cartera PYME sobre CET1. Impuesto 25 %.</a:t>
+              <a:t>Precio: BCE MIR. Comisiones: cuña española de 87 pb aplicada a los siete (único supuesto material). Recursos: tipos de depósito de empresa del MIR ponderados por los saldos del BSI. Riesgo: PD × LGD de la clase IRB de PYME (COREP C 9.02). Gastos: eficiencia EBA sobre margen. Capital: densidad de RWA observada sobre CET1. Impuesto 25 %.</a:t>
             </a:r>
             <a:endParaRPr lang="en-US" sz="900" dirty="0"/>
           </a:p>
@@ -39121,7 +39122,7 @@
                           <a:ea typeface="Calibri" pitchFamily="34" charset="-122"/>
                           <a:cs typeface="Calibri" pitchFamily="34" charset="-120"/>
                         </a:rPr>
-                        <a:t>0.8 %</a:t>
+                        <a:t>8.7 %</a:t>
                       </a:r>
                       <a:endParaRPr lang="en-US" sz="1100" dirty="0">
                         <a:latin typeface="Calibri" charset="0"/>
@@ -39186,7 +39187,7 @@
                           <a:ea typeface="Calibri" pitchFamily="34" charset="-122"/>
                           <a:cs typeface="Calibri" pitchFamily="34" charset="-120"/>
                         </a:rPr>
-                        <a:t>2.2 %</a:t>
+                        <a:t>10.1 %</a:t>
                       </a:r>
                       <a:endParaRPr lang="en-US" sz="1100" dirty="0">
                         <a:latin typeface="Calibri" charset="0"/>
@@ -39251,7 +39252,7 @@
                           <a:ea typeface="Calibri" pitchFamily="34" charset="-122"/>
                           <a:cs typeface="Calibri" pitchFamily="34" charset="-120"/>
                         </a:rPr>
-                        <a:t>3.5 %</a:t>
+                        <a:t>11.4 %</a:t>
                       </a:r>
                       <a:endParaRPr lang="en-US" sz="1100" dirty="0">
                         <a:latin typeface="Calibri" charset="0"/>
@@ -39316,7 +39317,7 @@
                           <a:ea typeface="Calibri" pitchFamily="34" charset="-122"/>
                           <a:cs typeface="Calibri" pitchFamily="34" charset="-120"/>
                         </a:rPr>
-                        <a:t>5.5 %</a:t>
+                        <a:t>13.4 %</a:t>
                       </a:r>
                       <a:endParaRPr lang="en-US" sz="1100" dirty="0">
                         <a:latin typeface="Calibri" charset="0"/>
@@ -39384,7 +39385,7 @@
                           <a:ea typeface="Calibri" pitchFamily="34" charset="-122"/>
                           <a:cs typeface="Calibri" pitchFamily="34" charset="-120"/>
                         </a:rPr>
-                        <a:t>6.2 %</a:t>
+                        <a:t>14.1 %</a:t>
                       </a:r>
                       <a:endParaRPr lang="en-US" sz="1100" dirty="0">
                         <a:latin typeface="Calibri" charset="0"/>
@@ -39449,7 +39450,7 @@
                           <a:ea typeface="Calibri" pitchFamily="34" charset="-122"/>
                           <a:cs typeface="Calibri" pitchFamily="34" charset="-120"/>
                         </a:rPr>
-                        <a:t>8.8 %</a:t>
+                        <a:t>16.7 %</a:t>
                       </a:r>
                       <a:endParaRPr lang="en-US" sz="1100" dirty="0">
                         <a:latin typeface="Calibri" charset="0"/>
@@ -39581,7 +39582,7 @@
                           <a:ea typeface="Calibri" pitchFamily="34" charset="-122"/>
                           <a:cs typeface="Calibri" pitchFamily="34" charset="-120"/>
                         </a:rPr>
-                        <a:t>7.2 %</a:t>
+                        <a:t>13.2 %</a:t>
                       </a:r>
                       <a:endParaRPr lang="en-US" sz="1100" dirty="0">
                         <a:latin typeface="Calibri" charset="0"/>
@@ -39646,7 +39647,7 @@
                           <a:ea typeface="Calibri" pitchFamily="34" charset="-122"/>
                           <a:cs typeface="Calibri" pitchFamily="34" charset="-120"/>
                         </a:rPr>
-                        <a:t>8.6 %</a:t>
+                        <a:t>14.6 %</a:t>
                       </a:r>
                       <a:endParaRPr lang="en-US" sz="1100" dirty="0">
                         <a:latin typeface="Calibri" charset="0"/>
@@ -39711,7 +39712,7 @@
                           <a:ea typeface="Calibri" pitchFamily="34" charset="-122"/>
                           <a:cs typeface="Calibri" pitchFamily="34" charset="-120"/>
                         </a:rPr>
-                        <a:t>10.0 %</a:t>
+                        <a:t>16.0 %</a:t>
                       </a:r>
                       <a:endParaRPr lang="en-US" sz="1100" dirty="0">
                         <a:latin typeface="Calibri" charset="0"/>
@@ -39776,7 +39777,7 @@
                           <a:ea typeface="Calibri" pitchFamily="34" charset="-122"/>
                           <a:cs typeface="Calibri" pitchFamily="34" charset="-120"/>
                         </a:rPr>
-                        <a:t>12.1 %</a:t>
+                        <a:t>18.1 %</a:t>
                       </a:r>
                       <a:endParaRPr lang="en-US" sz="1100" dirty="0">
                         <a:latin typeface="Calibri" charset="0"/>
@@ -39844,7 +39845,7 @@
                           <a:ea typeface="Calibri" pitchFamily="34" charset="-122"/>
                           <a:cs typeface="Calibri" pitchFamily="34" charset="-120"/>
                         </a:rPr>
-                        <a:t>12.8 %</a:t>
+                        <a:t>18.8 %</a:t>
                       </a:r>
                       <a:endParaRPr lang="en-US" sz="1100" dirty="0">
                         <a:latin typeface="Calibri" charset="0"/>
@@ -39909,7 +39910,7 @@
                           <a:ea typeface="Calibri" pitchFamily="34" charset="-122"/>
                           <a:cs typeface="Calibri" pitchFamily="34" charset="-120"/>
                         </a:rPr>
-                        <a:t>15.6 %</a:t>
+                        <a:t>21.6 %</a:t>
                       </a:r>
                       <a:endParaRPr lang="en-US" sz="1100" dirty="0">
                         <a:latin typeface="Calibri" charset="0"/>
@@ -40041,7 +40042,7 @@
                           <a:ea typeface="Calibri" pitchFamily="34" charset="-122"/>
                           <a:cs typeface="Calibri" pitchFamily="34" charset="-120"/>
                         </a:rPr>
-                        <a:t>-1.6 %</a:t>
+                        <a:t>1.7 %</a:t>
                       </a:r>
                       <a:endParaRPr lang="en-US" sz="1100" dirty="0">
                         <a:latin typeface="Calibri" charset="0"/>
@@ -40106,7 +40107,7 @@
                           <a:ea typeface="Calibri" pitchFamily="34" charset="-122"/>
                           <a:cs typeface="Calibri" pitchFamily="34" charset="-120"/>
                         </a:rPr>
-                        <a:t>-0.7 %</a:t>
+                        <a:t>2.7 %</a:t>
                       </a:r>
                       <a:endParaRPr lang="en-US" sz="1100" dirty="0">
                         <a:latin typeface="Calibri" charset="0"/>
@@ -40171,7 +40172,7 @@
                           <a:ea typeface="Calibri" pitchFamily="34" charset="-122"/>
                           <a:cs typeface="Calibri" pitchFamily="34" charset="-120"/>
                         </a:rPr>
-                        <a:t>0.3 %</a:t>
+                        <a:t>3.6 %</a:t>
                       </a:r>
                       <a:endParaRPr lang="en-US" sz="1100" dirty="0">
                         <a:latin typeface="Calibri" charset="0"/>
@@ -40236,7 +40237,7 @@
                           <a:ea typeface="Calibri" pitchFamily="34" charset="-122"/>
                           <a:cs typeface="Calibri" pitchFamily="34" charset="-120"/>
                         </a:rPr>
-                        <a:t>1.6 %</a:t>
+                        <a:t>5.0 %</a:t>
                       </a:r>
                       <a:endParaRPr lang="en-US" sz="1100" dirty="0">
                         <a:latin typeface="Calibri" charset="0"/>
@@ -40304,7 +40305,7 @@
                           <a:ea typeface="Calibri" pitchFamily="34" charset="-122"/>
                           <a:cs typeface="Calibri" pitchFamily="34" charset="-120"/>
                         </a:rPr>
-                        <a:t>2.1 %</a:t>
+                        <a:t>5.5 %</a:t>
                       </a:r>
                       <a:endParaRPr lang="en-US" sz="1100" dirty="0">
                         <a:latin typeface="Calibri" charset="0"/>
@@ -40369,7 +40370,7 @@
                           <a:ea typeface="Calibri" pitchFamily="34" charset="-122"/>
                           <a:cs typeface="Calibri" pitchFamily="34" charset="-120"/>
                         </a:rPr>
-                        <a:t>4.0 %</a:t>
+                        <a:t>7.4 %</a:t>
                       </a:r>
                       <a:endParaRPr lang="en-US" sz="1100" dirty="0">
                         <a:latin typeface="Calibri" charset="0"/>
@@ -40501,7 +40502,7 @@
                           <a:ea typeface="Calibri" pitchFamily="34" charset="-122"/>
                           <a:cs typeface="Calibri" pitchFamily="34" charset="-120"/>
                         </a:rPr>
-                        <a:t>2.8 %</a:t>
+                        <a:t>10.9 %</a:t>
                       </a:r>
                       <a:endParaRPr lang="en-US" sz="1100" dirty="0">
                         <a:latin typeface="Calibri" charset="0"/>
@@ -40566,7 +40567,7 @@
                           <a:ea typeface="Calibri" pitchFamily="34" charset="-122"/>
                           <a:cs typeface="Calibri" pitchFamily="34" charset="-120"/>
                         </a:rPr>
-                        <a:t>4.2 %</a:t>
+                        <a:t>12.3 %</a:t>
                       </a:r>
                       <a:endParaRPr lang="en-US" sz="1100" dirty="0">
                         <a:latin typeface="Calibri" charset="0"/>
@@ -40631,7 +40632,7 @@
                           <a:ea typeface="Calibri" pitchFamily="34" charset="-122"/>
                           <a:cs typeface="Calibri" pitchFamily="34" charset="-120"/>
                         </a:rPr>
-                        <a:t>5.6 %</a:t>
+                        <a:t>13.7 %</a:t>
                       </a:r>
                       <a:endParaRPr lang="en-US" sz="1100" dirty="0">
                         <a:latin typeface="Calibri" charset="0"/>
@@ -40696,7 +40697,7 @@
                           <a:ea typeface="Calibri" pitchFamily="34" charset="-122"/>
                           <a:cs typeface="Calibri" pitchFamily="34" charset="-120"/>
                         </a:rPr>
-                        <a:t>7.6 %</a:t>
+                        <a:t>15.8 %</a:t>
                       </a:r>
                       <a:endParaRPr lang="en-US" sz="1100" dirty="0">
                         <a:latin typeface="Calibri" charset="0"/>
@@ -40764,7 +40765,7 @@
                           <a:ea typeface="Calibri" pitchFamily="34" charset="-122"/>
                           <a:cs typeface="Calibri" pitchFamily="34" charset="-120"/>
                         </a:rPr>
-                        <a:t>8.3 %</a:t>
+                        <a:t>16.5 %</a:t>
                       </a:r>
                       <a:endParaRPr lang="en-US" sz="1100" dirty="0">
                         <a:latin typeface="Calibri" charset="0"/>
@@ -40829,7 +40830,7 @@
                           <a:ea typeface="Calibri" pitchFamily="34" charset="-122"/>
                           <a:cs typeface="Calibri" pitchFamily="34" charset="-120"/>
                         </a:rPr>
-                        <a:t>11.1 %</a:t>
+                        <a:t>19.2 %</a:t>
                       </a:r>
                       <a:endParaRPr lang="en-US" sz="1100" dirty="0">
                         <a:latin typeface="Calibri" charset="0"/>
@@ -40961,7 +40962,7 @@
                           <a:ea typeface="Calibri" pitchFamily="34" charset="-122"/>
                           <a:cs typeface="Calibri" pitchFamily="34" charset="-120"/>
                         </a:rPr>
-                        <a:t>4.2 %</a:t>
+                        <a:t>11.0 %</a:t>
                       </a:r>
                       <a:endParaRPr lang="en-US" sz="1100" dirty="0">
                         <a:latin typeface="Calibri" charset="0"/>
@@ -41026,7 +41027,7 @@
                           <a:ea typeface="Calibri" pitchFamily="34" charset="-122"/>
                           <a:cs typeface="Calibri" pitchFamily="34" charset="-120"/>
                         </a:rPr>
-                        <a:t>5.3 %</a:t>
+                        <a:t>12.1 %</a:t>
                       </a:r>
                       <a:endParaRPr lang="en-US" sz="1100" dirty="0">
                         <a:latin typeface="Calibri" charset="0"/>
@@ -41091,7 +41092,7 @@
                           <a:ea typeface="Calibri" pitchFamily="34" charset="-122"/>
                           <a:cs typeface="Calibri" pitchFamily="34" charset="-120"/>
                         </a:rPr>
-                        <a:t>6.4 %</a:t>
+                        <a:t>13.2 %</a:t>
                       </a:r>
                       <a:endParaRPr lang="en-US" sz="1100" dirty="0">
                         <a:latin typeface="Calibri" charset="0"/>
@@ -41156,7 +41157,7 @@
                           <a:ea typeface="Calibri" pitchFamily="34" charset="-122"/>
                           <a:cs typeface="Calibri" pitchFamily="34" charset="-120"/>
                         </a:rPr>
-                        <a:t>8.1 %</a:t>
+                        <a:t>14.9 %</a:t>
                       </a:r>
                       <a:endParaRPr lang="en-US" sz="1100" dirty="0">
                         <a:latin typeface="Calibri" charset="0"/>
@@ -41224,7 +41225,7 @@
                           <a:ea typeface="Calibri" pitchFamily="34" charset="-122"/>
                           <a:cs typeface="Calibri" pitchFamily="34" charset="-120"/>
                         </a:rPr>
-                        <a:t>8.7 %</a:t>
+                        <a:t>15.4 %</a:t>
                       </a:r>
                       <a:endParaRPr lang="en-US" sz="1100" dirty="0">
                         <a:latin typeface="Calibri" charset="0"/>
@@ -41289,7 +41290,7 @@
                           <a:ea typeface="Calibri" pitchFamily="34" charset="-122"/>
                           <a:cs typeface="Calibri" pitchFamily="34" charset="-120"/>
                         </a:rPr>
-                        <a:t>10.9 %</a:t>
+                        <a:t>17.7 %</a:t>
                       </a:r>
                       <a:endParaRPr lang="en-US" sz="1100" dirty="0">
                         <a:latin typeface="Calibri" charset="0"/>
@@ -41421,7 +41422,7 @@
                           <a:ea typeface="Calibri" pitchFamily="34" charset="-122"/>
                           <a:cs typeface="Calibri" pitchFamily="34" charset="-120"/>
                         </a:rPr>
-                        <a:t>8.7 %</a:t>
+                        <a:t>15.4 %</a:t>
                       </a:r>
                       <a:endParaRPr lang="en-US" sz="1100" dirty="0">
                         <a:latin typeface="Calibri" charset="0"/>
@@ -41486,7 +41487,7 @@
                           <a:ea typeface="Calibri" pitchFamily="34" charset="-122"/>
                           <a:cs typeface="Calibri" pitchFamily="34" charset="-120"/>
                         </a:rPr>
-                        <a:t>10.1 %</a:t>
+                        <a:t>16.9 %</a:t>
                       </a:r>
                       <a:endParaRPr lang="en-US" sz="1100" dirty="0">
                         <a:latin typeface="Calibri" charset="0"/>
@@ -41551,7 +41552,7 @@
                           <a:ea typeface="Calibri" pitchFamily="34" charset="-122"/>
                           <a:cs typeface="Calibri" pitchFamily="34" charset="-120"/>
                         </a:rPr>
-                        <a:t>11.6 %</a:t>
+                        <a:t>18.3 %</a:t>
                       </a:r>
                       <a:endParaRPr lang="en-US" sz="1100" dirty="0">
                         <a:latin typeface="Calibri" charset="0"/>
@@ -41616,7 +41617,7 @@
                           <a:ea typeface="Calibri" pitchFamily="34" charset="-122"/>
                           <a:cs typeface="Calibri" pitchFamily="34" charset="-120"/>
                         </a:rPr>
-                        <a:t>13.7 %</a:t>
+                        <a:t>20.4 %</a:t>
                       </a:r>
                       <a:endParaRPr lang="en-US" sz="1100" dirty="0">
                         <a:latin typeface="Calibri" charset="0"/>
@@ -41684,7 +41685,7 @@
                           <a:ea typeface="Calibri" pitchFamily="34" charset="-122"/>
                           <a:cs typeface="Calibri" pitchFamily="34" charset="-120"/>
                         </a:rPr>
-                        <a:t>14.4 %</a:t>
+                        <a:t>21.1 %</a:t>
                       </a:r>
                       <a:endParaRPr lang="en-US" sz="1100" dirty="0">
                         <a:latin typeface="Calibri" charset="0"/>
@@ -41749,7 +41750,7 @@
                           <a:ea typeface="Calibri" pitchFamily="34" charset="-122"/>
                           <a:cs typeface="Calibri" pitchFamily="34" charset="-120"/>
                         </a:rPr>
-                        <a:t>17.3 %</a:t>
+                        <a:t>24.0 %</a:t>
                       </a:r>
                       <a:endParaRPr lang="en-US" sz="1100" dirty="0">
                         <a:latin typeface="Calibri" charset="0"/>
@@ -41881,7 +41882,7 @@
                           <a:ea typeface="Calibri" pitchFamily="34" charset="-122"/>
                           <a:cs typeface="Calibri" pitchFamily="34" charset="-120"/>
                         </a:rPr>
-                        <a:t>5.5 %</a:t>
+                        <a:t>10.0 %</a:t>
                       </a:r>
                       <a:endParaRPr lang="en-US" sz="1100" dirty="0">
                         <a:latin typeface="Calibri" charset="0"/>
@@ -41946,7 +41947,7 @@
                           <a:ea typeface="Calibri" pitchFamily="34" charset="-122"/>
                           <a:cs typeface="Calibri" pitchFamily="34" charset="-120"/>
                         </a:rPr>
-                        <a:t>6.1 %</a:t>
+                        <a:t>10.6 %</a:t>
                       </a:r>
                       <a:endParaRPr lang="en-US" sz="1100" dirty="0">
                         <a:latin typeface="Calibri" charset="0"/>
@@ -42011,7 +42012,7 @@
                           <a:ea typeface="Calibri" pitchFamily="34" charset="-122"/>
                           <a:cs typeface="Calibri" pitchFamily="34" charset="-120"/>
                         </a:rPr>
-                        <a:t>6.7 %</a:t>
+                        <a:t>11.3 %</a:t>
                       </a:r>
                       <a:endParaRPr lang="en-US" sz="1100" dirty="0">
                         <a:latin typeface="Calibri" charset="0"/>
@@ -42076,7 +42077,7 @@
                           <a:ea typeface="Calibri" pitchFamily="34" charset="-122"/>
                           <a:cs typeface="Calibri" pitchFamily="34" charset="-120"/>
                         </a:rPr>
-                        <a:t>7.6 %</a:t>
+                        <a:t>12.2 %</a:t>
                       </a:r>
                       <a:endParaRPr lang="en-US" sz="1100" dirty="0">
                         <a:latin typeface="Calibri" charset="0"/>
@@ -42144,7 +42145,7 @@
                           <a:ea typeface="Calibri" pitchFamily="34" charset="-122"/>
                           <a:cs typeface="Calibri" pitchFamily="34" charset="-120"/>
                         </a:rPr>
-                        <a:t>8.0 %</a:t>
+                        <a:t>12.5 %</a:t>
                       </a:r>
                       <a:endParaRPr lang="en-US" sz="1100" dirty="0">
                         <a:latin typeface="Calibri" charset="0"/>
@@ -42209,7 +42210,7 @@
                           <a:ea typeface="Calibri" pitchFamily="34" charset="-122"/>
                           <a:cs typeface="Calibri" pitchFamily="34" charset="-120"/>
                         </a:rPr>
-                        <a:t>9.2 %</a:t>
+                        <a:t>13.8 %</a:t>
                       </a:r>
                       <a:endParaRPr lang="en-US" sz="1100" dirty="0">
                         <a:latin typeface="Calibri" charset="0"/>
@@ -42464,7 +42465,7 @@
                 <a:ea typeface="Cambria" pitchFamily="34" charset="-122"/>
                 <a:cs typeface="Cambria" pitchFamily="34" charset="-120"/>
               </a:rPr>
-              <a:t>Coste de los recursos: la liquidez de empresas</a:t>
+              <a:t>Coste de los recursos de empresa</a:t>
             </a:r>
             <a:endParaRPr lang="en-US" sz="3000" dirty="0"/>
           </a:p>
@@ -42503,7 +42504,7 @@
                 <a:ea typeface="Calibri" pitchFamily="34" charset="-122"/>
                 <a:cs typeface="Calibri" pitchFamily="34" charset="-120"/>
               </a:rPr>
-              <a:t>Lo que el banco paga por el depósito frente a lo que obtiene en la facilidad del BCE (2,09 %) · Media 2026</a:t>
+              <a:t>Tipos del MIR ponderados por la mezcla real de saldos del BSI · Media 2026 · Es el coste de fondos que usa el modelo</a:t>
             </a:r>
             <a:endParaRPr lang="en-US" sz="1300" dirty="0"/>
           </a:p>
@@ -42517,7 +42518,7 @@
         </p:nvGraphicFramePr>
         <p:xfrm>
           <a:off x="548640" y="1691640"/>
-          <a:ext cx="6858000" cy="3566160"/>
+          <a:ext cx="6812280" cy="3520440"/>
         </p:xfrm>
         <a:graphic xmlns:a="http://schemas.openxmlformats.org/drawingml/2006/main">
           <a:graphicData uri="http://schemas.openxmlformats.org/drawingml/2006/chart">
@@ -42525,28 +42526,2702 @@
           </a:graphicData>
         </a:graphic>
       </p:graphicFrame>
+      <p:graphicFrame>
+        <p:nvGraphicFramePr>
+          <p:cNvPr id="10" name="Table 0"/>
+          <p:cNvGraphicFramePr>
+            <a:graphicFrameLocks noGrp="1"/>
+          </p:cNvGraphicFramePr>
+          <p:nvPr>
+            <p:extLst>
+              <p:ext uri="{D42A27DB-BD31-4B8C-83A1-F6EECF244321}">
+                <p14:modId xmlns:p14="http://schemas.microsoft.com/office/powerpoint/2010/main" val="1579011935"/>
+              </p:ext>
+            </p:extLst>
+          </p:nvPr>
+        </p:nvGraphicFramePr>
+        <p:xfrm>
+          <a:off x="7452360" y="1691640"/>
+          <a:ext cx="4187952" cy="914400"/>
+        </p:xfrm>
+        <a:graphic>
+          <a:graphicData uri="http://schemas.openxmlformats.org/drawingml/2006/table">
+            <a:tbl>
+              <a:tblPr/>
+              <a:tblGrid>
+                <a:gridCol w="1170432"/>
+                <a:gridCol w="731520"/>
+                <a:gridCol w="731520"/>
+                <a:gridCol w="786384"/>
+                <a:gridCol w="768096"/>
+              </a:tblGrid>
+              <a:tr h="333756">
+                <a:tc>
+                  <a:txBody>
+                    <a:bodyPr/>
+                    <a:lstStyle/>
+                    <a:p>
+                      <a:pPr algn="l" indent="0" marL="0">
+                        <a:buNone/>
+                      </a:pPr>
+                      <a:endParaRPr lang="en-US" sz="950" dirty="0">
+                        <a:latin typeface="Calibri" charset="0"/>
+                        <a:ea typeface="Calibri" charset="0"/>
+                        <a:cs typeface="Calibri" charset="0"/>
+                      </a:endParaRPr>
+                    </a:p>
+                  </a:txBody>
+                  <a:tcPr marL="91440" marR="91440" marT="45720" marB="45720" anchor="ctr">
+                    <a:lnL w="6350" cap="flat" cmpd="sng" algn="ctr">
+                      <a:solidFill>
+                        <a:srgbClr val="D6DEE1"/>
+                      </a:solidFill>
+                      <a:prstDash val="solid"/>
+                      <a:round/>
+                      <a:headEnd type="none" w="med" len="med"/>
+                      <a:tailEnd type="none" w="med" len="med"/>
+                    </a:lnL>
+                    <a:lnR w="6350" cap="flat" cmpd="sng" algn="ctr">
+                      <a:solidFill>
+                        <a:srgbClr val="D6DEE1"/>
+                      </a:solidFill>
+                      <a:prstDash val="solid"/>
+                      <a:round/>
+                      <a:headEnd type="none" w="med" len="med"/>
+                      <a:tailEnd type="none" w="med" len="med"/>
+                    </a:lnR>
+                    <a:lnT w="6350" cap="flat" cmpd="sng" algn="ctr">
+                      <a:solidFill>
+                        <a:srgbClr val="D6DEE1"/>
+                      </a:solidFill>
+                      <a:prstDash val="solid"/>
+                      <a:round/>
+                      <a:headEnd type="none" w="med" len="med"/>
+                      <a:tailEnd type="none" w="med" len="med"/>
+                    </a:lnT>
+                    <a:lnB w="6350" cap="flat" cmpd="sng" algn="ctr">
+                      <a:solidFill>
+                        <a:srgbClr val="D6DEE1"/>
+                      </a:solidFill>
+                      <a:prstDash val="solid"/>
+                      <a:round/>
+                      <a:headEnd type="none" w="med" len="med"/>
+                      <a:tailEnd type="none" w="med" len="med"/>
+                    </a:lnB>
+                    <a:solidFill>
+                      <a:srgbClr val="1C3F4E"/>
+                    </a:solidFill>
+                  </a:tcPr>
+                </a:tc>
+                <a:tc>
+                  <a:txBody>
+                    <a:bodyPr/>
+                    <a:lstStyle/>
+                    <a:p>
+                      <a:pPr algn="ctr" indent="0" marL="0">
+                        <a:buNone/>
+                      </a:pPr>
+                      <a:r>
+                        <a:rPr lang="en-US" sz="950" b="1" dirty="0">
+                          <a:solidFill>
+                            <a:srgbClr val="FFFFFF"/>
+                          </a:solidFill>
+                          <a:latin typeface="Calibri" pitchFamily="34" charset="0"/>
+                          <a:ea typeface="Calibri" pitchFamily="34" charset="-122"/>
+                          <a:cs typeface="Calibri" pitchFamily="34" charset="-120"/>
+                        </a:rPr>
+                        <a:t>Vista</a:t>
+                      </a:r>
+                      <a:endParaRPr lang="en-US" sz="950" dirty="0">
+                        <a:latin typeface="Calibri" charset="0"/>
+                        <a:ea typeface="Calibri" charset="0"/>
+                        <a:cs typeface="Calibri" charset="0"/>
+                      </a:endParaRPr>
+                    </a:p>
+                  </a:txBody>
+                  <a:tcPr marL="91440" marR="91440" marT="45720" marB="45720" anchor="ctr">
+                    <a:lnL w="6350" cap="flat" cmpd="sng" algn="ctr">
+                      <a:solidFill>
+                        <a:srgbClr val="D6DEE1"/>
+                      </a:solidFill>
+                      <a:prstDash val="solid"/>
+                      <a:round/>
+                      <a:headEnd type="none" w="med" len="med"/>
+                      <a:tailEnd type="none" w="med" len="med"/>
+                    </a:lnL>
+                    <a:lnR w="6350" cap="flat" cmpd="sng" algn="ctr">
+                      <a:solidFill>
+                        <a:srgbClr val="D6DEE1"/>
+                      </a:solidFill>
+                      <a:prstDash val="solid"/>
+                      <a:round/>
+                      <a:headEnd type="none" w="med" len="med"/>
+                      <a:tailEnd type="none" w="med" len="med"/>
+                    </a:lnR>
+                    <a:lnT w="6350" cap="flat" cmpd="sng" algn="ctr">
+                      <a:solidFill>
+                        <a:srgbClr val="D6DEE1"/>
+                      </a:solidFill>
+                      <a:prstDash val="solid"/>
+                      <a:round/>
+                      <a:headEnd type="none" w="med" len="med"/>
+                      <a:tailEnd type="none" w="med" len="med"/>
+                    </a:lnT>
+                    <a:lnB w="6350" cap="flat" cmpd="sng" algn="ctr">
+                      <a:solidFill>
+                        <a:srgbClr val="D6DEE1"/>
+                      </a:solidFill>
+                      <a:prstDash val="solid"/>
+                      <a:round/>
+                      <a:headEnd type="none" w="med" len="med"/>
+                      <a:tailEnd type="none" w="med" len="med"/>
+                    </a:lnB>
+                    <a:solidFill>
+                      <a:srgbClr val="1C3F4E"/>
+                    </a:solidFill>
+                  </a:tcPr>
+                </a:tc>
+                <a:tc>
+                  <a:txBody>
+                    <a:bodyPr/>
+                    <a:lstStyle/>
+                    <a:p>
+                      <a:pPr algn="ctr" indent="0" marL="0">
+                        <a:buNone/>
+                      </a:pPr>
+                      <a:r>
+                        <a:rPr lang="en-US" sz="950" b="1" dirty="0">
+                          <a:solidFill>
+                            <a:srgbClr val="FFFFFF"/>
+                          </a:solidFill>
+                          <a:latin typeface="Calibri" pitchFamily="34" charset="0"/>
+                          <a:ea typeface="Calibri" pitchFamily="34" charset="-122"/>
+                          <a:cs typeface="Calibri" pitchFamily="34" charset="-120"/>
+                        </a:rPr>
+                        <a:t>Plazo</a:t>
+                      </a:r>
+                      <a:endParaRPr lang="en-US" sz="950" dirty="0">
+                        <a:latin typeface="Calibri" charset="0"/>
+                        <a:ea typeface="Calibri" charset="0"/>
+                        <a:cs typeface="Calibri" charset="0"/>
+                      </a:endParaRPr>
+                    </a:p>
+                  </a:txBody>
+                  <a:tcPr marL="91440" marR="91440" marT="45720" marB="45720" anchor="ctr">
+                    <a:lnL w="6350" cap="flat" cmpd="sng" algn="ctr">
+                      <a:solidFill>
+                        <a:srgbClr val="D6DEE1"/>
+                      </a:solidFill>
+                      <a:prstDash val="solid"/>
+                      <a:round/>
+                      <a:headEnd type="none" w="med" len="med"/>
+                      <a:tailEnd type="none" w="med" len="med"/>
+                    </a:lnL>
+                    <a:lnR w="6350" cap="flat" cmpd="sng" algn="ctr">
+                      <a:solidFill>
+                        <a:srgbClr val="D6DEE1"/>
+                      </a:solidFill>
+                      <a:prstDash val="solid"/>
+                      <a:round/>
+                      <a:headEnd type="none" w="med" len="med"/>
+                      <a:tailEnd type="none" w="med" len="med"/>
+                    </a:lnR>
+                    <a:lnT w="6350" cap="flat" cmpd="sng" algn="ctr">
+                      <a:solidFill>
+                        <a:srgbClr val="D6DEE1"/>
+                      </a:solidFill>
+                      <a:prstDash val="solid"/>
+                      <a:round/>
+                      <a:headEnd type="none" w="med" len="med"/>
+                      <a:tailEnd type="none" w="med" len="med"/>
+                    </a:lnT>
+                    <a:lnB w="6350" cap="flat" cmpd="sng" algn="ctr">
+                      <a:solidFill>
+                        <a:srgbClr val="D6DEE1"/>
+                      </a:solidFill>
+                      <a:prstDash val="solid"/>
+                      <a:round/>
+                      <a:headEnd type="none" w="med" len="med"/>
+                      <a:tailEnd type="none" w="med" len="med"/>
+                    </a:lnB>
+                    <a:solidFill>
+                      <a:srgbClr val="1C3F4E"/>
+                    </a:solidFill>
+                  </a:tcPr>
+                </a:tc>
+                <a:tc>
+                  <a:txBody>
+                    <a:bodyPr/>
+                    <a:lstStyle/>
+                    <a:p>
+                      <a:pPr algn="ctr" indent="0" marL="0">
+                        <a:buNone/>
+                      </a:pPr>
+                      <a:r>
+                        <a:rPr lang="en-US" sz="950" b="1" dirty="0">
+                          <a:solidFill>
+                            <a:srgbClr val="FFFFFF"/>
+                          </a:solidFill>
+                          <a:latin typeface="Calibri" pitchFamily="34" charset="0"/>
+                          <a:ea typeface="Calibri" pitchFamily="34" charset="-122"/>
+                          <a:cs typeface="Calibri" pitchFamily="34" charset="-120"/>
+                        </a:rPr>
+                        <a:t>% vista</a:t>
+                      </a:r>
+                      <a:endParaRPr lang="en-US" sz="950" dirty="0">
+                        <a:latin typeface="Calibri" charset="0"/>
+                        <a:ea typeface="Calibri" charset="0"/>
+                        <a:cs typeface="Calibri" charset="0"/>
+                      </a:endParaRPr>
+                    </a:p>
+                  </a:txBody>
+                  <a:tcPr marL="91440" marR="91440" marT="45720" marB="45720" anchor="ctr">
+                    <a:lnL w="6350" cap="flat" cmpd="sng" algn="ctr">
+                      <a:solidFill>
+                        <a:srgbClr val="D6DEE1"/>
+                      </a:solidFill>
+                      <a:prstDash val="solid"/>
+                      <a:round/>
+                      <a:headEnd type="none" w="med" len="med"/>
+                      <a:tailEnd type="none" w="med" len="med"/>
+                    </a:lnL>
+                    <a:lnR w="6350" cap="flat" cmpd="sng" algn="ctr">
+                      <a:solidFill>
+                        <a:srgbClr val="D6DEE1"/>
+                      </a:solidFill>
+                      <a:prstDash val="solid"/>
+                      <a:round/>
+                      <a:headEnd type="none" w="med" len="med"/>
+                      <a:tailEnd type="none" w="med" len="med"/>
+                    </a:lnR>
+                    <a:lnT w="6350" cap="flat" cmpd="sng" algn="ctr">
+                      <a:solidFill>
+                        <a:srgbClr val="D6DEE1"/>
+                      </a:solidFill>
+                      <a:prstDash val="solid"/>
+                      <a:round/>
+                      <a:headEnd type="none" w="med" len="med"/>
+                      <a:tailEnd type="none" w="med" len="med"/>
+                    </a:lnT>
+                    <a:lnB w="6350" cap="flat" cmpd="sng" algn="ctr">
+                      <a:solidFill>
+                        <a:srgbClr val="D6DEE1"/>
+                      </a:solidFill>
+                      <a:prstDash val="solid"/>
+                      <a:round/>
+                      <a:headEnd type="none" w="med" len="med"/>
+                      <a:tailEnd type="none" w="med" len="med"/>
+                    </a:lnB>
+                    <a:solidFill>
+                      <a:srgbClr val="1C3F4E"/>
+                    </a:solidFill>
+                  </a:tcPr>
+                </a:tc>
+                <a:tc>
+                  <a:txBody>
+                    <a:bodyPr/>
+                    <a:lstStyle/>
+                    <a:p>
+                      <a:pPr algn="ctr" indent="0" marL="0">
+                        <a:buNone/>
+                      </a:pPr>
+                      <a:r>
+                        <a:rPr lang="en-US" sz="950" b="1" dirty="0">
+                          <a:solidFill>
+                            <a:srgbClr val="FFFFFF"/>
+                          </a:solidFill>
+                          <a:latin typeface="Calibri" pitchFamily="34" charset="0"/>
+                          <a:ea typeface="Calibri" pitchFamily="34" charset="-122"/>
+                          <a:cs typeface="Calibri" pitchFamily="34" charset="-120"/>
+                        </a:rPr>
+                        <a:t>Ponderado</a:t>
+                      </a:r>
+                      <a:endParaRPr lang="en-US" sz="950" dirty="0">
+                        <a:latin typeface="Calibri" charset="0"/>
+                        <a:ea typeface="Calibri" charset="0"/>
+                        <a:cs typeface="Calibri" charset="0"/>
+                      </a:endParaRPr>
+                    </a:p>
+                  </a:txBody>
+                  <a:tcPr marL="91440" marR="91440" marT="45720" marB="45720" anchor="ctr">
+                    <a:lnL w="6350" cap="flat" cmpd="sng" algn="ctr">
+                      <a:solidFill>
+                        <a:srgbClr val="D6DEE1"/>
+                      </a:solidFill>
+                      <a:prstDash val="solid"/>
+                      <a:round/>
+                      <a:headEnd type="none" w="med" len="med"/>
+                      <a:tailEnd type="none" w="med" len="med"/>
+                    </a:lnL>
+                    <a:lnR w="6350" cap="flat" cmpd="sng" algn="ctr">
+                      <a:solidFill>
+                        <a:srgbClr val="D6DEE1"/>
+                      </a:solidFill>
+                      <a:prstDash val="solid"/>
+                      <a:round/>
+                      <a:headEnd type="none" w="med" len="med"/>
+                      <a:tailEnd type="none" w="med" len="med"/>
+                    </a:lnR>
+                    <a:lnT w="6350" cap="flat" cmpd="sng" algn="ctr">
+                      <a:solidFill>
+                        <a:srgbClr val="D6DEE1"/>
+                      </a:solidFill>
+                      <a:prstDash val="solid"/>
+                      <a:round/>
+                      <a:headEnd type="none" w="med" len="med"/>
+                      <a:tailEnd type="none" w="med" len="med"/>
+                    </a:lnT>
+                    <a:lnB w="6350" cap="flat" cmpd="sng" algn="ctr">
+                      <a:solidFill>
+                        <a:srgbClr val="D6DEE1"/>
+                      </a:solidFill>
+                      <a:prstDash val="solid"/>
+                      <a:round/>
+                      <a:headEnd type="none" w="med" len="med"/>
+                      <a:tailEnd type="none" w="med" len="med"/>
+                    </a:lnB>
+                    <a:solidFill>
+                      <a:srgbClr val="1C3F4E"/>
+                    </a:solidFill>
+                  </a:tcPr>
+                </a:tc>
+              </a:tr>
+              <a:tr h="333756">
+                <a:tc>
+                  <a:txBody>
+                    <a:bodyPr/>
+                    <a:lstStyle/>
+                    <a:p>
+                      <a:pPr algn="l" indent="0" marL="0">
+                        <a:buNone/>
+                      </a:pPr>
+                      <a:r>
+                        <a:rPr lang="en-US" sz="1000" b="1" dirty="0">
+                          <a:solidFill>
+                            <a:srgbClr val="2B3A42"/>
+                          </a:solidFill>
+                          <a:latin typeface="Calibri" pitchFamily="34" charset="0"/>
+                          <a:ea typeface="Calibri" pitchFamily="34" charset="-122"/>
+                          <a:cs typeface="Calibri" pitchFamily="34" charset="-120"/>
+                        </a:rPr>
+                        <a:t>España</a:t>
+                      </a:r>
+                      <a:endParaRPr lang="en-US" sz="1000" dirty="0">
+                        <a:latin typeface="Calibri" charset="0"/>
+                        <a:ea typeface="Calibri" charset="0"/>
+                        <a:cs typeface="Calibri" charset="0"/>
+                      </a:endParaRPr>
+                    </a:p>
+                  </a:txBody>
+                  <a:tcPr marL="91440" marR="91440" marT="45720" marB="45720" anchor="ctr">
+                    <a:lnL w="6350" cap="flat" cmpd="sng" algn="ctr">
+                      <a:solidFill>
+                        <a:srgbClr val="D6DEE1"/>
+                      </a:solidFill>
+                      <a:prstDash val="solid"/>
+                      <a:round/>
+                      <a:headEnd type="none" w="med" len="med"/>
+                      <a:tailEnd type="none" w="med" len="med"/>
+                    </a:lnL>
+                    <a:lnR w="6350" cap="flat" cmpd="sng" algn="ctr">
+                      <a:solidFill>
+                        <a:srgbClr val="D6DEE1"/>
+                      </a:solidFill>
+                      <a:prstDash val="solid"/>
+                      <a:round/>
+                      <a:headEnd type="none" w="med" len="med"/>
+                      <a:tailEnd type="none" w="med" len="med"/>
+                    </a:lnR>
+                    <a:lnT w="6350" cap="flat" cmpd="sng" algn="ctr">
+                      <a:solidFill>
+                        <a:srgbClr val="D6DEE1"/>
+                      </a:solidFill>
+                      <a:prstDash val="solid"/>
+                      <a:round/>
+                      <a:headEnd type="none" w="med" len="med"/>
+                      <a:tailEnd type="none" w="med" len="med"/>
+                    </a:lnT>
+                    <a:lnB w="6350" cap="flat" cmpd="sng" algn="ctr">
+                      <a:solidFill>
+                        <a:srgbClr val="D6DEE1"/>
+                      </a:solidFill>
+                      <a:prstDash val="solid"/>
+                      <a:round/>
+                      <a:headEnd type="none" w="med" len="med"/>
+                      <a:tailEnd type="none" w="med" len="med"/>
+                    </a:lnB>
+                  </a:tcPr>
+                </a:tc>
+                <a:tc>
+                  <a:txBody>
+                    <a:bodyPr/>
+                    <a:lstStyle/>
+                    <a:p>
+                      <a:pPr algn="ctr" indent="0" marL="0">
+                        <a:buNone/>
+                      </a:pPr>
+                      <a:r>
+                        <a:rPr lang="en-US" sz="1000" dirty="0">
+                          <a:solidFill>
+                            <a:srgbClr val="2B3A42"/>
+                          </a:solidFill>
+                          <a:latin typeface="Calibri" pitchFamily="34" charset="0"/>
+                          <a:ea typeface="Calibri" pitchFamily="34" charset="-122"/>
+                          <a:cs typeface="Calibri" pitchFamily="34" charset="-120"/>
+                        </a:rPr>
+                        <a:t>0.44</a:t>
+                      </a:r>
+                      <a:endParaRPr lang="en-US" sz="1000" dirty="0">
+                        <a:latin typeface="Calibri" charset="0"/>
+                        <a:ea typeface="Calibri" charset="0"/>
+                        <a:cs typeface="Calibri" charset="0"/>
+                      </a:endParaRPr>
+                    </a:p>
+                  </a:txBody>
+                  <a:tcPr marL="91440" marR="91440" marT="45720" marB="45720" anchor="ctr">
+                    <a:lnL w="6350" cap="flat" cmpd="sng" algn="ctr">
+                      <a:solidFill>
+                        <a:srgbClr val="D6DEE1"/>
+                      </a:solidFill>
+                      <a:prstDash val="solid"/>
+                      <a:round/>
+                      <a:headEnd type="none" w="med" len="med"/>
+                      <a:tailEnd type="none" w="med" len="med"/>
+                    </a:lnL>
+                    <a:lnR w="6350" cap="flat" cmpd="sng" algn="ctr">
+                      <a:solidFill>
+                        <a:srgbClr val="D6DEE1"/>
+                      </a:solidFill>
+                      <a:prstDash val="solid"/>
+                      <a:round/>
+                      <a:headEnd type="none" w="med" len="med"/>
+                      <a:tailEnd type="none" w="med" len="med"/>
+                    </a:lnR>
+                    <a:lnT w="6350" cap="flat" cmpd="sng" algn="ctr">
+                      <a:solidFill>
+                        <a:srgbClr val="D6DEE1"/>
+                      </a:solidFill>
+                      <a:prstDash val="solid"/>
+                      <a:round/>
+                      <a:headEnd type="none" w="med" len="med"/>
+                      <a:tailEnd type="none" w="med" len="med"/>
+                    </a:lnT>
+                    <a:lnB w="6350" cap="flat" cmpd="sng" algn="ctr">
+                      <a:solidFill>
+                        <a:srgbClr val="D6DEE1"/>
+                      </a:solidFill>
+                      <a:prstDash val="solid"/>
+                      <a:round/>
+                      <a:headEnd type="none" w="med" len="med"/>
+                      <a:tailEnd type="none" w="med" len="med"/>
+                    </a:lnB>
+                  </a:tcPr>
+                </a:tc>
+                <a:tc>
+                  <a:txBody>
+                    <a:bodyPr/>
+                    <a:lstStyle/>
+                    <a:p>
+                      <a:pPr algn="ctr" indent="0" marL="0">
+                        <a:buNone/>
+                      </a:pPr>
+                      <a:r>
+                        <a:rPr lang="en-US" sz="1000" dirty="0">
+                          <a:solidFill>
+                            <a:srgbClr val="2B3A42"/>
+                          </a:solidFill>
+                          <a:latin typeface="Calibri" pitchFamily="34" charset="0"/>
+                          <a:ea typeface="Calibri" pitchFamily="34" charset="-122"/>
+                          <a:cs typeface="Calibri" pitchFamily="34" charset="-120"/>
+                        </a:rPr>
+                        <a:t>1.90</a:t>
+                      </a:r>
+                      <a:endParaRPr lang="en-US" sz="1000" dirty="0">
+                        <a:latin typeface="Calibri" charset="0"/>
+                        <a:ea typeface="Calibri" charset="0"/>
+                        <a:cs typeface="Calibri" charset="0"/>
+                      </a:endParaRPr>
+                    </a:p>
+                  </a:txBody>
+                  <a:tcPr marL="91440" marR="91440" marT="45720" marB="45720" anchor="ctr">
+                    <a:lnL w="6350" cap="flat" cmpd="sng" algn="ctr">
+                      <a:solidFill>
+                        <a:srgbClr val="D6DEE1"/>
+                      </a:solidFill>
+                      <a:prstDash val="solid"/>
+                      <a:round/>
+                      <a:headEnd type="none" w="med" len="med"/>
+                      <a:tailEnd type="none" w="med" len="med"/>
+                    </a:lnL>
+                    <a:lnR w="6350" cap="flat" cmpd="sng" algn="ctr">
+                      <a:solidFill>
+                        <a:srgbClr val="D6DEE1"/>
+                      </a:solidFill>
+                      <a:prstDash val="solid"/>
+                      <a:round/>
+                      <a:headEnd type="none" w="med" len="med"/>
+                      <a:tailEnd type="none" w="med" len="med"/>
+                    </a:lnR>
+                    <a:lnT w="6350" cap="flat" cmpd="sng" algn="ctr">
+                      <a:solidFill>
+                        <a:srgbClr val="D6DEE1"/>
+                      </a:solidFill>
+                      <a:prstDash val="solid"/>
+                      <a:round/>
+                      <a:headEnd type="none" w="med" len="med"/>
+                      <a:tailEnd type="none" w="med" len="med"/>
+                    </a:lnT>
+                    <a:lnB w="6350" cap="flat" cmpd="sng" algn="ctr">
+                      <a:solidFill>
+                        <a:srgbClr val="D6DEE1"/>
+                      </a:solidFill>
+                      <a:prstDash val="solid"/>
+                      <a:round/>
+                      <a:headEnd type="none" w="med" len="med"/>
+                      <a:tailEnd type="none" w="med" len="med"/>
+                    </a:lnB>
+                  </a:tcPr>
+                </a:tc>
+                <a:tc>
+                  <a:txBody>
+                    <a:bodyPr/>
+                    <a:lstStyle/>
+                    <a:p>
+                      <a:pPr algn="ctr" indent="0" marL="0">
+                        <a:buNone/>
+                      </a:pPr>
+                      <a:r>
+                        <a:rPr lang="en-US" sz="1000" dirty="0">
+                          <a:solidFill>
+                            <a:srgbClr val="2B3A42"/>
+                          </a:solidFill>
+                          <a:latin typeface="Calibri" pitchFamily="34" charset="0"/>
+                          <a:ea typeface="Calibri" pitchFamily="34" charset="-122"/>
+                          <a:cs typeface="Calibri" pitchFamily="34" charset="-120"/>
+                        </a:rPr>
+                        <a:t>79 %</a:t>
+                      </a:r>
+                      <a:endParaRPr lang="en-US" sz="1000" dirty="0">
+                        <a:latin typeface="Calibri" charset="0"/>
+                        <a:ea typeface="Calibri" charset="0"/>
+                        <a:cs typeface="Calibri" charset="0"/>
+                      </a:endParaRPr>
+                    </a:p>
+                  </a:txBody>
+                  <a:tcPr marL="91440" marR="91440" marT="45720" marB="45720" anchor="ctr">
+                    <a:lnL w="6350" cap="flat" cmpd="sng" algn="ctr">
+                      <a:solidFill>
+                        <a:srgbClr val="D6DEE1"/>
+                      </a:solidFill>
+                      <a:prstDash val="solid"/>
+                      <a:round/>
+                      <a:headEnd type="none" w="med" len="med"/>
+                      <a:tailEnd type="none" w="med" len="med"/>
+                    </a:lnL>
+                    <a:lnR w="6350" cap="flat" cmpd="sng" algn="ctr">
+                      <a:solidFill>
+                        <a:srgbClr val="D6DEE1"/>
+                      </a:solidFill>
+                      <a:prstDash val="solid"/>
+                      <a:round/>
+                      <a:headEnd type="none" w="med" len="med"/>
+                      <a:tailEnd type="none" w="med" len="med"/>
+                    </a:lnR>
+                    <a:lnT w="6350" cap="flat" cmpd="sng" algn="ctr">
+                      <a:solidFill>
+                        <a:srgbClr val="D6DEE1"/>
+                      </a:solidFill>
+                      <a:prstDash val="solid"/>
+                      <a:round/>
+                      <a:headEnd type="none" w="med" len="med"/>
+                      <a:tailEnd type="none" w="med" len="med"/>
+                    </a:lnT>
+                    <a:lnB w="6350" cap="flat" cmpd="sng" algn="ctr">
+                      <a:solidFill>
+                        <a:srgbClr val="D6DEE1"/>
+                      </a:solidFill>
+                      <a:prstDash val="solid"/>
+                      <a:round/>
+                      <a:headEnd type="none" w="med" len="med"/>
+                      <a:tailEnd type="none" w="med" len="med"/>
+                    </a:lnB>
+                  </a:tcPr>
+                </a:tc>
+                <a:tc>
+                  <a:txBody>
+                    <a:bodyPr/>
+                    <a:lstStyle/>
+                    <a:p>
+                      <a:pPr algn="ctr" indent="0" marL="0">
+                        <a:buNone/>
+                      </a:pPr>
+                      <a:r>
+                        <a:rPr lang="en-US" sz="1000" b="1" dirty="0">
+                          <a:solidFill>
+                            <a:srgbClr val="1C3F4E"/>
+                          </a:solidFill>
+                          <a:latin typeface="Calibri" pitchFamily="34" charset="0"/>
+                          <a:ea typeface="Calibri" pitchFamily="34" charset="-122"/>
+                          <a:cs typeface="Calibri" pitchFamily="34" charset="-120"/>
+                        </a:rPr>
+                        <a:t>0.75</a:t>
+                      </a:r>
+                      <a:endParaRPr lang="en-US" sz="1000" dirty="0">
+                        <a:latin typeface="Calibri" charset="0"/>
+                        <a:ea typeface="Calibri" charset="0"/>
+                        <a:cs typeface="Calibri" charset="0"/>
+                      </a:endParaRPr>
+                    </a:p>
+                  </a:txBody>
+                  <a:tcPr marL="91440" marR="91440" marT="45720" marB="45720" anchor="ctr">
+                    <a:lnL w="6350" cap="flat" cmpd="sng" algn="ctr">
+                      <a:solidFill>
+                        <a:srgbClr val="D6DEE1"/>
+                      </a:solidFill>
+                      <a:prstDash val="solid"/>
+                      <a:round/>
+                      <a:headEnd type="none" w="med" len="med"/>
+                      <a:tailEnd type="none" w="med" len="med"/>
+                    </a:lnL>
+                    <a:lnR w="6350" cap="flat" cmpd="sng" algn="ctr">
+                      <a:solidFill>
+                        <a:srgbClr val="D6DEE1"/>
+                      </a:solidFill>
+                      <a:prstDash val="solid"/>
+                      <a:round/>
+                      <a:headEnd type="none" w="med" len="med"/>
+                      <a:tailEnd type="none" w="med" len="med"/>
+                    </a:lnR>
+                    <a:lnT w="6350" cap="flat" cmpd="sng" algn="ctr">
+                      <a:solidFill>
+                        <a:srgbClr val="D6DEE1"/>
+                      </a:solidFill>
+                      <a:prstDash val="solid"/>
+                      <a:round/>
+                      <a:headEnd type="none" w="med" len="med"/>
+                      <a:tailEnd type="none" w="med" len="med"/>
+                    </a:lnT>
+                    <a:lnB w="6350" cap="flat" cmpd="sng" algn="ctr">
+                      <a:solidFill>
+                        <a:srgbClr val="D6DEE1"/>
+                      </a:solidFill>
+                      <a:prstDash val="solid"/>
+                      <a:round/>
+                      <a:headEnd type="none" w="med" len="med"/>
+                      <a:tailEnd type="none" w="med" len="med"/>
+                    </a:lnB>
+                    <a:solidFill>
+                      <a:srgbClr val="EEF2F3"/>
+                    </a:solidFill>
+                  </a:tcPr>
+                </a:tc>
+              </a:tr>
+              <a:tr h="333756">
+                <a:tc>
+                  <a:txBody>
+                    <a:bodyPr/>
+                    <a:lstStyle/>
+                    <a:p>
+                      <a:pPr algn="l" indent="0" marL="0">
+                        <a:buNone/>
+                      </a:pPr>
+                      <a:r>
+                        <a:rPr lang="en-US" sz="1000" b="1" dirty="0">
+                          <a:solidFill>
+                            <a:srgbClr val="2B3A42"/>
+                          </a:solidFill>
+                          <a:latin typeface="Calibri" pitchFamily="34" charset="0"/>
+                          <a:ea typeface="Calibri" pitchFamily="34" charset="-122"/>
+                          <a:cs typeface="Calibri" pitchFamily="34" charset="-120"/>
+                        </a:rPr>
+                        <a:t>Alemania</a:t>
+                      </a:r>
+                      <a:endParaRPr lang="en-US" sz="1000" dirty="0">
+                        <a:latin typeface="Calibri" charset="0"/>
+                        <a:ea typeface="Calibri" charset="0"/>
+                        <a:cs typeface="Calibri" charset="0"/>
+                      </a:endParaRPr>
+                    </a:p>
+                  </a:txBody>
+                  <a:tcPr marL="91440" marR="91440" marT="45720" marB="45720" anchor="ctr">
+                    <a:lnL w="6350" cap="flat" cmpd="sng" algn="ctr">
+                      <a:solidFill>
+                        <a:srgbClr val="D6DEE1"/>
+                      </a:solidFill>
+                      <a:prstDash val="solid"/>
+                      <a:round/>
+                      <a:headEnd type="none" w="med" len="med"/>
+                      <a:tailEnd type="none" w="med" len="med"/>
+                    </a:lnL>
+                    <a:lnR w="6350" cap="flat" cmpd="sng" algn="ctr">
+                      <a:solidFill>
+                        <a:srgbClr val="D6DEE1"/>
+                      </a:solidFill>
+                      <a:prstDash val="solid"/>
+                      <a:round/>
+                      <a:headEnd type="none" w="med" len="med"/>
+                      <a:tailEnd type="none" w="med" len="med"/>
+                    </a:lnR>
+                    <a:lnT w="6350" cap="flat" cmpd="sng" algn="ctr">
+                      <a:solidFill>
+                        <a:srgbClr val="D6DEE1"/>
+                      </a:solidFill>
+                      <a:prstDash val="solid"/>
+                      <a:round/>
+                      <a:headEnd type="none" w="med" len="med"/>
+                      <a:tailEnd type="none" w="med" len="med"/>
+                    </a:lnT>
+                    <a:lnB w="6350" cap="flat" cmpd="sng" algn="ctr">
+                      <a:solidFill>
+                        <a:srgbClr val="D6DEE1"/>
+                      </a:solidFill>
+                      <a:prstDash val="solid"/>
+                      <a:round/>
+                      <a:headEnd type="none" w="med" len="med"/>
+                      <a:tailEnd type="none" w="med" len="med"/>
+                    </a:lnB>
+                  </a:tcPr>
+                </a:tc>
+                <a:tc>
+                  <a:txBody>
+                    <a:bodyPr/>
+                    <a:lstStyle/>
+                    <a:p>
+                      <a:pPr algn="ctr" indent="0" marL="0">
+                        <a:buNone/>
+                      </a:pPr>
+                      <a:r>
+                        <a:rPr lang="en-US" sz="1000" dirty="0">
+                          <a:solidFill>
+                            <a:srgbClr val="2B3A42"/>
+                          </a:solidFill>
+                          <a:latin typeface="Calibri" pitchFamily="34" charset="0"/>
+                          <a:ea typeface="Calibri" pitchFamily="34" charset="-122"/>
+                          <a:cs typeface="Calibri" pitchFamily="34" charset="-120"/>
+                        </a:rPr>
+                        <a:t>0.72</a:t>
+                      </a:r>
+                      <a:endParaRPr lang="en-US" sz="1000" dirty="0">
+                        <a:latin typeface="Calibri" charset="0"/>
+                        <a:ea typeface="Calibri" charset="0"/>
+                        <a:cs typeface="Calibri" charset="0"/>
+                      </a:endParaRPr>
+                    </a:p>
+                  </a:txBody>
+                  <a:tcPr marL="91440" marR="91440" marT="45720" marB="45720" anchor="ctr">
+                    <a:lnL w="6350" cap="flat" cmpd="sng" algn="ctr">
+                      <a:solidFill>
+                        <a:srgbClr val="D6DEE1"/>
+                      </a:solidFill>
+                      <a:prstDash val="solid"/>
+                      <a:round/>
+                      <a:headEnd type="none" w="med" len="med"/>
+                      <a:tailEnd type="none" w="med" len="med"/>
+                    </a:lnL>
+                    <a:lnR w="6350" cap="flat" cmpd="sng" algn="ctr">
+                      <a:solidFill>
+                        <a:srgbClr val="D6DEE1"/>
+                      </a:solidFill>
+                      <a:prstDash val="solid"/>
+                      <a:round/>
+                      <a:headEnd type="none" w="med" len="med"/>
+                      <a:tailEnd type="none" w="med" len="med"/>
+                    </a:lnR>
+                    <a:lnT w="6350" cap="flat" cmpd="sng" algn="ctr">
+                      <a:solidFill>
+                        <a:srgbClr val="D6DEE1"/>
+                      </a:solidFill>
+                      <a:prstDash val="solid"/>
+                      <a:round/>
+                      <a:headEnd type="none" w="med" len="med"/>
+                      <a:tailEnd type="none" w="med" len="med"/>
+                    </a:lnT>
+                    <a:lnB w="6350" cap="flat" cmpd="sng" algn="ctr">
+                      <a:solidFill>
+                        <a:srgbClr val="D6DEE1"/>
+                      </a:solidFill>
+                      <a:prstDash val="solid"/>
+                      <a:round/>
+                      <a:headEnd type="none" w="med" len="med"/>
+                      <a:tailEnd type="none" w="med" len="med"/>
+                    </a:lnB>
+                  </a:tcPr>
+                </a:tc>
+                <a:tc>
+                  <a:txBody>
+                    <a:bodyPr/>
+                    <a:lstStyle/>
+                    <a:p>
+                      <a:pPr algn="ctr" indent="0" marL="0">
+                        <a:buNone/>
+                      </a:pPr>
+                      <a:r>
+                        <a:rPr lang="en-US" sz="1000" dirty="0">
+                          <a:solidFill>
+                            <a:srgbClr val="2B3A42"/>
+                          </a:solidFill>
+                          <a:latin typeface="Calibri" pitchFamily="34" charset="0"/>
+                          <a:ea typeface="Calibri" pitchFamily="34" charset="-122"/>
+                          <a:cs typeface="Calibri" pitchFamily="34" charset="-120"/>
+                        </a:rPr>
+                        <a:t>2.23</a:t>
+                      </a:r>
+                      <a:endParaRPr lang="en-US" sz="1000" dirty="0">
+                        <a:latin typeface="Calibri" charset="0"/>
+                        <a:ea typeface="Calibri" charset="0"/>
+                        <a:cs typeface="Calibri" charset="0"/>
+                      </a:endParaRPr>
+                    </a:p>
+                  </a:txBody>
+                  <a:tcPr marL="91440" marR="91440" marT="45720" marB="45720" anchor="ctr">
+                    <a:lnL w="6350" cap="flat" cmpd="sng" algn="ctr">
+                      <a:solidFill>
+                        <a:srgbClr val="D6DEE1"/>
+                      </a:solidFill>
+                      <a:prstDash val="solid"/>
+                      <a:round/>
+                      <a:headEnd type="none" w="med" len="med"/>
+                      <a:tailEnd type="none" w="med" len="med"/>
+                    </a:lnL>
+                    <a:lnR w="6350" cap="flat" cmpd="sng" algn="ctr">
+                      <a:solidFill>
+                        <a:srgbClr val="D6DEE1"/>
+                      </a:solidFill>
+                      <a:prstDash val="solid"/>
+                      <a:round/>
+                      <a:headEnd type="none" w="med" len="med"/>
+                      <a:tailEnd type="none" w="med" len="med"/>
+                    </a:lnR>
+                    <a:lnT w="6350" cap="flat" cmpd="sng" algn="ctr">
+                      <a:solidFill>
+                        <a:srgbClr val="D6DEE1"/>
+                      </a:solidFill>
+                      <a:prstDash val="solid"/>
+                      <a:round/>
+                      <a:headEnd type="none" w="med" len="med"/>
+                      <a:tailEnd type="none" w="med" len="med"/>
+                    </a:lnT>
+                    <a:lnB w="6350" cap="flat" cmpd="sng" algn="ctr">
+                      <a:solidFill>
+                        <a:srgbClr val="D6DEE1"/>
+                      </a:solidFill>
+                      <a:prstDash val="solid"/>
+                      <a:round/>
+                      <a:headEnd type="none" w="med" len="med"/>
+                      <a:tailEnd type="none" w="med" len="med"/>
+                    </a:lnB>
+                  </a:tcPr>
+                </a:tc>
+                <a:tc>
+                  <a:txBody>
+                    <a:bodyPr/>
+                    <a:lstStyle/>
+                    <a:p>
+                      <a:pPr algn="ctr" indent="0" marL="0">
+                        <a:buNone/>
+                      </a:pPr>
+                      <a:r>
+                        <a:rPr lang="en-US" sz="1000" dirty="0">
+                          <a:solidFill>
+                            <a:srgbClr val="2B3A42"/>
+                          </a:solidFill>
+                          <a:latin typeface="Calibri" pitchFamily="34" charset="0"/>
+                          <a:ea typeface="Calibri" pitchFamily="34" charset="-122"/>
+                          <a:cs typeface="Calibri" pitchFamily="34" charset="-120"/>
+                        </a:rPr>
+                        <a:t>71 %</a:t>
+                      </a:r>
+                      <a:endParaRPr lang="en-US" sz="1000" dirty="0">
+                        <a:latin typeface="Calibri" charset="0"/>
+                        <a:ea typeface="Calibri" charset="0"/>
+                        <a:cs typeface="Calibri" charset="0"/>
+                      </a:endParaRPr>
+                    </a:p>
+                  </a:txBody>
+                  <a:tcPr marL="91440" marR="91440" marT="45720" marB="45720" anchor="ctr">
+                    <a:lnL w="6350" cap="flat" cmpd="sng" algn="ctr">
+                      <a:solidFill>
+                        <a:srgbClr val="D6DEE1"/>
+                      </a:solidFill>
+                      <a:prstDash val="solid"/>
+                      <a:round/>
+                      <a:headEnd type="none" w="med" len="med"/>
+                      <a:tailEnd type="none" w="med" len="med"/>
+                    </a:lnL>
+                    <a:lnR w="6350" cap="flat" cmpd="sng" algn="ctr">
+                      <a:solidFill>
+                        <a:srgbClr val="D6DEE1"/>
+                      </a:solidFill>
+                      <a:prstDash val="solid"/>
+                      <a:round/>
+                      <a:headEnd type="none" w="med" len="med"/>
+                      <a:tailEnd type="none" w="med" len="med"/>
+                    </a:lnR>
+                    <a:lnT w="6350" cap="flat" cmpd="sng" algn="ctr">
+                      <a:solidFill>
+                        <a:srgbClr val="D6DEE1"/>
+                      </a:solidFill>
+                      <a:prstDash val="solid"/>
+                      <a:round/>
+                      <a:headEnd type="none" w="med" len="med"/>
+                      <a:tailEnd type="none" w="med" len="med"/>
+                    </a:lnT>
+                    <a:lnB w="6350" cap="flat" cmpd="sng" algn="ctr">
+                      <a:solidFill>
+                        <a:srgbClr val="D6DEE1"/>
+                      </a:solidFill>
+                      <a:prstDash val="solid"/>
+                      <a:round/>
+                      <a:headEnd type="none" w="med" len="med"/>
+                      <a:tailEnd type="none" w="med" len="med"/>
+                    </a:lnB>
+                  </a:tcPr>
+                </a:tc>
+                <a:tc>
+                  <a:txBody>
+                    <a:bodyPr/>
+                    <a:lstStyle/>
+                    <a:p>
+                      <a:pPr algn="ctr" indent="0" marL="0">
+                        <a:buNone/>
+                      </a:pPr>
+                      <a:r>
+                        <a:rPr lang="en-US" sz="1000" b="1" dirty="0">
+                          <a:solidFill>
+                            <a:srgbClr val="1C3F4E"/>
+                          </a:solidFill>
+                          <a:latin typeface="Calibri" pitchFamily="34" charset="0"/>
+                          <a:ea typeface="Calibri" pitchFamily="34" charset="-122"/>
+                          <a:cs typeface="Calibri" pitchFamily="34" charset="-120"/>
+                        </a:rPr>
+                        <a:t>1.16</a:t>
+                      </a:r>
+                      <a:endParaRPr lang="en-US" sz="1000" dirty="0">
+                        <a:latin typeface="Calibri" charset="0"/>
+                        <a:ea typeface="Calibri" charset="0"/>
+                        <a:cs typeface="Calibri" charset="0"/>
+                      </a:endParaRPr>
+                    </a:p>
+                  </a:txBody>
+                  <a:tcPr marL="91440" marR="91440" marT="45720" marB="45720" anchor="ctr">
+                    <a:lnL w="6350" cap="flat" cmpd="sng" algn="ctr">
+                      <a:solidFill>
+                        <a:srgbClr val="D6DEE1"/>
+                      </a:solidFill>
+                      <a:prstDash val="solid"/>
+                      <a:round/>
+                      <a:headEnd type="none" w="med" len="med"/>
+                      <a:tailEnd type="none" w="med" len="med"/>
+                    </a:lnL>
+                    <a:lnR w="6350" cap="flat" cmpd="sng" algn="ctr">
+                      <a:solidFill>
+                        <a:srgbClr val="D6DEE1"/>
+                      </a:solidFill>
+                      <a:prstDash val="solid"/>
+                      <a:round/>
+                      <a:headEnd type="none" w="med" len="med"/>
+                      <a:tailEnd type="none" w="med" len="med"/>
+                    </a:lnR>
+                    <a:lnT w="6350" cap="flat" cmpd="sng" algn="ctr">
+                      <a:solidFill>
+                        <a:srgbClr val="D6DEE1"/>
+                      </a:solidFill>
+                      <a:prstDash val="solid"/>
+                      <a:round/>
+                      <a:headEnd type="none" w="med" len="med"/>
+                      <a:tailEnd type="none" w="med" len="med"/>
+                    </a:lnT>
+                    <a:lnB w="6350" cap="flat" cmpd="sng" algn="ctr">
+                      <a:solidFill>
+                        <a:srgbClr val="D6DEE1"/>
+                      </a:solidFill>
+                      <a:prstDash val="solid"/>
+                      <a:round/>
+                      <a:headEnd type="none" w="med" len="med"/>
+                      <a:tailEnd type="none" w="med" len="med"/>
+                    </a:lnB>
+                    <a:solidFill>
+                      <a:srgbClr val="EEF2F3"/>
+                    </a:solidFill>
+                  </a:tcPr>
+                </a:tc>
+              </a:tr>
+              <a:tr h="333756">
+                <a:tc>
+                  <a:txBody>
+                    <a:bodyPr/>
+                    <a:lstStyle/>
+                    <a:p>
+                      <a:pPr algn="l" indent="0" marL="0">
+                        <a:buNone/>
+                      </a:pPr>
+                      <a:r>
+                        <a:rPr lang="en-US" sz="1000" b="1" dirty="0">
+                          <a:solidFill>
+                            <a:srgbClr val="2B3A42"/>
+                          </a:solidFill>
+                          <a:latin typeface="Calibri" pitchFamily="34" charset="0"/>
+                          <a:ea typeface="Calibri" pitchFamily="34" charset="-122"/>
+                          <a:cs typeface="Calibri" pitchFamily="34" charset="-120"/>
+                        </a:rPr>
+                        <a:t>Francia</a:t>
+                      </a:r>
+                      <a:endParaRPr lang="en-US" sz="1000" dirty="0">
+                        <a:latin typeface="Calibri" charset="0"/>
+                        <a:ea typeface="Calibri" charset="0"/>
+                        <a:cs typeface="Calibri" charset="0"/>
+                      </a:endParaRPr>
+                    </a:p>
+                  </a:txBody>
+                  <a:tcPr marL="91440" marR="91440" marT="45720" marB="45720" anchor="ctr">
+                    <a:lnL w="6350" cap="flat" cmpd="sng" algn="ctr">
+                      <a:solidFill>
+                        <a:srgbClr val="D6DEE1"/>
+                      </a:solidFill>
+                      <a:prstDash val="solid"/>
+                      <a:round/>
+                      <a:headEnd type="none" w="med" len="med"/>
+                      <a:tailEnd type="none" w="med" len="med"/>
+                    </a:lnL>
+                    <a:lnR w="6350" cap="flat" cmpd="sng" algn="ctr">
+                      <a:solidFill>
+                        <a:srgbClr val="D6DEE1"/>
+                      </a:solidFill>
+                      <a:prstDash val="solid"/>
+                      <a:round/>
+                      <a:headEnd type="none" w="med" len="med"/>
+                      <a:tailEnd type="none" w="med" len="med"/>
+                    </a:lnR>
+                    <a:lnT w="6350" cap="flat" cmpd="sng" algn="ctr">
+                      <a:solidFill>
+                        <a:srgbClr val="D6DEE1"/>
+                      </a:solidFill>
+                      <a:prstDash val="solid"/>
+                      <a:round/>
+                      <a:headEnd type="none" w="med" len="med"/>
+                      <a:tailEnd type="none" w="med" len="med"/>
+                    </a:lnT>
+                    <a:lnB w="6350" cap="flat" cmpd="sng" algn="ctr">
+                      <a:solidFill>
+                        <a:srgbClr val="D6DEE1"/>
+                      </a:solidFill>
+                      <a:prstDash val="solid"/>
+                      <a:round/>
+                      <a:headEnd type="none" w="med" len="med"/>
+                      <a:tailEnd type="none" w="med" len="med"/>
+                    </a:lnB>
+                  </a:tcPr>
+                </a:tc>
+                <a:tc>
+                  <a:txBody>
+                    <a:bodyPr/>
+                    <a:lstStyle/>
+                    <a:p>
+                      <a:pPr algn="ctr" indent="0" marL="0">
+                        <a:buNone/>
+                      </a:pPr>
+                      <a:r>
+                        <a:rPr lang="en-US" sz="1000" dirty="0">
+                          <a:solidFill>
+                            <a:srgbClr val="2B3A42"/>
+                          </a:solidFill>
+                          <a:latin typeface="Calibri" pitchFamily="34" charset="0"/>
+                          <a:ea typeface="Calibri" pitchFamily="34" charset="-122"/>
+                          <a:cs typeface="Calibri" pitchFamily="34" charset="-120"/>
+                        </a:rPr>
+                        <a:t>0.52</a:t>
+                      </a:r>
+                      <a:endParaRPr lang="en-US" sz="1000" dirty="0">
+                        <a:latin typeface="Calibri" charset="0"/>
+                        <a:ea typeface="Calibri" charset="0"/>
+                        <a:cs typeface="Calibri" charset="0"/>
+                      </a:endParaRPr>
+                    </a:p>
+                  </a:txBody>
+                  <a:tcPr marL="91440" marR="91440" marT="45720" marB="45720" anchor="ctr">
+                    <a:lnL w="6350" cap="flat" cmpd="sng" algn="ctr">
+                      <a:solidFill>
+                        <a:srgbClr val="D6DEE1"/>
+                      </a:solidFill>
+                      <a:prstDash val="solid"/>
+                      <a:round/>
+                      <a:headEnd type="none" w="med" len="med"/>
+                      <a:tailEnd type="none" w="med" len="med"/>
+                    </a:lnL>
+                    <a:lnR w="6350" cap="flat" cmpd="sng" algn="ctr">
+                      <a:solidFill>
+                        <a:srgbClr val="D6DEE1"/>
+                      </a:solidFill>
+                      <a:prstDash val="solid"/>
+                      <a:round/>
+                      <a:headEnd type="none" w="med" len="med"/>
+                      <a:tailEnd type="none" w="med" len="med"/>
+                    </a:lnR>
+                    <a:lnT w="6350" cap="flat" cmpd="sng" algn="ctr">
+                      <a:solidFill>
+                        <a:srgbClr val="D6DEE1"/>
+                      </a:solidFill>
+                      <a:prstDash val="solid"/>
+                      <a:round/>
+                      <a:headEnd type="none" w="med" len="med"/>
+                      <a:tailEnd type="none" w="med" len="med"/>
+                    </a:lnT>
+                    <a:lnB w="6350" cap="flat" cmpd="sng" algn="ctr">
+                      <a:solidFill>
+                        <a:srgbClr val="D6DEE1"/>
+                      </a:solidFill>
+                      <a:prstDash val="solid"/>
+                      <a:round/>
+                      <a:headEnd type="none" w="med" len="med"/>
+                      <a:tailEnd type="none" w="med" len="med"/>
+                    </a:lnB>
+                  </a:tcPr>
+                </a:tc>
+                <a:tc>
+                  <a:txBody>
+                    <a:bodyPr/>
+                    <a:lstStyle/>
+                    <a:p>
+                      <a:pPr algn="ctr" indent="0" marL="0">
+                        <a:buNone/>
+                      </a:pPr>
+                      <a:r>
+                        <a:rPr lang="en-US" sz="1000" dirty="0">
+                          <a:solidFill>
+                            <a:srgbClr val="2B3A42"/>
+                          </a:solidFill>
+                          <a:latin typeface="Calibri" pitchFamily="34" charset="0"/>
+                          <a:ea typeface="Calibri" pitchFamily="34" charset="-122"/>
+                          <a:cs typeface="Calibri" pitchFamily="34" charset="-120"/>
+                        </a:rPr>
+                        <a:t>2.58</a:t>
+                      </a:r>
+                      <a:endParaRPr lang="en-US" sz="1000" dirty="0">
+                        <a:latin typeface="Calibri" charset="0"/>
+                        <a:ea typeface="Calibri" charset="0"/>
+                        <a:cs typeface="Calibri" charset="0"/>
+                      </a:endParaRPr>
+                    </a:p>
+                  </a:txBody>
+                  <a:tcPr marL="91440" marR="91440" marT="45720" marB="45720" anchor="ctr">
+                    <a:lnL w="6350" cap="flat" cmpd="sng" algn="ctr">
+                      <a:solidFill>
+                        <a:srgbClr val="D6DEE1"/>
+                      </a:solidFill>
+                      <a:prstDash val="solid"/>
+                      <a:round/>
+                      <a:headEnd type="none" w="med" len="med"/>
+                      <a:tailEnd type="none" w="med" len="med"/>
+                    </a:lnL>
+                    <a:lnR w="6350" cap="flat" cmpd="sng" algn="ctr">
+                      <a:solidFill>
+                        <a:srgbClr val="D6DEE1"/>
+                      </a:solidFill>
+                      <a:prstDash val="solid"/>
+                      <a:round/>
+                      <a:headEnd type="none" w="med" len="med"/>
+                      <a:tailEnd type="none" w="med" len="med"/>
+                    </a:lnR>
+                    <a:lnT w="6350" cap="flat" cmpd="sng" algn="ctr">
+                      <a:solidFill>
+                        <a:srgbClr val="D6DEE1"/>
+                      </a:solidFill>
+                      <a:prstDash val="solid"/>
+                      <a:round/>
+                      <a:headEnd type="none" w="med" len="med"/>
+                      <a:tailEnd type="none" w="med" len="med"/>
+                    </a:lnT>
+                    <a:lnB w="6350" cap="flat" cmpd="sng" algn="ctr">
+                      <a:solidFill>
+                        <a:srgbClr val="D6DEE1"/>
+                      </a:solidFill>
+                      <a:prstDash val="solid"/>
+                      <a:round/>
+                      <a:headEnd type="none" w="med" len="med"/>
+                      <a:tailEnd type="none" w="med" len="med"/>
+                    </a:lnB>
+                  </a:tcPr>
+                </a:tc>
+                <a:tc>
+                  <a:txBody>
+                    <a:bodyPr/>
+                    <a:lstStyle/>
+                    <a:p>
+                      <a:pPr algn="ctr" indent="0" marL="0">
+                        <a:buNone/>
+                      </a:pPr>
+                      <a:r>
+                        <a:rPr lang="en-US" sz="1000" dirty="0">
+                          <a:solidFill>
+                            <a:srgbClr val="2B3A42"/>
+                          </a:solidFill>
+                          <a:latin typeface="Calibri" pitchFamily="34" charset="0"/>
+                          <a:ea typeface="Calibri" pitchFamily="34" charset="-122"/>
+                          <a:cs typeface="Calibri" pitchFamily="34" charset="-120"/>
+                        </a:rPr>
+                        <a:t>60 %</a:t>
+                      </a:r>
+                      <a:endParaRPr lang="en-US" sz="1000" dirty="0">
+                        <a:latin typeface="Calibri" charset="0"/>
+                        <a:ea typeface="Calibri" charset="0"/>
+                        <a:cs typeface="Calibri" charset="0"/>
+                      </a:endParaRPr>
+                    </a:p>
+                  </a:txBody>
+                  <a:tcPr marL="91440" marR="91440" marT="45720" marB="45720" anchor="ctr">
+                    <a:lnL w="6350" cap="flat" cmpd="sng" algn="ctr">
+                      <a:solidFill>
+                        <a:srgbClr val="D6DEE1"/>
+                      </a:solidFill>
+                      <a:prstDash val="solid"/>
+                      <a:round/>
+                      <a:headEnd type="none" w="med" len="med"/>
+                      <a:tailEnd type="none" w="med" len="med"/>
+                    </a:lnL>
+                    <a:lnR w="6350" cap="flat" cmpd="sng" algn="ctr">
+                      <a:solidFill>
+                        <a:srgbClr val="D6DEE1"/>
+                      </a:solidFill>
+                      <a:prstDash val="solid"/>
+                      <a:round/>
+                      <a:headEnd type="none" w="med" len="med"/>
+                      <a:tailEnd type="none" w="med" len="med"/>
+                    </a:lnR>
+                    <a:lnT w="6350" cap="flat" cmpd="sng" algn="ctr">
+                      <a:solidFill>
+                        <a:srgbClr val="D6DEE1"/>
+                      </a:solidFill>
+                      <a:prstDash val="solid"/>
+                      <a:round/>
+                      <a:headEnd type="none" w="med" len="med"/>
+                      <a:tailEnd type="none" w="med" len="med"/>
+                    </a:lnT>
+                    <a:lnB w="6350" cap="flat" cmpd="sng" algn="ctr">
+                      <a:solidFill>
+                        <a:srgbClr val="D6DEE1"/>
+                      </a:solidFill>
+                      <a:prstDash val="solid"/>
+                      <a:round/>
+                      <a:headEnd type="none" w="med" len="med"/>
+                      <a:tailEnd type="none" w="med" len="med"/>
+                    </a:lnB>
+                  </a:tcPr>
+                </a:tc>
+                <a:tc>
+                  <a:txBody>
+                    <a:bodyPr/>
+                    <a:lstStyle/>
+                    <a:p>
+                      <a:pPr algn="ctr" indent="0" marL="0">
+                        <a:buNone/>
+                      </a:pPr>
+                      <a:r>
+                        <a:rPr lang="en-US" sz="1000" b="1" dirty="0">
+                          <a:solidFill>
+                            <a:srgbClr val="1C3F4E"/>
+                          </a:solidFill>
+                          <a:latin typeface="Calibri" pitchFamily="34" charset="0"/>
+                          <a:ea typeface="Calibri" pitchFamily="34" charset="-122"/>
+                          <a:cs typeface="Calibri" pitchFamily="34" charset="-120"/>
+                        </a:rPr>
+                        <a:t>1.34</a:t>
+                      </a:r>
+                      <a:endParaRPr lang="en-US" sz="1000" dirty="0">
+                        <a:latin typeface="Calibri" charset="0"/>
+                        <a:ea typeface="Calibri" charset="0"/>
+                        <a:cs typeface="Calibri" charset="0"/>
+                      </a:endParaRPr>
+                    </a:p>
+                  </a:txBody>
+                  <a:tcPr marL="91440" marR="91440" marT="45720" marB="45720" anchor="ctr">
+                    <a:lnL w="6350" cap="flat" cmpd="sng" algn="ctr">
+                      <a:solidFill>
+                        <a:srgbClr val="D6DEE1"/>
+                      </a:solidFill>
+                      <a:prstDash val="solid"/>
+                      <a:round/>
+                      <a:headEnd type="none" w="med" len="med"/>
+                      <a:tailEnd type="none" w="med" len="med"/>
+                    </a:lnL>
+                    <a:lnR w="6350" cap="flat" cmpd="sng" algn="ctr">
+                      <a:solidFill>
+                        <a:srgbClr val="D6DEE1"/>
+                      </a:solidFill>
+                      <a:prstDash val="solid"/>
+                      <a:round/>
+                      <a:headEnd type="none" w="med" len="med"/>
+                      <a:tailEnd type="none" w="med" len="med"/>
+                    </a:lnR>
+                    <a:lnT w="6350" cap="flat" cmpd="sng" algn="ctr">
+                      <a:solidFill>
+                        <a:srgbClr val="D6DEE1"/>
+                      </a:solidFill>
+                      <a:prstDash val="solid"/>
+                      <a:round/>
+                      <a:headEnd type="none" w="med" len="med"/>
+                      <a:tailEnd type="none" w="med" len="med"/>
+                    </a:lnT>
+                    <a:lnB w="6350" cap="flat" cmpd="sng" algn="ctr">
+                      <a:solidFill>
+                        <a:srgbClr val="D6DEE1"/>
+                      </a:solidFill>
+                      <a:prstDash val="solid"/>
+                      <a:round/>
+                      <a:headEnd type="none" w="med" len="med"/>
+                      <a:tailEnd type="none" w="med" len="med"/>
+                    </a:lnB>
+                    <a:solidFill>
+                      <a:srgbClr val="EEF2F3"/>
+                    </a:solidFill>
+                  </a:tcPr>
+                </a:tc>
+              </a:tr>
+              <a:tr h="333756">
+                <a:tc>
+                  <a:txBody>
+                    <a:bodyPr/>
+                    <a:lstStyle/>
+                    <a:p>
+                      <a:pPr algn="l" indent="0" marL="0">
+                        <a:buNone/>
+                      </a:pPr>
+                      <a:r>
+                        <a:rPr lang="en-US" sz="1000" b="1" dirty="0">
+                          <a:solidFill>
+                            <a:srgbClr val="2B3A42"/>
+                          </a:solidFill>
+                          <a:latin typeface="Calibri" pitchFamily="34" charset="0"/>
+                          <a:ea typeface="Calibri" pitchFamily="34" charset="-122"/>
+                          <a:cs typeface="Calibri" pitchFamily="34" charset="-120"/>
+                        </a:rPr>
+                        <a:t>Italia</a:t>
+                      </a:r>
+                      <a:endParaRPr lang="en-US" sz="1000" dirty="0">
+                        <a:latin typeface="Calibri" charset="0"/>
+                        <a:ea typeface="Calibri" charset="0"/>
+                        <a:cs typeface="Calibri" charset="0"/>
+                      </a:endParaRPr>
+                    </a:p>
+                  </a:txBody>
+                  <a:tcPr marL="91440" marR="91440" marT="45720" marB="45720" anchor="ctr">
+                    <a:lnL w="6350" cap="flat" cmpd="sng" algn="ctr">
+                      <a:solidFill>
+                        <a:srgbClr val="D6DEE1"/>
+                      </a:solidFill>
+                      <a:prstDash val="solid"/>
+                      <a:round/>
+                      <a:headEnd type="none" w="med" len="med"/>
+                      <a:tailEnd type="none" w="med" len="med"/>
+                    </a:lnL>
+                    <a:lnR w="6350" cap="flat" cmpd="sng" algn="ctr">
+                      <a:solidFill>
+                        <a:srgbClr val="D6DEE1"/>
+                      </a:solidFill>
+                      <a:prstDash val="solid"/>
+                      <a:round/>
+                      <a:headEnd type="none" w="med" len="med"/>
+                      <a:tailEnd type="none" w="med" len="med"/>
+                    </a:lnR>
+                    <a:lnT w="6350" cap="flat" cmpd="sng" algn="ctr">
+                      <a:solidFill>
+                        <a:srgbClr val="D6DEE1"/>
+                      </a:solidFill>
+                      <a:prstDash val="solid"/>
+                      <a:round/>
+                      <a:headEnd type="none" w="med" len="med"/>
+                      <a:tailEnd type="none" w="med" len="med"/>
+                    </a:lnT>
+                    <a:lnB w="6350" cap="flat" cmpd="sng" algn="ctr">
+                      <a:solidFill>
+                        <a:srgbClr val="D6DEE1"/>
+                      </a:solidFill>
+                      <a:prstDash val="solid"/>
+                      <a:round/>
+                      <a:headEnd type="none" w="med" len="med"/>
+                      <a:tailEnd type="none" w="med" len="med"/>
+                    </a:lnB>
+                  </a:tcPr>
+                </a:tc>
+                <a:tc>
+                  <a:txBody>
+                    <a:bodyPr/>
+                    <a:lstStyle/>
+                    <a:p>
+                      <a:pPr algn="ctr" indent="0" marL="0">
+                        <a:buNone/>
+                      </a:pPr>
+                      <a:r>
+                        <a:rPr lang="en-US" sz="1000" dirty="0">
+                          <a:solidFill>
+                            <a:srgbClr val="2B3A42"/>
+                          </a:solidFill>
+                          <a:latin typeface="Calibri" pitchFamily="34" charset="0"/>
+                          <a:ea typeface="Calibri" pitchFamily="34" charset="-122"/>
+                          <a:cs typeface="Calibri" pitchFamily="34" charset="-120"/>
+                        </a:rPr>
+                        <a:t>0.56</a:t>
+                      </a:r>
+                      <a:endParaRPr lang="en-US" sz="1000" dirty="0">
+                        <a:latin typeface="Calibri" charset="0"/>
+                        <a:ea typeface="Calibri" charset="0"/>
+                        <a:cs typeface="Calibri" charset="0"/>
+                      </a:endParaRPr>
+                    </a:p>
+                  </a:txBody>
+                  <a:tcPr marL="91440" marR="91440" marT="45720" marB="45720" anchor="ctr">
+                    <a:lnL w="6350" cap="flat" cmpd="sng" algn="ctr">
+                      <a:solidFill>
+                        <a:srgbClr val="D6DEE1"/>
+                      </a:solidFill>
+                      <a:prstDash val="solid"/>
+                      <a:round/>
+                      <a:headEnd type="none" w="med" len="med"/>
+                      <a:tailEnd type="none" w="med" len="med"/>
+                    </a:lnL>
+                    <a:lnR w="6350" cap="flat" cmpd="sng" algn="ctr">
+                      <a:solidFill>
+                        <a:srgbClr val="D6DEE1"/>
+                      </a:solidFill>
+                      <a:prstDash val="solid"/>
+                      <a:round/>
+                      <a:headEnd type="none" w="med" len="med"/>
+                      <a:tailEnd type="none" w="med" len="med"/>
+                    </a:lnR>
+                    <a:lnT w="6350" cap="flat" cmpd="sng" algn="ctr">
+                      <a:solidFill>
+                        <a:srgbClr val="D6DEE1"/>
+                      </a:solidFill>
+                      <a:prstDash val="solid"/>
+                      <a:round/>
+                      <a:headEnd type="none" w="med" len="med"/>
+                      <a:tailEnd type="none" w="med" len="med"/>
+                    </a:lnT>
+                    <a:lnB w="6350" cap="flat" cmpd="sng" algn="ctr">
+                      <a:solidFill>
+                        <a:srgbClr val="D6DEE1"/>
+                      </a:solidFill>
+                      <a:prstDash val="solid"/>
+                      <a:round/>
+                      <a:headEnd type="none" w="med" len="med"/>
+                      <a:tailEnd type="none" w="med" len="med"/>
+                    </a:lnB>
+                  </a:tcPr>
+                </a:tc>
+                <a:tc>
+                  <a:txBody>
+                    <a:bodyPr/>
+                    <a:lstStyle/>
+                    <a:p>
+                      <a:pPr algn="ctr" indent="0" marL="0">
+                        <a:buNone/>
+                      </a:pPr>
+                      <a:r>
+                        <a:rPr lang="en-US" sz="1000" dirty="0">
+                          <a:solidFill>
+                            <a:srgbClr val="2B3A42"/>
+                          </a:solidFill>
+                          <a:latin typeface="Calibri" pitchFamily="34" charset="0"/>
+                          <a:ea typeface="Calibri" pitchFamily="34" charset="-122"/>
+                          <a:cs typeface="Calibri" pitchFamily="34" charset="-120"/>
+                        </a:rPr>
+                        <a:t>2.31</a:t>
+                      </a:r>
+                      <a:endParaRPr lang="en-US" sz="1000" dirty="0">
+                        <a:latin typeface="Calibri" charset="0"/>
+                        <a:ea typeface="Calibri" charset="0"/>
+                        <a:cs typeface="Calibri" charset="0"/>
+                      </a:endParaRPr>
+                    </a:p>
+                  </a:txBody>
+                  <a:tcPr marL="91440" marR="91440" marT="45720" marB="45720" anchor="ctr">
+                    <a:lnL w="6350" cap="flat" cmpd="sng" algn="ctr">
+                      <a:solidFill>
+                        <a:srgbClr val="D6DEE1"/>
+                      </a:solidFill>
+                      <a:prstDash val="solid"/>
+                      <a:round/>
+                      <a:headEnd type="none" w="med" len="med"/>
+                      <a:tailEnd type="none" w="med" len="med"/>
+                    </a:lnL>
+                    <a:lnR w="6350" cap="flat" cmpd="sng" algn="ctr">
+                      <a:solidFill>
+                        <a:srgbClr val="D6DEE1"/>
+                      </a:solidFill>
+                      <a:prstDash val="solid"/>
+                      <a:round/>
+                      <a:headEnd type="none" w="med" len="med"/>
+                      <a:tailEnd type="none" w="med" len="med"/>
+                    </a:lnR>
+                    <a:lnT w="6350" cap="flat" cmpd="sng" algn="ctr">
+                      <a:solidFill>
+                        <a:srgbClr val="D6DEE1"/>
+                      </a:solidFill>
+                      <a:prstDash val="solid"/>
+                      <a:round/>
+                      <a:headEnd type="none" w="med" len="med"/>
+                      <a:tailEnd type="none" w="med" len="med"/>
+                    </a:lnT>
+                    <a:lnB w="6350" cap="flat" cmpd="sng" algn="ctr">
+                      <a:solidFill>
+                        <a:srgbClr val="D6DEE1"/>
+                      </a:solidFill>
+                      <a:prstDash val="solid"/>
+                      <a:round/>
+                      <a:headEnd type="none" w="med" len="med"/>
+                      <a:tailEnd type="none" w="med" len="med"/>
+                    </a:lnB>
+                  </a:tcPr>
+                </a:tc>
+                <a:tc>
+                  <a:txBody>
+                    <a:bodyPr/>
+                    <a:lstStyle/>
+                    <a:p>
+                      <a:pPr algn="ctr" indent="0" marL="0">
+                        <a:buNone/>
+                      </a:pPr>
+                      <a:r>
+                        <a:rPr lang="en-US" sz="1000" dirty="0">
+                          <a:solidFill>
+                            <a:srgbClr val="2B3A42"/>
+                          </a:solidFill>
+                          <a:latin typeface="Calibri" pitchFamily="34" charset="0"/>
+                          <a:ea typeface="Calibri" pitchFamily="34" charset="-122"/>
+                          <a:cs typeface="Calibri" pitchFamily="34" charset="-120"/>
+                        </a:rPr>
+                        <a:t>89 %</a:t>
+                      </a:r>
+                      <a:endParaRPr lang="en-US" sz="1000" dirty="0">
+                        <a:latin typeface="Calibri" charset="0"/>
+                        <a:ea typeface="Calibri" charset="0"/>
+                        <a:cs typeface="Calibri" charset="0"/>
+                      </a:endParaRPr>
+                    </a:p>
+                  </a:txBody>
+                  <a:tcPr marL="91440" marR="91440" marT="45720" marB="45720" anchor="ctr">
+                    <a:lnL w="6350" cap="flat" cmpd="sng" algn="ctr">
+                      <a:solidFill>
+                        <a:srgbClr val="D6DEE1"/>
+                      </a:solidFill>
+                      <a:prstDash val="solid"/>
+                      <a:round/>
+                      <a:headEnd type="none" w="med" len="med"/>
+                      <a:tailEnd type="none" w="med" len="med"/>
+                    </a:lnL>
+                    <a:lnR w="6350" cap="flat" cmpd="sng" algn="ctr">
+                      <a:solidFill>
+                        <a:srgbClr val="D6DEE1"/>
+                      </a:solidFill>
+                      <a:prstDash val="solid"/>
+                      <a:round/>
+                      <a:headEnd type="none" w="med" len="med"/>
+                      <a:tailEnd type="none" w="med" len="med"/>
+                    </a:lnR>
+                    <a:lnT w="6350" cap="flat" cmpd="sng" algn="ctr">
+                      <a:solidFill>
+                        <a:srgbClr val="D6DEE1"/>
+                      </a:solidFill>
+                      <a:prstDash val="solid"/>
+                      <a:round/>
+                      <a:headEnd type="none" w="med" len="med"/>
+                      <a:tailEnd type="none" w="med" len="med"/>
+                    </a:lnT>
+                    <a:lnB w="6350" cap="flat" cmpd="sng" algn="ctr">
+                      <a:solidFill>
+                        <a:srgbClr val="D6DEE1"/>
+                      </a:solidFill>
+                      <a:prstDash val="solid"/>
+                      <a:round/>
+                      <a:headEnd type="none" w="med" len="med"/>
+                      <a:tailEnd type="none" w="med" len="med"/>
+                    </a:lnB>
+                  </a:tcPr>
+                </a:tc>
+                <a:tc>
+                  <a:txBody>
+                    <a:bodyPr/>
+                    <a:lstStyle/>
+                    <a:p>
+                      <a:pPr algn="ctr" indent="0" marL="0">
+                        <a:buNone/>
+                      </a:pPr>
+                      <a:r>
+                        <a:rPr lang="en-US" sz="1000" b="1" dirty="0">
+                          <a:solidFill>
+                            <a:srgbClr val="1C3F4E"/>
+                          </a:solidFill>
+                          <a:latin typeface="Calibri" pitchFamily="34" charset="0"/>
+                          <a:ea typeface="Calibri" pitchFamily="34" charset="-122"/>
+                          <a:cs typeface="Calibri" pitchFamily="34" charset="-120"/>
+                        </a:rPr>
+                        <a:t>0.76</a:t>
+                      </a:r>
+                      <a:endParaRPr lang="en-US" sz="1000" dirty="0">
+                        <a:latin typeface="Calibri" charset="0"/>
+                        <a:ea typeface="Calibri" charset="0"/>
+                        <a:cs typeface="Calibri" charset="0"/>
+                      </a:endParaRPr>
+                    </a:p>
+                  </a:txBody>
+                  <a:tcPr marL="91440" marR="91440" marT="45720" marB="45720" anchor="ctr">
+                    <a:lnL w="6350" cap="flat" cmpd="sng" algn="ctr">
+                      <a:solidFill>
+                        <a:srgbClr val="D6DEE1"/>
+                      </a:solidFill>
+                      <a:prstDash val="solid"/>
+                      <a:round/>
+                      <a:headEnd type="none" w="med" len="med"/>
+                      <a:tailEnd type="none" w="med" len="med"/>
+                    </a:lnL>
+                    <a:lnR w="6350" cap="flat" cmpd="sng" algn="ctr">
+                      <a:solidFill>
+                        <a:srgbClr val="D6DEE1"/>
+                      </a:solidFill>
+                      <a:prstDash val="solid"/>
+                      <a:round/>
+                      <a:headEnd type="none" w="med" len="med"/>
+                      <a:tailEnd type="none" w="med" len="med"/>
+                    </a:lnR>
+                    <a:lnT w="6350" cap="flat" cmpd="sng" algn="ctr">
+                      <a:solidFill>
+                        <a:srgbClr val="D6DEE1"/>
+                      </a:solidFill>
+                      <a:prstDash val="solid"/>
+                      <a:round/>
+                      <a:headEnd type="none" w="med" len="med"/>
+                      <a:tailEnd type="none" w="med" len="med"/>
+                    </a:lnT>
+                    <a:lnB w="6350" cap="flat" cmpd="sng" algn="ctr">
+                      <a:solidFill>
+                        <a:srgbClr val="D6DEE1"/>
+                      </a:solidFill>
+                      <a:prstDash val="solid"/>
+                      <a:round/>
+                      <a:headEnd type="none" w="med" len="med"/>
+                      <a:tailEnd type="none" w="med" len="med"/>
+                    </a:lnB>
+                    <a:solidFill>
+                      <a:srgbClr val="EEF2F3"/>
+                    </a:solidFill>
+                  </a:tcPr>
+                </a:tc>
+              </a:tr>
+              <a:tr h="333756">
+                <a:tc>
+                  <a:txBody>
+                    <a:bodyPr/>
+                    <a:lstStyle/>
+                    <a:p>
+                      <a:pPr algn="l" indent="0" marL="0">
+                        <a:buNone/>
+                      </a:pPr>
+                      <a:r>
+                        <a:rPr lang="en-US" sz="1000" b="1" dirty="0">
+                          <a:solidFill>
+                            <a:srgbClr val="2B3A42"/>
+                          </a:solidFill>
+                          <a:latin typeface="Calibri" pitchFamily="34" charset="0"/>
+                          <a:ea typeface="Calibri" pitchFamily="34" charset="-122"/>
+                          <a:cs typeface="Calibri" pitchFamily="34" charset="-120"/>
+                        </a:rPr>
+                        <a:t>Portugal</a:t>
+                      </a:r>
+                      <a:endParaRPr lang="en-US" sz="1000" dirty="0">
+                        <a:latin typeface="Calibri" charset="0"/>
+                        <a:ea typeface="Calibri" charset="0"/>
+                        <a:cs typeface="Calibri" charset="0"/>
+                      </a:endParaRPr>
+                    </a:p>
+                  </a:txBody>
+                  <a:tcPr marL="91440" marR="91440" marT="45720" marB="45720" anchor="ctr">
+                    <a:lnL w="6350" cap="flat" cmpd="sng" algn="ctr">
+                      <a:solidFill>
+                        <a:srgbClr val="D6DEE1"/>
+                      </a:solidFill>
+                      <a:prstDash val="solid"/>
+                      <a:round/>
+                      <a:headEnd type="none" w="med" len="med"/>
+                      <a:tailEnd type="none" w="med" len="med"/>
+                    </a:lnL>
+                    <a:lnR w="6350" cap="flat" cmpd="sng" algn="ctr">
+                      <a:solidFill>
+                        <a:srgbClr val="D6DEE1"/>
+                      </a:solidFill>
+                      <a:prstDash val="solid"/>
+                      <a:round/>
+                      <a:headEnd type="none" w="med" len="med"/>
+                      <a:tailEnd type="none" w="med" len="med"/>
+                    </a:lnR>
+                    <a:lnT w="6350" cap="flat" cmpd="sng" algn="ctr">
+                      <a:solidFill>
+                        <a:srgbClr val="D6DEE1"/>
+                      </a:solidFill>
+                      <a:prstDash val="solid"/>
+                      <a:round/>
+                      <a:headEnd type="none" w="med" len="med"/>
+                      <a:tailEnd type="none" w="med" len="med"/>
+                    </a:lnT>
+                    <a:lnB w="6350" cap="flat" cmpd="sng" algn="ctr">
+                      <a:solidFill>
+                        <a:srgbClr val="D6DEE1"/>
+                      </a:solidFill>
+                      <a:prstDash val="solid"/>
+                      <a:round/>
+                      <a:headEnd type="none" w="med" len="med"/>
+                      <a:tailEnd type="none" w="med" len="med"/>
+                    </a:lnB>
+                  </a:tcPr>
+                </a:tc>
+                <a:tc>
+                  <a:txBody>
+                    <a:bodyPr/>
+                    <a:lstStyle/>
+                    <a:p>
+                      <a:pPr algn="ctr" indent="0" marL="0">
+                        <a:buNone/>
+                      </a:pPr>
+                      <a:r>
+                        <a:rPr lang="en-US" sz="1000" dirty="0">
+                          <a:solidFill>
+                            <a:srgbClr val="2B3A42"/>
+                          </a:solidFill>
+                          <a:latin typeface="Calibri" pitchFamily="34" charset="0"/>
+                          <a:ea typeface="Calibri" pitchFamily="34" charset="-122"/>
+                          <a:cs typeface="Calibri" pitchFamily="34" charset="-120"/>
+                        </a:rPr>
+                        <a:t>0.07</a:t>
+                      </a:r>
+                      <a:endParaRPr lang="en-US" sz="1000" dirty="0">
+                        <a:latin typeface="Calibri" charset="0"/>
+                        <a:ea typeface="Calibri" charset="0"/>
+                        <a:cs typeface="Calibri" charset="0"/>
+                      </a:endParaRPr>
+                    </a:p>
+                  </a:txBody>
+                  <a:tcPr marL="91440" marR="91440" marT="45720" marB="45720" anchor="ctr">
+                    <a:lnL w="6350" cap="flat" cmpd="sng" algn="ctr">
+                      <a:solidFill>
+                        <a:srgbClr val="D6DEE1"/>
+                      </a:solidFill>
+                      <a:prstDash val="solid"/>
+                      <a:round/>
+                      <a:headEnd type="none" w="med" len="med"/>
+                      <a:tailEnd type="none" w="med" len="med"/>
+                    </a:lnL>
+                    <a:lnR w="6350" cap="flat" cmpd="sng" algn="ctr">
+                      <a:solidFill>
+                        <a:srgbClr val="D6DEE1"/>
+                      </a:solidFill>
+                      <a:prstDash val="solid"/>
+                      <a:round/>
+                      <a:headEnd type="none" w="med" len="med"/>
+                      <a:tailEnd type="none" w="med" len="med"/>
+                    </a:lnR>
+                    <a:lnT w="6350" cap="flat" cmpd="sng" algn="ctr">
+                      <a:solidFill>
+                        <a:srgbClr val="D6DEE1"/>
+                      </a:solidFill>
+                      <a:prstDash val="solid"/>
+                      <a:round/>
+                      <a:headEnd type="none" w="med" len="med"/>
+                      <a:tailEnd type="none" w="med" len="med"/>
+                    </a:lnT>
+                    <a:lnB w="6350" cap="flat" cmpd="sng" algn="ctr">
+                      <a:solidFill>
+                        <a:srgbClr val="D6DEE1"/>
+                      </a:solidFill>
+                      <a:prstDash val="solid"/>
+                      <a:round/>
+                      <a:headEnd type="none" w="med" len="med"/>
+                      <a:tailEnd type="none" w="med" len="med"/>
+                    </a:lnB>
+                  </a:tcPr>
+                </a:tc>
+                <a:tc>
+                  <a:txBody>
+                    <a:bodyPr/>
+                    <a:lstStyle/>
+                    <a:p>
+                      <a:pPr algn="ctr" indent="0" marL="0">
+                        <a:buNone/>
+                      </a:pPr>
+                      <a:r>
+                        <a:rPr lang="en-US" sz="1000" dirty="0">
+                          <a:solidFill>
+                            <a:srgbClr val="2B3A42"/>
+                          </a:solidFill>
+                          <a:latin typeface="Calibri" pitchFamily="34" charset="0"/>
+                          <a:ea typeface="Calibri" pitchFamily="34" charset="-122"/>
+                          <a:cs typeface="Calibri" pitchFamily="34" charset="-120"/>
+                        </a:rPr>
+                        <a:t>1.77</a:t>
+                      </a:r>
+                      <a:endParaRPr lang="en-US" sz="1000" dirty="0">
+                        <a:latin typeface="Calibri" charset="0"/>
+                        <a:ea typeface="Calibri" charset="0"/>
+                        <a:cs typeface="Calibri" charset="0"/>
+                      </a:endParaRPr>
+                    </a:p>
+                  </a:txBody>
+                  <a:tcPr marL="91440" marR="91440" marT="45720" marB="45720" anchor="ctr">
+                    <a:lnL w="6350" cap="flat" cmpd="sng" algn="ctr">
+                      <a:solidFill>
+                        <a:srgbClr val="D6DEE1"/>
+                      </a:solidFill>
+                      <a:prstDash val="solid"/>
+                      <a:round/>
+                      <a:headEnd type="none" w="med" len="med"/>
+                      <a:tailEnd type="none" w="med" len="med"/>
+                    </a:lnL>
+                    <a:lnR w="6350" cap="flat" cmpd="sng" algn="ctr">
+                      <a:solidFill>
+                        <a:srgbClr val="D6DEE1"/>
+                      </a:solidFill>
+                      <a:prstDash val="solid"/>
+                      <a:round/>
+                      <a:headEnd type="none" w="med" len="med"/>
+                      <a:tailEnd type="none" w="med" len="med"/>
+                    </a:lnR>
+                    <a:lnT w="6350" cap="flat" cmpd="sng" algn="ctr">
+                      <a:solidFill>
+                        <a:srgbClr val="D6DEE1"/>
+                      </a:solidFill>
+                      <a:prstDash val="solid"/>
+                      <a:round/>
+                      <a:headEnd type="none" w="med" len="med"/>
+                      <a:tailEnd type="none" w="med" len="med"/>
+                    </a:lnT>
+                    <a:lnB w="6350" cap="flat" cmpd="sng" algn="ctr">
+                      <a:solidFill>
+                        <a:srgbClr val="D6DEE1"/>
+                      </a:solidFill>
+                      <a:prstDash val="solid"/>
+                      <a:round/>
+                      <a:headEnd type="none" w="med" len="med"/>
+                      <a:tailEnd type="none" w="med" len="med"/>
+                    </a:lnB>
+                  </a:tcPr>
+                </a:tc>
+                <a:tc>
+                  <a:txBody>
+                    <a:bodyPr/>
+                    <a:lstStyle/>
+                    <a:p>
+                      <a:pPr algn="ctr" indent="0" marL="0">
+                        <a:buNone/>
+                      </a:pPr>
+                      <a:r>
+                        <a:rPr lang="en-US" sz="1000" dirty="0">
+                          <a:solidFill>
+                            <a:srgbClr val="2B3A42"/>
+                          </a:solidFill>
+                          <a:latin typeface="Calibri" pitchFamily="34" charset="0"/>
+                          <a:ea typeface="Calibri" pitchFamily="34" charset="-122"/>
+                          <a:cs typeface="Calibri" pitchFamily="34" charset="-120"/>
+                        </a:rPr>
+                        <a:t>62 %</a:t>
+                      </a:r>
+                      <a:endParaRPr lang="en-US" sz="1000" dirty="0">
+                        <a:latin typeface="Calibri" charset="0"/>
+                        <a:ea typeface="Calibri" charset="0"/>
+                        <a:cs typeface="Calibri" charset="0"/>
+                      </a:endParaRPr>
+                    </a:p>
+                  </a:txBody>
+                  <a:tcPr marL="91440" marR="91440" marT="45720" marB="45720" anchor="ctr">
+                    <a:lnL w="6350" cap="flat" cmpd="sng" algn="ctr">
+                      <a:solidFill>
+                        <a:srgbClr val="D6DEE1"/>
+                      </a:solidFill>
+                      <a:prstDash val="solid"/>
+                      <a:round/>
+                      <a:headEnd type="none" w="med" len="med"/>
+                      <a:tailEnd type="none" w="med" len="med"/>
+                    </a:lnL>
+                    <a:lnR w="6350" cap="flat" cmpd="sng" algn="ctr">
+                      <a:solidFill>
+                        <a:srgbClr val="D6DEE1"/>
+                      </a:solidFill>
+                      <a:prstDash val="solid"/>
+                      <a:round/>
+                      <a:headEnd type="none" w="med" len="med"/>
+                      <a:tailEnd type="none" w="med" len="med"/>
+                    </a:lnR>
+                    <a:lnT w="6350" cap="flat" cmpd="sng" algn="ctr">
+                      <a:solidFill>
+                        <a:srgbClr val="D6DEE1"/>
+                      </a:solidFill>
+                      <a:prstDash val="solid"/>
+                      <a:round/>
+                      <a:headEnd type="none" w="med" len="med"/>
+                      <a:tailEnd type="none" w="med" len="med"/>
+                    </a:lnT>
+                    <a:lnB w="6350" cap="flat" cmpd="sng" algn="ctr">
+                      <a:solidFill>
+                        <a:srgbClr val="D6DEE1"/>
+                      </a:solidFill>
+                      <a:prstDash val="solid"/>
+                      <a:round/>
+                      <a:headEnd type="none" w="med" len="med"/>
+                      <a:tailEnd type="none" w="med" len="med"/>
+                    </a:lnB>
+                  </a:tcPr>
+                </a:tc>
+                <a:tc>
+                  <a:txBody>
+                    <a:bodyPr/>
+                    <a:lstStyle/>
+                    <a:p>
+                      <a:pPr algn="ctr" indent="0" marL="0">
+                        <a:buNone/>
+                      </a:pPr>
+                      <a:r>
+                        <a:rPr lang="en-US" sz="1000" b="1" dirty="0">
+                          <a:solidFill>
+                            <a:srgbClr val="1C3F4E"/>
+                          </a:solidFill>
+                          <a:latin typeface="Calibri" pitchFamily="34" charset="0"/>
+                          <a:ea typeface="Calibri" pitchFamily="34" charset="-122"/>
+                          <a:cs typeface="Calibri" pitchFamily="34" charset="-120"/>
+                        </a:rPr>
+                        <a:t>0.71</a:t>
+                      </a:r>
+                      <a:endParaRPr lang="en-US" sz="1000" dirty="0">
+                        <a:latin typeface="Calibri" charset="0"/>
+                        <a:ea typeface="Calibri" charset="0"/>
+                        <a:cs typeface="Calibri" charset="0"/>
+                      </a:endParaRPr>
+                    </a:p>
+                  </a:txBody>
+                  <a:tcPr marL="91440" marR="91440" marT="45720" marB="45720" anchor="ctr">
+                    <a:lnL w="6350" cap="flat" cmpd="sng" algn="ctr">
+                      <a:solidFill>
+                        <a:srgbClr val="D6DEE1"/>
+                      </a:solidFill>
+                      <a:prstDash val="solid"/>
+                      <a:round/>
+                      <a:headEnd type="none" w="med" len="med"/>
+                      <a:tailEnd type="none" w="med" len="med"/>
+                    </a:lnL>
+                    <a:lnR w="6350" cap="flat" cmpd="sng" algn="ctr">
+                      <a:solidFill>
+                        <a:srgbClr val="D6DEE1"/>
+                      </a:solidFill>
+                      <a:prstDash val="solid"/>
+                      <a:round/>
+                      <a:headEnd type="none" w="med" len="med"/>
+                      <a:tailEnd type="none" w="med" len="med"/>
+                    </a:lnR>
+                    <a:lnT w="6350" cap="flat" cmpd="sng" algn="ctr">
+                      <a:solidFill>
+                        <a:srgbClr val="D6DEE1"/>
+                      </a:solidFill>
+                      <a:prstDash val="solid"/>
+                      <a:round/>
+                      <a:headEnd type="none" w="med" len="med"/>
+                      <a:tailEnd type="none" w="med" len="med"/>
+                    </a:lnT>
+                    <a:lnB w="6350" cap="flat" cmpd="sng" algn="ctr">
+                      <a:solidFill>
+                        <a:srgbClr val="D6DEE1"/>
+                      </a:solidFill>
+                      <a:prstDash val="solid"/>
+                      <a:round/>
+                      <a:headEnd type="none" w="med" len="med"/>
+                      <a:tailEnd type="none" w="med" len="med"/>
+                    </a:lnB>
+                    <a:solidFill>
+                      <a:srgbClr val="EEF2F3"/>
+                    </a:solidFill>
+                  </a:tcPr>
+                </a:tc>
+              </a:tr>
+              <a:tr h="333756">
+                <a:tc>
+                  <a:txBody>
+                    <a:bodyPr/>
+                    <a:lstStyle/>
+                    <a:p>
+                      <a:pPr algn="l" indent="0" marL="0">
+                        <a:buNone/>
+                      </a:pPr>
+                      <a:r>
+                        <a:rPr lang="en-US" sz="1000" b="1" dirty="0">
+                          <a:solidFill>
+                            <a:srgbClr val="2B3A42"/>
+                          </a:solidFill>
+                          <a:latin typeface="Calibri" pitchFamily="34" charset="0"/>
+                          <a:ea typeface="Calibri" pitchFamily="34" charset="-122"/>
+                          <a:cs typeface="Calibri" pitchFamily="34" charset="-120"/>
+                        </a:rPr>
+                        <a:t>P. Bajos</a:t>
+                      </a:r>
+                      <a:endParaRPr lang="en-US" sz="1000" dirty="0">
+                        <a:latin typeface="Calibri" charset="0"/>
+                        <a:ea typeface="Calibri" charset="0"/>
+                        <a:cs typeface="Calibri" charset="0"/>
+                      </a:endParaRPr>
+                    </a:p>
+                  </a:txBody>
+                  <a:tcPr marL="91440" marR="91440" marT="45720" marB="45720" anchor="ctr">
+                    <a:lnL w="6350" cap="flat" cmpd="sng" algn="ctr">
+                      <a:solidFill>
+                        <a:srgbClr val="D6DEE1"/>
+                      </a:solidFill>
+                      <a:prstDash val="solid"/>
+                      <a:round/>
+                      <a:headEnd type="none" w="med" len="med"/>
+                      <a:tailEnd type="none" w="med" len="med"/>
+                    </a:lnL>
+                    <a:lnR w="6350" cap="flat" cmpd="sng" algn="ctr">
+                      <a:solidFill>
+                        <a:srgbClr val="D6DEE1"/>
+                      </a:solidFill>
+                      <a:prstDash val="solid"/>
+                      <a:round/>
+                      <a:headEnd type="none" w="med" len="med"/>
+                      <a:tailEnd type="none" w="med" len="med"/>
+                    </a:lnR>
+                    <a:lnT w="6350" cap="flat" cmpd="sng" algn="ctr">
+                      <a:solidFill>
+                        <a:srgbClr val="D6DEE1"/>
+                      </a:solidFill>
+                      <a:prstDash val="solid"/>
+                      <a:round/>
+                      <a:headEnd type="none" w="med" len="med"/>
+                      <a:tailEnd type="none" w="med" len="med"/>
+                    </a:lnT>
+                    <a:lnB w="6350" cap="flat" cmpd="sng" algn="ctr">
+                      <a:solidFill>
+                        <a:srgbClr val="D6DEE1"/>
+                      </a:solidFill>
+                      <a:prstDash val="solid"/>
+                      <a:round/>
+                      <a:headEnd type="none" w="med" len="med"/>
+                      <a:tailEnd type="none" w="med" len="med"/>
+                    </a:lnB>
+                  </a:tcPr>
+                </a:tc>
+                <a:tc>
+                  <a:txBody>
+                    <a:bodyPr/>
+                    <a:lstStyle/>
+                    <a:p>
+                      <a:pPr algn="ctr" indent="0" marL="0">
+                        <a:buNone/>
+                      </a:pPr>
+                      <a:r>
+                        <a:rPr lang="en-US" sz="1000" dirty="0">
+                          <a:solidFill>
+                            <a:srgbClr val="2B3A42"/>
+                          </a:solidFill>
+                          <a:latin typeface="Calibri" pitchFamily="34" charset="0"/>
+                          <a:ea typeface="Calibri" pitchFamily="34" charset="-122"/>
+                          <a:cs typeface="Calibri" pitchFamily="34" charset="-120"/>
+                        </a:rPr>
+                        <a:t>0.85</a:t>
+                      </a:r>
+                      <a:endParaRPr lang="en-US" sz="1000" dirty="0">
+                        <a:latin typeface="Calibri" charset="0"/>
+                        <a:ea typeface="Calibri" charset="0"/>
+                        <a:cs typeface="Calibri" charset="0"/>
+                      </a:endParaRPr>
+                    </a:p>
+                  </a:txBody>
+                  <a:tcPr marL="91440" marR="91440" marT="45720" marB="45720" anchor="ctr">
+                    <a:lnL w="6350" cap="flat" cmpd="sng" algn="ctr">
+                      <a:solidFill>
+                        <a:srgbClr val="D6DEE1"/>
+                      </a:solidFill>
+                      <a:prstDash val="solid"/>
+                      <a:round/>
+                      <a:headEnd type="none" w="med" len="med"/>
+                      <a:tailEnd type="none" w="med" len="med"/>
+                    </a:lnL>
+                    <a:lnR w="6350" cap="flat" cmpd="sng" algn="ctr">
+                      <a:solidFill>
+                        <a:srgbClr val="D6DEE1"/>
+                      </a:solidFill>
+                      <a:prstDash val="solid"/>
+                      <a:round/>
+                      <a:headEnd type="none" w="med" len="med"/>
+                      <a:tailEnd type="none" w="med" len="med"/>
+                    </a:lnR>
+                    <a:lnT w="6350" cap="flat" cmpd="sng" algn="ctr">
+                      <a:solidFill>
+                        <a:srgbClr val="D6DEE1"/>
+                      </a:solidFill>
+                      <a:prstDash val="solid"/>
+                      <a:round/>
+                      <a:headEnd type="none" w="med" len="med"/>
+                      <a:tailEnd type="none" w="med" len="med"/>
+                    </a:lnT>
+                    <a:lnB w="6350" cap="flat" cmpd="sng" algn="ctr">
+                      <a:solidFill>
+                        <a:srgbClr val="D6DEE1"/>
+                      </a:solidFill>
+                      <a:prstDash val="solid"/>
+                      <a:round/>
+                      <a:headEnd type="none" w="med" len="med"/>
+                      <a:tailEnd type="none" w="med" len="med"/>
+                    </a:lnB>
+                  </a:tcPr>
+                </a:tc>
+                <a:tc>
+                  <a:txBody>
+                    <a:bodyPr/>
+                    <a:lstStyle/>
+                    <a:p>
+                      <a:pPr algn="ctr" indent="0" marL="0">
+                        <a:buNone/>
+                      </a:pPr>
+                      <a:r>
+                        <a:rPr lang="en-US" sz="1000" dirty="0">
+                          <a:solidFill>
+                            <a:srgbClr val="2B3A42"/>
+                          </a:solidFill>
+                          <a:latin typeface="Calibri" pitchFamily="34" charset="0"/>
+                          <a:ea typeface="Calibri" pitchFamily="34" charset="-122"/>
+                          <a:cs typeface="Calibri" pitchFamily="34" charset="-120"/>
+                        </a:rPr>
+                        <a:t>2.14</a:t>
+                      </a:r>
+                      <a:endParaRPr lang="en-US" sz="1000" dirty="0">
+                        <a:latin typeface="Calibri" charset="0"/>
+                        <a:ea typeface="Calibri" charset="0"/>
+                        <a:cs typeface="Calibri" charset="0"/>
+                      </a:endParaRPr>
+                    </a:p>
+                  </a:txBody>
+                  <a:tcPr marL="91440" marR="91440" marT="45720" marB="45720" anchor="ctr">
+                    <a:lnL w="6350" cap="flat" cmpd="sng" algn="ctr">
+                      <a:solidFill>
+                        <a:srgbClr val="D6DEE1"/>
+                      </a:solidFill>
+                      <a:prstDash val="solid"/>
+                      <a:round/>
+                      <a:headEnd type="none" w="med" len="med"/>
+                      <a:tailEnd type="none" w="med" len="med"/>
+                    </a:lnL>
+                    <a:lnR w="6350" cap="flat" cmpd="sng" algn="ctr">
+                      <a:solidFill>
+                        <a:srgbClr val="D6DEE1"/>
+                      </a:solidFill>
+                      <a:prstDash val="solid"/>
+                      <a:round/>
+                      <a:headEnd type="none" w="med" len="med"/>
+                      <a:tailEnd type="none" w="med" len="med"/>
+                    </a:lnR>
+                    <a:lnT w="6350" cap="flat" cmpd="sng" algn="ctr">
+                      <a:solidFill>
+                        <a:srgbClr val="D6DEE1"/>
+                      </a:solidFill>
+                      <a:prstDash val="solid"/>
+                      <a:round/>
+                      <a:headEnd type="none" w="med" len="med"/>
+                      <a:tailEnd type="none" w="med" len="med"/>
+                    </a:lnT>
+                    <a:lnB w="6350" cap="flat" cmpd="sng" algn="ctr">
+                      <a:solidFill>
+                        <a:srgbClr val="D6DEE1"/>
+                      </a:solidFill>
+                      <a:prstDash val="solid"/>
+                      <a:round/>
+                      <a:headEnd type="none" w="med" len="med"/>
+                      <a:tailEnd type="none" w="med" len="med"/>
+                    </a:lnB>
+                  </a:tcPr>
+                </a:tc>
+                <a:tc>
+                  <a:txBody>
+                    <a:bodyPr/>
+                    <a:lstStyle/>
+                    <a:p>
+                      <a:pPr algn="ctr" indent="0" marL="0">
+                        <a:buNone/>
+                      </a:pPr>
+                      <a:r>
+                        <a:rPr lang="en-US" sz="1000" dirty="0">
+                          <a:solidFill>
+                            <a:srgbClr val="2B3A42"/>
+                          </a:solidFill>
+                          <a:latin typeface="Calibri" pitchFamily="34" charset="0"/>
+                          <a:ea typeface="Calibri" pitchFamily="34" charset="-122"/>
+                          <a:cs typeface="Calibri" pitchFamily="34" charset="-120"/>
+                        </a:rPr>
+                        <a:t>84 %</a:t>
+                      </a:r>
+                      <a:endParaRPr lang="en-US" sz="1000" dirty="0">
+                        <a:latin typeface="Calibri" charset="0"/>
+                        <a:ea typeface="Calibri" charset="0"/>
+                        <a:cs typeface="Calibri" charset="0"/>
+                      </a:endParaRPr>
+                    </a:p>
+                  </a:txBody>
+                  <a:tcPr marL="91440" marR="91440" marT="45720" marB="45720" anchor="ctr">
+                    <a:lnL w="6350" cap="flat" cmpd="sng" algn="ctr">
+                      <a:solidFill>
+                        <a:srgbClr val="D6DEE1"/>
+                      </a:solidFill>
+                      <a:prstDash val="solid"/>
+                      <a:round/>
+                      <a:headEnd type="none" w="med" len="med"/>
+                      <a:tailEnd type="none" w="med" len="med"/>
+                    </a:lnL>
+                    <a:lnR w="6350" cap="flat" cmpd="sng" algn="ctr">
+                      <a:solidFill>
+                        <a:srgbClr val="D6DEE1"/>
+                      </a:solidFill>
+                      <a:prstDash val="solid"/>
+                      <a:round/>
+                      <a:headEnd type="none" w="med" len="med"/>
+                      <a:tailEnd type="none" w="med" len="med"/>
+                    </a:lnR>
+                    <a:lnT w="6350" cap="flat" cmpd="sng" algn="ctr">
+                      <a:solidFill>
+                        <a:srgbClr val="D6DEE1"/>
+                      </a:solidFill>
+                      <a:prstDash val="solid"/>
+                      <a:round/>
+                      <a:headEnd type="none" w="med" len="med"/>
+                      <a:tailEnd type="none" w="med" len="med"/>
+                    </a:lnT>
+                    <a:lnB w="6350" cap="flat" cmpd="sng" algn="ctr">
+                      <a:solidFill>
+                        <a:srgbClr val="D6DEE1"/>
+                      </a:solidFill>
+                      <a:prstDash val="solid"/>
+                      <a:round/>
+                      <a:headEnd type="none" w="med" len="med"/>
+                      <a:tailEnd type="none" w="med" len="med"/>
+                    </a:lnB>
+                  </a:tcPr>
+                </a:tc>
+                <a:tc>
+                  <a:txBody>
+                    <a:bodyPr/>
+                    <a:lstStyle/>
+                    <a:p>
+                      <a:pPr algn="ctr" indent="0" marL="0">
+                        <a:buNone/>
+                      </a:pPr>
+                      <a:r>
+                        <a:rPr lang="en-US" sz="1000" b="1" dirty="0">
+                          <a:solidFill>
+                            <a:srgbClr val="1C3F4E"/>
+                          </a:solidFill>
+                          <a:latin typeface="Calibri" pitchFamily="34" charset="0"/>
+                          <a:ea typeface="Calibri" pitchFamily="34" charset="-122"/>
+                          <a:cs typeface="Calibri" pitchFamily="34" charset="-120"/>
+                        </a:rPr>
+                        <a:t>1.06</a:t>
+                      </a:r>
+                      <a:endParaRPr lang="en-US" sz="1000" dirty="0">
+                        <a:latin typeface="Calibri" charset="0"/>
+                        <a:ea typeface="Calibri" charset="0"/>
+                        <a:cs typeface="Calibri" charset="0"/>
+                      </a:endParaRPr>
+                    </a:p>
+                  </a:txBody>
+                  <a:tcPr marL="91440" marR="91440" marT="45720" marB="45720" anchor="ctr">
+                    <a:lnL w="6350" cap="flat" cmpd="sng" algn="ctr">
+                      <a:solidFill>
+                        <a:srgbClr val="D6DEE1"/>
+                      </a:solidFill>
+                      <a:prstDash val="solid"/>
+                      <a:round/>
+                      <a:headEnd type="none" w="med" len="med"/>
+                      <a:tailEnd type="none" w="med" len="med"/>
+                    </a:lnL>
+                    <a:lnR w="6350" cap="flat" cmpd="sng" algn="ctr">
+                      <a:solidFill>
+                        <a:srgbClr val="D6DEE1"/>
+                      </a:solidFill>
+                      <a:prstDash val="solid"/>
+                      <a:round/>
+                      <a:headEnd type="none" w="med" len="med"/>
+                      <a:tailEnd type="none" w="med" len="med"/>
+                    </a:lnR>
+                    <a:lnT w="6350" cap="flat" cmpd="sng" algn="ctr">
+                      <a:solidFill>
+                        <a:srgbClr val="D6DEE1"/>
+                      </a:solidFill>
+                      <a:prstDash val="solid"/>
+                      <a:round/>
+                      <a:headEnd type="none" w="med" len="med"/>
+                      <a:tailEnd type="none" w="med" len="med"/>
+                    </a:lnT>
+                    <a:lnB w="6350" cap="flat" cmpd="sng" algn="ctr">
+                      <a:solidFill>
+                        <a:srgbClr val="D6DEE1"/>
+                      </a:solidFill>
+                      <a:prstDash val="solid"/>
+                      <a:round/>
+                      <a:headEnd type="none" w="med" len="med"/>
+                      <a:tailEnd type="none" w="med" len="med"/>
+                    </a:lnB>
+                    <a:solidFill>
+                      <a:srgbClr val="EEF2F3"/>
+                    </a:solidFill>
+                  </a:tcPr>
+                </a:tc>
+              </a:tr>
+              <a:tr h="333756">
+                <a:tc>
+                  <a:txBody>
+                    <a:bodyPr/>
+                    <a:lstStyle/>
+                    <a:p>
+                      <a:pPr algn="l" indent="0" marL="0">
+                        <a:buNone/>
+                      </a:pPr>
+                      <a:r>
+                        <a:rPr lang="en-US" sz="1000" b="1" dirty="0">
+                          <a:solidFill>
+                            <a:srgbClr val="2B3A42"/>
+                          </a:solidFill>
+                          <a:latin typeface="Calibri" pitchFamily="34" charset="0"/>
+                          <a:ea typeface="Calibri" pitchFamily="34" charset="-122"/>
+                          <a:cs typeface="Calibri" pitchFamily="34" charset="-120"/>
+                        </a:rPr>
+                        <a:t>Irlanda</a:t>
+                      </a:r>
+                      <a:endParaRPr lang="en-US" sz="1000" dirty="0">
+                        <a:latin typeface="Calibri" charset="0"/>
+                        <a:ea typeface="Calibri" charset="0"/>
+                        <a:cs typeface="Calibri" charset="0"/>
+                      </a:endParaRPr>
+                    </a:p>
+                  </a:txBody>
+                  <a:tcPr marL="91440" marR="91440" marT="45720" marB="45720" anchor="ctr">
+                    <a:lnL w="6350" cap="flat" cmpd="sng" algn="ctr">
+                      <a:solidFill>
+                        <a:srgbClr val="D6DEE1"/>
+                      </a:solidFill>
+                      <a:prstDash val="solid"/>
+                      <a:round/>
+                      <a:headEnd type="none" w="med" len="med"/>
+                      <a:tailEnd type="none" w="med" len="med"/>
+                    </a:lnL>
+                    <a:lnR w="6350" cap="flat" cmpd="sng" algn="ctr">
+                      <a:solidFill>
+                        <a:srgbClr val="D6DEE1"/>
+                      </a:solidFill>
+                      <a:prstDash val="solid"/>
+                      <a:round/>
+                      <a:headEnd type="none" w="med" len="med"/>
+                      <a:tailEnd type="none" w="med" len="med"/>
+                    </a:lnR>
+                    <a:lnT w="6350" cap="flat" cmpd="sng" algn="ctr">
+                      <a:solidFill>
+                        <a:srgbClr val="D6DEE1"/>
+                      </a:solidFill>
+                      <a:prstDash val="solid"/>
+                      <a:round/>
+                      <a:headEnd type="none" w="med" len="med"/>
+                      <a:tailEnd type="none" w="med" len="med"/>
+                    </a:lnT>
+                    <a:lnB w="6350" cap="flat" cmpd="sng" algn="ctr">
+                      <a:solidFill>
+                        <a:srgbClr val="D6DEE1"/>
+                      </a:solidFill>
+                      <a:prstDash val="solid"/>
+                      <a:round/>
+                      <a:headEnd type="none" w="med" len="med"/>
+                      <a:tailEnd type="none" w="med" len="med"/>
+                    </a:lnB>
+                  </a:tcPr>
+                </a:tc>
+                <a:tc>
+                  <a:txBody>
+                    <a:bodyPr/>
+                    <a:lstStyle/>
+                    <a:p>
+                      <a:pPr algn="ctr" indent="0" marL="0">
+                        <a:buNone/>
+                      </a:pPr>
+                      <a:r>
+                        <a:rPr lang="en-US" sz="1000" dirty="0">
+                          <a:solidFill>
+                            <a:srgbClr val="2B3A42"/>
+                          </a:solidFill>
+                          <a:latin typeface="Calibri" pitchFamily="34" charset="0"/>
+                          <a:ea typeface="Calibri" pitchFamily="34" charset="-122"/>
+                          <a:cs typeface="Calibri" pitchFamily="34" charset="-120"/>
+                        </a:rPr>
+                        <a:t>0.10</a:t>
+                      </a:r>
+                      <a:endParaRPr lang="en-US" sz="1000" dirty="0">
+                        <a:latin typeface="Calibri" charset="0"/>
+                        <a:ea typeface="Calibri" charset="0"/>
+                        <a:cs typeface="Calibri" charset="0"/>
+                      </a:endParaRPr>
+                    </a:p>
+                  </a:txBody>
+                  <a:tcPr marL="91440" marR="91440" marT="45720" marB="45720" anchor="ctr">
+                    <a:lnL w="6350" cap="flat" cmpd="sng" algn="ctr">
+                      <a:solidFill>
+                        <a:srgbClr val="D6DEE1"/>
+                      </a:solidFill>
+                      <a:prstDash val="solid"/>
+                      <a:round/>
+                      <a:headEnd type="none" w="med" len="med"/>
+                      <a:tailEnd type="none" w="med" len="med"/>
+                    </a:lnL>
+                    <a:lnR w="6350" cap="flat" cmpd="sng" algn="ctr">
+                      <a:solidFill>
+                        <a:srgbClr val="D6DEE1"/>
+                      </a:solidFill>
+                      <a:prstDash val="solid"/>
+                      <a:round/>
+                      <a:headEnd type="none" w="med" len="med"/>
+                      <a:tailEnd type="none" w="med" len="med"/>
+                    </a:lnR>
+                    <a:lnT w="6350" cap="flat" cmpd="sng" algn="ctr">
+                      <a:solidFill>
+                        <a:srgbClr val="D6DEE1"/>
+                      </a:solidFill>
+                      <a:prstDash val="solid"/>
+                      <a:round/>
+                      <a:headEnd type="none" w="med" len="med"/>
+                      <a:tailEnd type="none" w="med" len="med"/>
+                    </a:lnT>
+                    <a:lnB w="6350" cap="flat" cmpd="sng" algn="ctr">
+                      <a:solidFill>
+                        <a:srgbClr val="D6DEE1"/>
+                      </a:solidFill>
+                      <a:prstDash val="solid"/>
+                      <a:round/>
+                      <a:headEnd type="none" w="med" len="med"/>
+                      <a:tailEnd type="none" w="med" len="med"/>
+                    </a:lnB>
+                  </a:tcPr>
+                </a:tc>
+                <a:tc>
+                  <a:txBody>
+                    <a:bodyPr/>
+                    <a:lstStyle/>
+                    <a:p>
+                      <a:pPr algn="ctr" indent="0" marL="0">
+                        <a:buNone/>
+                      </a:pPr>
+                      <a:r>
+                        <a:rPr lang="en-US" sz="1000" dirty="0">
+                          <a:solidFill>
+                            <a:srgbClr val="2B3A42"/>
+                          </a:solidFill>
+                          <a:latin typeface="Calibri" pitchFamily="34" charset="0"/>
+                          <a:ea typeface="Calibri" pitchFamily="34" charset="-122"/>
+                          <a:cs typeface="Calibri" pitchFamily="34" charset="-120"/>
+                        </a:rPr>
+                        <a:t>1.90</a:t>
+                      </a:r>
+                      <a:endParaRPr lang="en-US" sz="1000" dirty="0">
+                        <a:latin typeface="Calibri" charset="0"/>
+                        <a:ea typeface="Calibri" charset="0"/>
+                        <a:cs typeface="Calibri" charset="0"/>
+                      </a:endParaRPr>
+                    </a:p>
+                  </a:txBody>
+                  <a:tcPr marL="91440" marR="91440" marT="45720" marB="45720" anchor="ctr">
+                    <a:lnL w="6350" cap="flat" cmpd="sng" algn="ctr">
+                      <a:solidFill>
+                        <a:srgbClr val="D6DEE1"/>
+                      </a:solidFill>
+                      <a:prstDash val="solid"/>
+                      <a:round/>
+                      <a:headEnd type="none" w="med" len="med"/>
+                      <a:tailEnd type="none" w="med" len="med"/>
+                    </a:lnL>
+                    <a:lnR w="6350" cap="flat" cmpd="sng" algn="ctr">
+                      <a:solidFill>
+                        <a:srgbClr val="D6DEE1"/>
+                      </a:solidFill>
+                      <a:prstDash val="solid"/>
+                      <a:round/>
+                      <a:headEnd type="none" w="med" len="med"/>
+                      <a:tailEnd type="none" w="med" len="med"/>
+                    </a:lnR>
+                    <a:lnT w="6350" cap="flat" cmpd="sng" algn="ctr">
+                      <a:solidFill>
+                        <a:srgbClr val="D6DEE1"/>
+                      </a:solidFill>
+                      <a:prstDash val="solid"/>
+                      <a:round/>
+                      <a:headEnd type="none" w="med" len="med"/>
+                      <a:tailEnd type="none" w="med" len="med"/>
+                    </a:lnT>
+                    <a:lnB w="6350" cap="flat" cmpd="sng" algn="ctr">
+                      <a:solidFill>
+                        <a:srgbClr val="D6DEE1"/>
+                      </a:solidFill>
+                      <a:prstDash val="solid"/>
+                      <a:round/>
+                      <a:headEnd type="none" w="med" len="med"/>
+                      <a:tailEnd type="none" w="med" len="med"/>
+                    </a:lnB>
+                  </a:tcPr>
+                </a:tc>
+                <a:tc>
+                  <a:txBody>
+                    <a:bodyPr/>
+                    <a:lstStyle/>
+                    <a:p>
+                      <a:pPr algn="ctr" indent="0" marL="0">
+                        <a:buNone/>
+                      </a:pPr>
+                      <a:r>
+                        <a:rPr lang="en-US" sz="1000" dirty="0">
+                          <a:solidFill>
+                            <a:srgbClr val="2B3A42"/>
+                          </a:solidFill>
+                          <a:latin typeface="Calibri" pitchFamily="34" charset="0"/>
+                          <a:ea typeface="Calibri" pitchFamily="34" charset="-122"/>
+                          <a:cs typeface="Calibri" pitchFamily="34" charset="-120"/>
+                        </a:rPr>
+                        <a:t>83 %</a:t>
+                      </a:r>
+                      <a:endParaRPr lang="en-US" sz="1000" dirty="0">
+                        <a:latin typeface="Calibri" charset="0"/>
+                        <a:ea typeface="Calibri" charset="0"/>
+                        <a:cs typeface="Calibri" charset="0"/>
+                      </a:endParaRPr>
+                    </a:p>
+                  </a:txBody>
+                  <a:tcPr marL="91440" marR="91440" marT="45720" marB="45720" anchor="ctr">
+                    <a:lnL w="6350" cap="flat" cmpd="sng" algn="ctr">
+                      <a:solidFill>
+                        <a:srgbClr val="D6DEE1"/>
+                      </a:solidFill>
+                      <a:prstDash val="solid"/>
+                      <a:round/>
+                      <a:headEnd type="none" w="med" len="med"/>
+                      <a:tailEnd type="none" w="med" len="med"/>
+                    </a:lnL>
+                    <a:lnR w="6350" cap="flat" cmpd="sng" algn="ctr">
+                      <a:solidFill>
+                        <a:srgbClr val="D6DEE1"/>
+                      </a:solidFill>
+                      <a:prstDash val="solid"/>
+                      <a:round/>
+                      <a:headEnd type="none" w="med" len="med"/>
+                      <a:tailEnd type="none" w="med" len="med"/>
+                    </a:lnR>
+                    <a:lnT w="6350" cap="flat" cmpd="sng" algn="ctr">
+                      <a:solidFill>
+                        <a:srgbClr val="D6DEE1"/>
+                      </a:solidFill>
+                      <a:prstDash val="solid"/>
+                      <a:round/>
+                      <a:headEnd type="none" w="med" len="med"/>
+                      <a:tailEnd type="none" w="med" len="med"/>
+                    </a:lnT>
+                    <a:lnB w="6350" cap="flat" cmpd="sng" algn="ctr">
+                      <a:solidFill>
+                        <a:srgbClr val="D6DEE1"/>
+                      </a:solidFill>
+                      <a:prstDash val="solid"/>
+                      <a:round/>
+                      <a:headEnd type="none" w="med" len="med"/>
+                      <a:tailEnd type="none" w="med" len="med"/>
+                    </a:lnB>
+                  </a:tcPr>
+                </a:tc>
+                <a:tc>
+                  <a:txBody>
+                    <a:bodyPr/>
+                    <a:lstStyle/>
+                    <a:p>
+                      <a:pPr algn="ctr" indent="0" marL="0">
+                        <a:buNone/>
+                      </a:pPr>
+                      <a:r>
+                        <a:rPr lang="en-US" sz="1000" b="1" dirty="0">
+                          <a:solidFill>
+                            <a:srgbClr val="1C3F4E"/>
+                          </a:solidFill>
+                          <a:latin typeface="Calibri" pitchFamily="34" charset="0"/>
+                          <a:ea typeface="Calibri" pitchFamily="34" charset="-122"/>
+                          <a:cs typeface="Calibri" pitchFamily="34" charset="-120"/>
+                        </a:rPr>
+                        <a:t>0.41</a:t>
+                      </a:r>
+                      <a:endParaRPr lang="en-US" sz="1000" dirty="0">
+                        <a:latin typeface="Calibri" charset="0"/>
+                        <a:ea typeface="Calibri" charset="0"/>
+                        <a:cs typeface="Calibri" charset="0"/>
+                      </a:endParaRPr>
+                    </a:p>
+                  </a:txBody>
+                  <a:tcPr marL="91440" marR="91440" marT="45720" marB="45720" anchor="ctr">
+                    <a:lnL w="6350" cap="flat" cmpd="sng" algn="ctr">
+                      <a:solidFill>
+                        <a:srgbClr val="D6DEE1"/>
+                      </a:solidFill>
+                      <a:prstDash val="solid"/>
+                      <a:round/>
+                      <a:headEnd type="none" w="med" len="med"/>
+                      <a:tailEnd type="none" w="med" len="med"/>
+                    </a:lnL>
+                    <a:lnR w="6350" cap="flat" cmpd="sng" algn="ctr">
+                      <a:solidFill>
+                        <a:srgbClr val="D6DEE1"/>
+                      </a:solidFill>
+                      <a:prstDash val="solid"/>
+                      <a:round/>
+                      <a:headEnd type="none" w="med" len="med"/>
+                      <a:tailEnd type="none" w="med" len="med"/>
+                    </a:lnR>
+                    <a:lnT w="6350" cap="flat" cmpd="sng" algn="ctr">
+                      <a:solidFill>
+                        <a:srgbClr val="D6DEE1"/>
+                      </a:solidFill>
+                      <a:prstDash val="solid"/>
+                      <a:round/>
+                      <a:headEnd type="none" w="med" len="med"/>
+                      <a:tailEnd type="none" w="med" len="med"/>
+                    </a:lnT>
+                    <a:lnB w="6350" cap="flat" cmpd="sng" algn="ctr">
+                      <a:solidFill>
+                        <a:srgbClr val="D6DEE1"/>
+                      </a:solidFill>
+                      <a:prstDash val="solid"/>
+                      <a:round/>
+                      <a:headEnd type="none" w="med" len="med"/>
+                      <a:tailEnd type="none" w="med" len="med"/>
+                    </a:lnB>
+                    <a:solidFill>
+                      <a:srgbClr val="EEF2F3"/>
+                    </a:solidFill>
+                  </a:tcPr>
+                </a:tc>
+              </a:tr>
+            </a:tbl>
+          </a:graphicData>
+        </a:graphic>
+      </p:graphicFrame>
       <p:sp>
         <p:nvSpPr>
-          <p:cNvPr id="5" name="Shape 2"/>
+          <p:cNvPr id="6" name="Shape 2"/>
           <p:cNvSpPr/>
           <p:nvPr/>
         </p:nvSpPr>
         <p:spPr>
           <a:xfrm>
-            <a:off x="7680960" y="1691640"/>
-            <a:ext cx="3959352" cy="3566160"/>
+            <a:off x="7452360" y="4480560"/>
+            <a:ext cx="4187952" cy="777240"/>
           </a:xfrm>
           <a:prstGeom prst="roundRect">
             <a:avLst>
-              <a:gd name="adj" fmla="val 1538"/>
+              <a:gd name="adj" fmla="val 7059"/>
             </a:avLst>
           </a:prstGeom>
           <a:solidFill>
-            <a:srgbClr val="EEF2F3"/>
+            <a:srgbClr val="F7EDE4"/>
           </a:solidFill>
           <a:ln w="12700">
             <a:solidFill>
-              <a:srgbClr val="DCE4E7"/>
+              <a:srgbClr val="C97B3C"/>
             </a:solidFill>
             <a:prstDash val="solid"/>
           </a:ln>
@@ -42554,14 +45229,14 @@
       </p:sp>
       <p:sp>
         <p:nvSpPr>
-          <p:cNvPr id="6" name="Text 3"/>
+          <p:cNvPr id="7" name="Text 3"/>
           <p:cNvSpPr txBox="1"/>
           <p:nvPr/>
         </p:nvSpPr>
         <p:spPr>
           <a:xfrm>
-            <a:off x="7863840" y="1828800"/>
-            <a:ext cx="3611880" cy="548640"/>
+            <a:off x="7635240" y="4572000"/>
+            <a:ext cx="3840480" cy="621792"/>
           </a:xfrm>
           <a:prstGeom prst="rect">
             <a:avLst/>
@@ -42577,30 +45252,30 @@
               <a:buNone/>
             </a:pPr>
             <a:r>
-              <a:rPr lang="en-US" sz="1400" b="1" dirty="0">
+              <a:rPr lang="en-US" sz="1000" dirty="0">
                 <a:solidFill>
-                  <a:srgbClr val="1C3F4E"/>
+                  <a:srgbClr val="2B3A42"/>
                 </a:solidFill>
-                <a:latin typeface="Cambria" pitchFamily="34" charset="0"/>
-                <a:ea typeface="Cambria" pitchFamily="34" charset="-122"/>
-                <a:cs typeface="Cambria" pitchFamily="34" charset="-120"/>
+                <a:latin typeface="Calibri" pitchFamily="34" charset="0"/>
+                <a:ea typeface="Calibri" pitchFamily="34" charset="-122"/>
+                <a:cs typeface="Calibri" pitchFamily="34" charset="-120"/>
               </a:rPr>
-              <a:t>Portugal capta la liquidez más barata</a:t>
+              <a:t>La mezcla decide, no el tipo: Italia paga un 0,56 % a la vista y España un 0,44 %, pero Italia tiene un 89 % en vista y acaba igual de barata.</a:t>
             </a:r>
-            <a:endParaRPr lang="en-US" sz="1400" dirty="0"/>
+            <a:endParaRPr lang="en-US" sz="1000" dirty="0"/>
           </a:p>
         </p:txBody>
       </p:sp>
       <p:sp>
         <p:nvSpPr>
-          <p:cNvPr id="7" name="Text 4"/>
+          <p:cNvPr id="8" name="Text 4"/>
           <p:cNvSpPr txBox="1"/>
           <p:nvPr/>
         </p:nvSpPr>
         <p:spPr>
           <a:xfrm>
-            <a:off x="7863840" y="2423160"/>
-            <a:ext cx="3611880" cy="2651760"/>
+            <a:off x="548640" y="5394960"/>
+            <a:ext cx="11091672" cy="548640"/>
           </a:xfrm>
           <a:prstGeom prst="rect">
             <a:avLst/>
@@ -42616,7 +45291,7 @@
               <a:buNone/>
             </a:pPr>
             <a:r>
-              <a:rPr lang="en-US" sz="1150" dirty="0">
+              <a:rPr lang="en-US" sz="1200" dirty="0">
                 <a:solidFill>
                   <a:srgbClr val="2B3A42"/>
                 </a:solidFill>
@@ -42624,61 +45299,15 @@
                 <a:ea typeface="Calibri" pitchFamily="34" charset="-122"/>
                 <a:cs typeface="Calibri" pitchFamily="34" charset="-120"/>
               </a:rPr>
-              <a:t>Paga un 0,07 % por el depósito a la vista de empresas y puede colocarlo al 2,09 % en el BCE: 202 pb de margen sin riesgo ni consumo de capital.</a:t>
+              <a:t>Irlanda capta los recursos más baratos de los siete, un 0,41 %, y Francia los más caros, un 1,34 %: tres veces más. Es el segundo factor que más separa el ROE, por detrás del capital.</a:t>
             </a:r>
-            <a:endParaRPr lang="en-US" sz="1150" dirty="0"/>
-          </a:p>
-          <a:p>
-            <a:pPr indent="0" marL="0">
-              <a:buNone/>
-            </a:pPr>
-            <a:endParaRPr lang="en-US" sz="1150" dirty="0"/>
-          </a:p>
-          <a:p>
-            <a:pPr indent="0" marL="0">
-              <a:buNone/>
-            </a:pPr>
-            <a:r>
-              <a:rPr lang="en-US" sz="1150" dirty="0">
-                <a:solidFill>
-                  <a:srgbClr val="2B3A42"/>
-                </a:solidFill>
-                <a:latin typeface="Calibri" pitchFamily="34" charset="0"/>
-                <a:ea typeface="Calibri" pitchFamily="34" charset="-122"/>
-                <a:cs typeface="Calibri" pitchFamily="34" charset="-120"/>
-              </a:rPr>
-              <a:t>Países Bajos es el extremo opuesto, con 124 pb, porque paga un 0,85 %.</a:t>
-            </a:r>
-            <a:endParaRPr lang="en-US" sz="1150" dirty="0"/>
-          </a:p>
-          <a:p>
-            <a:pPr indent="0" marL="0">
-              <a:buNone/>
-            </a:pPr>
-            <a:endParaRPr lang="en-US" sz="1150" dirty="0"/>
-          </a:p>
-          <a:p>
-            <a:pPr indent="0" marL="0">
-              <a:buNone/>
-            </a:pPr>
-            <a:r>
-              <a:rPr lang="en-US" sz="1150" dirty="0">
-                <a:solidFill>
-                  <a:srgbClr val="2B3A42"/>
-                </a:solidFill>
-                <a:latin typeface="Calibri" pitchFamily="34" charset="0"/>
-                <a:ea typeface="Calibri" pitchFamily="34" charset="-122"/>
-                <a:cs typeface="Calibri" pitchFamily="34" charset="-120"/>
-              </a:rPr>
-              <a:t>Este margen no depende del crédito y por eso se modela aparte de la cuenta del préstamo.</a:t>
-            </a:r>
-            <a:endParaRPr lang="en-US" sz="1150" dirty="0"/>
+            <a:endParaRPr lang="en-US" sz="1200" dirty="0"/>
           </a:p>
         </p:txBody>
       </p:sp>
       <p:sp>
         <p:nvSpPr>
-          <p:cNvPr id="8" name="Text 5"/>
+          <p:cNvPr id="9" name="Text 5"/>
           <p:cNvSpPr txBox="1"/>
           <p:nvPr/>
         </p:nvSpPr>
@@ -42709,7 +45338,7 @@
                 <a:ea typeface="Calibri" pitchFamily="34" charset="-122"/>
                 <a:cs typeface="Calibri" pitchFamily="34" charset="-120"/>
               </a:rPr>
-              <a:t>Fuente: BCE, datasets MIR (tipos de depósito de sociedades no financieras) y FM (facilidad de depósito). El margen mostrado es sobre depósito a la vista; el depósito a plazo se remunera entre el 1,77 % y el 2,58 % según país.</a:t>
+              <a:t>Fuentes: BCE, dataset MIR (tipos de depósito de sociedades no financieras, nueva producción) y dataset BSI (saldos L21 vista y L22 plazo, sector 2240) para la ponderación. Facilidad de depósito del BCE al 2,09 %.</a:t>
             </a:r>
             <a:endParaRPr lang="en-US" sz="900" dirty="0"/>
           </a:p>
